--- a/CameraKit Walkthrough.pptx
+++ b/CameraKit Walkthrough.pptx
@@ -37,6 +37,17 @@
     <p:sldId id="277" r:id="rId31"/>
     <p:sldId id="279" r:id="rId32"/>
     <p:sldId id="280" r:id="rId33"/>
+    <p:sldId id="288" r:id="rId34"/>
+    <p:sldId id="289" r:id="rId35"/>
+    <p:sldId id="290" r:id="rId36"/>
+    <p:sldId id="291" r:id="rId37"/>
+    <p:sldId id="292" r:id="rId38"/>
+    <p:sldId id="293" r:id="rId39"/>
+    <p:sldId id="294" r:id="rId40"/>
+    <p:sldId id="295" r:id="rId41"/>
+    <p:sldId id="296" r:id="rId42"/>
+    <p:sldId id="297" r:id="rId43"/>
+    <p:sldId id="298" r:id="rId44"/>
   </p:sldIdLst>
   <p:sldSz cx="12192000" cy="6858000"/>
   <p:notesSz cx="6858000" cy="9144000"/>
@@ -292,7 +303,7 @@
           <a:p>
             <a:fld id="{56BB6EC9-C718-4390-853C-59E596581ED2}" type="datetimeFigureOut">
               <a:rPr lang="en-IE" smtClean="0"/>
-              <a:t>11/11/2025</a:t>
+              <a:t>18/11/2025</a:t>
             </a:fld>
             <a:endParaRPr lang="en-IE"/>
           </a:p>
@@ -492,7 +503,7 @@
           <a:p>
             <a:fld id="{56BB6EC9-C718-4390-853C-59E596581ED2}" type="datetimeFigureOut">
               <a:rPr lang="en-IE" smtClean="0"/>
-              <a:t>11/11/2025</a:t>
+              <a:t>18/11/2025</a:t>
             </a:fld>
             <a:endParaRPr lang="en-IE"/>
           </a:p>
@@ -702,7 +713,7 @@
           <a:p>
             <a:fld id="{56BB6EC9-C718-4390-853C-59E596581ED2}" type="datetimeFigureOut">
               <a:rPr lang="en-IE" smtClean="0"/>
-              <a:t>11/11/2025</a:t>
+              <a:t>18/11/2025</a:t>
             </a:fld>
             <a:endParaRPr lang="en-IE"/>
           </a:p>
@@ -902,7 +913,7 @@
           <a:p>
             <a:fld id="{56BB6EC9-C718-4390-853C-59E596581ED2}" type="datetimeFigureOut">
               <a:rPr lang="en-IE" smtClean="0"/>
-              <a:t>11/11/2025</a:t>
+              <a:t>18/11/2025</a:t>
             </a:fld>
             <a:endParaRPr lang="en-IE"/>
           </a:p>
@@ -1178,7 +1189,7 @@
           <a:p>
             <a:fld id="{56BB6EC9-C718-4390-853C-59E596581ED2}" type="datetimeFigureOut">
               <a:rPr lang="en-IE" smtClean="0"/>
-              <a:t>11/11/2025</a:t>
+              <a:t>18/11/2025</a:t>
             </a:fld>
             <a:endParaRPr lang="en-IE"/>
           </a:p>
@@ -1446,7 +1457,7 @@
           <a:p>
             <a:fld id="{56BB6EC9-C718-4390-853C-59E596581ED2}" type="datetimeFigureOut">
               <a:rPr lang="en-IE" smtClean="0"/>
-              <a:t>11/11/2025</a:t>
+              <a:t>18/11/2025</a:t>
             </a:fld>
             <a:endParaRPr lang="en-IE"/>
           </a:p>
@@ -1861,7 +1872,7 @@
           <a:p>
             <a:fld id="{56BB6EC9-C718-4390-853C-59E596581ED2}" type="datetimeFigureOut">
               <a:rPr lang="en-IE" smtClean="0"/>
-              <a:t>11/11/2025</a:t>
+              <a:t>18/11/2025</a:t>
             </a:fld>
             <a:endParaRPr lang="en-IE"/>
           </a:p>
@@ -2003,7 +2014,7 @@
           <a:p>
             <a:fld id="{56BB6EC9-C718-4390-853C-59E596581ED2}" type="datetimeFigureOut">
               <a:rPr lang="en-IE" smtClean="0"/>
-              <a:t>11/11/2025</a:t>
+              <a:t>18/11/2025</a:t>
             </a:fld>
             <a:endParaRPr lang="en-IE"/>
           </a:p>
@@ -2116,7 +2127,7 @@
           <a:p>
             <a:fld id="{56BB6EC9-C718-4390-853C-59E596581ED2}" type="datetimeFigureOut">
               <a:rPr lang="en-IE" smtClean="0"/>
-              <a:t>11/11/2025</a:t>
+              <a:t>18/11/2025</a:t>
             </a:fld>
             <a:endParaRPr lang="en-IE"/>
           </a:p>
@@ -2429,7 +2440,7 @@
           <a:p>
             <a:fld id="{56BB6EC9-C718-4390-853C-59E596581ED2}" type="datetimeFigureOut">
               <a:rPr lang="en-IE" smtClean="0"/>
-              <a:t>11/11/2025</a:t>
+              <a:t>18/11/2025</a:t>
             </a:fld>
             <a:endParaRPr lang="en-IE"/>
           </a:p>
@@ -2718,7 +2729,7 @@
           <a:p>
             <a:fld id="{56BB6EC9-C718-4390-853C-59E596581ED2}" type="datetimeFigureOut">
               <a:rPr lang="en-IE" smtClean="0"/>
-              <a:t>11/11/2025</a:t>
+              <a:t>18/11/2025</a:t>
             </a:fld>
             <a:endParaRPr lang="en-IE"/>
           </a:p>
@@ -2961,7 +2972,7 @@
           <a:p>
             <a:fld id="{56BB6EC9-C718-4390-853C-59E596581ED2}" type="datetimeFigureOut">
               <a:rPr lang="en-IE" smtClean="0"/>
-              <a:t>11/11/2025</a:t>
+              <a:t>18/11/2025</a:t>
             </a:fld>
             <a:endParaRPr lang="en-IE"/>
           </a:p>
@@ -3426,12 +3437,20 @@
             <p:ph type="subTitle" idx="1"/>
           </p:nvPr>
         </p:nvSpPr>
-        <p:spPr/>
+        <p:spPr>
+          <a:xfrm>
+            <a:off x="0" y="3602038"/>
+            <a:ext cx="12192000" cy="1655762"/>
+          </a:xfrm>
+        </p:spPr>
         <p:txBody>
           <a:bodyPr/>
           <a:lstStyle/>
           <a:p>
-            <a:endParaRPr lang="en-IE"/>
+            <a:r>
+              <a:rPr lang="en-IE" dirty="0"/>
+              <a:t>https://github.com/JohnRowleyDorsetCollege2025/oop-2025-a-camera-rental-20251111.git</a:t>
+            </a:r>
           </a:p>
         </p:txBody>
       </p:sp>
@@ -6221,6 +6240,917 @@
 </p:sld>
 </file>
 
+<file path=ppt/slides/slide33.xml><?xml version="1.0" encoding="utf-8"?>
+<p:sld xmlns:a="http://schemas.openxmlformats.org/drawingml/2006/main" xmlns:r="http://schemas.openxmlformats.org/officeDocument/2006/relationships" xmlns:p="http://schemas.openxmlformats.org/presentationml/2006/main">
+  <p:cSld>
+    <p:spTree>
+      <p:nvGrpSpPr>
+        <p:cNvPr id="1" name=""/>
+        <p:cNvGrpSpPr/>
+        <p:nvPr/>
+      </p:nvGrpSpPr>
+      <p:grpSpPr>
+        <a:xfrm>
+          <a:off x="0" y="0"/>
+          <a:ext cx="0" cy="0"/>
+          <a:chOff x="0" y="0"/>
+          <a:chExt cx="0" cy="0"/>
+        </a:xfrm>
+      </p:grpSpPr>
+      <p:sp>
+        <p:nvSpPr>
+          <p:cNvPr id="2" name="Title 1">
+            <a:extLst>
+              <a:ext uri="{FF2B5EF4-FFF2-40B4-BE49-F238E27FC236}">
+                <a16:creationId xmlns:a16="http://schemas.microsoft.com/office/drawing/2014/main" id="{A34B4CAC-CD86-DAA4-61EB-4FBAF5A12DBB}"/>
+              </a:ext>
+            </a:extLst>
+          </p:cNvPr>
+          <p:cNvSpPr>
+            <a:spLocks noGrp="1"/>
+          </p:cNvSpPr>
+          <p:nvPr>
+            <p:ph type="title"/>
+          </p:nvPr>
+        </p:nvSpPr>
+        <p:spPr/>
+        <p:txBody>
+          <a:bodyPr/>
+          <a:lstStyle/>
+          <a:p>
+            <a:r>
+              <a:rPr lang="en-GB" dirty="0"/>
+              <a:t>Interfaces, abstract classes</a:t>
+            </a:r>
+          </a:p>
+        </p:txBody>
+      </p:sp>
+      <p:sp>
+        <p:nvSpPr>
+          <p:cNvPr id="3" name="Text Placeholder 2">
+            <a:extLst>
+              <a:ext uri="{FF2B5EF4-FFF2-40B4-BE49-F238E27FC236}">
+                <a16:creationId xmlns:a16="http://schemas.microsoft.com/office/drawing/2014/main" id="{3CB5371B-AA99-D482-F471-BC3616BDE8BF}"/>
+              </a:ext>
+            </a:extLst>
+          </p:cNvPr>
+          <p:cNvSpPr>
+            <a:spLocks noGrp="1"/>
+          </p:cNvSpPr>
+          <p:nvPr>
+            <p:ph type="body" idx="1"/>
+          </p:nvPr>
+        </p:nvSpPr>
+        <p:spPr/>
+        <p:txBody>
+          <a:bodyPr/>
+          <a:lstStyle/>
+          <a:p>
+            <a:endParaRPr lang="en-GB" dirty="0"/>
+          </a:p>
+        </p:txBody>
+      </p:sp>
+    </p:spTree>
+    <p:extLst>
+      <p:ext uri="{BB962C8B-B14F-4D97-AF65-F5344CB8AC3E}">
+        <p14:creationId xmlns:p14="http://schemas.microsoft.com/office/powerpoint/2010/main" val="1665354833"/>
+      </p:ext>
+    </p:extLst>
+  </p:cSld>
+  <p:clrMapOvr>
+    <a:masterClrMapping/>
+  </p:clrMapOvr>
+</p:sld>
+</file>
+
+<file path=ppt/slides/slide34.xml><?xml version="1.0" encoding="utf-8"?>
+<p:sld xmlns:a="http://schemas.openxmlformats.org/drawingml/2006/main" xmlns:r="http://schemas.openxmlformats.org/officeDocument/2006/relationships" xmlns:p="http://schemas.openxmlformats.org/presentationml/2006/main">
+  <p:cSld>
+    <p:spTree>
+      <p:nvGrpSpPr>
+        <p:cNvPr id="1" name=""/>
+        <p:cNvGrpSpPr/>
+        <p:nvPr/>
+      </p:nvGrpSpPr>
+      <p:grpSpPr>
+        <a:xfrm>
+          <a:off x="0" y="0"/>
+          <a:ext cx="0" cy="0"/>
+          <a:chOff x="0" y="0"/>
+          <a:chExt cx="0" cy="0"/>
+        </a:xfrm>
+      </p:grpSpPr>
+      <p:pic>
+        <p:nvPicPr>
+          <p:cNvPr id="5" name="Picture 4">
+            <a:extLst>
+              <a:ext uri="{FF2B5EF4-FFF2-40B4-BE49-F238E27FC236}">
+                <a16:creationId xmlns:a16="http://schemas.microsoft.com/office/drawing/2014/main" id="{B6852D04-424B-4CDA-A6C7-B0CAE8294408}"/>
+              </a:ext>
+            </a:extLst>
+          </p:cNvPr>
+          <p:cNvPicPr>
+            <a:picLocks noChangeAspect="1"/>
+          </p:cNvPicPr>
+          <p:nvPr/>
+        </p:nvPicPr>
+        <p:blipFill>
+          <a:blip r:embed="rId2"/>
+          <a:stretch>
+            <a:fillRect/>
+          </a:stretch>
+        </p:blipFill>
+        <p:spPr>
+          <a:xfrm>
+            <a:off x="1071097" y="1272684"/>
+            <a:ext cx="10357816" cy="4158625"/>
+          </a:xfrm>
+          <a:prstGeom prst="rect">
+            <a:avLst/>
+          </a:prstGeom>
+        </p:spPr>
+      </p:pic>
+      <p:sp>
+        <p:nvSpPr>
+          <p:cNvPr id="6" name="Rectangle 5">
+            <a:extLst>
+              <a:ext uri="{FF2B5EF4-FFF2-40B4-BE49-F238E27FC236}">
+                <a16:creationId xmlns:a16="http://schemas.microsoft.com/office/drawing/2014/main" id="{232796C3-116F-516A-5722-E4CE3AF1F566}"/>
+              </a:ext>
+            </a:extLst>
+          </p:cNvPr>
+          <p:cNvSpPr/>
+          <p:nvPr/>
+        </p:nvSpPr>
+        <p:spPr>
+          <a:xfrm>
+            <a:off x="2242686" y="1366787"/>
+            <a:ext cx="1337912" cy="442762"/>
+          </a:xfrm>
+          <a:prstGeom prst="rect">
+            <a:avLst/>
+          </a:prstGeom>
+          <a:noFill/>
+        </p:spPr>
+        <p:style>
+          <a:lnRef idx="2">
+            <a:schemeClr val="accent1">
+              <a:shade val="15000"/>
+            </a:schemeClr>
+          </a:lnRef>
+          <a:fillRef idx="1">
+            <a:schemeClr val="accent1"/>
+          </a:fillRef>
+          <a:effectRef idx="0">
+            <a:schemeClr val="accent1"/>
+          </a:effectRef>
+          <a:fontRef idx="minor">
+            <a:schemeClr val="lt1"/>
+          </a:fontRef>
+        </p:style>
+        <p:txBody>
+          <a:bodyPr rtlCol="0" anchor="ctr"/>
+          <a:lstStyle/>
+          <a:p>
+            <a:pPr algn="ctr"/>
+            <a:endParaRPr lang="en-GB"/>
+          </a:p>
+        </p:txBody>
+      </p:sp>
+    </p:spTree>
+    <p:extLst>
+      <p:ext uri="{BB962C8B-B14F-4D97-AF65-F5344CB8AC3E}">
+        <p14:creationId xmlns:p14="http://schemas.microsoft.com/office/powerpoint/2010/main" val="413122751"/>
+      </p:ext>
+    </p:extLst>
+  </p:cSld>
+  <p:clrMapOvr>
+    <a:masterClrMapping/>
+  </p:clrMapOvr>
+</p:sld>
+</file>
+
+<file path=ppt/slides/slide35.xml><?xml version="1.0" encoding="utf-8"?>
+<p:sld xmlns:a="http://schemas.openxmlformats.org/drawingml/2006/main" xmlns:r="http://schemas.openxmlformats.org/officeDocument/2006/relationships" xmlns:p="http://schemas.openxmlformats.org/presentationml/2006/main">
+  <p:cSld>
+    <p:spTree>
+      <p:nvGrpSpPr>
+        <p:cNvPr id="1" name=""/>
+        <p:cNvGrpSpPr/>
+        <p:nvPr/>
+      </p:nvGrpSpPr>
+      <p:grpSpPr>
+        <a:xfrm>
+          <a:off x="0" y="0"/>
+          <a:ext cx="0" cy="0"/>
+          <a:chOff x="0" y="0"/>
+          <a:chExt cx="0" cy="0"/>
+        </a:xfrm>
+      </p:grpSpPr>
+      <p:pic>
+        <p:nvPicPr>
+          <p:cNvPr id="5" name="Picture 4">
+            <a:extLst>
+              <a:ext uri="{FF2B5EF4-FFF2-40B4-BE49-F238E27FC236}">
+                <a16:creationId xmlns:a16="http://schemas.microsoft.com/office/drawing/2014/main" id="{3A4A5351-59E1-EEE7-F7DE-B2E5C355C7F2}"/>
+              </a:ext>
+            </a:extLst>
+          </p:cNvPr>
+          <p:cNvPicPr>
+            <a:picLocks noChangeAspect="1"/>
+          </p:cNvPicPr>
+          <p:nvPr/>
+        </p:nvPicPr>
+        <p:blipFill>
+          <a:blip r:embed="rId2"/>
+          <a:stretch>
+            <a:fillRect/>
+          </a:stretch>
+        </p:blipFill>
+        <p:spPr>
+          <a:xfrm>
+            <a:off x="288892" y="258471"/>
+            <a:ext cx="11532978" cy="5795820"/>
+          </a:xfrm>
+          <a:prstGeom prst="rect">
+            <a:avLst/>
+          </a:prstGeom>
+        </p:spPr>
+      </p:pic>
+    </p:spTree>
+    <p:extLst>
+      <p:ext uri="{BB962C8B-B14F-4D97-AF65-F5344CB8AC3E}">
+        <p14:creationId xmlns:p14="http://schemas.microsoft.com/office/powerpoint/2010/main" val="1297244950"/>
+      </p:ext>
+    </p:extLst>
+  </p:cSld>
+  <p:clrMapOvr>
+    <a:masterClrMapping/>
+  </p:clrMapOvr>
+</p:sld>
+</file>
+
+<file path=ppt/slides/slide36.xml><?xml version="1.0" encoding="utf-8"?>
+<p:sld xmlns:a="http://schemas.openxmlformats.org/drawingml/2006/main" xmlns:r="http://schemas.openxmlformats.org/officeDocument/2006/relationships" xmlns:p="http://schemas.openxmlformats.org/presentationml/2006/main">
+  <p:cSld>
+    <p:spTree>
+      <p:nvGrpSpPr>
+        <p:cNvPr id="1" name=""/>
+        <p:cNvGrpSpPr/>
+        <p:nvPr/>
+      </p:nvGrpSpPr>
+      <p:grpSpPr>
+        <a:xfrm>
+          <a:off x="0" y="0"/>
+          <a:ext cx="0" cy="0"/>
+          <a:chOff x="0" y="0"/>
+          <a:chExt cx="0" cy="0"/>
+        </a:xfrm>
+      </p:grpSpPr>
+      <p:pic>
+        <p:nvPicPr>
+          <p:cNvPr id="5" name="Picture 4">
+            <a:extLst>
+              <a:ext uri="{FF2B5EF4-FFF2-40B4-BE49-F238E27FC236}">
+                <a16:creationId xmlns:a16="http://schemas.microsoft.com/office/drawing/2014/main" id="{139D0F41-2BCE-4CFA-3F27-BADC2FFC52E3}"/>
+              </a:ext>
+            </a:extLst>
+          </p:cNvPr>
+          <p:cNvPicPr>
+            <a:picLocks noChangeAspect="1"/>
+          </p:cNvPicPr>
+          <p:nvPr/>
+        </p:nvPicPr>
+        <p:blipFill>
+          <a:blip r:embed="rId2"/>
+          <a:srcRect r="22711"/>
+          <a:stretch>
+            <a:fillRect/>
+          </a:stretch>
+        </p:blipFill>
+        <p:spPr>
+          <a:xfrm>
+            <a:off x="0" y="2221598"/>
+            <a:ext cx="11838591" cy="3033795"/>
+          </a:xfrm>
+          <a:prstGeom prst="rect">
+            <a:avLst/>
+          </a:prstGeom>
+        </p:spPr>
+      </p:pic>
+      <p:cxnSp>
+        <p:nvCxnSpPr>
+          <p:cNvPr id="7" name="Straight Arrow Connector 6">
+            <a:extLst>
+              <a:ext uri="{FF2B5EF4-FFF2-40B4-BE49-F238E27FC236}">
+                <a16:creationId xmlns:a16="http://schemas.microsoft.com/office/drawing/2014/main" id="{5BCEEA32-8AE9-45C7-B0D3-916E6FA72FA7}"/>
+              </a:ext>
+            </a:extLst>
+          </p:cNvPr>
+          <p:cNvCxnSpPr/>
+          <p:nvPr/>
+        </p:nvCxnSpPr>
+        <p:spPr>
+          <a:xfrm flipH="1">
+            <a:off x="8142973" y="1443789"/>
+            <a:ext cx="962526" cy="1780674"/>
+          </a:xfrm>
+          <a:prstGeom prst="straightConnector1">
+            <a:avLst/>
+          </a:prstGeom>
+          <a:ln>
+            <a:tailEnd type="triangle"/>
+          </a:ln>
+        </p:spPr>
+        <p:style>
+          <a:lnRef idx="1">
+            <a:schemeClr val="accent1"/>
+          </a:lnRef>
+          <a:fillRef idx="0">
+            <a:schemeClr val="accent1"/>
+          </a:fillRef>
+          <a:effectRef idx="0">
+            <a:schemeClr val="accent1"/>
+          </a:effectRef>
+          <a:fontRef idx="minor">
+            <a:schemeClr val="tx1"/>
+          </a:fontRef>
+        </p:style>
+      </p:cxnSp>
+      <p:sp>
+        <p:nvSpPr>
+          <p:cNvPr id="8" name="Rectangle 7">
+            <a:extLst>
+              <a:ext uri="{FF2B5EF4-FFF2-40B4-BE49-F238E27FC236}">
+                <a16:creationId xmlns:a16="http://schemas.microsoft.com/office/drawing/2014/main" id="{8D12BD08-4843-3D98-A10C-FB5EF4B87A19}"/>
+              </a:ext>
+            </a:extLst>
+          </p:cNvPr>
+          <p:cNvSpPr/>
+          <p:nvPr/>
+        </p:nvSpPr>
+        <p:spPr>
+          <a:xfrm>
+            <a:off x="6517345" y="376588"/>
+            <a:ext cx="4598793" cy="970737"/>
+          </a:xfrm>
+          <a:prstGeom prst="rect">
+            <a:avLst/>
+          </a:prstGeom>
+          <a:solidFill>
+            <a:schemeClr val="accent4">
+              <a:lumMod val="40000"/>
+              <a:lumOff val="60000"/>
+            </a:schemeClr>
+          </a:solidFill>
+        </p:spPr>
+        <p:style>
+          <a:lnRef idx="2">
+            <a:schemeClr val="accent1">
+              <a:shade val="50000"/>
+            </a:schemeClr>
+          </a:lnRef>
+          <a:fillRef idx="1">
+            <a:schemeClr val="accent1"/>
+          </a:fillRef>
+          <a:effectRef idx="0">
+            <a:schemeClr val="accent1"/>
+          </a:effectRef>
+          <a:fontRef idx="minor">
+            <a:schemeClr val="lt1"/>
+          </a:fontRef>
+        </p:style>
+        <p:txBody>
+          <a:bodyPr rtlCol="0" anchor="ctr"/>
+          <a:lstStyle/>
+          <a:p>
+            <a:pPr algn="ctr"/>
+            <a:r>
+              <a:rPr lang="en-IE" dirty="0">
+                <a:solidFill>
+                  <a:schemeClr val="tx1"/>
+                </a:solidFill>
+              </a:rPr>
+              <a:t>Constructors passes parameters back to base / abstract class</a:t>
+            </a:r>
+          </a:p>
+        </p:txBody>
+      </p:sp>
+      <p:sp>
+        <p:nvSpPr>
+          <p:cNvPr id="9" name="Rectangle 8">
+            <a:extLst>
+              <a:ext uri="{FF2B5EF4-FFF2-40B4-BE49-F238E27FC236}">
+                <a16:creationId xmlns:a16="http://schemas.microsoft.com/office/drawing/2014/main" id="{7822A24E-A95F-B722-DC7D-48C429948DB1}"/>
+              </a:ext>
+            </a:extLst>
+          </p:cNvPr>
+          <p:cNvSpPr/>
+          <p:nvPr/>
+        </p:nvSpPr>
+        <p:spPr>
+          <a:xfrm>
+            <a:off x="721333" y="2752825"/>
+            <a:ext cx="4598793" cy="385010"/>
+          </a:xfrm>
+          <a:prstGeom prst="rect">
+            <a:avLst/>
+          </a:prstGeom>
+          <a:solidFill>
+            <a:schemeClr val="accent4">
+              <a:lumMod val="40000"/>
+              <a:lumOff val="60000"/>
+            </a:schemeClr>
+          </a:solidFill>
+        </p:spPr>
+        <p:style>
+          <a:lnRef idx="2">
+            <a:schemeClr val="accent1">
+              <a:shade val="50000"/>
+            </a:schemeClr>
+          </a:lnRef>
+          <a:fillRef idx="1">
+            <a:schemeClr val="accent1"/>
+          </a:fillRef>
+          <a:effectRef idx="0">
+            <a:schemeClr val="accent1"/>
+          </a:effectRef>
+          <a:fontRef idx="minor">
+            <a:schemeClr val="lt1"/>
+          </a:fontRef>
+        </p:style>
+        <p:txBody>
+          <a:bodyPr rtlCol="0" anchor="ctr"/>
+          <a:lstStyle/>
+          <a:p>
+            <a:pPr algn="ctr"/>
+            <a:r>
+              <a:rPr lang="en-IE" dirty="0">
+                <a:solidFill>
+                  <a:schemeClr val="tx1"/>
+                </a:solidFill>
+              </a:rPr>
+              <a:t>Removed original constructor</a:t>
+            </a:r>
+          </a:p>
+        </p:txBody>
+      </p:sp>
+    </p:spTree>
+    <p:extLst>
+      <p:ext uri="{BB962C8B-B14F-4D97-AF65-F5344CB8AC3E}">
+        <p14:creationId xmlns:p14="http://schemas.microsoft.com/office/powerpoint/2010/main" val="320270045"/>
+      </p:ext>
+    </p:extLst>
+  </p:cSld>
+  <p:clrMapOvr>
+    <a:masterClrMapping/>
+  </p:clrMapOvr>
+</p:sld>
+</file>
+
+<file path=ppt/slides/slide37.xml><?xml version="1.0" encoding="utf-8"?>
+<p:sld xmlns:a="http://schemas.openxmlformats.org/drawingml/2006/main" xmlns:r="http://schemas.openxmlformats.org/officeDocument/2006/relationships" xmlns:p="http://schemas.openxmlformats.org/presentationml/2006/main">
+  <p:cSld>
+    <p:spTree>
+      <p:nvGrpSpPr>
+        <p:cNvPr id="1" name=""/>
+        <p:cNvGrpSpPr/>
+        <p:nvPr/>
+      </p:nvGrpSpPr>
+      <p:grpSpPr>
+        <a:xfrm>
+          <a:off x="0" y="0"/>
+          <a:ext cx="0" cy="0"/>
+          <a:chOff x="0" y="0"/>
+          <a:chExt cx="0" cy="0"/>
+        </a:xfrm>
+      </p:grpSpPr>
+      <p:pic>
+        <p:nvPicPr>
+          <p:cNvPr id="5" name="Picture 4">
+            <a:extLst>
+              <a:ext uri="{FF2B5EF4-FFF2-40B4-BE49-F238E27FC236}">
+                <a16:creationId xmlns:a16="http://schemas.microsoft.com/office/drawing/2014/main" id="{CCE872A0-DE02-0E89-6C3F-8E79EFD600CF}"/>
+              </a:ext>
+            </a:extLst>
+          </p:cNvPr>
+          <p:cNvPicPr>
+            <a:picLocks noChangeAspect="1"/>
+          </p:cNvPicPr>
+          <p:nvPr/>
+        </p:nvPicPr>
+        <p:blipFill>
+          <a:blip r:embed="rId2"/>
+          <a:stretch>
+            <a:fillRect/>
+          </a:stretch>
+        </p:blipFill>
+        <p:spPr>
+          <a:xfrm>
+            <a:off x="477516" y="1087861"/>
+            <a:ext cx="5019048" cy="4104762"/>
+          </a:xfrm>
+          <a:prstGeom prst="rect">
+            <a:avLst/>
+          </a:prstGeom>
+        </p:spPr>
+      </p:pic>
+      <p:sp>
+        <p:nvSpPr>
+          <p:cNvPr id="6" name="Rectangle 5">
+            <a:extLst>
+              <a:ext uri="{FF2B5EF4-FFF2-40B4-BE49-F238E27FC236}">
+                <a16:creationId xmlns:a16="http://schemas.microsoft.com/office/drawing/2014/main" id="{3FFAA2D0-E045-DA01-6755-0697450E05A2}"/>
+              </a:ext>
+            </a:extLst>
+          </p:cNvPr>
+          <p:cNvSpPr/>
+          <p:nvPr/>
+        </p:nvSpPr>
+        <p:spPr>
+          <a:xfrm>
+            <a:off x="5496564" y="4467325"/>
+            <a:ext cx="4598793" cy="970737"/>
+          </a:xfrm>
+          <a:prstGeom prst="rect">
+            <a:avLst/>
+          </a:prstGeom>
+          <a:solidFill>
+            <a:schemeClr val="accent4">
+              <a:lumMod val="40000"/>
+              <a:lumOff val="60000"/>
+            </a:schemeClr>
+          </a:solidFill>
+        </p:spPr>
+        <p:style>
+          <a:lnRef idx="2">
+            <a:schemeClr val="accent1">
+              <a:shade val="50000"/>
+            </a:schemeClr>
+          </a:lnRef>
+          <a:fillRef idx="1">
+            <a:schemeClr val="accent1"/>
+          </a:fillRef>
+          <a:effectRef idx="0">
+            <a:schemeClr val="accent1"/>
+          </a:effectRef>
+          <a:fontRef idx="minor">
+            <a:schemeClr val="lt1"/>
+          </a:fontRef>
+        </p:style>
+        <p:txBody>
+          <a:bodyPr rtlCol="0" anchor="ctr"/>
+          <a:lstStyle/>
+          <a:p>
+            <a:pPr algn="ctr"/>
+            <a:r>
+              <a:rPr lang="en-IE" dirty="0">
+                <a:solidFill>
+                  <a:schemeClr val="tx1"/>
+                </a:solidFill>
+              </a:rPr>
+              <a:t>Add this to the abstract class</a:t>
+            </a:r>
+          </a:p>
+        </p:txBody>
+      </p:sp>
+      <p:cxnSp>
+        <p:nvCxnSpPr>
+          <p:cNvPr id="8" name="Straight Arrow Connector 7">
+            <a:extLst>
+              <a:ext uri="{FF2B5EF4-FFF2-40B4-BE49-F238E27FC236}">
+                <a16:creationId xmlns:a16="http://schemas.microsoft.com/office/drawing/2014/main" id="{F78D1E40-BBE5-EA01-A410-7D34A0284CA4}"/>
+              </a:ext>
+            </a:extLst>
+          </p:cNvPr>
+          <p:cNvCxnSpPr/>
+          <p:nvPr/>
+        </p:nvCxnSpPr>
+        <p:spPr>
+          <a:xfrm flipH="1">
+            <a:off x="4119613" y="5014762"/>
+            <a:ext cx="1232033" cy="0"/>
+          </a:xfrm>
+          <a:prstGeom prst="straightConnector1">
+            <a:avLst/>
+          </a:prstGeom>
+          <a:ln>
+            <a:tailEnd type="triangle"/>
+          </a:ln>
+        </p:spPr>
+        <p:style>
+          <a:lnRef idx="1">
+            <a:schemeClr val="accent1"/>
+          </a:lnRef>
+          <a:fillRef idx="0">
+            <a:schemeClr val="accent1"/>
+          </a:fillRef>
+          <a:effectRef idx="0">
+            <a:schemeClr val="accent1"/>
+          </a:effectRef>
+          <a:fontRef idx="minor">
+            <a:schemeClr val="tx1"/>
+          </a:fontRef>
+        </p:style>
+      </p:cxnSp>
+    </p:spTree>
+    <p:extLst>
+      <p:ext uri="{BB962C8B-B14F-4D97-AF65-F5344CB8AC3E}">
+        <p14:creationId xmlns:p14="http://schemas.microsoft.com/office/powerpoint/2010/main" val="2164239829"/>
+      </p:ext>
+    </p:extLst>
+  </p:cSld>
+  <p:clrMapOvr>
+    <a:masterClrMapping/>
+  </p:clrMapOvr>
+</p:sld>
+</file>
+
+<file path=ppt/slides/slide38.xml><?xml version="1.0" encoding="utf-8"?>
+<p:sld xmlns:a="http://schemas.openxmlformats.org/drawingml/2006/main" xmlns:r="http://schemas.openxmlformats.org/officeDocument/2006/relationships" xmlns:p="http://schemas.openxmlformats.org/presentationml/2006/main">
+  <p:cSld>
+    <p:spTree>
+      <p:nvGrpSpPr>
+        <p:cNvPr id="1" name=""/>
+        <p:cNvGrpSpPr/>
+        <p:nvPr/>
+      </p:nvGrpSpPr>
+      <p:grpSpPr>
+        <a:xfrm>
+          <a:off x="0" y="0"/>
+          <a:ext cx="0" cy="0"/>
+          <a:chOff x="0" y="0"/>
+          <a:chExt cx="0" cy="0"/>
+        </a:xfrm>
+      </p:grpSpPr>
+      <p:pic>
+        <p:nvPicPr>
+          <p:cNvPr id="5" name="Picture 4">
+            <a:extLst>
+              <a:ext uri="{FF2B5EF4-FFF2-40B4-BE49-F238E27FC236}">
+                <a16:creationId xmlns:a16="http://schemas.microsoft.com/office/drawing/2014/main" id="{BC87A773-B15B-C6B9-F10F-FECF22FDC71E}"/>
+              </a:ext>
+            </a:extLst>
+          </p:cNvPr>
+          <p:cNvPicPr>
+            <a:picLocks noChangeAspect="1"/>
+          </p:cNvPicPr>
+          <p:nvPr/>
+        </p:nvPicPr>
+        <p:blipFill>
+          <a:blip r:embed="rId2"/>
+          <a:stretch>
+            <a:fillRect/>
+          </a:stretch>
+        </p:blipFill>
+        <p:spPr>
+          <a:xfrm>
+            <a:off x="195713" y="2528354"/>
+            <a:ext cx="11800573" cy="1801292"/>
+          </a:xfrm>
+          <a:prstGeom prst="rect">
+            <a:avLst/>
+          </a:prstGeom>
+        </p:spPr>
+      </p:pic>
+      <p:sp>
+        <p:nvSpPr>
+          <p:cNvPr id="6" name="Rectangle 5">
+            <a:extLst>
+              <a:ext uri="{FF2B5EF4-FFF2-40B4-BE49-F238E27FC236}">
+                <a16:creationId xmlns:a16="http://schemas.microsoft.com/office/drawing/2014/main" id="{37E5071C-60CB-1C23-4ED8-7FF46721D6BF}"/>
+              </a:ext>
+            </a:extLst>
+          </p:cNvPr>
+          <p:cNvSpPr/>
+          <p:nvPr/>
+        </p:nvSpPr>
+        <p:spPr>
+          <a:xfrm>
+            <a:off x="597305" y="877102"/>
+            <a:ext cx="4598793" cy="970737"/>
+          </a:xfrm>
+          <a:prstGeom prst="rect">
+            <a:avLst/>
+          </a:prstGeom>
+          <a:solidFill>
+            <a:schemeClr val="accent4">
+              <a:lumMod val="40000"/>
+              <a:lumOff val="60000"/>
+            </a:schemeClr>
+          </a:solidFill>
+        </p:spPr>
+        <p:style>
+          <a:lnRef idx="2">
+            <a:schemeClr val="accent1">
+              <a:shade val="50000"/>
+            </a:schemeClr>
+          </a:lnRef>
+          <a:fillRef idx="1">
+            <a:schemeClr val="accent1"/>
+          </a:fillRef>
+          <a:effectRef idx="0">
+            <a:schemeClr val="accent1"/>
+          </a:effectRef>
+          <a:fontRef idx="minor">
+            <a:schemeClr val="lt1"/>
+          </a:fontRef>
+        </p:style>
+        <p:txBody>
+          <a:bodyPr rtlCol="0" anchor="ctr"/>
+          <a:lstStyle/>
+          <a:p>
+            <a:pPr algn="ctr"/>
+            <a:r>
+              <a:rPr lang="en-IE" dirty="0">
+                <a:solidFill>
+                  <a:schemeClr val="tx1"/>
+                </a:solidFill>
+              </a:rPr>
+              <a:t>Modify this to implement abstract method from base class</a:t>
+            </a:r>
+          </a:p>
+        </p:txBody>
+      </p:sp>
+      <p:sp>
+        <p:nvSpPr>
+          <p:cNvPr id="7" name="Rectangle 6">
+            <a:extLst>
+              <a:ext uri="{FF2B5EF4-FFF2-40B4-BE49-F238E27FC236}">
+                <a16:creationId xmlns:a16="http://schemas.microsoft.com/office/drawing/2014/main" id="{5F5991C2-C11A-1CFF-EA61-74152318C84C}"/>
+              </a:ext>
+            </a:extLst>
+          </p:cNvPr>
+          <p:cNvSpPr/>
+          <p:nvPr/>
+        </p:nvSpPr>
+        <p:spPr>
+          <a:xfrm>
+            <a:off x="1222411" y="2666198"/>
+            <a:ext cx="943276" cy="259882"/>
+          </a:xfrm>
+          <a:prstGeom prst="rect">
+            <a:avLst/>
+          </a:prstGeom>
+          <a:noFill/>
+        </p:spPr>
+        <p:style>
+          <a:lnRef idx="2">
+            <a:schemeClr val="accent1">
+              <a:shade val="15000"/>
+            </a:schemeClr>
+          </a:lnRef>
+          <a:fillRef idx="1">
+            <a:schemeClr val="accent1"/>
+          </a:fillRef>
+          <a:effectRef idx="0">
+            <a:schemeClr val="accent1"/>
+          </a:effectRef>
+          <a:fontRef idx="minor">
+            <a:schemeClr val="lt1"/>
+          </a:fontRef>
+        </p:style>
+        <p:txBody>
+          <a:bodyPr rtlCol="0" anchor="ctr"/>
+          <a:lstStyle/>
+          <a:p>
+            <a:pPr algn="ctr"/>
+            <a:endParaRPr lang="en-GB"/>
+          </a:p>
+        </p:txBody>
+      </p:sp>
+      <p:cxnSp>
+        <p:nvCxnSpPr>
+          <p:cNvPr id="9" name="Straight Arrow Connector 8">
+            <a:extLst>
+              <a:ext uri="{FF2B5EF4-FFF2-40B4-BE49-F238E27FC236}">
+                <a16:creationId xmlns:a16="http://schemas.microsoft.com/office/drawing/2014/main" id="{75DDC459-390A-9DD4-94C4-0CDEB03270BE}"/>
+              </a:ext>
+            </a:extLst>
+          </p:cNvPr>
+          <p:cNvCxnSpPr/>
+          <p:nvPr/>
+        </p:nvCxnSpPr>
+        <p:spPr>
+          <a:xfrm flipH="1">
+            <a:off x="1973179" y="1847839"/>
+            <a:ext cx="356135" cy="500725"/>
+          </a:xfrm>
+          <a:prstGeom prst="straightConnector1">
+            <a:avLst/>
+          </a:prstGeom>
+          <a:ln>
+            <a:tailEnd type="triangle"/>
+          </a:ln>
+        </p:spPr>
+        <p:style>
+          <a:lnRef idx="1">
+            <a:schemeClr val="accent1"/>
+          </a:lnRef>
+          <a:fillRef idx="0">
+            <a:schemeClr val="accent1"/>
+          </a:fillRef>
+          <a:effectRef idx="0">
+            <a:schemeClr val="accent1"/>
+          </a:effectRef>
+          <a:fontRef idx="minor">
+            <a:schemeClr val="tx1"/>
+          </a:fontRef>
+        </p:style>
+      </p:cxnSp>
+    </p:spTree>
+    <p:extLst>
+      <p:ext uri="{BB962C8B-B14F-4D97-AF65-F5344CB8AC3E}">
+        <p14:creationId xmlns:p14="http://schemas.microsoft.com/office/powerpoint/2010/main" val="4081973646"/>
+      </p:ext>
+    </p:extLst>
+  </p:cSld>
+  <p:clrMapOvr>
+    <a:masterClrMapping/>
+  </p:clrMapOvr>
+</p:sld>
+</file>
+
+<file path=ppt/slides/slide39.xml><?xml version="1.0" encoding="utf-8"?>
+<p:sld xmlns:a="http://schemas.openxmlformats.org/drawingml/2006/main" xmlns:r="http://schemas.openxmlformats.org/officeDocument/2006/relationships" xmlns:p="http://schemas.openxmlformats.org/presentationml/2006/main">
+  <p:cSld>
+    <p:spTree>
+      <p:nvGrpSpPr>
+        <p:cNvPr id="1" name=""/>
+        <p:cNvGrpSpPr/>
+        <p:nvPr/>
+      </p:nvGrpSpPr>
+      <p:grpSpPr>
+        <a:xfrm>
+          <a:off x="0" y="0"/>
+          <a:ext cx="0" cy="0"/>
+          <a:chOff x="0" y="0"/>
+          <a:chExt cx="0" cy="0"/>
+        </a:xfrm>
+      </p:grpSpPr>
+      <p:sp>
+        <p:nvSpPr>
+          <p:cNvPr id="2" name="Title 1">
+            <a:extLst>
+              <a:ext uri="{FF2B5EF4-FFF2-40B4-BE49-F238E27FC236}">
+                <a16:creationId xmlns:a16="http://schemas.microsoft.com/office/drawing/2014/main" id="{64F2D141-63A9-403A-8A02-0B31473E37A5}"/>
+              </a:ext>
+            </a:extLst>
+          </p:cNvPr>
+          <p:cNvSpPr>
+            <a:spLocks noGrp="1"/>
+          </p:cNvSpPr>
+          <p:nvPr>
+            <p:ph type="title"/>
+          </p:nvPr>
+        </p:nvSpPr>
+        <p:spPr/>
+        <p:txBody>
+          <a:bodyPr/>
+          <a:lstStyle/>
+          <a:p>
+            <a:endParaRPr lang="en-GB"/>
+          </a:p>
+        </p:txBody>
+      </p:sp>
+      <p:sp>
+        <p:nvSpPr>
+          <p:cNvPr id="3" name="Text Placeholder 2">
+            <a:extLst>
+              <a:ext uri="{FF2B5EF4-FFF2-40B4-BE49-F238E27FC236}">
+                <a16:creationId xmlns:a16="http://schemas.microsoft.com/office/drawing/2014/main" id="{D9DB5BD4-AEFA-F103-842A-3FEAD57A3D00}"/>
+              </a:ext>
+            </a:extLst>
+          </p:cNvPr>
+          <p:cNvSpPr>
+            <a:spLocks noGrp="1"/>
+          </p:cNvSpPr>
+          <p:nvPr>
+            <p:ph type="body" idx="1"/>
+          </p:nvPr>
+        </p:nvSpPr>
+        <p:spPr/>
+        <p:txBody>
+          <a:bodyPr/>
+          <a:lstStyle/>
+          <a:p>
+            <a:endParaRPr lang="en-GB"/>
+          </a:p>
+        </p:txBody>
+      </p:sp>
+    </p:spTree>
+    <p:extLst>
+      <p:ext uri="{BB962C8B-B14F-4D97-AF65-F5344CB8AC3E}">
+        <p14:creationId xmlns:p14="http://schemas.microsoft.com/office/powerpoint/2010/main" val="4142992940"/>
+      </p:ext>
+    </p:extLst>
+  </p:cSld>
+  <p:clrMapOvr>
+    <a:masterClrMapping/>
+  </p:clrMapOvr>
+</p:sld>
+</file>
+
 <file path=ppt/slides/slide4.xml><?xml version="1.0" encoding="utf-8"?>
 <p:sld xmlns:a="http://schemas.openxmlformats.org/drawingml/2006/main" xmlns:r="http://schemas.openxmlformats.org/officeDocument/2006/relationships" xmlns:p="http://schemas.openxmlformats.org/presentationml/2006/main">
   <p:cSld>
@@ -6272,6 +7202,326 @@
     <p:extLst>
       <p:ext uri="{BB962C8B-B14F-4D97-AF65-F5344CB8AC3E}">
         <p14:creationId xmlns:p14="http://schemas.microsoft.com/office/powerpoint/2010/main" val="488773756"/>
+      </p:ext>
+    </p:extLst>
+  </p:cSld>
+  <p:clrMapOvr>
+    <a:masterClrMapping/>
+  </p:clrMapOvr>
+</p:sld>
+</file>
+
+<file path=ppt/slides/slide40.xml><?xml version="1.0" encoding="utf-8"?>
+<p:sld xmlns:a="http://schemas.openxmlformats.org/drawingml/2006/main" xmlns:r="http://schemas.openxmlformats.org/officeDocument/2006/relationships" xmlns:p="http://schemas.openxmlformats.org/presentationml/2006/main">
+  <p:cSld>
+    <p:spTree>
+      <p:nvGrpSpPr>
+        <p:cNvPr id="1" name=""/>
+        <p:cNvGrpSpPr/>
+        <p:nvPr/>
+      </p:nvGrpSpPr>
+      <p:grpSpPr>
+        <a:xfrm>
+          <a:off x="0" y="0"/>
+          <a:ext cx="0" cy="0"/>
+          <a:chOff x="0" y="0"/>
+          <a:chExt cx="0" cy="0"/>
+        </a:xfrm>
+      </p:grpSpPr>
+      <p:sp>
+        <p:nvSpPr>
+          <p:cNvPr id="2" name="Title 1">
+            <a:extLst>
+              <a:ext uri="{FF2B5EF4-FFF2-40B4-BE49-F238E27FC236}">
+                <a16:creationId xmlns:a16="http://schemas.microsoft.com/office/drawing/2014/main" id="{4D2B38F2-DAFE-8B22-44EE-CAFFB081FE3B}"/>
+              </a:ext>
+            </a:extLst>
+          </p:cNvPr>
+          <p:cNvSpPr>
+            <a:spLocks noGrp="1"/>
+          </p:cNvSpPr>
+          <p:nvPr>
+            <p:ph type="title"/>
+          </p:nvPr>
+        </p:nvSpPr>
+        <p:spPr/>
+        <p:txBody>
+          <a:bodyPr/>
+          <a:lstStyle/>
+          <a:p>
+            <a:endParaRPr lang="en-GB"/>
+          </a:p>
+        </p:txBody>
+      </p:sp>
+      <p:sp>
+        <p:nvSpPr>
+          <p:cNvPr id="3" name="Text Placeholder 2">
+            <a:extLst>
+              <a:ext uri="{FF2B5EF4-FFF2-40B4-BE49-F238E27FC236}">
+                <a16:creationId xmlns:a16="http://schemas.microsoft.com/office/drawing/2014/main" id="{7BE27874-114B-03C6-C95A-507B42BA0758}"/>
+              </a:ext>
+            </a:extLst>
+          </p:cNvPr>
+          <p:cNvSpPr>
+            <a:spLocks noGrp="1"/>
+          </p:cNvSpPr>
+          <p:nvPr>
+            <p:ph type="body" idx="1"/>
+          </p:nvPr>
+        </p:nvSpPr>
+        <p:spPr/>
+        <p:txBody>
+          <a:bodyPr/>
+          <a:lstStyle/>
+          <a:p>
+            <a:endParaRPr lang="en-GB"/>
+          </a:p>
+        </p:txBody>
+      </p:sp>
+    </p:spTree>
+    <p:extLst>
+      <p:ext uri="{BB962C8B-B14F-4D97-AF65-F5344CB8AC3E}">
+        <p14:creationId xmlns:p14="http://schemas.microsoft.com/office/powerpoint/2010/main" val="2096573669"/>
+      </p:ext>
+    </p:extLst>
+  </p:cSld>
+  <p:clrMapOvr>
+    <a:masterClrMapping/>
+  </p:clrMapOvr>
+</p:sld>
+</file>
+
+<file path=ppt/slides/slide41.xml><?xml version="1.0" encoding="utf-8"?>
+<p:sld xmlns:a="http://schemas.openxmlformats.org/drawingml/2006/main" xmlns:r="http://schemas.openxmlformats.org/officeDocument/2006/relationships" xmlns:p="http://schemas.openxmlformats.org/presentationml/2006/main">
+  <p:cSld>
+    <p:spTree>
+      <p:nvGrpSpPr>
+        <p:cNvPr id="1" name=""/>
+        <p:cNvGrpSpPr/>
+        <p:nvPr/>
+      </p:nvGrpSpPr>
+      <p:grpSpPr>
+        <a:xfrm>
+          <a:off x="0" y="0"/>
+          <a:ext cx="0" cy="0"/>
+          <a:chOff x="0" y="0"/>
+          <a:chExt cx="0" cy="0"/>
+        </a:xfrm>
+      </p:grpSpPr>
+      <p:sp>
+        <p:nvSpPr>
+          <p:cNvPr id="2" name="Title 1">
+            <a:extLst>
+              <a:ext uri="{FF2B5EF4-FFF2-40B4-BE49-F238E27FC236}">
+                <a16:creationId xmlns:a16="http://schemas.microsoft.com/office/drawing/2014/main" id="{CDE48A65-0C4C-0A0B-AC33-AC4B5949C67F}"/>
+              </a:ext>
+            </a:extLst>
+          </p:cNvPr>
+          <p:cNvSpPr>
+            <a:spLocks noGrp="1"/>
+          </p:cNvSpPr>
+          <p:nvPr>
+            <p:ph type="title"/>
+          </p:nvPr>
+        </p:nvSpPr>
+        <p:spPr/>
+        <p:txBody>
+          <a:bodyPr/>
+          <a:lstStyle/>
+          <a:p>
+            <a:endParaRPr lang="en-GB"/>
+          </a:p>
+        </p:txBody>
+      </p:sp>
+      <p:sp>
+        <p:nvSpPr>
+          <p:cNvPr id="3" name="Text Placeholder 2">
+            <a:extLst>
+              <a:ext uri="{FF2B5EF4-FFF2-40B4-BE49-F238E27FC236}">
+                <a16:creationId xmlns:a16="http://schemas.microsoft.com/office/drawing/2014/main" id="{508E0947-8BE3-8F21-95C9-4413EB26348E}"/>
+              </a:ext>
+            </a:extLst>
+          </p:cNvPr>
+          <p:cNvSpPr>
+            <a:spLocks noGrp="1"/>
+          </p:cNvSpPr>
+          <p:nvPr>
+            <p:ph type="body" idx="1"/>
+          </p:nvPr>
+        </p:nvSpPr>
+        <p:spPr/>
+        <p:txBody>
+          <a:bodyPr/>
+          <a:lstStyle/>
+          <a:p>
+            <a:endParaRPr lang="en-GB"/>
+          </a:p>
+        </p:txBody>
+      </p:sp>
+    </p:spTree>
+    <p:extLst>
+      <p:ext uri="{BB962C8B-B14F-4D97-AF65-F5344CB8AC3E}">
+        <p14:creationId xmlns:p14="http://schemas.microsoft.com/office/powerpoint/2010/main" val="1955045216"/>
+      </p:ext>
+    </p:extLst>
+  </p:cSld>
+  <p:clrMapOvr>
+    <a:masterClrMapping/>
+  </p:clrMapOvr>
+</p:sld>
+</file>
+
+<file path=ppt/slides/slide42.xml><?xml version="1.0" encoding="utf-8"?>
+<p:sld xmlns:a="http://schemas.openxmlformats.org/drawingml/2006/main" xmlns:r="http://schemas.openxmlformats.org/officeDocument/2006/relationships" xmlns:p="http://schemas.openxmlformats.org/presentationml/2006/main">
+  <p:cSld>
+    <p:spTree>
+      <p:nvGrpSpPr>
+        <p:cNvPr id="1" name=""/>
+        <p:cNvGrpSpPr/>
+        <p:nvPr/>
+      </p:nvGrpSpPr>
+      <p:grpSpPr>
+        <a:xfrm>
+          <a:off x="0" y="0"/>
+          <a:ext cx="0" cy="0"/>
+          <a:chOff x="0" y="0"/>
+          <a:chExt cx="0" cy="0"/>
+        </a:xfrm>
+      </p:grpSpPr>
+      <p:sp>
+        <p:nvSpPr>
+          <p:cNvPr id="2" name="Title 1">
+            <a:extLst>
+              <a:ext uri="{FF2B5EF4-FFF2-40B4-BE49-F238E27FC236}">
+                <a16:creationId xmlns:a16="http://schemas.microsoft.com/office/drawing/2014/main" id="{DF180E21-FA5E-AB13-5518-193D6E56CA3D}"/>
+              </a:ext>
+            </a:extLst>
+          </p:cNvPr>
+          <p:cNvSpPr>
+            <a:spLocks noGrp="1"/>
+          </p:cNvSpPr>
+          <p:nvPr>
+            <p:ph type="title"/>
+          </p:nvPr>
+        </p:nvSpPr>
+        <p:spPr/>
+        <p:txBody>
+          <a:bodyPr/>
+          <a:lstStyle/>
+          <a:p>
+            <a:endParaRPr lang="en-GB"/>
+          </a:p>
+        </p:txBody>
+      </p:sp>
+      <p:sp>
+        <p:nvSpPr>
+          <p:cNvPr id="3" name="Text Placeholder 2">
+            <a:extLst>
+              <a:ext uri="{FF2B5EF4-FFF2-40B4-BE49-F238E27FC236}">
+                <a16:creationId xmlns:a16="http://schemas.microsoft.com/office/drawing/2014/main" id="{E5ADF57A-3FA8-B6FE-5EBB-B398E2D10466}"/>
+              </a:ext>
+            </a:extLst>
+          </p:cNvPr>
+          <p:cNvSpPr>
+            <a:spLocks noGrp="1"/>
+          </p:cNvSpPr>
+          <p:nvPr>
+            <p:ph type="body" idx="1"/>
+          </p:nvPr>
+        </p:nvSpPr>
+        <p:spPr/>
+        <p:txBody>
+          <a:bodyPr/>
+          <a:lstStyle/>
+          <a:p>
+            <a:endParaRPr lang="en-GB"/>
+          </a:p>
+        </p:txBody>
+      </p:sp>
+    </p:spTree>
+    <p:extLst>
+      <p:ext uri="{BB962C8B-B14F-4D97-AF65-F5344CB8AC3E}">
+        <p14:creationId xmlns:p14="http://schemas.microsoft.com/office/powerpoint/2010/main" val="73006775"/>
+      </p:ext>
+    </p:extLst>
+  </p:cSld>
+  <p:clrMapOvr>
+    <a:masterClrMapping/>
+  </p:clrMapOvr>
+</p:sld>
+</file>
+
+<file path=ppt/slides/slide43.xml><?xml version="1.0" encoding="utf-8"?>
+<p:sld xmlns:a="http://schemas.openxmlformats.org/drawingml/2006/main" xmlns:r="http://schemas.openxmlformats.org/officeDocument/2006/relationships" xmlns:p="http://schemas.openxmlformats.org/presentationml/2006/main">
+  <p:cSld>
+    <p:spTree>
+      <p:nvGrpSpPr>
+        <p:cNvPr id="1" name=""/>
+        <p:cNvGrpSpPr/>
+        <p:nvPr/>
+      </p:nvGrpSpPr>
+      <p:grpSpPr>
+        <a:xfrm>
+          <a:off x="0" y="0"/>
+          <a:ext cx="0" cy="0"/>
+          <a:chOff x="0" y="0"/>
+          <a:chExt cx="0" cy="0"/>
+        </a:xfrm>
+      </p:grpSpPr>
+      <p:sp>
+        <p:nvSpPr>
+          <p:cNvPr id="2" name="Title 1">
+            <a:extLst>
+              <a:ext uri="{FF2B5EF4-FFF2-40B4-BE49-F238E27FC236}">
+                <a16:creationId xmlns:a16="http://schemas.microsoft.com/office/drawing/2014/main" id="{88CABA1B-FB23-971D-1CB2-5225504941AB}"/>
+              </a:ext>
+            </a:extLst>
+          </p:cNvPr>
+          <p:cNvSpPr>
+            <a:spLocks noGrp="1"/>
+          </p:cNvSpPr>
+          <p:nvPr>
+            <p:ph type="title"/>
+          </p:nvPr>
+        </p:nvSpPr>
+        <p:spPr/>
+        <p:txBody>
+          <a:bodyPr/>
+          <a:lstStyle/>
+          <a:p>
+            <a:endParaRPr lang="en-GB"/>
+          </a:p>
+        </p:txBody>
+      </p:sp>
+      <p:sp>
+        <p:nvSpPr>
+          <p:cNvPr id="3" name="Text Placeholder 2">
+            <a:extLst>
+              <a:ext uri="{FF2B5EF4-FFF2-40B4-BE49-F238E27FC236}">
+                <a16:creationId xmlns:a16="http://schemas.microsoft.com/office/drawing/2014/main" id="{F51FC2B8-AD28-6B87-9822-7E7A55C488D2}"/>
+              </a:ext>
+            </a:extLst>
+          </p:cNvPr>
+          <p:cNvSpPr>
+            <a:spLocks noGrp="1"/>
+          </p:cNvSpPr>
+          <p:nvPr>
+            <p:ph type="body" idx="1"/>
+          </p:nvPr>
+        </p:nvSpPr>
+        <p:spPr/>
+        <p:txBody>
+          <a:bodyPr/>
+          <a:lstStyle/>
+          <a:p>
+            <a:endParaRPr lang="en-GB"/>
+          </a:p>
+        </p:txBody>
+      </p:sp>
+    </p:spTree>
+    <p:extLst>
+      <p:ext uri="{BB962C8B-B14F-4D97-AF65-F5344CB8AC3E}">
+        <p14:creationId xmlns:p14="http://schemas.microsoft.com/office/powerpoint/2010/main" val="3808289765"/>
       </p:ext>
     </p:extLst>
   </p:cSld>

--- a/CameraKit Walkthrough.pptx
+++ b/CameraKit Walkthrough.pptx
@@ -48,6 +48,14 @@
     <p:sldId id="296" r:id="rId42"/>
     <p:sldId id="297" r:id="rId43"/>
     <p:sldId id="298" r:id="rId44"/>
+    <p:sldId id="299" r:id="rId45"/>
+    <p:sldId id="300" r:id="rId46"/>
+    <p:sldId id="301" r:id="rId47"/>
+    <p:sldId id="302" r:id="rId48"/>
+    <p:sldId id="303" r:id="rId49"/>
+    <p:sldId id="304" r:id="rId50"/>
+    <p:sldId id="305" r:id="rId51"/>
+    <p:sldId id="306" r:id="rId52"/>
   </p:sldIdLst>
   <p:sldSz cx="12192000" cy="6858000"/>
   <p:notesSz cx="6858000" cy="9144000"/>
@@ -6695,6 +6703,108 @@
           </a:p>
         </p:txBody>
       </p:sp>
+      <p:cxnSp>
+        <p:nvCxnSpPr>
+          <p:cNvPr id="11" name="Straight Connector 10">
+            <a:extLst>
+              <a:ext uri="{FF2B5EF4-FFF2-40B4-BE49-F238E27FC236}">
+                <a16:creationId xmlns:a16="http://schemas.microsoft.com/office/drawing/2014/main" id="{F649D702-9337-98B7-1A4A-A8880FE0A019}"/>
+              </a:ext>
+            </a:extLst>
+          </p:cNvPr>
+          <p:cNvCxnSpPr/>
+          <p:nvPr/>
+        </p:nvCxnSpPr>
+        <p:spPr>
+          <a:xfrm>
+            <a:off x="1155032" y="3936733"/>
+            <a:ext cx="1309035" cy="1039528"/>
+          </a:xfrm>
+          <a:prstGeom prst="line">
+            <a:avLst/>
+          </a:prstGeom>
+        </p:spPr>
+        <p:style>
+          <a:lnRef idx="1">
+            <a:schemeClr val="accent1"/>
+          </a:lnRef>
+          <a:fillRef idx="0">
+            <a:schemeClr val="accent1"/>
+          </a:fillRef>
+          <a:effectRef idx="0">
+            <a:schemeClr val="accent1"/>
+          </a:effectRef>
+          <a:fontRef idx="minor">
+            <a:schemeClr val="tx1"/>
+          </a:fontRef>
+        </p:style>
+      </p:cxnSp>
+      <p:cxnSp>
+        <p:nvCxnSpPr>
+          <p:cNvPr id="13" name="Straight Connector 12">
+            <a:extLst>
+              <a:ext uri="{FF2B5EF4-FFF2-40B4-BE49-F238E27FC236}">
+                <a16:creationId xmlns:a16="http://schemas.microsoft.com/office/drawing/2014/main" id="{2ABDEB68-668A-2818-C2D7-29410C7BD490}"/>
+              </a:ext>
+            </a:extLst>
+          </p:cNvPr>
+          <p:cNvCxnSpPr/>
+          <p:nvPr/>
+        </p:nvCxnSpPr>
+        <p:spPr>
+          <a:xfrm flipH="1">
+            <a:off x="1318661" y="3917482"/>
+            <a:ext cx="1251284" cy="1029903"/>
+          </a:xfrm>
+          <a:prstGeom prst="line">
+            <a:avLst/>
+          </a:prstGeom>
+        </p:spPr>
+        <p:style>
+          <a:lnRef idx="1">
+            <a:schemeClr val="accent1"/>
+          </a:lnRef>
+          <a:fillRef idx="0">
+            <a:schemeClr val="accent1"/>
+          </a:fillRef>
+          <a:effectRef idx="0">
+            <a:schemeClr val="accent1"/>
+          </a:effectRef>
+          <a:fontRef idx="minor">
+            <a:schemeClr val="tx1"/>
+          </a:fontRef>
+        </p:style>
+      </p:cxnSp>
+      <p:pic>
+        <p:nvPicPr>
+          <p:cNvPr id="15" name="Picture 14">
+            <a:extLst>
+              <a:ext uri="{FF2B5EF4-FFF2-40B4-BE49-F238E27FC236}">
+                <a16:creationId xmlns:a16="http://schemas.microsoft.com/office/drawing/2014/main" id="{9758352B-379C-3492-D74D-118ECBCC6F72}"/>
+              </a:ext>
+            </a:extLst>
+          </p:cNvPr>
+          <p:cNvPicPr>
+            <a:picLocks noChangeAspect="1"/>
+          </p:cNvPicPr>
+          <p:nvPr/>
+        </p:nvPicPr>
+        <p:blipFill>
+          <a:blip r:embed="rId3"/>
+          <a:stretch>
+            <a:fillRect/>
+          </a:stretch>
+        </p:blipFill>
+        <p:spPr>
+          <a:xfrm>
+            <a:off x="919181" y="5255393"/>
+            <a:ext cx="10000228" cy="1330609"/>
+          </a:xfrm>
+          <a:prstGeom prst="rect">
+            <a:avLst/>
+          </a:prstGeom>
+        </p:spPr>
+      </p:pic>
     </p:spTree>
     <p:extLst>
       <p:ext uri="{BB962C8B-B14F-4D97-AF65-F5344CB8AC3E}">
@@ -7088,56 +7198,105 @@
           <a:chExt cx="0" cy="0"/>
         </a:xfrm>
       </p:grpSpPr>
-      <p:sp>
-        <p:nvSpPr>
-          <p:cNvPr id="2" name="Title 1">
-            <a:extLst>
-              <a:ext uri="{FF2B5EF4-FFF2-40B4-BE49-F238E27FC236}">
-                <a16:creationId xmlns:a16="http://schemas.microsoft.com/office/drawing/2014/main" id="{64F2D141-63A9-403A-8A02-0B31473E37A5}"/>
-              </a:ext>
-            </a:extLst>
-          </p:cNvPr>
-          <p:cNvSpPr>
-            <a:spLocks noGrp="1"/>
-          </p:cNvSpPr>
-          <p:nvPr>
-            <p:ph type="title"/>
-          </p:nvPr>
-        </p:nvSpPr>
-        <p:spPr/>
-        <p:txBody>
-          <a:bodyPr/>
-          <a:lstStyle/>
-          <a:p>
-            <a:endParaRPr lang="en-GB"/>
-          </a:p>
-        </p:txBody>
-      </p:sp>
-      <p:sp>
-        <p:nvSpPr>
-          <p:cNvPr id="3" name="Text Placeholder 2">
-            <a:extLst>
-              <a:ext uri="{FF2B5EF4-FFF2-40B4-BE49-F238E27FC236}">
-                <a16:creationId xmlns:a16="http://schemas.microsoft.com/office/drawing/2014/main" id="{D9DB5BD4-AEFA-F103-842A-3FEAD57A3D00}"/>
-              </a:ext>
-            </a:extLst>
-          </p:cNvPr>
-          <p:cNvSpPr>
-            <a:spLocks noGrp="1"/>
-          </p:cNvSpPr>
-          <p:nvPr>
-            <p:ph type="body" idx="1"/>
-          </p:nvPr>
-        </p:nvSpPr>
-        <p:spPr/>
-        <p:txBody>
-          <a:bodyPr/>
-          <a:lstStyle/>
-          <a:p>
-            <a:endParaRPr lang="en-GB"/>
-          </a:p>
-        </p:txBody>
-      </p:sp>
+      <p:pic>
+        <p:nvPicPr>
+          <p:cNvPr id="7" name="Picture 6">
+            <a:extLst>
+              <a:ext uri="{FF2B5EF4-FFF2-40B4-BE49-F238E27FC236}">
+                <a16:creationId xmlns:a16="http://schemas.microsoft.com/office/drawing/2014/main" id="{1997F211-3BBA-8C38-8964-235CE5B1473B}"/>
+              </a:ext>
+            </a:extLst>
+          </p:cNvPr>
+          <p:cNvPicPr>
+            <a:picLocks noChangeAspect="1"/>
+          </p:cNvPicPr>
+          <p:nvPr/>
+        </p:nvPicPr>
+        <p:blipFill>
+          <a:blip r:embed="rId2"/>
+          <a:stretch>
+            <a:fillRect/>
+          </a:stretch>
+        </p:blipFill>
+        <p:spPr>
+          <a:xfrm>
+            <a:off x="2788682" y="245579"/>
+            <a:ext cx="5492670" cy="2218487"/>
+          </a:xfrm>
+          <a:prstGeom prst="rect">
+            <a:avLst/>
+          </a:prstGeom>
+        </p:spPr>
+      </p:pic>
+      <p:pic>
+        <p:nvPicPr>
+          <p:cNvPr id="9" name="Picture 8">
+            <a:extLst>
+              <a:ext uri="{FF2B5EF4-FFF2-40B4-BE49-F238E27FC236}">
+                <a16:creationId xmlns:a16="http://schemas.microsoft.com/office/drawing/2014/main" id="{180957E3-89DC-CFDF-3344-0D3E9771B5B0}"/>
+              </a:ext>
+            </a:extLst>
+          </p:cNvPr>
+          <p:cNvPicPr>
+            <a:picLocks noChangeAspect="1"/>
+          </p:cNvPicPr>
+          <p:nvPr/>
+        </p:nvPicPr>
+        <p:blipFill>
+          <a:blip r:embed="rId3"/>
+          <a:stretch>
+            <a:fillRect/>
+          </a:stretch>
+        </p:blipFill>
+        <p:spPr>
+          <a:xfrm>
+            <a:off x="683211" y="4117466"/>
+            <a:ext cx="11271367" cy="1474812"/>
+          </a:xfrm>
+          <a:prstGeom prst="rect">
+            <a:avLst/>
+          </a:prstGeom>
+        </p:spPr>
+      </p:pic>
+      <p:cxnSp>
+        <p:nvCxnSpPr>
+          <p:cNvPr id="11" name="Straight Arrow Connector 10">
+            <a:extLst>
+              <a:ext uri="{FF2B5EF4-FFF2-40B4-BE49-F238E27FC236}">
+                <a16:creationId xmlns:a16="http://schemas.microsoft.com/office/drawing/2014/main" id="{CEDED1B5-2B17-6F7B-829D-44E013B001C4}"/>
+              </a:ext>
+            </a:extLst>
+          </p:cNvPr>
+          <p:cNvCxnSpPr/>
+          <p:nvPr/>
+        </p:nvCxnSpPr>
+        <p:spPr>
+          <a:xfrm flipH="1">
+            <a:off x="8412480" y="2645873"/>
+            <a:ext cx="644892" cy="1289786"/>
+          </a:xfrm>
+          <a:prstGeom prst="straightConnector1">
+            <a:avLst/>
+          </a:prstGeom>
+          <a:ln>
+            <a:tailEnd type="triangle"/>
+          </a:ln>
+        </p:spPr>
+        <p:style>
+          <a:lnRef idx="1">
+            <a:schemeClr val="accent1"/>
+          </a:lnRef>
+          <a:fillRef idx="0">
+            <a:schemeClr val="accent1"/>
+          </a:fillRef>
+          <a:effectRef idx="0">
+            <a:schemeClr val="accent1"/>
+          </a:effectRef>
+          <a:fontRef idx="minor">
+            <a:schemeClr val="tx1"/>
+          </a:fontRef>
+        </p:style>
+      </p:cxnSp>
     </p:spTree>
     <p:extLst>
       <p:ext uri="{BB962C8B-B14F-4D97-AF65-F5344CB8AC3E}">
@@ -7228,56 +7387,66 @@
           <a:chExt cx="0" cy="0"/>
         </a:xfrm>
       </p:grpSpPr>
-      <p:sp>
-        <p:nvSpPr>
-          <p:cNvPr id="2" name="Title 1">
-            <a:extLst>
-              <a:ext uri="{FF2B5EF4-FFF2-40B4-BE49-F238E27FC236}">
-                <a16:creationId xmlns:a16="http://schemas.microsoft.com/office/drawing/2014/main" id="{4D2B38F2-DAFE-8B22-44EE-CAFFB081FE3B}"/>
-              </a:ext>
-            </a:extLst>
-          </p:cNvPr>
-          <p:cNvSpPr>
-            <a:spLocks noGrp="1"/>
-          </p:cNvSpPr>
-          <p:nvPr>
-            <p:ph type="title"/>
-          </p:nvPr>
-        </p:nvSpPr>
-        <p:spPr/>
-        <p:txBody>
-          <a:bodyPr/>
-          <a:lstStyle/>
-          <a:p>
-            <a:endParaRPr lang="en-GB"/>
-          </a:p>
-        </p:txBody>
-      </p:sp>
-      <p:sp>
-        <p:nvSpPr>
-          <p:cNvPr id="3" name="Text Placeholder 2">
-            <a:extLst>
-              <a:ext uri="{FF2B5EF4-FFF2-40B4-BE49-F238E27FC236}">
-                <a16:creationId xmlns:a16="http://schemas.microsoft.com/office/drawing/2014/main" id="{7BE27874-114B-03C6-C95A-507B42BA0758}"/>
-              </a:ext>
-            </a:extLst>
-          </p:cNvPr>
-          <p:cNvSpPr>
-            <a:spLocks noGrp="1"/>
-          </p:cNvSpPr>
-          <p:nvPr>
-            <p:ph type="body" idx="1"/>
-          </p:nvPr>
-        </p:nvSpPr>
-        <p:spPr/>
-        <p:txBody>
-          <a:bodyPr/>
-          <a:lstStyle/>
-          <a:p>
-            <a:endParaRPr lang="en-GB"/>
-          </a:p>
-        </p:txBody>
-      </p:sp>
+      <p:pic>
+        <p:nvPicPr>
+          <p:cNvPr id="5" name="Picture 4">
+            <a:extLst>
+              <a:ext uri="{FF2B5EF4-FFF2-40B4-BE49-F238E27FC236}">
+                <a16:creationId xmlns:a16="http://schemas.microsoft.com/office/drawing/2014/main" id="{481F9B75-EC1C-AF42-3906-1901803A60FE}"/>
+              </a:ext>
+            </a:extLst>
+          </p:cNvPr>
+          <p:cNvPicPr>
+            <a:picLocks noChangeAspect="1"/>
+          </p:cNvPicPr>
+          <p:nvPr/>
+        </p:nvPicPr>
+        <p:blipFill>
+          <a:blip r:embed="rId2"/>
+          <a:stretch>
+            <a:fillRect/>
+          </a:stretch>
+        </p:blipFill>
+        <p:spPr>
+          <a:xfrm>
+            <a:off x="1955646" y="443463"/>
+            <a:ext cx="7746619" cy="4369441"/>
+          </a:xfrm>
+          <a:prstGeom prst="rect">
+            <a:avLst/>
+          </a:prstGeom>
+        </p:spPr>
+      </p:pic>
+      <p:pic>
+        <p:nvPicPr>
+          <p:cNvPr id="6" name="Picture 5">
+            <a:extLst>
+              <a:ext uri="{FF2B5EF4-FFF2-40B4-BE49-F238E27FC236}">
+                <a16:creationId xmlns:a16="http://schemas.microsoft.com/office/drawing/2014/main" id="{304B81AC-8435-34BE-CC4E-BC52762723C9}"/>
+              </a:ext>
+            </a:extLst>
+          </p:cNvPr>
+          <p:cNvPicPr>
+            <a:picLocks noChangeAspect="1"/>
+          </p:cNvPicPr>
+          <p:nvPr/>
+        </p:nvPicPr>
+        <p:blipFill>
+          <a:blip r:embed="rId3"/>
+          <a:stretch>
+            <a:fillRect/>
+          </a:stretch>
+        </p:blipFill>
+        <p:spPr>
+          <a:xfrm>
+            <a:off x="460316" y="5070367"/>
+            <a:ext cx="11271367" cy="1474812"/>
+          </a:xfrm>
+          <a:prstGeom prst="rect">
+            <a:avLst/>
+          </a:prstGeom>
+        </p:spPr>
+      </p:pic>
     </p:spTree>
     <p:extLst>
       <p:ext uri="{BB962C8B-B14F-4D97-AF65-F5344CB8AC3E}">
@@ -7308,53 +7477,325 @@
           <a:chExt cx="0" cy="0"/>
         </a:xfrm>
       </p:grpSpPr>
+      <p:pic>
+        <p:nvPicPr>
+          <p:cNvPr id="5" name="Picture 4">
+            <a:extLst>
+              <a:ext uri="{FF2B5EF4-FFF2-40B4-BE49-F238E27FC236}">
+                <a16:creationId xmlns:a16="http://schemas.microsoft.com/office/drawing/2014/main" id="{F730E9BC-3139-7AE8-8C1C-B46C88859466}"/>
+              </a:ext>
+            </a:extLst>
+          </p:cNvPr>
+          <p:cNvPicPr>
+            <a:picLocks noChangeAspect="1"/>
+          </p:cNvPicPr>
+          <p:nvPr/>
+        </p:nvPicPr>
+        <p:blipFill>
+          <a:blip r:embed="rId2"/>
+          <a:stretch>
+            <a:fillRect/>
+          </a:stretch>
+        </p:blipFill>
+        <p:spPr>
+          <a:xfrm>
+            <a:off x="796260" y="423908"/>
+            <a:ext cx="4323809" cy="2333333"/>
+          </a:xfrm>
+          <a:prstGeom prst="rect">
+            <a:avLst/>
+          </a:prstGeom>
+        </p:spPr>
+      </p:pic>
+      <p:pic>
+        <p:nvPicPr>
+          <p:cNvPr id="7" name="Picture 6">
+            <a:extLst>
+              <a:ext uri="{FF2B5EF4-FFF2-40B4-BE49-F238E27FC236}">
+                <a16:creationId xmlns:a16="http://schemas.microsoft.com/office/drawing/2014/main" id="{3FFD7A3A-B6D6-3B43-D09C-DAB512C2BB7A}"/>
+              </a:ext>
+            </a:extLst>
+          </p:cNvPr>
+          <p:cNvPicPr>
+            <a:picLocks noChangeAspect="1"/>
+          </p:cNvPicPr>
+          <p:nvPr/>
+        </p:nvPicPr>
+        <p:blipFill>
+          <a:blip r:embed="rId3"/>
+          <a:stretch>
+            <a:fillRect/>
+          </a:stretch>
+        </p:blipFill>
+        <p:spPr>
+          <a:xfrm>
+            <a:off x="962526" y="2847631"/>
+            <a:ext cx="8997895" cy="3372060"/>
+          </a:xfrm>
+          <a:prstGeom prst="rect">
+            <a:avLst/>
+          </a:prstGeom>
+        </p:spPr>
+      </p:pic>
       <p:sp>
         <p:nvSpPr>
-          <p:cNvPr id="2" name="Title 1">
-            <a:extLst>
-              <a:ext uri="{FF2B5EF4-FFF2-40B4-BE49-F238E27FC236}">
-                <a16:creationId xmlns:a16="http://schemas.microsoft.com/office/drawing/2014/main" id="{CDE48A65-0C4C-0A0B-AC33-AC4B5949C67F}"/>
-              </a:ext>
-            </a:extLst>
-          </p:cNvPr>
-          <p:cNvSpPr>
-            <a:spLocks noGrp="1"/>
-          </p:cNvSpPr>
-          <p:nvPr>
-            <p:ph type="title"/>
-          </p:nvPr>
+          <p:cNvPr id="8" name="Rectangle 7">
+            <a:extLst>
+              <a:ext uri="{FF2B5EF4-FFF2-40B4-BE49-F238E27FC236}">
+                <a16:creationId xmlns:a16="http://schemas.microsoft.com/office/drawing/2014/main" id="{90F462E6-A66D-9574-CD2C-9D4E65D2B39D}"/>
+              </a:ext>
+            </a:extLst>
+          </p:cNvPr>
+          <p:cNvSpPr/>
+          <p:nvPr/>
         </p:nvSpPr>
-        <p:spPr/>
+        <p:spPr>
+          <a:xfrm>
+            <a:off x="1318660" y="952901"/>
+            <a:ext cx="644893" cy="375385"/>
+          </a:xfrm>
+          <a:prstGeom prst="rect">
+            <a:avLst/>
+          </a:prstGeom>
+          <a:noFill/>
+        </p:spPr>
+        <p:style>
+          <a:lnRef idx="2">
+            <a:schemeClr val="accent1">
+              <a:shade val="15000"/>
+            </a:schemeClr>
+          </a:lnRef>
+          <a:fillRef idx="1">
+            <a:schemeClr val="accent1"/>
+          </a:fillRef>
+          <a:effectRef idx="0">
+            <a:schemeClr val="accent1"/>
+          </a:effectRef>
+          <a:fontRef idx="minor">
+            <a:schemeClr val="lt1"/>
+          </a:fontRef>
+        </p:style>
         <p:txBody>
-          <a:bodyPr/>
+          <a:bodyPr rtlCol="0" anchor="ctr"/>
           <a:lstStyle/>
           <a:p>
+            <a:pPr algn="ctr"/>
             <a:endParaRPr lang="en-GB"/>
           </a:p>
         </p:txBody>
       </p:sp>
+      <p:cxnSp>
+        <p:nvCxnSpPr>
+          <p:cNvPr id="10" name="Straight Arrow Connector 9">
+            <a:extLst>
+              <a:ext uri="{FF2B5EF4-FFF2-40B4-BE49-F238E27FC236}">
+                <a16:creationId xmlns:a16="http://schemas.microsoft.com/office/drawing/2014/main" id="{4EA0FF7A-1DBD-6691-861B-33CB0EC0F7BE}"/>
+              </a:ext>
+            </a:extLst>
+          </p:cNvPr>
+          <p:cNvCxnSpPr/>
+          <p:nvPr/>
+        </p:nvCxnSpPr>
+        <p:spPr>
+          <a:xfrm flipH="1">
+            <a:off x="2088682" y="77002"/>
+            <a:ext cx="1780674" cy="798897"/>
+          </a:xfrm>
+          <a:prstGeom prst="straightConnector1">
+            <a:avLst/>
+          </a:prstGeom>
+          <a:ln>
+            <a:tailEnd type="triangle"/>
+          </a:ln>
+        </p:spPr>
+        <p:style>
+          <a:lnRef idx="1">
+            <a:schemeClr val="accent1"/>
+          </a:lnRef>
+          <a:fillRef idx="0">
+            <a:schemeClr val="accent1"/>
+          </a:fillRef>
+          <a:effectRef idx="0">
+            <a:schemeClr val="accent1"/>
+          </a:effectRef>
+          <a:fontRef idx="minor">
+            <a:schemeClr val="tx1"/>
+          </a:fontRef>
+        </p:style>
+      </p:cxnSp>
+      <p:cxnSp>
+        <p:nvCxnSpPr>
+          <p:cNvPr id="11" name="Straight Arrow Connector 10">
+            <a:extLst>
+              <a:ext uri="{FF2B5EF4-FFF2-40B4-BE49-F238E27FC236}">
+                <a16:creationId xmlns:a16="http://schemas.microsoft.com/office/drawing/2014/main" id="{A09FD424-57F3-4DD8-C9C6-FE7DF8C992C8}"/>
+              </a:ext>
+            </a:extLst>
+          </p:cNvPr>
+          <p:cNvCxnSpPr/>
+          <p:nvPr/>
+        </p:nvCxnSpPr>
+        <p:spPr>
+          <a:xfrm flipH="1">
+            <a:off x="3415364" y="3429000"/>
+            <a:ext cx="1780674" cy="798897"/>
+          </a:xfrm>
+          <a:prstGeom prst="straightConnector1">
+            <a:avLst/>
+          </a:prstGeom>
+          <a:ln>
+            <a:tailEnd type="triangle"/>
+          </a:ln>
+        </p:spPr>
+        <p:style>
+          <a:lnRef idx="1">
+            <a:schemeClr val="accent1"/>
+          </a:lnRef>
+          <a:fillRef idx="0">
+            <a:schemeClr val="accent1"/>
+          </a:fillRef>
+          <a:effectRef idx="0">
+            <a:schemeClr val="accent1"/>
+          </a:effectRef>
+          <a:fontRef idx="minor">
+            <a:schemeClr val="tx1"/>
+          </a:fontRef>
+        </p:style>
+      </p:cxnSp>
+      <p:cxnSp>
+        <p:nvCxnSpPr>
+          <p:cNvPr id="12" name="Straight Arrow Connector 11">
+            <a:extLst>
+              <a:ext uri="{FF2B5EF4-FFF2-40B4-BE49-F238E27FC236}">
+                <a16:creationId xmlns:a16="http://schemas.microsoft.com/office/drawing/2014/main" id="{158C3CDB-C391-65EC-46FA-1BF246D35C69}"/>
+              </a:ext>
+            </a:extLst>
+          </p:cNvPr>
+          <p:cNvCxnSpPr/>
+          <p:nvPr/>
+        </p:nvCxnSpPr>
+        <p:spPr>
+          <a:xfrm flipH="1">
+            <a:off x="3548513" y="4533661"/>
+            <a:ext cx="1780674" cy="798897"/>
+          </a:xfrm>
+          <a:prstGeom prst="straightConnector1">
+            <a:avLst/>
+          </a:prstGeom>
+          <a:ln>
+            <a:tailEnd type="triangle"/>
+          </a:ln>
+        </p:spPr>
+        <p:style>
+          <a:lnRef idx="1">
+            <a:schemeClr val="accent1"/>
+          </a:lnRef>
+          <a:fillRef idx="0">
+            <a:schemeClr val="accent1"/>
+          </a:fillRef>
+          <a:effectRef idx="0">
+            <a:schemeClr val="accent1"/>
+          </a:effectRef>
+          <a:fontRef idx="minor">
+            <a:schemeClr val="tx1"/>
+          </a:fontRef>
+        </p:style>
+      </p:cxnSp>
+      <p:cxnSp>
+        <p:nvCxnSpPr>
+          <p:cNvPr id="13" name="Straight Arrow Connector 12">
+            <a:extLst>
+              <a:ext uri="{FF2B5EF4-FFF2-40B4-BE49-F238E27FC236}">
+                <a16:creationId xmlns:a16="http://schemas.microsoft.com/office/drawing/2014/main" id="{EA0EA304-62F3-12F4-CA34-F2CB77C451D4}"/>
+              </a:ext>
+            </a:extLst>
+          </p:cNvPr>
+          <p:cNvCxnSpPr/>
+          <p:nvPr/>
+        </p:nvCxnSpPr>
+        <p:spPr>
+          <a:xfrm flipH="1">
+            <a:off x="2231579" y="2003539"/>
+            <a:ext cx="1780674" cy="798897"/>
+          </a:xfrm>
+          <a:prstGeom prst="straightConnector1">
+            <a:avLst/>
+          </a:prstGeom>
+          <a:ln>
+            <a:tailEnd type="triangle"/>
+          </a:ln>
+        </p:spPr>
+        <p:style>
+          <a:lnRef idx="1">
+            <a:schemeClr val="accent1"/>
+          </a:lnRef>
+          <a:fillRef idx="0">
+            <a:schemeClr val="accent1"/>
+          </a:fillRef>
+          <a:effectRef idx="0">
+            <a:schemeClr val="accent1"/>
+          </a:effectRef>
+          <a:fontRef idx="minor">
+            <a:schemeClr val="tx1"/>
+          </a:fontRef>
+        </p:style>
+      </p:cxnSp>
       <p:sp>
         <p:nvSpPr>
-          <p:cNvPr id="3" name="Text Placeholder 2">
-            <a:extLst>
-              <a:ext uri="{FF2B5EF4-FFF2-40B4-BE49-F238E27FC236}">
-                <a16:creationId xmlns:a16="http://schemas.microsoft.com/office/drawing/2014/main" id="{508E0947-8BE3-8F21-95C9-4413EB26348E}"/>
-              </a:ext>
-            </a:extLst>
-          </p:cNvPr>
-          <p:cNvSpPr>
-            <a:spLocks noGrp="1"/>
-          </p:cNvSpPr>
-          <p:nvPr>
-            <p:ph type="body" idx="1"/>
-          </p:nvPr>
+          <p:cNvPr id="16" name="Rectangle 15">
+            <a:extLst>
+              <a:ext uri="{FF2B5EF4-FFF2-40B4-BE49-F238E27FC236}">
+                <a16:creationId xmlns:a16="http://schemas.microsoft.com/office/drawing/2014/main" id="{8D564A3A-CAFB-50BE-388F-EB52B00F8D25}"/>
+              </a:ext>
+            </a:extLst>
+          </p:cNvPr>
+          <p:cNvSpPr/>
+          <p:nvPr/>
         </p:nvSpPr>
-        <p:spPr/>
+        <p:spPr>
+          <a:xfrm>
+            <a:off x="6274547" y="1223612"/>
+            <a:ext cx="4598793" cy="970737"/>
+          </a:xfrm>
+          <a:prstGeom prst="rect">
+            <a:avLst/>
+          </a:prstGeom>
+          <a:solidFill>
+            <a:schemeClr val="accent4">
+              <a:lumMod val="40000"/>
+              <a:lumOff val="60000"/>
+            </a:schemeClr>
+          </a:solidFill>
+        </p:spPr>
+        <p:style>
+          <a:lnRef idx="2">
+            <a:schemeClr val="accent1">
+              <a:shade val="50000"/>
+            </a:schemeClr>
+          </a:lnRef>
+          <a:fillRef idx="1">
+            <a:schemeClr val="accent1"/>
+          </a:fillRef>
+          <a:effectRef idx="0">
+            <a:schemeClr val="accent1"/>
+          </a:effectRef>
+          <a:fontRef idx="minor">
+            <a:schemeClr val="lt1"/>
+          </a:fontRef>
+        </p:style>
         <p:txBody>
-          <a:bodyPr/>
+          <a:bodyPr rtlCol="0" anchor="ctr"/>
           <a:lstStyle/>
           <a:p>
-            <a:endParaRPr lang="en-GB"/>
+            <a:pPr algn="ctr"/>
+            <a:r>
+              <a:rPr lang="en-IE" dirty="0">
+                <a:solidFill>
+                  <a:schemeClr val="tx1"/>
+                </a:solidFill>
+              </a:rPr>
+              <a:t>Modify Book to return a bool (true/false) and update the method with return declaration and return values</a:t>
+            </a:r>
           </a:p>
         </p:txBody>
       </p:sp>
@@ -7388,56 +7829,177 @@
           <a:chExt cx="0" cy="0"/>
         </a:xfrm>
       </p:grpSpPr>
+      <p:pic>
+        <p:nvPicPr>
+          <p:cNvPr id="5" name="Picture 4">
+            <a:extLst>
+              <a:ext uri="{FF2B5EF4-FFF2-40B4-BE49-F238E27FC236}">
+                <a16:creationId xmlns:a16="http://schemas.microsoft.com/office/drawing/2014/main" id="{9F1AA596-877A-C1F9-4CE9-006B4E94260D}"/>
+              </a:ext>
+            </a:extLst>
+          </p:cNvPr>
+          <p:cNvPicPr>
+            <a:picLocks noChangeAspect="1"/>
+          </p:cNvPicPr>
+          <p:nvPr/>
+        </p:nvPicPr>
+        <p:blipFill>
+          <a:blip r:embed="rId2"/>
+          <a:stretch>
+            <a:fillRect/>
+          </a:stretch>
+        </p:blipFill>
+        <p:spPr>
+          <a:xfrm>
+            <a:off x="483603" y="1325346"/>
+            <a:ext cx="7784498" cy="4439691"/>
+          </a:xfrm>
+          <a:prstGeom prst="rect">
+            <a:avLst/>
+          </a:prstGeom>
+        </p:spPr>
+      </p:pic>
       <p:sp>
         <p:nvSpPr>
-          <p:cNvPr id="2" name="Title 1">
-            <a:extLst>
-              <a:ext uri="{FF2B5EF4-FFF2-40B4-BE49-F238E27FC236}">
-                <a16:creationId xmlns:a16="http://schemas.microsoft.com/office/drawing/2014/main" id="{DF180E21-FA5E-AB13-5518-193D6E56CA3D}"/>
-              </a:ext>
-            </a:extLst>
-          </p:cNvPr>
-          <p:cNvSpPr>
-            <a:spLocks noGrp="1"/>
-          </p:cNvSpPr>
-          <p:nvPr>
-            <p:ph type="title"/>
-          </p:nvPr>
+          <p:cNvPr id="10" name="Rectangle 9">
+            <a:extLst>
+              <a:ext uri="{FF2B5EF4-FFF2-40B4-BE49-F238E27FC236}">
+                <a16:creationId xmlns:a16="http://schemas.microsoft.com/office/drawing/2014/main" id="{F476451C-AC8C-7356-C9CD-AD3B39171AB8}"/>
+              </a:ext>
+            </a:extLst>
+          </p:cNvPr>
+          <p:cNvSpPr/>
+          <p:nvPr/>
         </p:nvSpPr>
-        <p:spPr/>
+        <p:spPr>
+          <a:xfrm>
+            <a:off x="7361465" y="4024563"/>
+            <a:ext cx="4598793" cy="970737"/>
+          </a:xfrm>
+          <a:prstGeom prst="rect">
+            <a:avLst/>
+          </a:prstGeom>
+          <a:solidFill>
+            <a:schemeClr val="accent4">
+              <a:lumMod val="40000"/>
+              <a:lumOff val="60000"/>
+            </a:schemeClr>
+          </a:solidFill>
+        </p:spPr>
+        <p:style>
+          <a:lnRef idx="2">
+            <a:schemeClr val="accent1">
+              <a:shade val="50000"/>
+            </a:schemeClr>
+          </a:lnRef>
+          <a:fillRef idx="1">
+            <a:schemeClr val="accent1"/>
+          </a:fillRef>
+          <a:effectRef idx="0">
+            <a:schemeClr val="accent1"/>
+          </a:effectRef>
+          <a:fontRef idx="minor">
+            <a:schemeClr val="lt1"/>
+          </a:fontRef>
+        </p:style>
         <p:txBody>
-          <a:bodyPr/>
+          <a:bodyPr rtlCol="0" anchor="ctr"/>
           <a:lstStyle/>
           <a:p>
-            <a:endParaRPr lang="en-GB"/>
+            <a:pPr algn="ctr"/>
+            <a:r>
+              <a:rPr lang="en-IE" dirty="0">
+                <a:solidFill>
+                  <a:schemeClr val="tx1"/>
+                </a:solidFill>
+              </a:rPr>
+              <a:t>Add the two new methods but throw an ‘Not Implemented Exception’</a:t>
+            </a:r>
           </a:p>
         </p:txBody>
       </p:sp>
-      <p:sp>
-        <p:nvSpPr>
-          <p:cNvPr id="3" name="Text Placeholder 2">
-            <a:extLst>
-              <a:ext uri="{FF2B5EF4-FFF2-40B4-BE49-F238E27FC236}">
-                <a16:creationId xmlns:a16="http://schemas.microsoft.com/office/drawing/2014/main" id="{E5ADF57A-3FA8-B6FE-5EBB-B398E2D10466}"/>
-              </a:ext>
-            </a:extLst>
-          </p:cNvPr>
-          <p:cNvSpPr>
-            <a:spLocks noGrp="1"/>
-          </p:cNvSpPr>
-          <p:nvPr>
-            <p:ph type="body" idx="1"/>
-          </p:nvPr>
-        </p:nvSpPr>
-        <p:spPr/>
-        <p:txBody>
-          <a:bodyPr/>
-          <a:lstStyle/>
-          <a:p>
-            <a:endParaRPr lang="en-GB"/>
-          </a:p>
-        </p:txBody>
-      </p:sp>
+      <p:cxnSp>
+        <p:nvCxnSpPr>
+          <p:cNvPr id="12" name="Straight Arrow Connector 11">
+            <a:extLst>
+              <a:ext uri="{FF2B5EF4-FFF2-40B4-BE49-F238E27FC236}">
+                <a16:creationId xmlns:a16="http://schemas.microsoft.com/office/drawing/2014/main" id="{56BFEA6A-9607-2A81-E9C4-CF6AF022A8E7}"/>
+              </a:ext>
+            </a:extLst>
+          </p:cNvPr>
+          <p:cNvCxnSpPr>
+            <a:cxnSpLocks/>
+          </p:cNvCxnSpPr>
+          <p:nvPr/>
+        </p:nvCxnSpPr>
+        <p:spPr>
+          <a:xfrm flipH="1">
+            <a:off x="4254366" y="4379495"/>
+            <a:ext cx="2290813" cy="0"/>
+          </a:xfrm>
+          <a:prstGeom prst="straightConnector1">
+            <a:avLst/>
+          </a:prstGeom>
+          <a:ln>
+            <a:tailEnd type="triangle"/>
+          </a:ln>
+        </p:spPr>
+        <p:style>
+          <a:lnRef idx="1">
+            <a:schemeClr val="accent1"/>
+          </a:lnRef>
+          <a:fillRef idx="0">
+            <a:schemeClr val="accent1"/>
+          </a:fillRef>
+          <a:effectRef idx="0">
+            <a:schemeClr val="accent1"/>
+          </a:effectRef>
+          <a:fontRef idx="minor">
+            <a:schemeClr val="tx1"/>
+          </a:fontRef>
+        </p:style>
+      </p:cxnSp>
+      <p:cxnSp>
+        <p:nvCxnSpPr>
+          <p:cNvPr id="13" name="Straight Arrow Connector 12">
+            <a:extLst>
+              <a:ext uri="{FF2B5EF4-FFF2-40B4-BE49-F238E27FC236}">
+                <a16:creationId xmlns:a16="http://schemas.microsoft.com/office/drawing/2014/main" id="{257ACE3D-14E0-520D-04D4-D7FDC67B3FB7}"/>
+              </a:ext>
+            </a:extLst>
+          </p:cNvPr>
+          <p:cNvCxnSpPr>
+            <a:cxnSpLocks/>
+          </p:cNvCxnSpPr>
+          <p:nvPr/>
+        </p:nvCxnSpPr>
+        <p:spPr>
+          <a:xfrm flipH="1">
+            <a:off x="6225941" y="4849528"/>
+            <a:ext cx="949693" cy="0"/>
+          </a:xfrm>
+          <a:prstGeom prst="straightConnector1">
+            <a:avLst/>
+          </a:prstGeom>
+          <a:ln>
+            <a:tailEnd type="triangle"/>
+          </a:ln>
+        </p:spPr>
+        <p:style>
+          <a:lnRef idx="1">
+            <a:schemeClr val="accent1"/>
+          </a:lnRef>
+          <a:fillRef idx="0">
+            <a:schemeClr val="accent1"/>
+          </a:fillRef>
+          <a:effectRef idx="0">
+            <a:schemeClr val="accent1"/>
+          </a:effectRef>
+          <a:fontRef idx="minor">
+            <a:schemeClr val="tx1"/>
+          </a:fontRef>
+        </p:style>
+      </p:cxnSp>
     </p:spTree>
     <p:extLst>
       <p:ext uri="{BB962C8B-B14F-4D97-AF65-F5344CB8AC3E}">
@@ -7468,60 +8030,250 @@
           <a:chExt cx="0" cy="0"/>
         </a:xfrm>
       </p:grpSpPr>
-      <p:sp>
-        <p:nvSpPr>
-          <p:cNvPr id="2" name="Title 1">
-            <a:extLst>
-              <a:ext uri="{FF2B5EF4-FFF2-40B4-BE49-F238E27FC236}">
-                <a16:creationId xmlns:a16="http://schemas.microsoft.com/office/drawing/2014/main" id="{88CABA1B-FB23-971D-1CB2-5225504941AB}"/>
-              </a:ext>
-            </a:extLst>
-          </p:cNvPr>
-          <p:cNvSpPr>
-            <a:spLocks noGrp="1"/>
-          </p:cNvSpPr>
-          <p:nvPr>
-            <p:ph type="title"/>
-          </p:nvPr>
-        </p:nvSpPr>
-        <p:spPr/>
-        <p:txBody>
-          <a:bodyPr/>
-          <a:lstStyle/>
-          <a:p>
-            <a:endParaRPr lang="en-GB"/>
-          </a:p>
-        </p:txBody>
-      </p:sp>
-      <p:sp>
-        <p:nvSpPr>
-          <p:cNvPr id="3" name="Text Placeholder 2">
-            <a:extLst>
-              <a:ext uri="{FF2B5EF4-FFF2-40B4-BE49-F238E27FC236}">
-                <a16:creationId xmlns:a16="http://schemas.microsoft.com/office/drawing/2014/main" id="{F51FC2B8-AD28-6B87-9822-7E7A55C488D2}"/>
-              </a:ext>
-            </a:extLst>
-          </p:cNvPr>
-          <p:cNvSpPr>
-            <a:spLocks noGrp="1"/>
-          </p:cNvSpPr>
-          <p:nvPr>
-            <p:ph type="body" idx="1"/>
-          </p:nvPr>
-        </p:nvSpPr>
-        <p:spPr/>
-        <p:txBody>
-          <a:bodyPr/>
-          <a:lstStyle/>
-          <a:p>
-            <a:endParaRPr lang="en-GB"/>
-          </a:p>
-        </p:txBody>
-      </p:sp>
+      <p:pic>
+        <p:nvPicPr>
+          <p:cNvPr id="5" name="Picture 4">
+            <a:extLst>
+              <a:ext uri="{FF2B5EF4-FFF2-40B4-BE49-F238E27FC236}">
+                <a16:creationId xmlns:a16="http://schemas.microsoft.com/office/drawing/2014/main" id="{764D1CEC-E4E6-7374-3C86-92BC2DB28255}"/>
+              </a:ext>
+            </a:extLst>
+          </p:cNvPr>
+          <p:cNvPicPr>
+            <a:picLocks noChangeAspect="1"/>
+          </p:cNvPicPr>
+          <p:nvPr/>
+        </p:nvPicPr>
+        <p:blipFill>
+          <a:blip r:embed="rId2"/>
+          <a:stretch>
+            <a:fillRect/>
+          </a:stretch>
+        </p:blipFill>
+        <p:spPr>
+          <a:xfrm>
+            <a:off x="1217251" y="1870430"/>
+            <a:ext cx="9757498" cy="2922951"/>
+          </a:xfrm>
+          <a:prstGeom prst="rect">
+            <a:avLst/>
+          </a:prstGeom>
+        </p:spPr>
+      </p:pic>
     </p:spTree>
     <p:extLst>
       <p:ext uri="{BB962C8B-B14F-4D97-AF65-F5344CB8AC3E}">
         <p14:creationId xmlns:p14="http://schemas.microsoft.com/office/powerpoint/2010/main" val="3808289765"/>
+      </p:ext>
+    </p:extLst>
+  </p:cSld>
+  <p:clrMapOvr>
+    <a:masterClrMapping/>
+  </p:clrMapOvr>
+</p:sld>
+</file>
+
+<file path=ppt/slides/slide44.xml><?xml version="1.0" encoding="utf-8"?>
+<p:sld xmlns:a="http://schemas.openxmlformats.org/drawingml/2006/main" xmlns:r="http://schemas.openxmlformats.org/officeDocument/2006/relationships" xmlns:p="http://schemas.openxmlformats.org/presentationml/2006/main">
+  <p:cSld>
+    <p:spTree>
+      <p:nvGrpSpPr>
+        <p:cNvPr id="1" name=""/>
+        <p:cNvGrpSpPr/>
+        <p:nvPr/>
+      </p:nvGrpSpPr>
+      <p:grpSpPr>
+        <a:xfrm>
+          <a:off x="0" y="0"/>
+          <a:ext cx="0" cy="0"/>
+          <a:chOff x="0" y="0"/>
+          <a:chExt cx="0" cy="0"/>
+        </a:xfrm>
+      </p:grpSpPr>
+      <p:pic>
+        <p:nvPicPr>
+          <p:cNvPr id="3" name="Picture 2">
+            <a:extLst>
+              <a:ext uri="{FF2B5EF4-FFF2-40B4-BE49-F238E27FC236}">
+                <a16:creationId xmlns:a16="http://schemas.microsoft.com/office/drawing/2014/main" id="{9E135F79-0A20-4A52-FEE0-542DB805A60C}"/>
+              </a:ext>
+            </a:extLst>
+          </p:cNvPr>
+          <p:cNvPicPr>
+            <a:picLocks noChangeAspect="1"/>
+          </p:cNvPicPr>
+          <p:nvPr/>
+        </p:nvPicPr>
+        <p:blipFill>
+          <a:blip r:embed="rId2"/>
+          <a:stretch>
+            <a:fillRect/>
+          </a:stretch>
+        </p:blipFill>
+        <p:spPr>
+          <a:xfrm>
+            <a:off x="619809" y="1843285"/>
+            <a:ext cx="10952381" cy="3171429"/>
+          </a:xfrm>
+          <a:prstGeom prst="rect">
+            <a:avLst/>
+          </a:prstGeom>
+        </p:spPr>
+      </p:pic>
+    </p:spTree>
+    <p:extLst>
+      <p:ext uri="{BB962C8B-B14F-4D97-AF65-F5344CB8AC3E}">
+        <p14:creationId xmlns:p14="http://schemas.microsoft.com/office/powerpoint/2010/main" val="2634191447"/>
+      </p:ext>
+    </p:extLst>
+  </p:cSld>
+  <p:clrMapOvr>
+    <a:masterClrMapping/>
+  </p:clrMapOvr>
+</p:sld>
+</file>
+
+<file path=ppt/slides/slide45.xml><?xml version="1.0" encoding="utf-8"?>
+<p:sld xmlns:a="http://schemas.openxmlformats.org/drawingml/2006/main" xmlns:r="http://schemas.openxmlformats.org/officeDocument/2006/relationships" xmlns:p="http://schemas.openxmlformats.org/presentationml/2006/main">
+  <p:cSld>
+    <p:spTree>
+      <p:nvGrpSpPr>
+        <p:cNvPr id="1" name=""/>
+        <p:cNvGrpSpPr/>
+        <p:nvPr/>
+      </p:nvGrpSpPr>
+      <p:grpSpPr>
+        <a:xfrm>
+          <a:off x="0" y="0"/>
+          <a:ext cx="0" cy="0"/>
+          <a:chOff x="0" y="0"/>
+          <a:chExt cx="0" cy="0"/>
+        </a:xfrm>
+      </p:grpSpPr>
+    </p:spTree>
+    <p:extLst>
+      <p:ext uri="{BB962C8B-B14F-4D97-AF65-F5344CB8AC3E}">
+        <p14:creationId xmlns:p14="http://schemas.microsoft.com/office/powerpoint/2010/main" val="3653207458"/>
+      </p:ext>
+    </p:extLst>
+  </p:cSld>
+  <p:clrMapOvr>
+    <a:masterClrMapping/>
+  </p:clrMapOvr>
+</p:sld>
+</file>
+
+<file path=ppt/slides/slide46.xml><?xml version="1.0" encoding="utf-8"?>
+<p:sld xmlns:a="http://schemas.openxmlformats.org/drawingml/2006/main" xmlns:r="http://schemas.openxmlformats.org/officeDocument/2006/relationships" xmlns:p="http://schemas.openxmlformats.org/presentationml/2006/main">
+  <p:cSld>
+    <p:spTree>
+      <p:nvGrpSpPr>
+        <p:cNvPr id="1" name=""/>
+        <p:cNvGrpSpPr/>
+        <p:nvPr/>
+      </p:nvGrpSpPr>
+      <p:grpSpPr>
+        <a:xfrm>
+          <a:off x="0" y="0"/>
+          <a:ext cx="0" cy="0"/>
+          <a:chOff x="0" y="0"/>
+          <a:chExt cx="0" cy="0"/>
+        </a:xfrm>
+      </p:grpSpPr>
+    </p:spTree>
+    <p:extLst>
+      <p:ext uri="{BB962C8B-B14F-4D97-AF65-F5344CB8AC3E}">
+        <p14:creationId xmlns:p14="http://schemas.microsoft.com/office/powerpoint/2010/main" val="3983423945"/>
+      </p:ext>
+    </p:extLst>
+  </p:cSld>
+  <p:clrMapOvr>
+    <a:masterClrMapping/>
+  </p:clrMapOvr>
+</p:sld>
+</file>
+
+<file path=ppt/slides/slide47.xml><?xml version="1.0" encoding="utf-8"?>
+<p:sld xmlns:a="http://schemas.openxmlformats.org/drawingml/2006/main" xmlns:r="http://schemas.openxmlformats.org/officeDocument/2006/relationships" xmlns:p="http://schemas.openxmlformats.org/presentationml/2006/main">
+  <p:cSld>
+    <p:spTree>
+      <p:nvGrpSpPr>
+        <p:cNvPr id="1" name=""/>
+        <p:cNvGrpSpPr/>
+        <p:nvPr/>
+      </p:nvGrpSpPr>
+      <p:grpSpPr>
+        <a:xfrm>
+          <a:off x="0" y="0"/>
+          <a:ext cx="0" cy="0"/>
+          <a:chOff x="0" y="0"/>
+          <a:chExt cx="0" cy="0"/>
+        </a:xfrm>
+      </p:grpSpPr>
+    </p:spTree>
+    <p:extLst>
+      <p:ext uri="{BB962C8B-B14F-4D97-AF65-F5344CB8AC3E}">
+        <p14:creationId xmlns:p14="http://schemas.microsoft.com/office/powerpoint/2010/main" val="2627098666"/>
+      </p:ext>
+    </p:extLst>
+  </p:cSld>
+  <p:clrMapOvr>
+    <a:masterClrMapping/>
+  </p:clrMapOvr>
+</p:sld>
+</file>
+
+<file path=ppt/slides/slide48.xml><?xml version="1.0" encoding="utf-8"?>
+<p:sld xmlns:a="http://schemas.openxmlformats.org/drawingml/2006/main" xmlns:r="http://schemas.openxmlformats.org/officeDocument/2006/relationships" xmlns:p="http://schemas.openxmlformats.org/presentationml/2006/main">
+  <p:cSld>
+    <p:spTree>
+      <p:nvGrpSpPr>
+        <p:cNvPr id="1" name=""/>
+        <p:cNvGrpSpPr/>
+        <p:nvPr/>
+      </p:nvGrpSpPr>
+      <p:grpSpPr>
+        <a:xfrm>
+          <a:off x="0" y="0"/>
+          <a:ext cx="0" cy="0"/>
+          <a:chOff x="0" y="0"/>
+          <a:chExt cx="0" cy="0"/>
+        </a:xfrm>
+      </p:grpSpPr>
+    </p:spTree>
+    <p:extLst>
+      <p:ext uri="{BB962C8B-B14F-4D97-AF65-F5344CB8AC3E}">
+        <p14:creationId xmlns:p14="http://schemas.microsoft.com/office/powerpoint/2010/main" val="2353242281"/>
+      </p:ext>
+    </p:extLst>
+  </p:cSld>
+  <p:clrMapOvr>
+    <a:masterClrMapping/>
+  </p:clrMapOvr>
+</p:sld>
+</file>
+
+<file path=ppt/slides/slide49.xml><?xml version="1.0" encoding="utf-8"?>
+<p:sld xmlns:a="http://schemas.openxmlformats.org/drawingml/2006/main" xmlns:r="http://schemas.openxmlformats.org/officeDocument/2006/relationships" xmlns:p="http://schemas.openxmlformats.org/presentationml/2006/main">
+  <p:cSld>
+    <p:spTree>
+      <p:nvGrpSpPr>
+        <p:cNvPr id="1" name=""/>
+        <p:cNvGrpSpPr/>
+        <p:nvPr/>
+      </p:nvGrpSpPr>
+      <p:grpSpPr>
+        <a:xfrm>
+          <a:off x="0" y="0"/>
+          <a:ext cx="0" cy="0"/>
+          <a:chOff x="0" y="0"/>
+          <a:chExt cx="0" cy="0"/>
+        </a:xfrm>
+      </p:grpSpPr>
+    </p:spTree>
+    <p:extLst>
+      <p:ext uri="{BB962C8B-B14F-4D97-AF65-F5344CB8AC3E}">
+        <p14:creationId xmlns:p14="http://schemas.microsoft.com/office/powerpoint/2010/main" val="3208859128"/>
       </p:ext>
     </p:extLst>
   </p:cSld>
@@ -7582,6 +8334,66 @@
     <p:extLst>
       <p:ext uri="{BB962C8B-B14F-4D97-AF65-F5344CB8AC3E}">
         <p14:creationId xmlns:p14="http://schemas.microsoft.com/office/powerpoint/2010/main" val="2445765700"/>
+      </p:ext>
+    </p:extLst>
+  </p:cSld>
+  <p:clrMapOvr>
+    <a:masterClrMapping/>
+  </p:clrMapOvr>
+</p:sld>
+</file>
+
+<file path=ppt/slides/slide50.xml><?xml version="1.0" encoding="utf-8"?>
+<p:sld xmlns:a="http://schemas.openxmlformats.org/drawingml/2006/main" xmlns:r="http://schemas.openxmlformats.org/officeDocument/2006/relationships" xmlns:p="http://schemas.openxmlformats.org/presentationml/2006/main">
+  <p:cSld>
+    <p:spTree>
+      <p:nvGrpSpPr>
+        <p:cNvPr id="1" name=""/>
+        <p:cNvGrpSpPr/>
+        <p:nvPr/>
+      </p:nvGrpSpPr>
+      <p:grpSpPr>
+        <a:xfrm>
+          <a:off x="0" y="0"/>
+          <a:ext cx="0" cy="0"/>
+          <a:chOff x="0" y="0"/>
+          <a:chExt cx="0" cy="0"/>
+        </a:xfrm>
+      </p:grpSpPr>
+    </p:spTree>
+    <p:extLst>
+      <p:ext uri="{BB962C8B-B14F-4D97-AF65-F5344CB8AC3E}">
+        <p14:creationId xmlns:p14="http://schemas.microsoft.com/office/powerpoint/2010/main" val="4076882749"/>
+      </p:ext>
+    </p:extLst>
+  </p:cSld>
+  <p:clrMapOvr>
+    <a:masterClrMapping/>
+  </p:clrMapOvr>
+</p:sld>
+</file>
+
+<file path=ppt/slides/slide51.xml><?xml version="1.0" encoding="utf-8"?>
+<p:sld xmlns:a="http://schemas.openxmlformats.org/drawingml/2006/main" xmlns:r="http://schemas.openxmlformats.org/officeDocument/2006/relationships" xmlns:p="http://schemas.openxmlformats.org/presentationml/2006/main">
+  <p:cSld>
+    <p:spTree>
+      <p:nvGrpSpPr>
+        <p:cNvPr id="1" name=""/>
+        <p:cNvGrpSpPr/>
+        <p:nvPr/>
+      </p:nvGrpSpPr>
+      <p:grpSpPr>
+        <a:xfrm>
+          <a:off x="0" y="0"/>
+          <a:ext cx="0" cy="0"/>
+          <a:chOff x="0" y="0"/>
+          <a:chExt cx="0" cy="0"/>
+        </a:xfrm>
+      </p:grpSpPr>
+    </p:spTree>
+    <p:extLst>
+      <p:ext uri="{BB962C8B-B14F-4D97-AF65-F5344CB8AC3E}">
+        <p14:creationId xmlns:p14="http://schemas.microsoft.com/office/powerpoint/2010/main" val="4098131677"/>
       </p:ext>
     </p:extLst>
   </p:cSld>

--- a/CameraKit Walkthrough.pptx
+++ b/CameraKit Walkthrough.pptx
@@ -5,57 +5,58 @@
     <p:sldMasterId id="2147483648" r:id="rId1"/>
   </p:sldMasterIdLst>
   <p:sldIdLst>
-    <p:sldId id="256" r:id="rId2"/>
-    <p:sldId id="285" r:id="rId3"/>
-    <p:sldId id="281" r:id="rId4"/>
-    <p:sldId id="282" r:id="rId5"/>
-    <p:sldId id="283" r:id="rId6"/>
-    <p:sldId id="284" r:id="rId7"/>
-    <p:sldId id="257" r:id="rId8"/>
-    <p:sldId id="272" r:id="rId9"/>
-    <p:sldId id="273" r:id="rId10"/>
-    <p:sldId id="274" r:id="rId11"/>
-    <p:sldId id="259" r:id="rId12"/>
-    <p:sldId id="260" r:id="rId13"/>
-    <p:sldId id="258" r:id="rId14"/>
-    <p:sldId id="261" r:id="rId15"/>
-    <p:sldId id="262" r:id="rId16"/>
-    <p:sldId id="263" r:id="rId17"/>
-    <p:sldId id="264" r:id="rId18"/>
-    <p:sldId id="265" r:id="rId19"/>
-    <p:sldId id="286" r:id="rId20"/>
-    <p:sldId id="287" r:id="rId21"/>
-    <p:sldId id="266" r:id="rId22"/>
-    <p:sldId id="268" r:id="rId23"/>
-    <p:sldId id="267" r:id="rId24"/>
-    <p:sldId id="269" r:id="rId25"/>
-    <p:sldId id="270" r:id="rId26"/>
-    <p:sldId id="271" r:id="rId27"/>
-    <p:sldId id="276" r:id="rId28"/>
-    <p:sldId id="275" r:id="rId29"/>
-    <p:sldId id="278" r:id="rId30"/>
-    <p:sldId id="277" r:id="rId31"/>
-    <p:sldId id="279" r:id="rId32"/>
-    <p:sldId id="280" r:id="rId33"/>
-    <p:sldId id="288" r:id="rId34"/>
-    <p:sldId id="289" r:id="rId35"/>
-    <p:sldId id="290" r:id="rId36"/>
-    <p:sldId id="291" r:id="rId37"/>
-    <p:sldId id="292" r:id="rId38"/>
-    <p:sldId id="293" r:id="rId39"/>
-    <p:sldId id="294" r:id="rId40"/>
-    <p:sldId id="295" r:id="rId41"/>
-    <p:sldId id="296" r:id="rId42"/>
-    <p:sldId id="297" r:id="rId43"/>
-    <p:sldId id="298" r:id="rId44"/>
-    <p:sldId id="299" r:id="rId45"/>
-    <p:sldId id="300" r:id="rId46"/>
-    <p:sldId id="301" r:id="rId47"/>
-    <p:sldId id="302" r:id="rId48"/>
-    <p:sldId id="303" r:id="rId49"/>
-    <p:sldId id="304" r:id="rId50"/>
-    <p:sldId id="305" r:id="rId51"/>
-    <p:sldId id="306" r:id="rId52"/>
+    <p:sldId id="307" r:id="rId2"/>
+    <p:sldId id="256" r:id="rId3"/>
+    <p:sldId id="285" r:id="rId4"/>
+    <p:sldId id="281" r:id="rId5"/>
+    <p:sldId id="282" r:id="rId6"/>
+    <p:sldId id="283" r:id="rId7"/>
+    <p:sldId id="284" r:id="rId8"/>
+    <p:sldId id="257" r:id="rId9"/>
+    <p:sldId id="272" r:id="rId10"/>
+    <p:sldId id="273" r:id="rId11"/>
+    <p:sldId id="274" r:id="rId12"/>
+    <p:sldId id="259" r:id="rId13"/>
+    <p:sldId id="260" r:id="rId14"/>
+    <p:sldId id="258" r:id="rId15"/>
+    <p:sldId id="261" r:id="rId16"/>
+    <p:sldId id="262" r:id="rId17"/>
+    <p:sldId id="263" r:id="rId18"/>
+    <p:sldId id="264" r:id="rId19"/>
+    <p:sldId id="265" r:id="rId20"/>
+    <p:sldId id="286" r:id="rId21"/>
+    <p:sldId id="287" r:id="rId22"/>
+    <p:sldId id="266" r:id="rId23"/>
+    <p:sldId id="268" r:id="rId24"/>
+    <p:sldId id="267" r:id="rId25"/>
+    <p:sldId id="269" r:id="rId26"/>
+    <p:sldId id="270" r:id="rId27"/>
+    <p:sldId id="271" r:id="rId28"/>
+    <p:sldId id="276" r:id="rId29"/>
+    <p:sldId id="275" r:id="rId30"/>
+    <p:sldId id="278" r:id="rId31"/>
+    <p:sldId id="277" r:id="rId32"/>
+    <p:sldId id="279" r:id="rId33"/>
+    <p:sldId id="280" r:id="rId34"/>
+    <p:sldId id="288" r:id="rId35"/>
+    <p:sldId id="289" r:id="rId36"/>
+    <p:sldId id="290" r:id="rId37"/>
+    <p:sldId id="291" r:id="rId38"/>
+    <p:sldId id="292" r:id="rId39"/>
+    <p:sldId id="293" r:id="rId40"/>
+    <p:sldId id="294" r:id="rId41"/>
+    <p:sldId id="295" r:id="rId42"/>
+    <p:sldId id="296" r:id="rId43"/>
+    <p:sldId id="297" r:id="rId44"/>
+    <p:sldId id="298" r:id="rId45"/>
+    <p:sldId id="299" r:id="rId46"/>
+    <p:sldId id="300" r:id="rId47"/>
+    <p:sldId id="301" r:id="rId48"/>
+    <p:sldId id="302" r:id="rId49"/>
+    <p:sldId id="303" r:id="rId50"/>
+    <p:sldId id="304" r:id="rId51"/>
+    <p:sldId id="305" r:id="rId52"/>
+    <p:sldId id="306" r:id="rId53"/>
   </p:sldIdLst>
   <p:sldSz cx="12192000" cy="6858000"/>
   <p:notesSz cx="6858000" cy="9144000"/>
@@ -3402,7 +3403,7 @@
           <p:cNvPr id="2" name="Title 1">
             <a:extLst>
               <a:ext uri="{FF2B5EF4-FFF2-40B4-BE49-F238E27FC236}">
-                <a16:creationId xmlns:a16="http://schemas.microsoft.com/office/drawing/2014/main" id="{431C61E0-FA94-43A1-A514-ED8BD9FC33E0}"/>
+                <a16:creationId xmlns:a16="http://schemas.microsoft.com/office/drawing/2014/main" id="{85DDE8C1-1F59-3EE8-07E6-8016FB21430E}"/>
               </a:ext>
             </a:extLst>
           </p:cNvPr>
@@ -3410,7 +3411,7 @@
             <a:spLocks noGrp="1"/>
           </p:cNvSpPr>
           <p:nvPr>
-            <p:ph type="ctrTitle"/>
+            <p:ph type="title"/>
           </p:nvPr>
         </p:nvSpPr>
         <p:spPr/>
@@ -3419,22 +3420,19 @@
           <a:lstStyle/>
           <a:p>
             <a:r>
-              <a:rPr lang="en-IE" dirty="0" err="1"/>
-              <a:t>CameraKit</a:t>
+              <a:rPr lang="en-GB" dirty="0" err="1"/>
+              <a:t>Kudvenkat</a:t>
             </a:r>
-            <a:r>
-              <a:rPr lang="en-IE" dirty="0"/>
-              <a:t> Walkthrough</a:t>
-            </a:r>
+            <a:endParaRPr lang="en-GB" dirty="0"/>
           </a:p>
         </p:txBody>
       </p:sp>
       <p:sp>
         <p:nvSpPr>
-          <p:cNvPr id="3" name="Subtitle 2">
-            <a:extLst>
-              <a:ext uri="{FF2B5EF4-FFF2-40B4-BE49-F238E27FC236}">
-                <a16:creationId xmlns:a16="http://schemas.microsoft.com/office/drawing/2014/main" id="{C6E1029C-7098-41E2-91CC-A17A69D89878}"/>
+          <p:cNvPr id="3" name="Content Placeholder 2">
+            <a:extLst>
+              <a:ext uri="{FF2B5EF4-FFF2-40B4-BE49-F238E27FC236}">
+                <a16:creationId xmlns:a16="http://schemas.microsoft.com/office/drawing/2014/main" id="{E74FB2A8-5C50-42B2-D8C9-5F3F7F6B27E6}"/>
               </a:ext>
             </a:extLst>
           </p:cNvPr>
@@ -3442,30 +3440,94 @@
             <a:spLocks noGrp="1"/>
           </p:cNvSpPr>
           <p:nvPr>
-            <p:ph type="subTitle" idx="1"/>
+            <p:ph idx="1"/>
           </p:nvPr>
         </p:nvSpPr>
-        <p:spPr>
-          <a:xfrm>
-            <a:off x="0" y="3602038"/>
-            <a:ext cx="12192000" cy="1655762"/>
-          </a:xfrm>
-        </p:spPr>
+        <p:spPr/>
         <p:txBody>
           <a:bodyPr/>
           <a:lstStyle/>
           <a:p>
             <a:r>
-              <a:rPr lang="en-IE" dirty="0"/>
-              <a:t>https://github.com/JohnRowleyDorsetCollege2025/oop-2025-a-camera-rental-20251111.git</a:t>
+              <a:rPr lang="en-GB" dirty="0"/>
+              <a:t>https://www.youtube.com/watch?v=SXmVym6L8dw&amp;list=PLAC325451207E3105</a:t>
             </a:r>
           </a:p>
         </p:txBody>
       </p:sp>
+      <p:pic>
+        <p:nvPicPr>
+          <p:cNvPr id="5" name="Picture 4">
+            <a:extLst>
+              <a:ext uri="{FF2B5EF4-FFF2-40B4-BE49-F238E27FC236}">
+                <a16:creationId xmlns:a16="http://schemas.microsoft.com/office/drawing/2014/main" id="{544B9BF0-A1E2-5F1D-14DA-F914593C8E05}"/>
+              </a:ext>
+            </a:extLst>
+          </p:cNvPr>
+          <p:cNvPicPr>
+            <a:picLocks noChangeAspect="1"/>
+          </p:cNvPicPr>
+          <p:nvPr/>
+        </p:nvPicPr>
+        <p:blipFill>
+          <a:blip r:embed="rId2"/>
+          <a:stretch>
+            <a:fillRect/>
+          </a:stretch>
+        </p:blipFill>
+        <p:spPr>
+          <a:xfrm>
+            <a:off x="3561537" y="4758003"/>
+            <a:ext cx="3047619" cy="1038095"/>
+          </a:xfrm>
+          <a:prstGeom prst="rect">
+            <a:avLst/>
+          </a:prstGeom>
+        </p:spPr>
+      </p:pic>
+      <p:cxnSp>
+        <p:nvCxnSpPr>
+          <p:cNvPr id="7" name="Straight Arrow Connector 6">
+            <a:extLst>
+              <a:ext uri="{FF2B5EF4-FFF2-40B4-BE49-F238E27FC236}">
+                <a16:creationId xmlns:a16="http://schemas.microsoft.com/office/drawing/2014/main" id="{03CF75A7-6E3E-B6E8-B1C6-3679D370791F}"/>
+              </a:ext>
+            </a:extLst>
+          </p:cNvPr>
+          <p:cNvCxnSpPr/>
+          <p:nvPr/>
+        </p:nvCxnSpPr>
+        <p:spPr>
+          <a:xfrm flipH="1">
+            <a:off x="4706754" y="3570973"/>
+            <a:ext cx="2425566" cy="1713296"/>
+          </a:xfrm>
+          <a:prstGeom prst="straightConnector1">
+            <a:avLst/>
+          </a:prstGeom>
+          <a:ln>
+            <a:tailEnd type="triangle"/>
+          </a:ln>
+        </p:spPr>
+        <p:style>
+          <a:lnRef idx="1">
+            <a:schemeClr val="accent1"/>
+          </a:lnRef>
+          <a:fillRef idx="0">
+            <a:schemeClr val="accent1"/>
+          </a:fillRef>
+          <a:effectRef idx="0">
+            <a:schemeClr val="accent1"/>
+          </a:effectRef>
+          <a:fontRef idx="minor">
+            <a:schemeClr val="tx1"/>
+          </a:fontRef>
+        </p:style>
+      </p:cxnSp>
     </p:spTree>
     <p:extLst>
       <p:ext uri="{BB962C8B-B14F-4D97-AF65-F5344CB8AC3E}">
-        <p14:creationId xmlns:p14="http://schemas.microsoft.com/office/powerpoint/2010/main" val="3068780484"/>
+        <p14:creationId xmlns:p14="http://schemas.microsoft.com/office/powerpoint/2010/main" val="257882662"/>
       </p:ext>
     </p:extLst>
   </p:cSld>
@@ -3494,10 +3556,10 @@
       </p:grpSpPr>
       <p:pic>
         <p:nvPicPr>
-          <p:cNvPr id="4" name="Picture 3">
-            <a:extLst>
-              <a:ext uri="{FF2B5EF4-FFF2-40B4-BE49-F238E27FC236}">
-                <a16:creationId xmlns:a16="http://schemas.microsoft.com/office/drawing/2014/main" id="{AEF26E8E-6917-4BD7-B429-8F590D7DD412}"/>
+          <p:cNvPr id="6" name="Picture 5">
+            <a:extLst>
+              <a:ext uri="{FF2B5EF4-FFF2-40B4-BE49-F238E27FC236}">
+                <a16:creationId xmlns:a16="http://schemas.microsoft.com/office/drawing/2014/main" id="{83CB04F6-9669-4322-9B09-9D4A9850D07A}"/>
               </a:ext>
             </a:extLst>
           </p:cNvPr>
@@ -3514,68 +3576,8 @@
         </p:blipFill>
         <p:spPr>
           <a:xfrm>
-            <a:off x="2042857" y="1904787"/>
-            <a:ext cx="9030960" cy="3048425"/>
-          </a:xfrm>
-          <a:prstGeom prst="rect">
-            <a:avLst/>
-          </a:prstGeom>
-        </p:spPr>
-      </p:pic>
-      <p:pic>
-        <p:nvPicPr>
-          <p:cNvPr id="5" name="Picture 4">
-            <a:extLst>
-              <a:ext uri="{FF2B5EF4-FFF2-40B4-BE49-F238E27FC236}">
-                <a16:creationId xmlns:a16="http://schemas.microsoft.com/office/drawing/2014/main" id="{1098EDB7-33BD-4DD2-82C7-BBEC890E98F0}"/>
-              </a:ext>
-            </a:extLst>
-          </p:cNvPr>
-          <p:cNvPicPr>
-            <a:picLocks noChangeAspect="1"/>
-          </p:cNvPicPr>
-          <p:nvPr/>
-        </p:nvPicPr>
-        <p:blipFill>
-          <a:blip r:embed="rId3"/>
-          <a:stretch>
-            <a:fillRect/>
-          </a:stretch>
-        </p:blipFill>
-        <p:spPr>
-          <a:xfrm>
-            <a:off x="2650622" y="139727"/>
-            <a:ext cx="6192114" cy="1400370"/>
-          </a:xfrm>
-          <a:prstGeom prst="rect">
-            <a:avLst/>
-          </a:prstGeom>
-        </p:spPr>
-      </p:pic>
-      <p:pic>
-        <p:nvPicPr>
-          <p:cNvPr id="6" name="Picture 5">
-            <a:extLst>
-              <a:ext uri="{FF2B5EF4-FFF2-40B4-BE49-F238E27FC236}">
-                <a16:creationId xmlns:a16="http://schemas.microsoft.com/office/drawing/2014/main" id="{83CB04F6-9669-4322-9B09-9D4A9850D07A}"/>
-              </a:ext>
-            </a:extLst>
-          </p:cNvPr>
-          <p:cNvPicPr>
-            <a:picLocks noChangeAspect="1"/>
-          </p:cNvPicPr>
-          <p:nvPr/>
-        </p:nvPicPr>
-        <p:blipFill>
-          <a:blip r:embed="rId4"/>
-          <a:stretch>
-            <a:fillRect/>
-          </a:stretch>
-        </p:blipFill>
-        <p:spPr>
-          <a:xfrm>
-            <a:off x="3895150" y="4953212"/>
-            <a:ext cx="3703057" cy="1919193"/>
+            <a:off x="2136089" y="1528815"/>
+            <a:ext cx="7332763" cy="3800370"/>
           </a:xfrm>
           <a:prstGeom prst="rect">
             <a:avLst/>
@@ -3585,7 +3587,7 @@
     </p:spTree>
     <p:extLst>
       <p:ext uri="{BB962C8B-B14F-4D97-AF65-F5344CB8AC3E}">
-        <p14:creationId xmlns:p14="http://schemas.microsoft.com/office/powerpoint/2010/main" val="2423344153"/>
+        <p14:creationId xmlns:p14="http://schemas.microsoft.com/office/powerpoint/2010/main" val="3930244857"/>
       </p:ext>
     </p:extLst>
   </p:cSld>
@@ -3617,7 +3619,7 @@
           <p:cNvPr id="4" name="Picture 3">
             <a:extLst>
               <a:ext uri="{FF2B5EF4-FFF2-40B4-BE49-F238E27FC236}">
-                <a16:creationId xmlns:a16="http://schemas.microsoft.com/office/drawing/2014/main" id="{D3EF98BC-003F-46BD-A162-AC8534024E34}"/>
+                <a16:creationId xmlns:a16="http://schemas.microsoft.com/office/drawing/2014/main" id="{AEF26E8E-6917-4BD7-B429-8F590D7DD412}"/>
               </a:ext>
             </a:extLst>
           </p:cNvPr>
@@ -3634,72 +3636,20 @@
         </p:blipFill>
         <p:spPr>
           <a:xfrm>
-            <a:off x="589845" y="1194348"/>
-            <a:ext cx="10078857" cy="3372321"/>
+            <a:off x="2042857" y="1904787"/>
+            <a:ext cx="9030960" cy="3048425"/>
           </a:xfrm>
           <a:prstGeom prst="rect">
             <a:avLst/>
           </a:prstGeom>
         </p:spPr>
       </p:pic>
-      <p:sp>
-        <p:nvSpPr>
-          <p:cNvPr id="5" name="Rectangle 4">
-            <a:extLst>
-              <a:ext uri="{FF2B5EF4-FFF2-40B4-BE49-F238E27FC236}">
-                <a16:creationId xmlns:a16="http://schemas.microsoft.com/office/drawing/2014/main" id="{181793FD-3E55-4663-9340-BC6A31BF037F}"/>
-              </a:ext>
-            </a:extLst>
-          </p:cNvPr>
-          <p:cNvSpPr/>
-          <p:nvPr/>
-        </p:nvSpPr>
-        <p:spPr>
-          <a:xfrm>
-            <a:off x="4714875" y="2333841"/>
-            <a:ext cx="3333750" cy="369333"/>
-          </a:xfrm>
-          <a:prstGeom prst="rect">
-            <a:avLst/>
-          </a:prstGeom>
-          <a:solidFill>
-            <a:schemeClr val="accent4">
-              <a:lumMod val="40000"/>
-              <a:lumOff val="60000"/>
-            </a:schemeClr>
-          </a:solidFill>
-        </p:spPr>
-        <p:style>
-          <a:lnRef idx="2">
-            <a:schemeClr val="accent1">
-              <a:shade val="50000"/>
-            </a:schemeClr>
-          </a:lnRef>
-          <a:fillRef idx="1">
-            <a:schemeClr val="accent1"/>
-          </a:fillRef>
-          <a:effectRef idx="0">
-            <a:schemeClr val="accent1"/>
-          </a:effectRef>
-          <a:fontRef idx="minor">
-            <a:schemeClr val="lt1"/>
-          </a:fontRef>
-        </p:style>
-        <p:txBody>
-          <a:bodyPr rtlCol="0" anchor="ctr"/>
-          <a:lstStyle/>
-          <a:p>
-            <a:pPr algn="ctr"/>
-            <a:endParaRPr lang="en-IE"/>
-          </a:p>
-        </p:txBody>
-      </p:sp>
       <p:pic>
         <p:nvPicPr>
-          <p:cNvPr id="2" name="Picture 1">
-            <a:extLst>
-              <a:ext uri="{FF2B5EF4-FFF2-40B4-BE49-F238E27FC236}">
-                <a16:creationId xmlns:a16="http://schemas.microsoft.com/office/drawing/2014/main" id="{A8252EF1-E97B-44D5-916F-C2C5CFD10994}"/>
+          <p:cNvPr id="5" name="Picture 4">
+            <a:extLst>
+              <a:ext uri="{FF2B5EF4-FFF2-40B4-BE49-F238E27FC236}">
+                <a16:creationId xmlns:a16="http://schemas.microsoft.com/office/drawing/2014/main" id="{1098EDB7-33BD-4DD2-82C7-BBEC890E98F0}"/>
               </a:ext>
             </a:extLst>
           </p:cNvPr>
@@ -3716,53 +3666,48 @@
         </p:blipFill>
         <p:spPr>
           <a:xfrm>
-            <a:off x="2799954" y="4414694"/>
-            <a:ext cx="5658640" cy="2048161"/>
+            <a:off x="2650622" y="139727"/>
+            <a:ext cx="6192114" cy="1400370"/>
           </a:xfrm>
           <a:prstGeom prst="rect">
             <a:avLst/>
           </a:prstGeom>
         </p:spPr>
       </p:pic>
-      <p:sp>
-        <p:nvSpPr>
-          <p:cNvPr id="3" name="TextBox 2">
-            <a:extLst>
-              <a:ext uri="{FF2B5EF4-FFF2-40B4-BE49-F238E27FC236}">
-                <a16:creationId xmlns:a16="http://schemas.microsoft.com/office/drawing/2014/main" id="{5F96645E-A53F-4CE5-A216-78431F02A64E}"/>
-              </a:ext>
-            </a:extLst>
-          </p:cNvPr>
-          <p:cNvSpPr txBox="1"/>
-          <p:nvPr/>
-        </p:nvSpPr>
-        <p:spPr>
-          <a:xfrm>
-            <a:off x="4933950" y="2333842"/>
-            <a:ext cx="2828082" cy="369332"/>
+      <p:pic>
+        <p:nvPicPr>
+          <p:cNvPr id="6" name="Picture 5">
+            <a:extLst>
+              <a:ext uri="{FF2B5EF4-FFF2-40B4-BE49-F238E27FC236}">
+                <a16:creationId xmlns:a16="http://schemas.microsoft.com/office/drawing/2014/main" id="{83CB04F6-9669-4322-9B09-9D4A9850D07A}"/>
+              </a:ext>
+            </a:extLst>
+          </p:cNvPr>
+          <p:cNvPicPr>
+            <a:picLocks noChangeAspect="1"/>
+          </p:cNvPicPr>
+          <p:nvPr/>
+        </p:nvPicPr>
+        <p:blipFill>
+          <a:blip r:embed="rId4"/>
+          <a:stretch>
+            <a:fillRect/>
+          </a:stretch>
+        </p:blipFill>
+        <p:spPr>
+          <a:xfrm>
+            <a:off x="3895150" y="4953212"/>
+            <a:ext cx="3703057" cy="1919193"/>
           </a:xfrm>
           <a:prstGeom prst="rect">
             <a:avLst/>
           </a:prstGeom>
-          <a:noFill/>
-        </p:spPr>
-        <p:txBody>
-          <a:bodyPr wrap="none" rtlCol="0">
-            <a:spAutoFit/>
-          </a:bodyPr>
-          <a:lstStyle/>
-          <a:p>
-            <a:r>
-              <a:rPr lang="en-IE" dirty="0"/>
-              <a:t>constructor (no parameters)</a:t>
-            </a:r>
-          </a:p>
-        </p:txBody>
-      </p:sp>
+        </p:spPr>
+      </p:pic>
     </p:spTree>
     <p:extLst>
       <p:ext uri="{BB962C8B-B14F-4D97-AF65-F5344CB8AC3E}">
-        <p14:creationId xmlns:p14="http://schemas.microsoft.com/office/powerpoint/2010/main" val="393501333"/>
+        <p14:creationId xmlns:p14="http://schemas.microsoft.com/office/powerpoint/2010/main" val="2423344153"/>
       </p:ext>
     </p:extLst>
   </p:cSld>
@@ -3794,7 +3739,7 @@
           <p:cNvPr id="4" name="Picture 3">
             <a:extLst>
               <a:ext uri="{FF2B5EF4-FFF2-40B4-BE49-F238E27FC236}">
-                <a16:creationId xmlns:a16="http://schemas.microsoft.com/office/drawing/2014/main" id="{97169860-E41D-46E7-836D-F2DB368AE4E4}"/>
+                <a16:creationId xmlns:a16="http://schemas.microsoft.com/office/drawing/2014/main" id="{D3EF98BC-003F-46BD-A162-AC8534024E34}"/>
               </a:ext>
             </a:extLst>
           </p:cNvPr>
@@ -3811,8 +3756,8 @@
         </p:blipFill>
         <p:spPr>
           <a:xfrm>
-            <a:off x="1199466" y="699706"/>
-            <a:ext cx="9793067" cy="5458587"/>
+            <a:off x="589845" y="1194348"/>
+            <a:ext cx="10078857" cy="3372321"/>
           </a:xfrm>
           <a:prstGeom prst="rect">
             <a:avLst/>
@@ -3821,10 +3766,10 @@
       </p:pic>
       <p:sp>
         <p:nvSpPr>
-          <p:cNvPr id="3" name="Rectangle 2">
-            <a:extLst>
-              <a:ext uri="{FF2B5EF4-FFF2-40B4-BE49-F238E27FC236}">
-                <a16:creationId xmlns:a16="http://schemas.microsoft.com/office/drawing/2014/main" id="{A65CC4AA-A112-4E16-9283-C00647BD6B6D}"/>
+          <p:cNvPr id="5" name="Rectangle 4">
+            <a:extLst>
+              <a:ext uri="{FF2B5EF4-FFF2-40B4-BE49-F238E27FC236}">
+                <a16:creationId xmlns:a16="http://schemas.microsoft.com/office/drawing/2014/main" id="{181793FD-3E55-4663-9340-BC6A31BF037F}"/>
               </a:ext>
             </a:extLst>
           </p:cNvPr>
@@ -3833,13 +3778,18 @@
         </p:nvSpPr>
         <p:spPr>
           <a:xfrm>
-            <a:off x="3057525" y="3876891"/>
-            <a:ext cx="809625" cy="323633"/>
+            <a:off x="4714875" y="2333841"/>
+            <a:ext cx="3333750" cy="369333"/>
           </a:xfrm>
           <a:prstGeom prst="rect">
             <a:avLst/>
           </a:prstGeom>
-          <a:noFill/>
+          <a:solidFill>
+            <a:schemeClr val="accent4">
+              <a:lumMod val="40000"/>
+              <a:lumOff val="60000"/>
+            </a:schemeClr>
+          </a:solidFill>
         </p:spPr>
         <p:style>
           <a:lnRef idx="2">
@@ -3866,198 +3816,67 @@
           </a:p>
         </p:txBody>
       </p:sp>
-      <p:cxnSp>
-        <p:nvCxnSpPr>
-          <p:cNvPr id="5" name="Straight Arrow Connector 4">
-            <a:extLst>
-              <a:ext uri="{FF2B5EF4-FFF2-40B4-BE49-F238E27FC236}">
-                <a16:creationId xmlns:a16="http://schemas.microsoft.com/office/drawing/2014/main" id="{2B9CA81C-3EA9-49AE-9E0B-3ED57B961732}"/>
-              </a:ext>
-            </a:extLst>
-          </p:cNvPr>
-          <p:cNvCxnSpPr/>
-          <p:nvPr/>
-        </p:nvCxnSpPr>
-        <p:spPr>
-          <a:xfrm flipH="1">
-            <a:off x="3105150" y="1152525"/>
-            <a:ext cx="866775" cy="600075"/>
-          </a:xfrm>
-          <a:prstGeom prst="straightConnector1">
-            <a:avLst/>
-          </a:prstGeom>
-          <a:ln>
-            <a:tailEnd type="triangle"/>
-          </a:ln>
-        </p:spPr>
-        <p:style>
-          <a:lnRef idx="1">
-            <a:schemeClr val="accent1"/>
-          </a:lnRef>
-          <a:fillRef idx="0">
-            <a:schemeClr val="accent1"/>
-          </a:fillRef>
-          <a:effectRef idx="0">
-            <a:schemeClr val="accent1"/>
-          </a:effectRef>
-          <a:fontRef idx="minor">
-            <a:schemeClr val="tx1"/>
-          </a:fontRef>
-        </p:style>
-      </p:cxnSp>
-      <p:cxnSp>
-        <p:nvCxnSpPr>
-          <p:cNvPr id="7" name="Straight Arrow Connector 6">
-            <a:extLst>
-              <a:ext uri="{FF2B5EF4-FFF2-40B4-BE49-F238E27FC236}">
-                <a16:creationId xmlns:a16="http://schemas.microsoft.com/office/drawing/2014/main" id="{3AC82516-F65C-41AA-A2EF-7614A3911B85}"/>
-              </a:ext>
-            </a:extLst>
-          </p:cNvPr>
-          <p:cNvCxnSpPr/>
-          <p:nvPr/>
-        </p:nvCxnSpPr>
-        <p:spPr>
-          <a:xfrm flipH="1">
-            <a:off x="3686175" y="3257550"/>
-            <a:ext cx="609600" cy="438150"/>
-          </a:xfrm>
-          <a:prstGeom prst="straightConnector1">
-            <a:avLst/>
-          </a:prstGeom>
-          <a:ln>
-            <a:tailEnd type="triangle"/>
-          </a:ln>
-        </p:spPr>
-        <p:style>
-          <a:lnRef idx="1">
-            <a:schemeClr val="accent1"/>
-          </a:lnRef>
-          <a:fillRef idx="0">
-            <a:schemeClr val="accent1"/>
-          </a:fillRef>
-          <a:effectRef idx="0">
-            <a:schemeClr val="accent1"/>
-          </a:effectRef>
-          <a:fontRef idx="minor">
-            <a:schemeClr val="tx1"/>
-          </a:fontRef>
-        </p:style>
-      </p:cxnSp>
+      <p:pic>
+        <p:nvPicPr>
+          <p:cNvPr id="2" name="Picture 1">
+            <a:extLst>
+              <a:ext uri="{FF2B5EF4-FFF2-40B4-BE49-F238E27FC236}">
+                <a16:creationId xmlns:a16="http://schemas.microsoft.com/office/drawing/2014/main" id="{A8252EF1-E97B-44D5-916F-C2C5CFD10994}"/>
+              </a:ext>
+            </a:extLst>
+          </p:cNvPr>
+          <p:cNvPicPr>
+            <a:picLocks noChangeAspect="1"/>
+          </p:cNvPicPr>
+          <p:nvPr/>
+        </p:nvPicPr>
+        <p:blipFill>
+          <a:blip r:embed="rId3"/>
+          <a:stretch>
+            <a:fillRect/>
+          </a:stretch>
+        </p:blipFill>
+        <p:spPr>
+          <a:xfrm>
+            <a:off x="2799954" y="4414694"/>
+            <a:ext cx="5658640" cy="2048161"/>
+          </a:xfrm>
+          <a:prstGeom prst="rect">
+            <a:avLst/>
+          </a:prstGeom>
+        </p:spPr>
+      </p:pic>
       <p:sp>
         <p:nvSpPr>
-          <p:cNvPr id="8" name="Rectangle 7">
-            <a:extLst>
-              <a:ext uri="{FF2B5EF4-FFF2-40B4-BE49-F238E27FC236}">
-                <a16:creationId xmlns:a16="http://schemas.microsoft.com/office/drawing/2014/main" id="{DC6E4F5F-DAFC-46FB-BBCF-9BA3EB754CFD}"/>
-              </a:ext>
-            </a:extLst>
-          </p:cNvPr>
-          <p:cNvSpPr/>
+          <p:cNvPr id="3" name="TextBox 2">
+            <a:extLst>
+              <a:ext uri="{FF2B5EF4-FFF2-40B4-BE49-F238E27FC236}">
+                <a16:creationId xmlns:a16="http://schemas.microsoft.com/office/drawing/2014/main" id="{5F96645E-A53F-4CE5-A216-78431F02A64E}"/>
+              </a:ext>
+            </a:extLst>
+          </p:cNvPr>
+          <p:cNvSpPr txBox="1"/>
           <p:nvPr/>
         </p:nvSpPr>
         <p:spPr>
           <a:xfrm>
-            <a:off x="5295899" y="1152526"/>
-            <a:ext cx="4619625" cy="361950"/>
+            <a:off x="4933950" y="2333842"/>
+            <a:ext cx="2828082" cy="369332"/>
           </a:xfrm>
           <a:prstGeom prst="rect">
             <a:avLst/>
           </a:prstGeom>
-          <a:solidFill>
-            <a:schemeClr val="accent4">
-              <a:lumMod val="40000"/>
-              <a:lumOff val="60000"/>
-            </a:schemeClr>
-          </a:solidFill>
-        </p:spPr>
-        <p:style>
-          <a:lnRef idx="2">
-            <a:schemeClr val="accent1">
-              <a:shade val="50000"/>
-            </a:schemeClr>
-          </a:lnRef>
-          <a:fillRef idx="1">
-            <a:schemeClr val="accent1"/>
-          </a:fillRef>
-          <a:effectRef idx="0">
-            <a:schemeClr val="accent1"/>
-          </a:effectRef>
-          <a:fontRef idx="minor">
-            <a:schemeClr val="lt1"/>
-          </a:fontRef>
-        </p:style>
+          <a:noFill/>
+        </p:spPr>
         <p:txBody>
-          <a:bodyPr rtlCol="0" anchor="ctr"/>
+          <a:bodyPr wrap="none" rtlCol="0">
+            <a:spAutoFit/>
+          </a:bodyPr>
           <a:lstStyle/>
           <a:p>
-            <a:pPr algn="ctr"/>
             <a:r>
-              <a:rPr lang="en-IE" dirty="0">
-                <a:solidFill>
-                  <a:schemeClr val="tx1"/>
-                </a:solidFill>
-              </a:rPr>
-              <a:t>Constructors do not declare a return  value</a:t>
-            </a:r>
-          </a:p>
-        </p:txBody>
-      </p:sp>
-      <p:sp>
-        <p:nvSpPr>
-          <p:cNvPr id="9" name="Rectangle 8">
-            <a:extLst>
-              <a:ext uri="{FF2B5EF4-FFF2-40B4-BE49-F238E27FC236}">
-                <a16:creationId xmlns:a16="http://schemas.microsoft.com/office/drawing/2014/main" id="{1910B007-5C6F-4A80-8627-F24231A92A79}"/>
-              </a:ext>
-            </a:extLst>
-          </p:cNvPr>
-          <p:cNvSpPr/>
-          <p:nvPr/>
-        </p:nvSpPr>
-        <p:spPr>
-          <a:xfrm>
-            <a:off x="6353859" y="3553257"/>
-            <a:ext cx="3852180" cy="323634"/>
-          </a:xfrm>
-          <a:prstGeom prst="rect">
-            <a:avLst/>
-          </a:prstGeom>
-          <a:solidFill>
-            <a:schemeClr val="accent4">
-              <a:lumMod val="40000"/>
-              <a:lumOff val="60000"/>
-            </a:schemeClr>
-          </a:solidFill>
-        </p:spPr>
-        <p:style>
-          <a:lnRef idx="2">
-            <a:schemeClr val="accent1">
-              <a:shade val="50000"/>
-            </a:schemeClr>
-          </a:lnRef>
-          <a:fillRef idx="1">
-            <a:schemeClr val="accent1"/>
-          </a:fillRef>
-          <a:effectRef idx="0">
-            <a:schemeClr val="accent1"/>
-          </a:effectRef>
-          <a:fontRef idx="minor">
-            <a:schemeClr val="lt1"/>
-          </a:fontRef>
-        </p:style>
-        <p:txBody>
-          <a:bodyPr rtlCol="0" anchor="ctr"/>
-          <a:lstStyle/>
-          <a:p>
-            <a:pPr algn="ctr"/>
-            <a:r>
-              <a:rPr lang="en-IE" dirty="0">
-                <a:solidFill>
-                  <a:schemeClr val="tx1"/>
-                </a:solidFill>
-              </a:rPr>
-              <a:t>Void indicates no value returned</a:t>
+              <a:rPr lang="en-IE" dirty="0"/>
+              <a:t>constructor (no parameters)</a:t>
             </a:r>
           </a:p>
         </p:txBody>
@@ -4065,7 +3884,7 @@
     </p:spTree>
     <p:extLst>
       <p:ext uri="{BB962C8B-B14F-4D97-AF65-F5344CB8AC3E}">
-        <p14:creationId xmlns:p14="http://schemas.microsoft.com/office/powerpoint/2010/main" val="404521868"/>
+        <p14:creationId xmlns:p14="http://schemas.microsoft.com/office/powerpoint/2010/main" val="393501333"/>
       </p:ext>
     </p:extLst>
   </p:cSld>
@@ -4097,7 +3916,7 @@
           <p:cNvPr id="4" name="Picture 3">
             <a:extLst>
               <a:ext uri="{FF2B5EF4-FFF2-40B4-BE49-F238E27FC236}">
-                <a16:creationId xmlns:a16="http://schemas.microsoft.com/office/drawing/2014/main" id="{2F8F8523-EBD4-43FE-9A27-6A7BFCA492AC}"/>
+                <a16:creationId xmlns:a16="http://schemas.microsoft.com/office/drawing/2014/main" id="{97169860-E41D-46E7-836D-F2DB368AE4E4}"/>
               </a:ext>
             </a:extLst>
           </p:cNvPr>
@@ -4114,48 +3933,261 @@
         </p:blipFill>
         <p:spPr>
           <a:xfrm>
-            <a:off x="2630626" y="5048254"/>
-            <a:ext cx="5944430" cy="1467055"/>
+            <a:off x="1199466" y="699706"/>
+            <a:ext cx="9793067" cy="5458587"/>
           </a:xfrm>
           <a:prstGeom prst="rect">
             <a:avLst/>
           </a:prstGeom>
         </p:spPr>
       </p:pic>
-      <p:pic>
-        <p:nvPicPr>
-          <p:cNvPr id="5" name="Picture 4">
-            <a:extLst>
-              <a:ext uri="{FF2B5EF4-FFF2-40B4-BE49-F238E27FC236}">
-                <a16:creationId xmlns:a16="http://schemas.microsoft.com/office/drawing/2014/main" id="{B27CF325-EFBC-4BC5-B6EB-D62A7A04C177}"/>
-              </a:ext>
-            </a:extLst>
-          </p:cNvPr>
-          <p:cNvPicPr>
-            <a:picLocks noChangeAspect="1"/>
-          </p:cNvPicPr>
-          <p:nvPr/>
-        </p:nvPicPr>
-        <p:blipFill>
-          <a:blip r:embed="rId3"/>
-          <a:stretch>
-            <a:fillRect/>
-          </a:stretch>
-        </p:blipFill>
-        <p:spPr>
-          <a:xfrm>
-            <a:off x="1566230" y="1175989"/>
-            <a:ext cx="9059539" cy="3458058"/>
+      <p:sp>
+        <p:nvSpPr>
+          <p:cNvPr id="3" name="Rectangle 2">
+            <a:extLst>
+              <a:ext uri="{FF2B5EF4-FFF2-40B4-BE49-F238E27FC236}">
+                <a16:creationId xmlns:a16="http://schemas.microsoft.com/office/drawing/2014/main" id="{A65CC4AA-A112-4E16-9283-C00647BD6B6D}"/>
+              </a:ext>
+            </a:extLst>
+          </p:cNvPr>
+          <p:cNvSpPr/>
+          <p:nvPr/>
+        </p:nvSpPr>
+        <p:spPr>
+          <a:xfrm>
+            <a:off x="3057525" y="3876891"/>
+            <a:ext cx="809625" cy="323633"/>
           </a:xfrm>
           <a:prstGeom prst="rect">
             <a:avLst/>
           </a:prstGeom>
-        </p:spPr>
-      </p:pic>
+          <a:noFill/>
+        </p:spPr>
+        <p:style>
+          <a:lnRef idx="2">
+            <a:schemeClr val="accent1">
+              <a:shade val="50000"/>
+            </a:schemeClr>
+          </a:lnRef>
+          <a:fillRef idx="1">
+            <a:schemeClr val="accent1"/>
+          </a:fillRef>
+          <a:effectRef idx="0">
+            <a:schemeClr val="accent1"/>
+          </a:effectRef>
+          <a:fontRef idx="minor">
+            <a:schemeClr val="lt1"/>
+          </a:fontRef>
+        </p:style>
+        <p:txBody>
+          <a:bodyPr rtlCol="0" anchor="ctr"/>
+          <a:lstStyle/>
+          <a:p>
+            <a:pPr algn="ctr"/>
+            <a:endParaRPr lang="en-IE"/>
+          </a:p>
+        </p:txBody>
+      </p:sp>
+      <p:cxnSp>
+        <p:nvCxnSpPr>
+          <p:cNvPr id="5" name="Straight Arrow Connector 4">
+            <a:extLst>
+              <a:ext uri="{FF2B5EF4-FFF2-40B4-BE49-F238E27FC236}">
+                <a16:creationId xmlns:a16="http://schemas.microsoft.com/office/drawing/2014/main" id="{2B9CA81C-3EA9-49AE-9E0B-3ED57B961732}"/>
+              </a:ext>
+            </a:extLst>
+          </p:cNvPr>
+          <p:cNvCxnSpPr/>
+          <p:nvPr/>
+        </p:nvCxnSpPr>
+        <p:spPr>
+          <a:xfrm flipH="1">
+            <a:off x="3105150" y="1152525"/>
+            <a:ext cx="866775" cy="600075"/>
+          </a:xfrm>
+          <a:prstGeom prst="straightConnector1">
+            <a:avLst/>
+          </a:prstGeom>
+          <a:ln>
+            <a:tailEnd type="triangle"/>
+          </a:ln>
+        </p:spPr>
+        <p:style>
+          <a:lnRef idx="1">
+            <a:schemeClr val="accent1"/>
+          </a:lnRef>
+          <a:fillRef idx="0">
+            <a:schemeClr val="accent1"/>
+          </a:fillRef>
+          <a:effectRef idx="0">
+            <a:schemeClr val="accent1"/>
+          </a:effectRef>
+          <a:fontRef idx="minor">
+            <a:schemeClr val="tx1"/>
+          </a:fontRef>
+        </p:style>
+      </p:cxnSp>
+      <p:cxnSp>
+        <p:nvCxnSpPr>
+          <p:cNvPr id="7" name="Straight Arrow Connector 6">
+            <a:extLst>
+              <a:ext uri="{FF2B5EF4-FFF2-40B4-BE49-F238E27FC236}">
+                <a16:creationId xmlns:a16="http://schemas.microsoft.com/office/drawing/2014/main" id="{3AC82516-F65C-41AA-A2EF-7614A3911B85}"/>
+              </a:ext>
+            </a:extLst>
+          </p:cNvPr>
+          <p:cNvCxnSpPr/>
+          <p:nvPr/>
+        </p:nvCxnSpPr>
+        <p:spPr>
+          <a:xfrm flipH="1">
+            <a:off x="3686175" y="3257550"/>
+            <a:ext cx="609600" cy="438150"/>
+          </a:xfrm>
+          <a:prstGeom prst="straightConnector1">
+            <a:avLst/>
+          </a:prstGeom>
+          <a:ln>
+            <a:tailEnd type="triangle"/>
+          </a:ln>
+        </p:spPr>
+        <p:style>
+          <a:lnRef idx="1">
+            <a:schemeClr val="accent1"/>
+          </a:lnRef>
+          <a:fillRef idx="0">
+            <a:schemeClr val="accent1"/>
+          </a:fillRef>
+          <a:effectRef idx="0">
+            <a:schemeClr val="accent1"/>
+          </a:effectRef>
+          <a:fontRef idx="minor">
+            <a:schemeClr val="tx1"/>
+          </a:fontRef>
+        </p:style>
+      </p:cxnSp>
+      <p:sp>
+        <p:nvSpPr>
+          <p:cNvPr id="8" name="Rectangle 7">
+            <a:extLst>
+              <a:ext uri="{FF2B5EF4-FFF2-40B4-BE49-F238E27FC236}">
+                <a16:creationId xmlns:a16="http://schemas.microsoft.com/office/drawing/2014/main" id="{DC6E4F5F-DAFC-46FB-BBCF-9BA3EB754CFD}"/>
+              </a:ext>
+            </a:extLst>
+          </p:cNvPr>
+          <p:cNvSpPr/>
+          <p:nvPr/>
+        </p:nvSpPr>
+        <p:spPr>
+          <a:xfrm>
+            <a:off x="5295899" y="1152526"/>
+            <a:ext cx="4619625" cy="361950"/>
+          </a:xfrm>
+          <a:prstGeom prst="rect">
+            <a:avLst/>
+          </a:prstGeom>
+          <a:solidFill>
+            <a:schemeClr val="accent4">
+              <a:lumMod val="40000"/>
+              <a:lumOff val="60000"/>
+            </a:schemeClr>
+          </a:solidFill>
+        </p:spPr>
+        <p:style>
+          <a:lnRef idx="2">
+            <a:schemeClr val="accent1">
+              <a:shade val="50000"/>
+            </a:schemeClr>
+          </a:lnRef>
+          <a:fillRef idx="1">
+            <a:schemeClr val="accent1"/>
+          </a:fillRef>
+          <a:effectRef idx="0">
+            <a:schemeClr val="accent1"/>
+          </a:effectRef>
+          <a:fontRef idx="minor">
+            <a:schemeClr val="lt1"/>
+          </a:fontRef>
+        </p:style>
+        <p:txBody>
+          <a:bodyPr rtlCol="0" anchor="ctr"/>
+          <a:lstStyle/>
+          <a:p>
+            <a:pPr algn="ctr"/>
+            <a:r>
+              <a:rPr lang="en-IE" dirty="0">
+                <a:solidFill>
+                  <a:schemeClr val="tx1"/>
+                </a:solidFill>
+              </a:rPr>
+              <a:t>Constructors do not declare a return  value</a:t>
+            </a:r>
+          </a:p>
+        </p:txBody>
+      </p:sp>
+      <p:sp>
+        <p:nvSpPr>
+          <p:cNvPr id="9" name="Rectangle 8">
+            <a:extLst>
+              <a:ext uri="{FF2B5EF4-FFF2-40B4-BE49-F238E27FC236}">
+                <a16:creationId xmlns:a16="http://schemas.microsoft.com/office/drawing/2014/main" id="{1910B007-5C6F-4A80-8627-F24231A92A79}"/>
+              </a:ext>
+            </a:extLst>
+          </p:cNvPr>
+          <p:cNvSpPr/>
+          <p:nvPr/>
+        </p:nvSpPr>
+        <p:spPr>
+          <a:xfrm>
+            <a:off x="6353859" y="3553257"/>
+            <a:ext cx="3852180" cy="323634"/>
+          </a:xfrm>
+          <a:prstGeom prst="rect">
+            <a:avLst/>
+          </a:prstGeom>
+          <a:solidFill>
+            <a:schemeClr val="accent4">
+              <a:lumMod val="40000"/>
+              <a:lumOff val="60000"/>
+            </a:schemeClr>
+          </a:solidFill>
+        </p:spPr>
+        <p:style>
+          <a:lnRef idx="2">
+            <a:schemeClr val="accent1">
+              <a:shade val="50000"/>
+            </a:schemeClr>
+          </a:lnRef>
+          <a:fillRef idx="1">
+            <a:schemeClr val="accent1"/>
+          </a:fillRef>
+          <a:effectRef idx="0">
+            <a:schemeClr val="accent1"/>
+          </a:effectRef>
+          <a:fontRef idx="minor">
+            <a:schemeClr val="lt1"/>
+          </a:fontRef>
+        </p:style>
+        <p:txBody>
+          <a:bodyPr rtlCol="0" anchor="ctr"/>
+          <a:lstStyle/>
+          <a:p>
+            <a:pPr algn="ctr"/>
+            <a:r>
+              <a:rPr lang="en-IE" dirty="0">
+                <a:solidFill>
+                  <a:schemeClr val="tx1"/>
+                </a:solidFill>
+              </a:rPr>
+              <a:t>Void indicates no value returned</a:t>
+            </a:r>
+          </a:p>
+        </p:txBody>
+      </p:sp>
     </p:spTree>
     <p:extLst>
       <p:ext uri="{BB962C8B-B14F-4D97-AF65-F5344CB8AC3E}">
-        <p14:creationId xmlns:p14="http://schemas.microsoft.com/office/powerpoint/2010/main" val="1571154289"/>
+        <p14:creationId xmlns:p14="http://schemas.microsoft.com/office/powerpoint/2010/main" val="404521868"/>
       </p:ext>
     </p:extLst>
   </p:cSld>
@@ -4187,7 +4219,7 @@
           <p:cNvPr id="4" name="Picture 3">
             <a:extLst>
               <a:ext uri="{FF2B5EF4-FFF2-40B4-BE49-F238E27FC236}">
-                <a16:creationId xmlns:a16="http://schemas.microsoft.com/office/drawing/2014/main" id="{90153D77-D444-43D7-B16C-F5D3D4F4A7E2}"/>
+                <a16:creationId xmlns:a16="http://schemas.microsoft.com/office/drawing/2014/main" id="{2F8F8523-EBD4-43FE-9A27-6A7BFCA492AC}"/>
               </a:ext>
             </a:extLst>
           </p:cNvPr>
@@ -4204,8 +4236,38 @@
         </p:blipFill>
         <p:spPr>
           <a:xfrm>
-            <a:off x="1664413" y="156444"/>
-            <a:ext cx="9075024" cy="6701556"/>
+            <a:off x="2630626" y="5048254"/>
+            <a:ext cx="5944430" cy="1467055"/>
+          </a:xfrm>
+          <a:prstGeom prst="rect">
+            <a:avLst/>
+          </a:prstGeom>
+        </p:spPr>
+      </p:pic>
+      <p:pic>
+        <p:nvPicPr>
+          <p:cNvPr id="5" name="Picture 4">
+            <a:extLst>
+              <a:ext uri="{FF2B5EF4-FFF2-40B4-BE49-F238E27FC236}">
+                <a16:creationId xmlns:a16="http://schemas.microsoft.com/office/drawing/2014/main" id="{B27CF325-EFBC-4BC5-B6EB-D62A7A04C177}"/>
+              </a:ext>
+            </a:extLst>
+          </p:cNvPr>
+          <p:cNvPicPr>
+            <a:picLocks noChangeAspect="1"/>
+          </p:cNvPicPr>
+          <p:nvPr/>
+        </p:nvPicPr>
+        <p:blipFill>
+          <a:blip r:embed="rId3"/>
+          <a:stretch>
+            <a:fillRect/>
+          </a:stretch>
+        </p:blipFill>
+        <p:spPr>
+          <a:xfrm>
+            <a:off x="1566230" y="1175989"/>
+            <a:ext cx="9059539" cy="3458058"/>
           </a:xfrm>
           <a:prstGeom prst="rect">
             <a:avLst/>
@@ -4215,7 +4277,7 @@
     </p:spTree>
     <p:extLst>
       <p:ext uri="{BB962C8B-B14F-4D97-AF65-F5344CB8AC3E}">
-        <p14:creationId xmlns:p14="http://schemas.microsoft.com/office/powerpoint/2010/main" val="4223829669"/>
+        <p14:creationId xmlns:p14="http://schemas.microsoft.com/office/powerpoint/2010/main" val="1571154289"/>
       </p:ext>
     </p:extLst>
   </p:cSld>
@@ -4244,10 +4306,10 @@
       </p:grpSpPr>
       <p:pic>
         <p:nvPicPr>
-          <p:cNvPr id="5" name="Picture 4">
-            <a:extLst>
-              <a:ext uri="{FF2B5EF4-FFF2-40B4-BE49-F238E27FC236}">
-                <a16:creationId xmlns:a16="http://schemas.microsoft.com/office/drawing/2014/main" id="{F070C5F3-DB1D-46E1-ABE8-BF60B71C82C1}"/>
+          <p:cNvPr id="4" name="Picture 3">
+            <a:extLst>
+              <a:ext uri="{FF2B5EF4-FFF2-40B4-BE49-F238E27FC236}">
+                <a16:creationId xmlns:a16="http://schemas.microsoft.com/office/drawing/2014/main" id="{90153D77-D444-43D7-B16C-F5D3D4F4A7E2}"/>
               </a:ext>
             </a:extLst>
           </p:cNvPr>
@@ -4264,185 +4326,18 @@
         </p:blipFill>
         <p:spPr>
           <a:xfrm>
-            <a:off x="508051" y="218950"/>
-            <a:ext cx="7033179" cy="6654770"/>
+            <a:off x="1664413" y="156444"/>
+            <a:ext cx="9075024" cy="6701556"/>
           </a:xfrm>
           <a:prstGeom prst="rect">
             <a:avLst/>
           </a:prstGeom>
         </p:spPr>
       </p:pic>
-      <p:pic>
-        <p:nvPicPr>
-          <p:cNvPr id="3" name="Picture 2">
-            <a:extLst>
-              <a:ext uri="{FF2B5EF4-FFF2-40B4-BE49-F238E27FC236}">
-                <a16:creationId xmlns:a16="http://schemas.microsoft.com/office/drawing/2014/main" id="{2B6AA7DE-1552-412B-85E3-79A48469EC19}"/>
-              </a:ext>
-            </a:extLst>
-          </p:cNvPr>
-          <p:cNvPicPr>
-            <a:picLocks noChangeAspect="1"/>
-          </p:cNvPicPr>
-          <p:nvPr/>
-        </p:nvPicPr>
-        <p:blipFill>
-          <a:blip r:embed="rId3"/>
-          <a:stretch>
-            <a:fillRect/>
-          </a:stretch>
-        </p:blipFill>
-        <p:spPr>
-          <a:xfrm>
-            <a:off x="781049" y="3559541"/>
-            <a:ext cx="9497115" cy="2012876"/>
-          </a:xfrm>
-          <a:prstGeom prst="rect">
-            <a:avLst/>
-          </a:prstGeom>
-        </p:spPr>
-      </p:pic>
-      <p:sp>
-        <p:nvSpPr>
-          <p:cNvPr id="8" name="Rectangle 7">
-            <a:extLst>
-              <a:ext uri="{FF2B5EF4-FFF2-40B4-BE49-F238E27FC236}">
-                <a16:creationId xmlns:a16="http://schemas.microsoft.com/office/drawing/2014/main" id="{3C310F07-1479-46C6-AD02-F50B46ADD06E}"/>
-              </a:ext>
-            </a:extLst>
-          </p:cNvPr>
-          <p:cNvSpPr/>
-          <p:nvPr/>
-        </p:nvSpPr>
-        <p:spPr>
-          <a:xfrm>
-            <a:off x="7278881" y="1772869"/>
-            <a:ext cx="4598793" cy="970737"/>
-          </a:xfrm>
-          <a:prstGeom prst="rect">
-            <a:avLst/>
-          </a:prstGeom>
-          <a:solidFill>
-            <a:schemeClr val="accent4">
-              <a:lumMod val="40000"/>
-              <a:lumOff val="60000"/>
-            </a:schemeClr>
-          </a:solidFill>
-        </p:spPr>
-        <p:style>
-          <a:lnRef idx="2">
-            <a:schemeClr val="accent1">
-              <a:shade val="50000"/>
-            </a:schemeClr>
-          </a:lnRef>
-          <a:fillRef idx="1">
-            <a:schemeClr val="accent1"/>
-          </a:fillRef>
-          <a:effectRef idx="0">
-            <a:schemeClr val="accent1"/>
-          </a:effectRef>
-          <a:fontRef idx="minor">
-            <a:schemeClr val="lt1"/>
-          </a:fontRef>
-        </p:style>
-        <p:txBody>
-          <a:bodyPr rtlCol="0" anchor="ctr"/>
-          <a:lstStyle/>
-          <a:p>
-            <a:pPr algn="ctr"/>
-            <a:r>
-              <a:rPr lang="en-IE" dirty="0">
-                <a:solidFill>
-                  <a:schemeClr val="tx1"/>
-                </a:solidFill>
-              </a:rPr>
-              <a:t>Constructors have different ‘signatures’ depending on number and type of parameters</a:t>
-            </a:r>
-          </a:p>
-        </p:txBody>
-      </p:sp>
-      <p:cxnSp>
-        <p:nvCxnSpPr>
-          <p:cNvPr id="10" name="Straight Arrow Connector 9">
-            <a:extLst>
-              <a:ext uri="{FF2B5EF4-FFF2-40B4-BE49-F238E27FC236}">
-                <a16:creationId xmlns:a16="http://schemas.microsoft.com/office/drawing/2014/main" id="{C7241290-C325-4ADE-99B6-374F6823D806}"/>
-              </a:ext>
-            </a:extLst>
-          </p:cNvPr>
-          <p:cNvCxnSpPr/>
-          <p:nvPr/>
-        </p:nvCxnSpPr>
-        <p:spPr>
-          <a:xfrm flipH="1">
-            <a:off x="7724775" y="2809875"/>
-            <a:ext cx="657225" cy="619125"/>
-          </a:xfrm>
-          <a:prstGeom prst="straightConnector1">
-            <a:avLst/>
-          </a:prstGeom>
-          <a:ln>
-            <a:tailEnd type="triangle"/>
-          </a:ln>
-        </p:spPr>
-        <p:style>
-          <a:lnRef idx="1">
-            <a:schemeClr val="accent1"/>
-          </a:lnRef>
-          <a:fillRef idx="0">
-            <a:schemeClr val="accent1"/>
-          </a:fillRef>
-          <a:effectRef idx="0">
-            <a:schemeClr val="accent1"/>
-          </a:effectRef>
-          <a:fontRef idx="minor">
-            <a:schemeClr val="tx1"/>
-          </a:fontRef>
-        </p:style>
-      </p:cxnSp>
-      <p:cxnSp>
-        <p:nvCxnSpPr>
-          <p:cNvPr id="12" name="Straight Arrow Connector 11">
-            <a:extLst>
-              <a:ext uri="{FF2B5EF4-FFF2-40B4-BE49-F238E27FC236}">
-                <a16:creationId xmlns:a16="http://schemas.microsoft.com/office/drawing/2014/main" id="{E0862FCF-D23B-4AE9-822F-B392D1798E2A}"/>
-              </a:ext>
-            </a:extLst>
-          </p:cNvPr>
-          <p:cNvCxnSpPr/>
-          <p:nvPr/>
-        </p:nvCxnSpPr>
-        <p:spPr>
-          <a:xfrm flipH="1">
-            <a:off x="3324225" y="2124075"/>
-            <a:ext cx="3848100" cy="457200"/>
-          </a:xfrm>
-          <a:prstGeom prst="straightConnector1">
-            <a:avLst/>
-          </a:prstGeom>
-          <a:ln>
-            <a:tailEnd type="triangle"/>
-          </a:ln>
-        </p:spPr>
-        <p:style>
-          <a:lnRef idx="1">
-            <a:schemeClr val="accent1"/>
-          </a:lnRef>
-          <a:fillRef idx="0">
-            <a:schemeClr val="accent1"/>
-          </a:fillRef>
-          <a:effectRef idx="0">
-            <a:schemeClr val="accent1"/>
-          </a:effectRef>
-          <a:fontRef idx="minor">
-            <a:schemeClr val="tx1"/>
-          </a:fontRef>
-        </p:style>
-      </p:cxnSp>
     </p:spTree>
     <p:extLst>
       <p:ext uri="{BB962C8B-B14F-4D97-AF65-F5344CB8AC3E}">
-        <p14:creationId xmlns:p14="http://schemas.microsoft.com/office/powerpoint/2010/main" val="664805428"/>
+        <p14:creationId xmlns:p14="http://schemas.microsoft.com/office/powerpoint/2010/main" val="4223829669"/>
       </p:ext>
     </p:extLst>
   </p:cSld>
@@ -4471,10 +4366,10 @@
       </p:grpSpPr>
       <p:pic>
         <p:nvPicPr>
-          <p:cNvPr id="4" name="Picture 3">
-            <a:extLst>
-              <a:ext uri="{FF2B5EF4-FFF2-40B4-BE49-F238E27FC236}">
-                <a16:creationId xmlns:a16="http://schemas.microsoft.com/office/drawing/2014/main" id="{6A2D9718-3BEE-49FD-BF6A-D948923A67F9}"/>
+          <p:cNvPr id="5" name="Picture 4">
+            <a:extLst>
+              <a:ext uri="{FF2B5EF4-FFF2-40B4-BE49-F238E27FC236}">
+                <a16:creationId xmlns:a16="http://schemas.microsoft.com/office/drawing/2014/main" id="{F070C5F3-DB1D-46E1-ABE8-BF60B71C82C1}"/>
               </a:ext>
             </a:extLst>
           </p:cNvPr>
@@ -4491,18 +4386,185 @@
         </p:blipFill>
         <p:spPr>
           <a:xfrm>
-            <a:off x="0" y="1099443"/>
-            <a:ext cx="12192000" cy="4659114"/>
+            <a:off x="508051" y="218950"/>
+            <a:ext cx="7033179" cy="6654770"/>
           </a:xfrm>
           <a:prstGeom prst="rect">
             <a:avLst/>
           </a:prstGeom>
         </p:spPr>
       </p:pic>
+      <p:pic>
+        <p:nvPicPr>
+          <p:cNvPr id="3" name="Picture 2">
+            <a:extLst>
+              <a:ext uri="{FF2B5EF4-FFF2-40B4-BE49-F238E27FC236}">
+                <a16:creationId xmlns:a16="http://schemas.microsoft.com/office/drawing/2014/main" id="{2B6AA7DE-1552-412B-85E3-79A48469EC19}"/>
+              </a:ext>
+            </a:extLst>
+          </p:cNvPr>
+          <p:cNvPicPr>
+            <a:picLocks noChangeAspect="1"/>
+          </p:cNvPicPr>
+          <p:nvPr/>
+        </p:nvPicPr>
+        <p:blipFill>
+          <a:blip r:embed="rId3"/>
+          <a:stretch>
+            <a:fillRect/>
+          </a:stretch>
+        </p:blipFill>
+        <p:spPr>
+          <a:xfrm>
+            <a:off x="781049" y="3559541"/>
+            <a:ext cx="9497115" cy="2012876"/>
+          </a:xfrm>
+          <a:prstGeom prst="rect">
+            <a:avLst/>
+          </a:prstGeom>
+        </p:spPr>
+      </p:pic>
+      <p:sp>
+        <p:nvSpPr>
+          <p:cNvPr id="8" name="Rectangle 7">
+            <a:extLst>
+              <a:ext uri="{FF2B5EF4-FFF2-40B4-BE49-F238E27FC236}">
+                <a16:creationId xmlns:a16="http://schemas.microsoft.com/office/drawing/2014/main" id="{3C310F07-1479-46C6-AD02-F50B46ADD06E}"/>
+              </a:ext>
+            </a:extLst>
+          </p:cNvPr>
+          <p:cNvSpPr/>
+          <p:nvPr/>
+        </p:nvSpPr>
+        <p:spPr>
+          <a:xfrm>
+            <a:off x="7278881" y="1772869"/>
+            <a:ext cx="4598793" cy="970737"/>
+          </a:xfrm>
+          <a:prstGeom prst="rect">
+            <a:avLst/>
+          </a:prstGeom>
+          <a:solidFill>
+            <a:schemeClr val="accent4">
+              <a:lumMod val="40000"/>
+              <a:lumOff val="60000"/>
+            </a:schemeClr>
+          </a:solidFill>
+        </p:spPr>
+        <p:style>
+          <a:lnRef idx="2">
+            <a:schemeClr val="accent1">
+              <a:shade val="50000"/>
+            </a:schemeClr>
+          </a:lnRef>
+          <a:fillRef idx="1">
+            <a:schemeClr val="accent1"/>
+          </a:fillRef>
+          <a:effectRef idx="0">
+            <a:schemeClr val="accent1"/>
+          </a:effectRef>
+          <a:fontRef idx="minor">
+            <a:schemeClr val="lt1"/>
+          </a:fontRef>
+        </p:style>
+        <p:txBody>
+          <a:bodyPr rtlCol="0" anchor="ctr"/>
+          <a:lstStyle/>
+          <a:p>
+            <a:pPr algn="ctr"/>
+            <a:r>
+              <a:rPr lang="en-IE" dirty="0">
+                <a:solidFill>
+                  <a:schemeClr val="tx1"/>
+                </a:solidFill>
+              </a:rPr>
+              <a:t>Constructors have different ‘signatures’ depending on number and type of parameters</a:t>
+            </a:r>
+          </a:p>
+        </p:txBody>
+      </p:sp>
+      <p:cxnSp>
+        <p:nvCxnSpPr>
+          <p:cNvPr id="10" name="Straight Arrow Connector 9">
+            <a:extLst>
+              <a:ext uri="{FF2B5EF4-FFF2-40B4-BE49-F238E27FC236}">
+                <a16:creationId xmlns:a16="http://schemas.microsoft.com/office/drawing/2014/main" id="{C7241290-C325-4ADE-99B6-374F6823D806}"/>
+              </a:ext>
+            </a:extLst>
+          </p:cNvPr>
+          <p:cNvCxnSpPr/>
+          <p:nvPr/>
+        </p:nvCxnSpPr>
+        <p:spPr>
+          <a:xfrm flipH="1">
+            <a:off x="7724775" y="2809875"/>
+            <a:ext cx="657225" cy="619125"/>
+          </a:xfrm>
+          <a:prstGeom prst="straightConnector1">
+            <a:avLst/>
+          </a:prstGeom>
+          <a:ln>
+            <a:tailEnd type="triangle"/>
+          </a:ln>
+        </p:spPr>
+        <p:style>
+          <a:lnRef idx="1">
+            <a:schemeClr val="accent1"/>
+          </a:lnRef>
+          <a:fillRef idx="0">
+            <a:schemeClr val="accent1"/>
+          </a:fillRef>
+          <a:effectRef idx="0">
+            <a:schemeClr val="accent1"/>
+          </a:effectRef>
+          <a:fontRef idx="minor">
+            <a:schemeClr val="tx1"/>
+          </a:fontRef>
+        </p:style>
+      </p:cxnSp>
+      <p:cxnSp>
+        <p:nvCxnSpPr>
+          <p:cNvPr id="12" name="Straight Arrow Connector 11">
+            <a:extLst>
+              <a:ext uri="{FF2B5EF4-FFF2-40B4-BE49-F238E27FC236}">
+                <a16:creationId xmlns:a16="http://schemas.microsoft.com/office/drawing/2014/main" id="{E0862FCF-D23B-4AE9-822F-B392D1798E2A}"/>
+              </a:ext>
+            </a:extLst>
+          </p:cNvPr>
+          <p:cNvCxnSpPr/>
+          <p:nvPr/>
+        </p:nvCxnSpPr>
+        <p:spPr>
+          <a:xfrm flipH="1">
+            <a:off x="3324225" y="2124075"/>
+            <a:ext cx="3848100" cy="457200"/>
+          </a:xfrm>
+          <a:prstGeom prst="straightConnector1">
+            <a:avLst/>
+          </a:prstGeom>
+          <a:ln>
+            <a:tailEnd type="triangle"/>
+          </a:ln>
+        </p:spPr>
+        <p:style>
+          <a:lnRef idx="1">
+            <a:schemeClr val="accent1"/>
+          </a:lnRef>
+          <a:fillRef idx="0">
+            <a:schemeClr val="accent1"/>
+          </a:fillRef>
+          <a:effectRef idx="0">
+            <a:schemeClr val="accent1"/>
+          </a:effectRef>
+          <a:fontRef idx="minor">
+            <a:schemeClr val="tx1"/>
+          </a:fontRef>
+        </p:style>
+      </p:cxnSp>
     </p:spTree>
     <p:extLst>
       <p:ext uri="{BB962C8B-B14F-4D97-AF65-F5344CB8AC3E}">
-        <p14:creationId xmlns:p14="http://schemas.microsoft.com/office/powerpoint/2010/main" val="902120908"/>
+        <p14:creationId xmlns:p14="http://schemas.microsoft.com/office/powerpoint/2010/main" val="664805428"/>
       </p:ext>
     </p:extLst>
   </p:cSld>
@@ -4534,7 +4596,7 @@
           <p:cNvPr id="4" name="Picture 3">
             <a:extLst>
               <a:ext uri="{FF2B5EF4-FFF2-40B4-BE49-F238E27FC236}">
-                <a16:creationId xmlns:a16="http://schemas.microsoft.com/office/drawing/2014/main" id="{41414A14-9E25-4E41-9B20-D7BBC995D53D}"/>
+                <a16:creationId xmlns:a16="http://schemas.microsoft.com/office/drawing/2014/main" id="{6A2D9718-3BEE-49FD-BF6A-D948923A67F9}"/>
               </a:ext>
             </a:extLst>
           </p:cNvPr>
@@ -4551,8 +4613,8 @@
         </p:blipFill>
         <p:spPr>
           <a:xfrm>
-            <a:off x="184934" y="1871759"/>
-            <a:ext cx="12007065" cy="3163202"/>
+            <a:off x="0" y="1099443"/>
+            <a:ext cx="12192000" cy="4659114"/>
           </a:xfrm>
           <a:prstGeom prst="rect">
             <a:avLst/>
@@ -4562,7 +4624,7 @@
     </p:spTree>
     <p:extLst>
       <p:ext uri="{BB962C8B-B14F-4D97-AF65-F5344CB8AC3E}">
-        <p14:creationId xmlns:p14="http://schemas.microsoft.com/office/powerpoint/2010/main" val="2231545889"/>
+        <p14:creationId xmlns:p14="http://schemas.microsoft.com/office/powerpoint/2010/main" val="902120908"/>
       </p:ext>
     </p:extLst>
   </p:cSld>
@@ -4594,7 +4656,7 @@
           <p:cNvPr id="4" name="Picture 3">
             <a:extLst>
               <a:ext uri="{FF2B5EF4-FFF2-40B4-BE49-F238E27FC236}">
-                <a16:creationId xmlns:a16="http://schemas.microsoft.com/office/drawing/2014/main" id="{74293B36-558A-4469-88AB-21883A1A3587}"/>
+                <a16:creationId xmlns:a16="http://schemas.microsoft.com/office/drawing/2014/main" id="{41414A14-9E25-4E41-9B20-D7BBC995D53D}"/>
               </a:ext>
             </a:extLst>
           </p:cNvPr>
@@ -4611,8 +4673,8 @@
         </p:blipFill>
         <p:spPr>
           <a:xfrm>
-            <a:off x="0" y="878833"/>
-            <a:ext cx="12192000" cy="5100333"/>
+            <a:off x="184934" y="1871759"/>
+            <a:ext cx="12007065" cy="3163202"/>
           </a:xfrm>
           <a:prstGeom prst="rect">
             <a:avLst/>
@@ -4622,7 +4684,7 @@
     </p:spTree>
     <p:extLst>
       <p:ext uri="{BB962C8B-B14F-4D97-AF65-F5344CB8AC3E}">
-        <p14:creationId xmlns:p14="http://schemas.microsoft.com/office/powerpoint/2010/main" val="3726329990"/>
+        <p14:creationId xmlns:p14="http://schemas.microsoft.com/office/powerpoint/2010/main" val="2231545889"/>
       </p:ext>
     </p:extLst>
   </p:cSld>
@@ -4651,10 +4713,10 @@
       </p:grpSpPr>
       <p:pic>
         <p:nvPicPr>
-          <p:cNvPr id="2" name="Picture 1">
-            <a:extLst>
-              <a:ext uri="{FF2B5EF4-FFF2-40B4-BE49-F238E27FC236}">
-                <a16:creationId xmlns:a16="http://schemas.microsoft.com/office/drawing/2014/main" id="{DB64DC36-1874-4752-9668-4C8A6C8A0DF9}"/>
+          <p:cNvPr id="4" name="Picture 3">
+            <a:extLst>
+              <a:ext uri="{FF2B5EF4-FFF2-40B4-BE49-F238E27FC236}">
+                <a16:creationId xmlns:a16="http://schemas.microsoft.com/office/drawing/2014/main" id="{74293B36-558A-4469-88AB-21883A1A3587}"/>
               </a:ext>
             </a:extLst>
           </p:cNvPr>
@@ -4671,8 +4733,8 @@
         </p:blipFill>
         <p:spPr>
           <a:xfrm>
-            <a:off x="0" y="2208306"/>
-            <a:ext cx="12192000" cy="2441387"/>
+            <a:off x="0" y="878833"/>
+            <a:ext cx="12192000" cy="5100333"/>
           </a:xfrm>
           <a:prstGeom prst="rect">
             <a:avLst/>
@@ -4682,7 +4744,7 @@
     </p:spTree>
     <p:extLst>
       <p:ext uri="{BB962C8B-B14F-4D97-AF65-F5344CB8AC3E}">
-        <p14:creationId xmlns:p14="http://schemas.microsoft.com/office/powerpoint/2010/main" val="547217525"/>
+        <p14:creationId xmlns:p14="http://schemas.microsoft.com/office/powerpoint/2010/main" val="3726329990"/>
       </p:ext>
     </p:extLst>
   </p:cSld>
@@ -4709,118 +4771,75 @@
           <a:chExt cx="0" cy="0"/>
         </a:xfrm>
       </p:grpSpPr>
-      <p:pic>
-        <p:nvPicPr>
-          <p:cNvPr id="2" name="Picture 1">
-            <a:extLst>
-              <a:ext uri="{FF2B5EF4-FFF2-40B4-BE49-F238E27FC236}">
-                <a16:creationId xmlns:a16="http://schemas.microsoft.com/office/drawing/2014/main" id="{6E7DCFB6-2ACA-413A-8B09-181A17AD96E7}"/>
-              </a:ext>
-            </a:extLst>
-          </p:cNvPr>
-          <p:cNvPicPr>
-            <a:picLocks noChangeAspect="1"/>
-          </p:cNvPicPr>
-          <p:nvPr/>
-        </p:nvPicPr>
-        <p:blipFill>
-          <a:blip r:embed="rId2"/>
-          <a:stretch>
-            <a:fillRect/>
-          </a:stretch>
-        </p:blipFill>
-        <p:spPr>
-          <a:xfrm>
-            <a:off x="708619" y="0"/>
-            <a:ext cx="10774762" cy="6858000"/>
-          </a:xfrm>
-          <a:prstGeom prst="rect">
-            <a:avLst/>
-          </a:prstGeom>
-        </p:spPr>
-      </p:pic>
-      <p:cxnSp>
-        <p:nvCxnSpPr>
-          <p:cNvPr id="4" name="Straight Arrow Connector 3">
-            <a:extLst>
-              <a:ext uri="{FF2B5EF4-FFF2-40B4-BE49-F238E27FC236}">
-                <a16:creationId xmlns:a16="http://schemas.microsoft.com/office/drawing/2014/main" id="{D8AB72E8-9DF1-4B2F-B53D-3270B5FB3F01}"/>
-              </a:ext>
-            </a:extLst>
-          </p:cNvPr>
-          <p:cNvCxnSpPr/>
-          <p:nvPr/>
-        </p:nvCxnSpPr>
-        <p:spPr>
-          <a:xfrm flipH="1">
-            <a:off x="2962275" y="514350"/>
-            <a:ext cx="1314450" cy="885825"/>
-          </a:xfrm>
-          <a:prstGeom prst="straightConnector1">
-            <a:avLst/>
-          </a:prstGeom>
-          <a:ln>
-            <a:tailEnd type="triangle"/>
-          </a:ln>
-        </p:spPr>
-        <p:style>
-          <a:lnRef idx="1">
-            <a:schemeClr val="accent1"/>
-          </a:lnRef>
-          <a:fillRef idx="0">
-            <a:schemeClr val="accent1"/>
-          </a:fillRef>
-          <a:effectRef idx="0">
-            <a:schemeClr val="accent1"/>
-          </a:effectRef>
-          <a:fontRef idx="minor">
-            <a:schemeClr val="tx1"/>
-          </a:fontRef>
-        </p:style>
-      </p:cxnSp>
-      <p:cxnSp>
-        <p:nvCxnSpPr>
-          <p:cNvPr id="6" name="Straight Arrow Connector 5">
-            <a:extLst>
-              <a:ext uri="{FF2B5EF4-FFF2-40B4-BE49-F238E27FC236}">
-                <a16:creationId xmlns:a16="http://schemas.microsoft.com/office/drawing/2014/main" id="{F10E5806-5DB6-45A1-AC20-D464967D7EA4}"/>
-              </a:ext>
-            </a:extLst>
-          </p:cNvPr>
-          <p:cNvCxnSpPr/>
-          <p:nvPr/>
-        </p:nvCxnSpPr>
-        <p:spPr>
-          <a:xfrm flipH="1">
-            <a:off x="7991475" y="981075"/>
-            <a:ext cx="1000125" cy="666750"/>
-          </a:xfrm>
-          <a:prstGeom prst="straightConnector1">
-            <a:avLst/>
-          </a:prstGeom>
-          <a:ln>
-            <a:tailEnd type="triangle"/>
-          </a:ln>
-        </p:spPr>
-        <p:style>
-          <a:lnRef idx="1">
-            <a:schemeClr val="accent1"/>
-          </a:lnRef>
-          <a:fillRef idx="0">
-            <a:schemeClr val="accent1"/>
-          </a:fillRef>
-          <a:effectRef idx="0">
-            <a:schemeClr val="accent1"/>
-          </a:effectRef>
-          <a:fontRef idx="minor">
-            <a:schemeClr val="tx1"/>
-          </a:fontRef>
-        </p:style>
-      </p:cxnSp>
+      <p:sp>
+        <p:nvSpPr>
+          <p:cNvPr id="2" name="Title 1">
+            <a:extLst>
+              <a:ext uri="{FF2B5EF4-FFF2-40B4-BE49-F238E27FC236}">
+                <a16:creationId xmlns:a16="http://schemas.microsoft.com/office/drawing/2014/main" id="{431C61E0-FA94-43A1-A514-ED8BD9FC33E0}"/>
+              </a:ext>
+            </a:extLst>
+          </p:cNvPr>
+          <p:cNvSpPr>
+            <a:spLocks noGrp="1"/>
+          </p:cNvSpPr>
+          <p:nvPr>
+            <p:ph type="ctrTitle"/>
+          </p:nvPr>
+        </p:nvSpPr>
+        <p:spPr/>
+        <p:txBody>
+          <a:bodyPr/>
+          <a:lstStyle/>
+          <a:p>
+            <a:r>
+              <a:rPr lang="en-IE" dirty="0" err="1"/>
+              <a:t>CameraKit</a:t>
+            </a:r>
+            <a:r>
+              <a:rPr lang="en-IE" dirty="0"/>
+              <a:t> Walkthrough</a:t>
+            </a:r>
+          </a:p>
+        </p:txBody>
+      </p:sp>
+      <p:sp>
+        <p:nvSpPr>
+          <p:cNvPr id="3" name="Subtitle 2">
+            <a:extLst>
+              <a:ext uri="{FF2B5EF4-FFF2-40B4-BE49-F238E27FC236}">
+                <a16:creationId xmlns:a16="http://schemas.microsoft.com/office/drawing/2014/main" id="{C6E1029C-7098-41E2-91CC-A17A69D89878}"/>
+              </a:ext>
+            </a:extLst>
+          </p:cNvPr>
+          <p:cNvSpPr>
+            <a:spLocks noGrp="1"/>
+          </p:cNvSpPr>
+          <p:nvPr>
+            <p:ph type="subTitle" idx="1"/>
+          </p:nvPr>
+        </p:nvSpPr>
+        <p:spPr>
+          <a:xfrm>
+            <a:off x="0" y="3602038"/>
+            <a:ext cx="12192000" cy="1655762"/>
+          </a:xfrm>
+        </p:spPr>
+        <p:txBody>
+          <a:bodyPr/>
+          <a:lstStyle/>
+          <a:p>
+            <a:r>
+              <a:rPr lang="en-IE" dirty="0"/>
+              <a:t>https://github.com/JohnRowleyDorsetCollege2025/oop-2025-a-camera-rental-20251111.git</a:t>
+            </a:r>
+          </a:p>
+        </p:txBody>
+      </p:sp>
     </p:spTree>
     <p:extLst>
       <p:ext uri="{BB962C8B-B14F-4D97-AF65-F5344CB8AC3E}">
-        <p14:creationId xmlns:p14="http://schemas.microsoft.com/office/powerpoint/2010/main" val="3235060740"/>
+        <p14:creationId xmlns:p14="http://schemas.microsoft.com/office/powerpoint/2010/main" val="3068780484"/>
       </p:ext>
     </p:extLst>
   </p:cSld>
@@ -4852,7 +4871,7 @@
           <p:cNvPr id="2" name="Picture 1">
             <a:extLst>
               <a:ext uri="{FF2B5EF4-FFF2-40B4-BE49-F238E27FC236}">
-                <a16:creationId xmlns:a16="http://schemas.microsoft.com/office/drawing/2014/main" id="{A541E6A9-D8A4-4C66-BF27-6133815E0B8D}"/>
+                <a16:creationId xmlns:a16="http://schemas.microsoft.com/office/drawing/2014/main" id="{DB64DC36-1874-4752-9668-4C8A6C8A0DF9}"/>
               </a:ext>
             </a:extLst>
           </p:cNvPr>
@@ -4869,38 +4888,8 @@
         </p:blipFill>
         <p:spPr>
           <a:xfrm>
-            <a:off x="1057275" y="104775"/>
-            <a:ext cx="9569526" cy="2677686"/>
-          </a:xfrm>
-          <a:prstGeom prst="rect">
-            <a:avLst/>
-          </a:prstGeom>
-        </p:spPr>
-      </p:pic>
-      <p:pic>
-        <p:nvPicPr>
-          <p:cNvPr id="3" name="Picture 2">
-            <a:extLst>
-              <a:ext uri="{FF2B5EF4-FFF2-40B4-BE49-F238E27FC236}">
-                <a16:creationId xmlns:a16="http://schemas.microsoft.com/office/drawing/2014/main" id="{7876D2FD-9861-48B8-B4DD-7C5528B508DF}"/>
-              </a:ext>
-            </a:extLst>
-          </p:cNvPr>
-          <p:cNvPicPr>
-            <a:picLocks noChangeAspect="1"/>
-          </p:cNvPicPr>
-          <p:nvPr/>
-        </p:nvPicPr>
-        <p:blipFill>
-          <a:blip r:embed="rId3"/>
-          <a:stretch>
-            <a:fillRect/>
-          </a:stretch>
-        </p:blipFill>
-        <p:spPr>
-          <a:xfrm>
-            <a:off x="789786" y="2596994"/>
-            <a:ext cx="9935364" cy="4089556"/>
+            <a:off x="0" y="2208306"/>
+            <a:ext cx="12192000" cy="2441387"/>
           </a:xfrm>
           <a:prstGeom prst="rect">
             <a:avLst/>
@@ -4910,7 +4899,7 @@
     </p:spTree>
     <p:extLst>
       <p:ext uri="{BB962C8B-B14F-4D97-AF65-F5344CB8AC3E}">
-        <p14:creationId xmlns:p14="http://schemas.microsoft.com/office/powerpoint/2010/main" val="4097050225"/>
+        <p14:creationId xmlns:p14="http://schemas.microsoft.com/office/powerpoint/2010/main" val="547217525"/>
       </p:ext>
     </p:extLst>
   </p:cSld>
@@ -4942,7 +4931,7 @@
           <p:cNvPr id="2" name="Picture 1">
             <a:extLst>
               <a:ext uri="{FF2B5EF4-FFF2-40B4-BE49-F238E27FC236}">
-                <a16:creationId xmlns:a16="http://schemas.microsoft.com/office/drawing/2014/main" id="{4B6D0AD9-1102-4246-8AD0-0C0A0EF6A448}"/>
+                <a16:creationId xmlns:a16="http://schemas.microsoft.com/office/drawing/2014/main" id="{A541E6A9-D8A4-4C66-BF27-6133815E0B8D}"/>
               </a:ext>
             </a:extLst>
           </p:cNvPr>
@@ -4959,57 +4948,48 @@
         </p:blipFill>
         <p:spPr>
           <a:xfrm>
-            <a:off x="145552" y="724185"/>
-            <a:ext cx="11840217" cy="5317020"/>
+            <a:off x="1057275" y="104775"/>
+            <a:ext cx="9569526" cy="2677686"/>
           </a:xfrm>
           <a:prstGeom prst="rect">
             <a:avLst/>
           </a:prstGeom>
         </p:spPr>
       </p:pic>
-      <p:cxnSp>
-        <p:nvCxnSpPr>
-          <p:cNvPr id="4" name="Straight Arrow Connector 3">
-            <a:extLst>
-              <a:ext uri="{FF2B5EF4-FFF2-40B4-BE49-F238E27FC236}">
-                <a16:creationId xmlns:a16="http://schemas.microsoft.com/office/drawing/2014/main" id="{27249275-1D75-46B5-B3A8-37A4DEA2AA89}"/>
-              </a:ext>
-            </a:extLst>
-          </p:cNvPr>
-          <p:cNvCxnSpPr/>
-          <p:nvPr/>
-        </p:nvCxnSpPr>
-        <p:spPr>
-          <a:xfrm flipH="1">
-            <a:off x="6893959" y="2992348"/>
-            <a:ext cx="2044557" cy="873303"/>
-          </a:xfrm>
-          <a:prstGeom prst="straightConnector1">
-            <a:avLst/>
-          </a:prstGeom>
-          <a:ln w="28575">
-            <a:tailEnd type="triangle"/>
-          </a:ln>
-        </p:spPr>
-        <p:style>
-          <a:lnRef idx="1">
-            <a:schemeClr val="accent1"/>
-          </a:lnRef>
-          <a:fillRef idx="0">
-            <a:schemeClr val="accent1"/>
-          </a:fillRef>
-          <a:effectRef idx="0">
-            <a:schemeClr val="accent1"/>
-          </a:effectRef>
-          <a:fontRef idx="minor">
-            <a:schemeClr val="tx1"/>
-          </a:fontRef>
-        </p:style>
-      </p:cxnSp>
+      <p:pic>
+        <p:nvPicPr>
+          <p:cNvPr id="3" name="Picture 2">
+            <a:extLst>
+              <a:ext uri="{FF2B5EF4-FFF2-40B4-BE49-F238E27FC236}">
+                <a16:creationId xmlns:a16="http://schemas.microsoft.com/office/drawing/2014/main" id="{7876D2FD-9861-48B8-B4DD-7C5528B508DF}"/>
+              </a:ext>
+            </a:extLst>
+          </p:cNvPr>
+          <p:cNvPicPr>
+            <a:picLocks noChangeAspect="1"/>
+          </p:cNvPicPr>
+          <p:nvPr/>
+        </p:nvPicPr>
+        <p:blipFill>
+          <a:blip r:embed="rId3"/>
+          <a:stretch>
+            <a:fillRect/>
+          </a:stretch>
+        </p:blipFill>
+        <p:spPr>
+          <a:xfrm>
+            <a:off x="789786" y="2596994"/>
+            <a:ext cx="9935364" cy="4089556"/>
+          </a:xfrm>
+          <a:prstGeom prst="rect">
+            <a:avLst/>
+          </a:prstGeom>
+        </p:spPr>
+      </p:pic>
     </p:spTree>
     <p:extLst>
       <p:ext uri="{BB962C8B-B14F-4D97-AF65-F5344CB8AC3E}">
-        <p14:creationId xmlns:p14="http://schemas.microsoft.com/office/powerpoint/2010/main" val="160332528"/>
+        <p14:creationId xmlns:p14="http://schemas.microsoft.com/office/powerpoint/2010/main" val="4097050225"/>
       </p:ext>
     </p:extLst>
   </p:cSld>
@@ -5041,7 +5021,7 @@
           <p:cNvPr id="2" name="Picture 1">
             <a:extLst>
               <a:ext uri="{FF2B5EF4-FFF2-40B4-BE49-F238E27FC236}">
-                <a16:creationId xmlns:a16="http://schemas.microsoft.com/office/drawing/2014/main" id="{6449D424-98B0-4AB5-BF6A-869B47A31544}"/>
+                <a16:creationId xmlns:a16="http://schemas.microsoft.com/office/drawing/2014/main" id="{4B6D0AD9-1102-4246-8AD0-0C0A0EF6A448}"/>
               </a:ext>
             </a:extLst>
           </p:cNvPr>
@@ -5058,8 +5038,8 @@
         </p:blipFill>
         <p:spPr>
           <a:xfrm>
-            <a:off x="585626" y="2368152"/>
-            <a:ext cx="10815263" cy="1771898"/>
+            <a:off x="145552" y="724185"/>
+            <a:ext cx="11840217" cy="5317020"/>
           </a:xfrm>
           <a:prstGeom prst="rect">
             <a:avLst/>
@@ -5071,7 +5051,7 @@
           <p:cNvPr id="4" name="Straight Arrow Connector 3">
             <a:extLst>
               <a:ext uri="{FF2B5EF4-FFF2-40B4-BE49-F238E27FC236}">
-                <a16:creationId xmlns:a16="http://schemas.microsoft.com/office/drawing/2014/main" id="{71A1CBE5-9B6F-421A-B2EA-1D184ED1DFE0}"/>
+                <a16:creationId xmlns:a16="http://schemas.microsoft.com/office/drawing/2014/main" id="{27249275-1D75-46B5-B3A8-37A4DEA2AA89}"/>
               </a:ext>
             </a:extLst>
           </p:cNvPr>
@@ -5080,8 +5060,8 @@
         </p:nvCxnSpPr>
         <p:spPr>
           <a:xfrm flipH="1">
-            <a:off x="8979614" y="1921029"/>
-            <a:ext cx="1140431" cy="1333072"/>
+            <a:off x="6893959" y="2992348"/>
+            <a:ext cx="2044557" cy="873303"/>
           </a:xfrm>
           <a:prstGeom prst="straightConnector1">
             <a:avLst/>
@@ -5108,7 +5088,7 @@
     </p:spTree>
     <p:extLst>
       <p:ext uri="{BB962C8B-B14F-4D97-AF65-F5344CB8AC3E}">
-        <p14:creationId xmlns:p14="http://schemas.microsoft.com/office/powerpoint/2010/main" val="4242256871"/>
+        <p14:creationId xmlns:p14="http://schemas.microsoft.com/office/powerpoint/2010/main" val="160332528"/>
       </p:ext>
     </p:extLst>
   </p:cSld>
@@ -5137,10 +5117,10 @@
       </p:grpSpPr>
       <p:pic>
         <p:nvPicPr>
-          <p:cNvPr id="3" name="Picture 2">
-            <a:extLst>
-              <a:ext uri="{FF2B5EF4-FFF2-40B4-BE49-F238E27FC236}">
-                <a16:creationId xmlns:a16="http://schemas.microsoft.com/office/drawing/2014/main" id="{418E2C8B-FA03-4BDB-9732-40C6BE6AA115}"/>
+          <p:cNvPr id="2" name="Picture 1">
+            <a:extLst>
+              <a:ext uri="{FF2B5EF4-FFF2-40B4-BE49-F238E27FC236}">
+                <a16:creationId xmlns:a16="http://schemas.microsoft.com/office/drawing/2014/main" id="{6449D424-98B0-4AB5-BF6A-869B47A31544}"/>
               </a:ext>
             </a:extLst>
           </p:cNvPr>
@@ -5157,48 +5137,57 @@
         </p:blipFill>
         <p:spPr>
           <a:xfrm>
-            <a:off x="0" y="150162"/>
-            <a:ext cx="5875204" cy="1021091"/>
+            <a:off x="585626" y="2368152"/>
+            <a:ext cx="10815263" cy="1771898"/>
           </a:xfrm>
           <a:prstGeom prst="rect">
             <a:avLst/>
           </a:prstGeom>
         </p:spPr>
       </p:pic>
-      <p:pic>
-        <p:nvPicPr>
-          <p:cNvPr id="4" name="Picture 3">
-            <a:extLst>
-              <a:ext uri="{FF2B5EF4-FFF2-40B4-BE49-F238E27FC236}">
-                <a16:creationId xmlns:a16="http://schemas.microsoft.com/office/drawing/2014/main" id="{913188CC-830D-46C3-A4EB-8299B4CB812A}"/>
-              </a:ext>
-            </a:extLst>
-          </p:cNvPr>
-          <p:cNvPicPr>
-            <a:picLocks noChangeAspect="1"/>
-          </p:cNvPicPr>
-          <p:nvPr/>
-        </p:nvPicPr>
-        <p:blipFill>
-          <a:blip r:embed="rId3"/>
-          <a:stretch>
-            <a:fillRect/>
-          </a:stretch>
-        </p:blipFill>
-        <p:spPr>
-          <a:xfrm>
-            <a:off x="942974" y="1894413"/>
-            <a:ext cx="10135435" cy="3768510"/>
-          </a:xfrm>
-          <a:prstGeom prst="rect">
-            <a:avLst/>
-          </a:prstGeom>
-        </p:spPr>
-      </p:pic>
+      <p:cxnSp>
+        <p:nvCxnSpPr>
+          <p:cNvPr id="4" name="Straight Arrow Connector 3">
+            <a:extLst>
+              <a:ext uri="{FF2B5EF4-FFF2-40B4-BE49-F238E27FC236}">
+                <a16:creationId xmlns:a16="http://schemas.microsoft.com/office/drawing/2014/main" id="{71A1CBE5-9B6F-421A-B2EA-1D184ED1DFE0}"/>
+              </a:ext>
+            </a:extLst>
+          </p:cNvPr>
+          <p:cNvCxnSpPr/>
+          <p:nvPr/>
+        </p:nvCxnSpPr>
+        <p:spPr>
+          <a:xfrm flipH="1">
+            <a:off x="8979614" y="1921029"/>
+            <a:ext cx="1140431" cy="1333072"/>
+          </a:xfrm>
+          <a:prstGeom prst="straightConnector1">
+            <a:avLst/>
+          </a:prstGeom>
+          <a:ln w="28575">
+            <a:tailEnd type="triangle"/>
+          </a:ln>
+        </p:spPr>
+        <p:style>
+          <a:lnRef idx="1">
+            <a:schemeClr val="accent1"/>
+          </a:lnRef>
+          <a:fillRef idx="0">
+            <a:schemeClr val="accent1"/>
+          </a:fillRef>
+          <a:effectRef idx="0">
+            <a:schemeClr val="accent1"/>
+          </a:effectRef>
+          <a:fontRef idx="minor">
+            <a:schemeClr val="tx1"/>
+          </a:fontRef>
+        </p:style>
+      </p:cxnSp>
     </p:spTree>
     <p:extLst>
       <p:ext uri="{BB962C8B-B14F-4D97-AF65-F5344CB8AC3E}">
-        <p14:creationId xmlns:p14="http://schemas.microsoft.com/office/powerpoint/2010/main" val="2349278776"/>
+        <p14:creationId xmlns:p14="http://schemas.microsoft.com/office/powerpoint/2010/main" val="4242256871"/>
       </p:ext>
     </p:extLst>
   </p:cSld>
@@ -5227,10 +5216,10 @@
       </p:grpSpPr>
       <p:pic>
         <p:nvPicPr>
-          <p:cNvPr id="2" name="Picture 1">
-            <a:extLst>
-              <a:ext uri="{FF2B5EF4-FFF2-40B4-BE49-F238E27FC236}">
-                <a16:creationId xmlns:a16="http://schemas.microsoft.com/office/drawing/2014/main" id="{EBB5D80D-B59C-442E-B2FF-9F30072360A5}"/>
+          <p:cNvPr id="3" name="Picture 2">
+            <a:extLst>
+              <a:ext uri="{FF2B5EF4-FFF2-40B4-BE49-F238E27FC236}">
+                <a16:creationId xmlns:a16="http://schemas.microsoft.com/office/drawing/2014/main" id="{418E2C8B-FA03-4BDB-9732-40C6BE6AA115}"/>
               </a:ext>
             </a:extLst>
           </p:cNvPr>
@@ -5247,8 +5236,8 @@
         </p:blipFill>
         <p:spPr>
           <a:xfrm>
-            <a:off x="760588" y="4256431"/>
-            <a:ext cx="10259857" cy="2495898"/>
+            <a:off x="0" y="150162"/>
+            <a:ext cx="5875204" cy="1021091"/>
           </a:xfrm>
           <a:prstGeom prst="rect">
             <a:avLst/>
@@ -5257,10 +5246,10 @@
       </p:pic>
       <p:pic>
         <p:nvPicPr>
-          <p:cNvPr id="3" name="Picture 2">
-            <a:extLst>
-              <a:ext uri="{FF2B5EF4-FFF2-40B4-BE49-F238E27FC236}">
-                <a16:creationId xmlns:a16="http://schemas.microsoft.com/office/drawing/2014/main" id="{2668E8B7-AD95-4868-A356-C3E07B35FF01}"/>
+          <p:cNvPr id="4" name="Picture 3">
+            <a:extLst>
+              <a:ext uri="{FF2B5EF4-FFF2-40B4-BE49-F238E27FC236}">
+                <a16:creationId xmlns:a16="http://schemas.microsoft.com/office/drawing/2014/main" id="{913188CC-830D-46C3-A4EB-8299B4CB812A}"/>
               </a:ext>
             </a:extLst>
           </p:cNvPr>
@@ -5277,8 +5266,8 @@
         </p:blipFill>
         <p:spPr>
           <a:xfrm>
-            <a:off x="760588" y="105671"/>
-            <a:ext cx="9669224" cy="4029637"/>
+            <a:off x="942974" y="1894413"/>
+            <a:ext cx="10135435" cy="3768510"/>
           </a:xfrm>
           <a:prstGeom prst="rect">
             <a:avLst/>
@@ -5288,7 +5277,7 @@
     </p:spTree>
     <p:extLst>
       <p:ext uri="{BB962C8B-B14F-4D97-AF65-F5344CB8AC3E}">
-        <p14:creationId xmlns:p14="http://schemas.microsoft.com/office/powerpoint/2010/main" val="2742488538"/>
+        <p14:creationId xmlns:p14="http://schemas.microsoft.com/office/powerpoint/2010/main" val="2349278776"/>
       </p:ext>
     </p:extLst>
   </p:cSld>
@@ -5320,7 +5309,7 @@
           <p:cNvPr id="2" name="Picture 1">
             <a:extLst>
               <a:ext uri="{FF2B5EF4-FFF2-40B4-BE49-F238E27FC236}">
-                <a16:creationId xmlns:a16="http://schemas.microsoft.com/office/drawing/2014/main" id="{A189285C-CCEA-440F-9213-9D38D53C3ABD}"/>
+                <a16:creationId xmlns:a16="http://schemas.microsoft.com/office/drawing/2014/main" id="{EBB5D80D-B59C-442E-B2FF-9F30072360A5}"/>
               </a:ext>
             </a:extLst>
           </p:cNvPr>
@@ -5329,15 +5318,16 @@
           </p:cNvPicPr>
           <p:nvPr/>
         </p:nvPicPr>
-        <p:blipFill rotWithShape="1">
+        <p:blipFill>
           <a:blip r:embed="rId2"/>
-          <a:srcRect r="17932"/>
-          <a:stretch/>
+          <a:stretch>
+            <a:fillRect/>
+          </a:stretch>
         </p:blipFill>
         <p:spPr>
           <a:xfrm>
-            <a:off x="1018317" y="1438381"/>
-            <a:ext cx="9872290" cy="4746662"/>
+            <a:off x="760588" y="4256431"/>
+            <a:ext cx="10259857" cy="2495898"/>
           </a:xfrm>
           <a:prstGeom prst="rect">
             <a:avLst/>
@@ -5349,7 +5339,7 @@
           <p:cNvPr id="3" name="Picture 2">
             <a:extLst>
               <a:ext uri="{FF2B5EF4-FFF2-40B4-BE49-F238E27FC236}">
-                <a16:creationId xmlns:a16="http://schemas.microsoft.com/office/drawing/2014/main" id="{0C487A2E-5CA2-4D5A-8FA1-2D0F0D1250D2}"/>
+                <a16:creationId xmlns:a16="http://schemas.microsoft.com/office/drawing/2014/main" id="{2668E8B7-AD95-4868-A356-C3E07B35FF01}"/>
               </a:ext>
             </a:extLst>
           </p:cNvPr>
@@ -5366,8 +5356,8 @@
         </p:blipFill>
         <p:spPr>
           <a:xfrm>
-            <a:off x="220796" y="417290"/>
-            <a:ext cx="5875204" cy="1021091"/>
+            <a:off x="760588" y="105671"/>
+            <a:ext cx="9669224" cy="4029637"/>
           </a:xfrm>
           <a:prstGeom prst="rect">
             <a:avLst/>
@@ -5377,7 +5367,7 @@
     </p:spTree>
     <p:extLst>
       <p:ext uri="{BB962C8B-B14F-4D97-AF65-F5344CB8AC3E}">
-        <p14:creationId xmlns:p14="http://schemas.microsoft.com/office/powerpoint/2010/main" val="832942784"/>
+        <p14:creationId xmlns:p14="http://schemas.microsoft.com/office/powerpoint/2010/main" val="2742488538"/>
       </p:ext>
     </p:extLst>
   </p:cSld>
@@ -5409,7 +5399,7 @@
           <p:cNvPr id="2" name="Picture 1">
             <a:extLst>
               <a:ext uri="{FF2B5EF4-FFF2-40B4-BE49-F238E27FC236}">
-                <a16:creationId xmlns:a16="http://schemas.microsoft.com/office/drawing/2014/main" id="{1BEFC0DE-5338-40A5-90EB-BFAC46E85183}"/>
+                <a16:creationId xmlns:a16="http://schemas.microsoft.com/office/drawing/2014/main" id="{A189285C-CCEA-440F-9213-9D38D53C3ABD}"/>
               </a:ext>
             </a:extLst>
           </p:cNvPr>
@@ -5418,16 +5408,45 @@
           </p:cNvPicPr>
           <p:nvPr/>
         </p:nvPicPr>
+        <p:blipFill rotWithShape="1">
+          <a:blip r:embed="rId2"/>
+          <a:srcRect r="17932"/>
+          <a:stretch/>
+        </p:blipFill>
+        <p:spPr>
+          <a:xfrm>
+            <a:off x="1018317" y="1438381"/>
+            <a:ext cx="9872290" cy="4746662"/>
+          </a:xfrm>
+          <a:prstGeom prst="rect">
+            <a:avLst/>
+          </a:prstGeom>
+        </p:spPr>
+      </p:pic>
+      <p:pic>
+        <p:nvPicPr>
+          <p:cNvPr id="3" name="Picture 2">
+            <a:extLst>
+              <a:ext uri="{FF2B5EF4-FFF2-40B4-BE49-F238E27FC236}">
+                <a16:creationId xmlns:a16="http://schemas.microsoft.com/office/drawing/2014/main" id="{0C487A2E-5CA2-4D5A-8FA1-2D0F0D1250D2}"/>
+              </a:ext>
+            </a:extLst>
+          </p:cNvPr>
+          <p:cNvPicPr>
+            <a:picLocks noChangeAspect="1"/>
+          </p:cNvPicPr>
+          <p:nvPr/>
+        </p:nvPicPr>
         <p:blipFill>
-          <a:blip r:embed="rId2"/>
+          <a:blip r:embed="rId3"/>
           <a:stretch>
             <a:fillRect/>
           </a:stretch>
         </p:blipFill>
         <p:spPr>
           <a:xfrm>
-            <a:off x="441789" y="557635"/>
-            <a:ext cx="10746768" cy="5457508"/>
+            <a:off x="220796" y="417290"/>
+            <a:ext cx="5875204" cy="1021091"/>
           </a:xfrm>
           <a:prstGeom prst="rect">
             <a:avLst/>
@@ -5437,7 +5456,7 @@
     </p:spTree>
     <p:extLst>
       <p:ext uri="{BB962C8B-B14F-4D97-AF65-F5344CB8AC3E}">
-        <p14:creationId xmlns:p14="http://schemas.microsoft.com/office/powerpoint/2010/main" val="2758012131"/>
+        <p14:creationId xmlns:p14="http://schemas.microsoft.com/office/powerpoint/2010/main" val="832942784"/>
       </p:ext>
     </p:extLst>
   </p:cSld>
@@ -5469,7 +5488,7 @@
           <p:cNvPr id="2" name="Picture 1">
             <a:extLst>
               <a:ext uri="{FF2B5EF4-FFF2-40B4-BE49-F238E27FC236}">
-                <a16:creationId xmlns:a16="http://schemas.microsoft.com/office/drawing/2014/main" id="{0393AAA9-A207-4316-91EC-3AF239395A0C}"/>
+                <a16:creationId xmlns:a16="http://schemas.microsoft.com/office/drawing/2014/main" id="{1BEFC0DE-5338-40A5-90EB-BFAC46E85183}"/>
               </a:ext>
             </a:extLst>
           </p:cNvPr>
@@ -5478,66 +5497,26 @@
           </p:cNvPicPr>
           <p:nvPr/>
         </p:nvPicPr>
-        <p:blipFill rotWithShape="1">
+        <p:blipFill>
           <a:blip r:embed="rId2"/>
-          <a:srcRect r="32358"/>
-          <a:stretch/>
+          <a:stretch>
+            <a:fillRect/>
+          </a:stretch>
         </p:blipFill>
         <p:spPr>
           <a:xfrm>
-            <a:off x="915665" y="760379"/>
-            <a:ext cx="8278439" cy="5337241"/>
+            <a:off x="441789" y="557635"/>
+            <a:ext cx="10746768" cy="5457508"/>
           </a:xfrm>
           <a:prstGeom prst="rect">
             <a:avLst/>
           </a:prstGeom>
         </p:spPr>
       </p:pic>
-      <p:cxnSp>
-        <p:nvCxnSpPr>
-          <p:cNvPr id="4" name="Straight Arrow Connector 3">
-            <a:extLst>
-              <a:ext uri="{FF2B5EF4-FFF2-40B4-BE49-F238E27FC236}">
-                <a16:creationId xmlns:a16="http://schemas.microsoft.com/office/drawing/2014/main" id="{861136E4-7548-4FAD-B7B9-BE921768F77E}"/>
-              </a:ext>
-            </a:extLst>
-          </p:cNvPr>
-          <p:cNvCxnSpPr>
-            <a:cxnSpLocks/>
-          </p:cNvCxnSpPr>
-          <p:nvPr/>
-        </p:nvCxnSpPr>
-        <p:spPr>
-          <a:xfrm flipH="1">
-            <a:off x="6421348" y="2250040"/>
-            <a:ext cx="4448710" cy="1530850"/>
-          </a:xfrm>
-          <a:prstGeom prst="straightConnector1">
-            <a:avLst/>
-          </a:prstGeom>
-          <a:ln w="28575">
-            <a:tailEnd type="triangle"/>
-          </a:ln>
-        </p:spPr>
-        <p:style>
-          <a:lnRef idx="1">
-            <a:schemeClr val="accent1"/>
-          </a:lnRef>
-          <a:fillRef idx="0">
-            <a:schemeClr val="accent1"/>
-          </a:fillRef>
-          <a:effectRef idx="0">
-            <a:schemeClr val="accent1"/>
-          </a:effectRef>
-          <a:fontRef idx="minor">
-            <a:schemeClr val="tx1"/>
-          </a:fontRef>
-        </p:style>
-      </p:cxnSp>
     </p:spTree>
     <p:extLst>
       <p:ext uri="{BB962C8B-B14F-4D97-AF65-F5344CB8AC3E}">
-        <p14:creationId xmlns:p14="http://schemas.microsoft.com/office/powerpoint/2010/main" val="2207590314"/>
+        <p14:creationId xmlns:p14="http://schemas.microsoft.com/office/powerpoint/2010/main" val="2758012131"/>
       </p:ext>
     </p:extLst>
   </p:cSld>
@@ -5569,7 +5548,7 @@
           <p:cNvPr id="2" name="Picture 1">
             <a:extLst>
               <a:ext uri="{FF2B5EF4-FFF2-40B4-BE49-F238E27FC236}">
-                <a16:creationId xmlns:a16="http://schemas.microsoft.com/office/drawing/2014/main" id="{2056C74B-D82A-4F8A-822A-2162991FB973}"/>
+                <a16:creationId xmlns:a16="http://schemas.microsoft.com/office/drawing/2014/main" id="{0393AAA9-A207-4316-91EC-3AF239395A0C}"/>
               </a:ext>
             </a:extLst>
           </p:cNvPr>
@@ -5578,26 +5557,66 @@
           </p:cNvPicPr>
           <p:nvPr/>
         </p:nvPicPr>
-        <p:blipFill>
+        <p:blipFill rotWithShape="1">
           <a:blip r:embed="rId2"/>
-          <a:stretch>
-            <a:fillRect/>
-          </a:stretch>
+          <a:srcRect r="32358"/>
+          <a:stretch/>
         </p:blipFill>
         <p:spPr>
           <a:xfrm>
-            <a:off x="698643" y="2520301"/>
-            <a:ext cx="10630328" cy="4324856"/>
+            <a:off x="915665" y="760379"/>
+            <a:ext cx="8278439" cy="5337241"/>
           </a:xfrm>
           <a:prstGeom prst="rect">
             <a:avLst/>
           </a:prstGeom>
         </p:spPr>
       </p:pic>
+      <p:cxnSp>
+        <p:nvCxnSpPr>
+          <p:cNvPr id="4" name="Straight Arrow Connector 3">
+            <a:extLst>
+              <a:ext uri="{FF2B5EF4-FFF2-40B4-BE49-F238E27FC236}">
+                <a16:creationId xmlns:a16="http://schemas.microsoft.com/office/drawing/2014/main" id="{861136E4-7548-4FAD-B7B9-BE921768F77E}"/>
+              </a:ext>
+            </a:extLst>
+          </p:cNvPr>
+          <p:cNvCxnSpPr>
+            <a:cxnSpLocks/>
+          </p:cNvCxnSpPr>
+          <p:nvPr/>
+        </p:nvCxnSpPr>
+        <p:spPr>
+          <a:xfrm flipH="1">
+            <a:off x="6421348" y="2250040"/>
+            <a:ext cx="4448710" cy="1530850"/>
+          </a:xfrm>
+          <a:prstGeom prst="straightConnector1">
+            <a:avLst/>
+          </a:prstGeom>
+          <a:ln w="28575">
+            <a:tailEnd type="triangle"/>
+          </a:ln>
+        </p:spPr>
+        <p:style>
+          <a:lnRef idx="1">
+            <a:schemeClr val="accent1"/>
+          </a:lnRef>
+          <a:fillRef idx="0">
+            <a:schemeClr val="accent1"/>
+          </a:fillRef>
+          <a:effectRef idx="0">
+            <a:schemeClr val="accent1"/>
+          </a:effectRef>
+          <a:fontRef idx="minor">
+            <a:schemeClr val="tx1"/>
+          </a:fontRef>
+        </p:style>
+      </p:cxnSp>
     </p:spTree>
     <p:extLst>
       <p:ext uri="{BB962C8B-B14F-4D97-AF65-F5344CB8AC3E}">
-        <p14:creationId xmlns:p14="http://schemas.microsoft.com/office/powerpoint/2010/main" val="962619515"/>
+        <p14:creationId xmlns:p14="http://schemas.microsoft.com/office/powerpoint/2010/main" val="2207590314"/>
       </p:ext>
     </p:extLst>
   </p:cSld>
@@ -5629,7 +5648,7 @@
           <p:cNvPr id="2" name="Picture 1">
             <a:extLst>
               <a:ext uri="{FF2B5EF4-FFF2-40B4-BE49-F238E27FC236}">
-                <a16:creationId xmlns:a16="http://schemas.microsoft.com/office/drawing/2014/main" id="{8C404EF0-09B9-4AD7-997D-077CA6A98E45}"/>
+                <a16:creationId xmlns:a16="http://schemas.microsoft.com/office/drawing/2014/main" id="{2056C74B-D82A-4F8A-822A-2162991FB973}"/>
               </a:ext>
             </a:extLst>
           </p:cNvPr>
@@ -5646,146 +5665,8 @@
         </p:blipFill>
         <p:spPr>
           <a:xfrm>
-            <a:off x="978500" y="1833936"/>
-            <a:ext cx="7754432" cy="4172532"/>
-          </a:xfrm>
-          <a:prstGeom prst="rect">
-            <a:avLst/>
-          </a:prstGeom>
-        </p:spPr>
-      </p:pic>
-      <p:pic>
-        <p:nvPicPr>
-          <p:cNvPr id="3" name="Picture 2">
-            <a:extLst>
-              <a:ext uri="{FF2B5EF4-FFF2-40B4-BE49-F238E27FC236}">
-                <a16:creationId xmlns:a16="http://schemas.microsoft.com/office/drawing/2014/main" id="{0E85CA1F-335F-49E8-A44C-B0BEF4E96B8E}"/>
-              </a:ext>
-            </a:extLst>
-          </p:cNvPr>
-          <p:cNvPicPr>
-            <a:picLocks noChangeAspect="1"/>
-          </p:cNvPicPr>
-          <p:nvPr/>
-        </p:nvPicPr>
-        <p:blipFill>
-          <a:blip r:embed="rId3"/>
-          <a:stretch>
-            <a:fillRect/>
-          </a:stretch>
-        </p:blipFill>
-        <p:spPr>
-          <a:xfrm>
-            <a:off x="220796" y="458387"/>
-            <a:ext cx="5875204" cy="1021091"/>
-          </a:xfrm>
-          <a:prstGeom prst="rect">
-            <a:avLst/>
-          </a:prstGeom>
-        </p:spPr>
-      </p:pic>
-      <p:cxnSp>
-        <p:nvCxnSpPr>
-          <p:cNvPr id="5" name="Straight Arrow Connector 4">
-            <a:extLst>
-              <a:ext uri="{FF2B5EF4-FFF2-40B4-BE49-F238E27FC236}">
-                <a16:creationId xmlns:a16="http://schemas.microsoft.com/office/drawing/2014/main" id="{D5BFBCE9-02C2-4D4D-864F-9463DAE0227D}"/>
-              </a:ext>
-            </a:extLst>
-          </p:cNvPr>
-          <p:cNvCxnSpPr/>
-          <p:nvPr/>
-        </p:nvCxnSpPr>
-        <p:spPr>
-          <a:xfrm flipH="1">
-            <a:off x="5097158" y="5034337"/>
-            <a:ext cx="1592495" cy="698643"/>
-          </a:xfrm>
-          <a:prstGeom prst="straightConnector1">
-            <a:avLst/>
-          </a:prstGeom>
-          <a:ln w="28575">
-            <a:tailEnd type="triangle"/>
-          </a:ln>
-        </p:spPr>
-        <p:style>
-          <a:lnRef idx="1">
-            <a:schemeClr val="accent1"/>
-          </a:lnRef>
-          <a:fillRef idx="0">
-            <a:schemeClr val="accent1"/>
-          </a:fillRef>
-          <a:effectRef idx="0">
-            <a:schemeClr val="accent1"/>
-          </a:effectRef>
-          <a:fontRef idx="minor">
-            <a:schemeClr val="tx1"/>
-          </a:fontRef>
-        </p:style>
-      </p:cxnSp>
-      <p:cxnSp>
-        <p:nvCxnSpPr>
-          <p:cNvPr id="7" name="Straight Arrow Connector 6">
-            <a:extLst>
-              <a:ext uri="{FF2B5EF4-FFF2-40B4-BE49-F238E27FC236}">
-                <a16:creationId xmlns:a16="http://schemas.microsoft.com/office/drawing/2014/main" id="{D65B7052-677A-47E6-ADE8-D5D08A0F46C8}"/>
-              </a:ext>
-            </a:extLst>
-          </p:cNvPr>
-          <p:cNvCxnSpPr/>
-          <p:nvPr/>
-        </p:nvCxnSpPr>
-        <p:spPr>
-          <a:xfrm flipV="1">
-            <a:off x="3711860" y="6006468"/>
-            <a:ext cx="82193" cy="851532"/>
-          </a:xfrm>
-          <a:prstGeom prst="straightConnector1">
-            <a:avLst/>
-          </a:prstGeom>
-          <a:ln w="28575">
-            <a:tailEnd type="triangle"/>
-          </a:ln>
-        </p:spPr>
-        <p:style>
-          <a:lnRef idx="1">
-            <a:schemeClr val="accent1"/>
-          </a:lnRef>
-          <a:fillRef idx="0">
-            <a:schemeClr val="accent1"/>
-          </a:fillRef>
-          <a:effectRef idx="0">
-            <a:schemeClr val="accent1"/>
-          </a:effectRef>
-          <a:fontRef idx="minor">
-            <a:schemeClr val="tx1"/>
-          </a:fontRef>
-        </p:style>
-      </p:cxnSp>
-      <p:pic>
-        <p:nvPicPr>
-          <p:cNvPr id="8" name="Picture 7">
-            <a:extLst>
-              <a:ext uri="{FF2B5EF4-FFF2-40B4-BE49-F238E27FC236}">
-                <a16:creationId xmlns:a16="http://schemas.microsoft.com/office/drawing/2014/main" id="{15922457-6E7C-4DD4-A70A-B59541DF490E}"/>
-              </a:ext>
-            </a:extLst>
-          </p:cNvPr>
-          <p:cNvPicPr>
-            <a:picLocks noChangeAspect="1"/>
-          </p:cNvPicPr>
-          <p:nvPr/>
-        </p:nvPicPr>
-        <p:blipFill>
-          <a:blip r:embed="rId4"/>
-          <a:stretch>
-            <a:fillRect/>
-          </a:stretch>
-        </p:blipFill>
-        <p:spPr>
-          <a:xfrm>
-            <a:off x="978500" y="1350368"/>
-            <a:ext cx="6077798" cy="571580"/>
+            <a:off x="698643" y="2520301"/>
+            <a:ext cx="10630328" cy="4324856"/>
           </a:xfrm>
           <a:prstGeom prst="rect">
             <a:avLst/>
@@ -5795,7 +5676,7 @@
     </p:spTree>
     <p:extLst>
       <p:ext uri="{BB962C8B-B14F-4D97-AF65-F5344CB8AC3E}">
-        <p14:creationId xmlns:p14="http://schemas.microsoft.com/office/powerpoint/2010/main" val="4253257354"/>
+        <p14:creationId xmlns:p14="http://schemas.microsoft.com/office/powerpoint/2010/main" val="962619515"/>
       </p:ext>
     </p:extLst>
   </p:cSld>
@@ -5827,7 +5708,7 @@
           <p:cNvPr id="2" name="Picture 1">
             <a:extLst>
               <a:ext uri="{FF2B5EF4-FFF2-40B4-BE49-F238E27FC236}">
-                <a16:creationId xmlns:a16="http://schemas.microsoft.com/office/drawing/2014/main" id="{BE757A81-DE4F-408D-9AC1-C2C3D502802E}"/>
+                <a16:creationId xmlns:a16="http://schemas.microsoft.com/office/drawing/2014/main" id="{6E7DCFB6-2ACA-413A-8B09-181A17AD96E7}"/>
               </a:ext>
             </a:extLst>
           </p:cNvPr>
@@ -5844,18 +5725,96 @@
         </p:blipFill>
         <p:spPr>
           <a:xfrm>
-            <a:off x="1657270" y="463271"/>
-            <a:ext cx="8877460" cy="5737503"/>
+            <a:off x="708619" y="0"/>
+            <a:ext cx="10774762" cy="6858000"/>
           </a:xfrm>
           <a:prstGeom prst="rect">
             <a:avLst/>
           </a:prstGeom>
         </p:spPr>
       </p:pic>
+      <p:cxnSp>
+        <p:nvCxnSpPr>
+          <p:cNvPr id="4" name="Straight Arrow Connector 3">
+            <a:extLst>
+              <a:ext uri="{FF2B5EF4-FFF2-40B4-BE49-F238E27FC236}">
+                <a16:creationId xmlns:a16="http://schemas.microsoft.com/office/drawing/2014/main" id="{D8AB72E8-9DF1-4B2F-B53D-3270B5FB3F01}"/>
+              </a:ext>
+            </a:extLst>
+          </p:cNvPr>
+          <p:cNvCxnSpPr/>
+          <p:nvPr/>
+        </p:nvCxnSpPr>
+        <p:spPr>
+          <a:xfrm flipH="1">
+            <a:off x="2962275" y="514350"/>
+            <a:ext cx="1314450" cy="885825"/>
+          </a:xfrm>
+          <a:prstGeom prst="straightConnector1">
+            <a:avLst/>
+          </a:prstGeom>
+          <a:ln>
+            <a:tailEnd type="triangle"/>
+          </a:ln>
+        </p:spPr>
+        <p:style>
+          <a:lnRef idx="1">
+            <a:schemeClr val="accent1"/>
+          </a:lnRef>
+          <a:fillRef idx="0">
+            <a:schemeClr val="accent1"/>
+          </a:fillRef>
+          <a:effectRef idx="0">
+            <a:schemeClr val="accent1"/>
+          </a:effectRef>
+          <a:fontRef idx="minor">
+            <a:schemeClr val="tx1"/>
+          </a:fontRef>
+        </p:style>
+      </p:cxnSp>
+      <p:cxnSp>
+        <p:nvCxnSpPr>
+          <p:cNvPr id="6" name="Straight Arrow Connector 5">
+            <a:extLst>
+              <a:ext uri="{FF2B5EF4-FFF2-40B4-BE49-F238E27FC236}">
+                <a16:creationId xmlns:a16="http://schemas.microsoft.com/office/drawing/2014/main" id="{F10E5806-5DB6-45A1-AC20-D464967D7EA4}"/>
+              </a:ext>
+            </a:extLst>
+          </p:cNvPr>
+          <p:cNvCxnSpPr/>
+          <p:nvPr/>
+        </p:nvCxnSpPr>
+        <p:spPr>
+          <a:xfrm flipH="1">
+            <a:off x="7991475" y="981075"/>
+            <a:ext cx="1000125" cy="666750"/>
+          </a:xfrm>
+          <a:prstGeom prst="straightConnector1">
+            <a:avLst/>
+          </a:prstGeom>
+          <a:ln>
+            <a:tailEnd type="triangle"/>
+          </a:ln>
+        </p:spPr>
+        <p:style>
+          <a:lnRef idx="1">
+            <a:schemeClr val="accent1"/>
+          </a:lnRef>
+          <a:fillRef idx="0">
+            <a:schemeClr val="accent1"/>
+          </a:fillRef>
+          <a:effectRef idx="0">
+            <a:schemeClr val="accent1"/>
+          </a:effectRef>
+          <a:fontRef idx="minor">
+            <a:schemeClr val="tx1"/>
+          </a:fontRef>
+        </p:style>
+      </p:cxnSp>
     </p:spTree>
     <p:extLst>
       <p:ext uri="{BB962C8B-B14F-4D97-AF65-F5344CB8AC3E}">
-        <p14:creationId xmlns:p14="http://schemas.microsoft.com/office/powerpoint/2010/main" val="2661305381"/>
+        <p14:creationId xmlns:p14="http://schemas.microsoft.com/office/powerpoint/2010/main" val="3235060740"/>
       </p:ext>
     </p:extLst>
   </p:cSld>
@@ -5884,10 +5843,10 @@
       </p:grpSpPr>
       <p:pic>
         <p:nvPicPr>
-          <p:cNvPr id="3" name="Picture 2">
-            <a:extLst>
-              <a:ext uri="{FF2B5EF4-FFF2-40B4-BE49-F238E27FC236}">
-                <a16:creationId xmlns:a16="http://schemas.microsoft.com/office/drawing/2014/main" id="{5DAD2C53-924D-42BB-AB46-9EC351826017}"/>
+          <p:cNvPr id="2" name="Picture 1">
+            <a:extLst>
+              <a:ext uri="{FF2B5EF4-FFF2-40B4-BE49-F238E27FC236}">
+                <a16:creationId xmlns:a16="http://schemas.microsoft.com/office/drawing/2014/main" id="{8C404EF0-09B9-4AD7-997D-077CA6A98E45}"/>
               </a:ext>
             </a:extLst>
           </p:cNvPr>
@@ -5904,8 +5863,146 @@
         </p:blipFill>
         <p:spPr>
           <a:xfrm>
-            <a:off x="1108036" y="150332"/>
-            <a:ext cx="8169528" cy="6645847"/>
+            <a:off x="978500" y="1833936"/>
+            <a:ext cx="7754432" cy="4172532"/>
+          </a:xfrm>
+          <a:prstGeom prst="rect">
+            <a:avLst/>
+          </a:prstGeom>
+        </p:spPr>
+      </p:pic>
+      <p:pic>
+        <p:nvPicPr>
+          <p:cNvPr id="3" name="Picture 2">
+            <a:extLst>
+              <a:ext uri="{FF2B5EF4-FFF2-40B4-BE49-F238E27FC236}">
+                <a16:creationId xmlns:a16="http://schemas.microsoft.com/office/drawing/2014/main" id="{0E85CA1F-335F-49E8-A44C-B0BEF4E96B8E}"/>
+              </a:ext>
+            </a:extLst>
+          </p:cNvPr>
+          <p:cNvPicPr>
+            <a:picLocks noChangeAspect="1"/>
+          </p:cNvPicPr>
+          <p:nvPr/>
+        </p:nvPicPr>
+        <p:blipFill>
+          <a:blip r:embed="rId3"/>
+          <a:stretch>
+            <a:fillRect/>
+          </a:stretch>
+        </p:blipFill>
+        <p:spPr>
+          <a:xfrm>
+            <a:off x="220796" y="458387"/>
+            <a:ext cx="5875204" cy="1021091"/>
+          </a:xfrm>
+          <a:prstGeom prst="rect">
+            <a:avLst/>
+          </a:prstGeom>
+        </p:spPr>
+      </p:pic>
+      <p:cxnSp>
+        <p:nvCxnSpPr>
+          <p:cNvPr id="5" name="Straight Arrow Connector 4">
+            <a:extLst>
+              <a:ext uri="{FF2B5EF4-FFF2-40B4-BE49-F238E27FC236}">
+                <a16:creationId xmlns:a16="http://schemas.microsoft.com/office/drawing/2014/main" id="{D5BFBCE9-02C2-4D4D-864F-9463DAE0227D}"/>
+              </a:ext>
+            </a:extLst>
+          </p:cNvPr>
+          <p:cNvCxnSpPr/>
+          <p:nvPr/>
+        </p:nvCxnSpPr>
+        <p:spPr>
+          <a:xfrm flipH="1">
+            <a:off x="5097158" y="5034337"/>
+            <a:ext cx="1592495" cy="698643"/>
+          </a:xfrm>
+          <a:prstGeom prst="straightConnector1">
+            <a:avLst/>
+          </a:prstGeom>
+          <a:ln w="28575">
+            <a:tailEnd type="triangle"/>
+          </a:ln>
+        </p:spPr>
+        <p:style>
+          <a:lnRef idx="1">
+            <a:schemeClr val="accent1"/>
+          </a:lnRef>
+          <a:fillRef idx="0">
+            <a:schemeClr val="accent1"/>
+          </a:fillRef>
+          <a:effectRef idx="0">
+            <a:schemeClr val="accent1"/>
+          </a:effectRef>
+          <a:fontRef idx="minor">
+            <a:schemeClr val="tx1"/>
+          </a:fontRef>
+        </p:style>
+      </p:cxnSp>
+      <p:cxnSp>
+        <p:nvCxnSpPr>
+          <p:cNvPr id="7" name="Straight Arrow Connector 6">
+            <a:extLst>
+              <a:ext uri="{FF2B5EF4-FFF2-40B4-BE49-F238E27FC236}">
+                <a16:creationId xmlns:a16="http://schemas.microsoft.com/office/drawing/2014/main" id="{D65B7052-677A-47E6-ADE8-D5D08A0F46C8}"/>
+              </a:ext>
+            </a:extLst>
+          </p:cNvPr>
+          <p:cNvCxnSpPr/>
+          <p:nvPr/>
+        </p:nvCxnSpPr>
+        <p:spPr>
+          <a:xfrm flipV="1">
+            <a:off x="3711860" y="6006468"/>
+            <a:ext cx="82193" cy="851532"/>
+          </a:xfrm>
+          <a:prstGeom prst="straightConnector1">
+            <a:avLst/>
+          </a:prstGeom>
+          <a:ln w="28575">
+            <a:tailEnd type="triangle"/>
+          </a:ln>
+        </p:spPr>
+        <p:style>
+          <a:lnRef idx="1">
+            <a:schemeClr val="accent1"/>
+          </a:lnRef>
+          <a:fillRef idx="0">
+            <a:schemeClr val="accent1"/>
+          </a:fillRef>
+          <a:effectRef idx="0">
+            <a:schemeClr val="accent1"/>
+          </a:effectRef>
+          <a:fontRef idx="minor">
+            <a:schemeClr val="tx1"/>
+          </a:fontRef>
+        </p:style>
+      </p:cxnSp>
+      <p:pic>
+        <p:nvPicPr>
+          <p:cNvPr id="8" name="Picture 7">
+            <a:extLst>
+              <a:ext uri="{FF2B5EF4-FFF2-40B4-BE49-F238E27FC236}">
+                <a16:creationId xmlns:a16="http://schemas.microsoft.com/office/drawing/2014/main" id="{15922457-6E7C-4DD4-A70A-B59541DF490E}"/>
+              </a:ext>
+            </a:extLst>
+          </p:cNvPr>
+          <p:cNvPicPr>
+            <a:picLocks noChangeAspect="1"/>
+          </p:cNvPicPr>
+          <p:nvPr/>
+        </p:nvPicPr>
+        <p:blipFill>
+          <a:blip r:embed="rId4"/>
+          <a:stretch>
+            <a:fillRect/>
+          </a:stretch>
+        </p:blipFill>
+        <p:spPr>
+          <a:xfrm>
+            <a:off x="978500" y="1350368"/>
+            <a:ext cx="6077798" cy="571580"/>
           </a:xfrm>
           <a:prstGeom prst="rect">
             <a:avLst/>
@@ -5915,7 +6012,7 @@
     </p:spTree>
     <p:extLst>
       <p:ext uri="{BB962C8B-B14F-4D97-AF65-F5344CB8AC3E}">
-        <p14:creationId xmlns:p14="http://schemas.microsoft.com/office/powerpoint/2010/main" val="2038936841"/>
+        <p14:creationId xmlns:p14="http://schemas.microsoft.com/office/powerpoint/2010/main" val="4253257354"/>
       </p:ext>
     </p:extLst>
   </p:cSld>
@@ -5944,10 +6041,10 @@
       </p:grpSpPr>
       <p:pic>
         <p:nvPicPr>
-          <p:cNvPr id="2" name="Picture 1">
-            <a:extLst>
-              <a:ext uri="{FF2B5EF4-FFF2-40B4-BE49-F238E27FC236}">
-                <a16:creationId xmlns:a16="http://schemas.microsoft.com/office/drawing/2014/main" id="{EDC64680-E3BC-447B-9F54-26D55F1DCA66}"/>
+          <p:cNvPr id="3" name="Picture 2">
+            <a:extLst>
+              <a:ext uri="{FF2B5EF4-FFF2-40B4-BE49-F238E27FC236}">
+                <a16:creationId xmlns:a16="http://schemas.microsoft.com/office/drawing/2014/main" id="{5DAD2C53-924D-42BB-AB46-9EC351826017}"/>
               </a:ext>
             </a:extLst>
           </p:cNvPr>
@@ -5964,96 +6061,18 @@
         </p:blipFill>
         <p:spPr>
           <a:xfrm>
-            <a:off x="1242335" y="113837"/>
-            <a:ext cx="9707330" cy="6630325"/>
+            <a:off x="1108036" y="150332"/>
+            <a:ext cx="8169528" cy="6645847"/>
           </a:xfrm>
           <a:prstGeom prst="rect">
             <a:avLst/>
           </a:prstGeom>
         </p:spPr>
       </p:pic>
-      <p:cxnSp>
-        <p:nvCxnSpPr>
-          <p:cNvPr id="4" name="Straight Arrow Connector 3">
-            <a:extLst>
-              <a:ext uri="{FF2B5EF4-FFF2-40B4-BE49-F238E27FC236}">
-                <a16:creationId xmlns:a16="http://schemas.microsoft.com/office/drawing/2014/main" id="{72060E63-DDD1-4117-9B17-75BCB06F3E78}"/>
-              </a:ext>
-            </a:extLst>
-          </p:cNvPr>
-          <p:cNvCxnSpPr/>
-          <p:nvPr/>
-        </p:nvCxnSpPr>
-        <p:spPr>
-          <a:xfrm flipH="1">
-            <a:off x="7346023" y="1417833"/>
-            <a:ext cx="976045" cy="0"/>
-          </a:xfrm>
-          <a:prstGeom prst="straightConnector1">
-            <a:avLst/>
-          </a:prstGeom>
-          <a:ln w="28575">
-            <a:tailEnd type="triangle"/>
-          </a:ln>
-        </p:spPr>
-        <p:style>
-          <a:lnRef idx="1">
-            <a:schemeClr val="accent1"/>
-          </a:lnRef>
-          <a:fillRef idx="0">
-            <a:schemeClr val="accent1"/>
-          </a:fillRef>
-          <a:effectRef idx="0">
-            <a:schemeClr val="accent1"/>
-          </a:effectRef>
-          <a:fontRef idx="minor">
-            <a:schemeClr val="tx1"/>
-          </a:fontRef>
-        </p:style>
-      </p:cxnSp>
-      <p:cxnSp>
-        <p:nvCxnSpPr>
-          <p:cNvPr id="5" name="Straight Arrow Connector 4">
-            <a:extLst>
-              <a:ext uri="{FF2B5EF4-FFF2-40B4-BE49-F238E27FC236}">
-                <a16:creationId xmlns:a16="http://schemas.microsoft.com/office/drawing/2014/main" id="{13A3909C-4D0B-4C1C-8844-47E0DC1594D1}"/>
-              </a:ext>
-            </a:extLst>
-          </p:cNvPr>
-          <p:cNvCxnSpPr/>
-          <p:nvPr/>
-        </p:nvCxnSpPr>
-        <p:spPr>
-          <a:xfrm flipH="1">
-            <a:off x="5607977" y="5679896"/>
-            <a:ext cx="976045" cy="0"/>
-          </a:xfrm>
-          <a:prstGeom prst="straightConnector1">
-            <a:avLst/>
-          </a:prstGeom>
-          <a:ln w="28575">
-            <a:tailEnd type="triangle"/>
-          </a:ln>
-        </p:spPr>
-        <p:style>
-          <a:lnRef idx="1">
-            <a:schemeClr val="accent1"/>
-          </a:lnRef>
-          <a:fillRef idx="0">
-            <a:schemeClr val="accent1"/>
-          </a:fillRef>
-          <a:effectRef idx="0">
-            <a:schemeClr val="accent1"/>
-          </a:effectRef>
-          <a:fontRef idx="minor">
-            <a:schemeClr val="tx1"/>
-          </a:fontRef>
-        </p:style>
-      </p:cxnSp>
     </p:spTree>
     <p:extLst>
       <p:ext uri="{BB962C8B-B14F-4D97-AF65-F5344CB8AC3E}">
-        <p14:creationId xmlns:p14="http://schemas.microsoft.com/office/powerpoint/2010/main" val="549452556"/>
+        <p14:creationId xmlns:p14="http://schemas.microsoft.com/office/powerpoint/2010/main" val="2038936841"/>
       </p:ext>
     </p:extLst>
   </p:cSld>
@@ -6085,7 +6104,7 @@
           <p:cNvPr id="2" name="Picture 1">
             <a:extLst>
               <a:ext uri="{FF2B5EF4-FFF2-40B4-BE49-F238E27FC236}">
-                <a16:creationId xmlns:a16="http://schemas.microsoft.com/office/drawing/2014/main" id="{F91B6CC9-0DEE-4964-8528-F0C43BF3F0AC}"/>
+                <a16:creationId xmlns:a16="http://schemas.microsoft.com/office/drawing/2014/main" id="{EDC64680-E3BC-447B-9F54-26D55F1DCA66}"/>
               </a:ext>
             </a:extLst>
           </p:cNvPr>
@@ -6102,8 +6121,8 @@
         </p:blipFill>
         <p:spPr>
           <a:xfrm>
-            <a:off x="1058238" y="809652"/>
-            <a:ext cx="9417714" cy="5117974"/>
+            <a:off x="1242335" y="113837"/>
+            <a:ext cx="9707330" cy="6630325"/>
           </a:xfrm>
           <a:prstGeom prst="rect">
             <a:avLst/>
@@ -6112,10 +6131,10 @@
       </p:pic>
       <p:cxnSp>
         <p:nvCxnSpPr>
-          <p:cNvPr id="5" name="Straight Arrow Connector 4">
-            <a:extLst>
-              <a:ext uri="{FF2B5EF4-FFF2-40B4-BE49-F238E27FC236}">
-                <a16:creationId xmlns:a16="http://schemas.microsoft.com/office/drawing/2014/main" id="{5733E2CC-C3FD-46FC-8FCE-80265BE51E6E}"/>
+          <p:cNvPr id="4" name="Straight Arrow Connector 3">
+            <a:extLst>
+              <a:ext uri="{FF2B5EF4-FFF2-40B4-BE49-F238E27FC236}">
+                <a16:creationId xmlns:a16="http://schemas.microsoft.com/office/drawing/2014/main" id="{72060E63-DDD1-4117-9B17-75BCB06F3E78}"/>
               </a:ext>
             </a:extLst>
           </p:cNvPr>
@@ -6123,9 +6142,9 @@
           <p:nvPr/>
         </p:nvCxnSpPr>
         <p:spPr>
-          <a:xfrm flipH="1" flipV="1">
-            <a:off x="4767209" y="1510301"/>
-            <a:ext cx="1736333" cy="513708"/>
+          <a:xfrm flipH="1">
+            <a:off x="7346023" y="1417833"/>
+            <a:ext cx="976045" cy="0"/>
           </a:xfrm>
           <a:prstGeom prst="straightConnector1">
             <a:avLst/>
@@ -6149,59 +6168,12 @@
           </a:fontRef>
         </p:style>
       </p:cxnSp>
-      <p:sp>
-        <p:nvSpPr>
-          <p:cNvPr id="6" name="Rectangle 5">
-            <a:extLst>
-              <a:ext uri="{FF2B5EF4-FFF2-40B4-BE49-F238E27FC236}">
-                <a16:creationId xmlns:a16="http://schemas.microsoft.com/office/drawing/2014/main" id="{37C2F2DD-12D5-409F-A97C-1E8EA44C8E55}"/>
-              </a:ext>
-            </a:extLst>
-          </p:cNvPr>
-          <p:cNvSpPr/>
-          <p:nvPr/>
-        </p:nvSpPr>
-        <p:spPr>
-          <a:xfrm>
-            <a:off x="1058238" y="708917"/>
-            <a:ext cx="7017250" cy="2116476"/>
-          </a:xfrm>
-          <a:prstGeom prst="rect">
-            <a:avLst/>
-          </a:prstGeom>
-          <a:noFill/>
-        </p:spPr>
-        <p:style>
-          <a:lnRef idx="2">
-            <a:schemeClr val="accent1">
-              <a:shade val="50000"/>
-            </a:schemeClr>
-          </a:lnRef>
-          <a:fillRef idx="1">
-            <a:schemeClr val="accent1"/>
-          </a:fillRef>
-          <a:effectRef idx="0">
-            <a:schemeClr val="accent1"/>
-          </a:effectRef>
-          <a:fontRef idx="minor">
-            <a:schemeClr val="lt1"/>
-          </a:fontRef>
-        </p:style>
-        <p:txBody>
-          <a:bodyPr rtlCol="0" anchor="ctr"/>
-          <a:lstStyle/>
-          <a:p>
-            <a:pPr algn="ctr"/>
-            <a:endParaRPr lang="en-IE"/>
-          </a:p>
-        </p:txBody>
-      </p:sp>
       <p:cxnSp>
         <p:nvCxnSpPr>
-          <p:cNvPr id="8" name="Straight Arrow Connector 7">
-            <a:extLst>
-              <a:ext uri="{FF2B5EF4-FFF2-40B4-BE49-F238E27FC236}">
-                <a16:creationId xmlns:a16="http://schemas.microsoft.com/office/drawing/2014/main" id="{C3B55387-CDDB-49E3-9CC0-3E19E2161C76}"/>
+          <p:cNvPr id="5" name="Straight Arrow Connector 4">
+            <a:extLst>
+              <a:ext uri="{FF2B5EF4-FFF2-40B4-BE49-F238E27FC236}">
+                <a16:creationId xmlns:a16="http://schemas.microsoft.com/office/drawing/2014/main" id="{13A3909C-4D0B-4C1C-8844-47E0DC1594D1}"/>
               </a:ext>
             </a:extLst>
           </p:cNvPr>
@@ -6210,8 +6182,8 @@
         </p:nvCxnSpPr>
         <p:spPr>
           <a:xfrm flipH="1">
-            <a:off x="6791218" y="3308279"/>
-            <a:ext cx="1767155" cy="120721"/>
+            <a:off x="5607977" y="5679896"/>
+            <a:ext cx="976045" cy="0"/>
           </a:xfrm>
           <a:prstGeom prst="straightConnector1">
             <a:avLst/>
@@ -6238,7 +6210,7 @@
     </p:spTree>
     <p:extLst>
       <p:ext uri="{BB962C8B-B14F-4D97-AF65-F5344CB8AC3E}">
-        <p14:creationId xmlns:p14="http://schemas.microsoft.com/office/powerpoint/2010/main" val="1164149674"/>
+        <p14:creationId xmlns:p14="http://schemas.microsoft.com/office/powerpoint/2010/main" val="549452556"/>
       </p:ext>
     </p:extLst>
   </p:cSld>
@@ -6265,63 +6237,165 @@
           <a:chExt cx="0" cy="0"/>
         </a:xfrm>
       </p:grpSpPr>
+      <p:pic>
+        <p:nvPicPr>
+          <p:cNvPr id="2" name="Picture 1">
+            <a:extLst>
+              <a:ext uri="{FF2B5EF4-FFF2-40B4-BE49-F238E27FC236}">
+                <a16:creationId xmlns:a16="http://schemas.microsoft.com/office/drawing/2014/main" id="{F91B6CC9-0DEE-4964-8528-F0C43BF3F0AC}"/>
+              </a:ext>
+            </a:extLst>
+          </p:cNvPr>
+          <p:cNvPicPr>
+            <a:picLocks noChangeAspect="1"/>
+          </p:cNvPicPr>
+          <p:nvPr/>
+        </p:nvPicPr>
+        <p:blipFill>
+          <a:blip r:embed="rId2"/>
+          <a:stretch>
+            <a:fillRect/>
+          </a:stretch>
+        </p:blipFill>
+        <p:spPr>
+          <a:xfrm>
+            <a:off x="1058238" y="809652"/>
+            <a:ext cx="9417714" cy="5117974"/>
+          </a:xfrm>
+          <a:prstGeom prst="rect">
+            <a:avLst/>
+          </a:prstGeom>
+        </p:spPr>
+      </p:pic>
+      <p:cxnSp>
+        <p:nvCxnSpPr>
+          <p:cNvPr id="5" name="Straight Arrow Connector 4">
+            <a:extLst>
+              <a:ext uri="{FF2B5EF4-FFF2-40B4-BE49-F238E27FC236}">
+                <a16:creationId xmlns:a16="http://schemas.microsoft.com/office/drawing/2014/main" id="{5733E2CC-C3FD-46FC-8FCE-80265BE51E6E}"/>
+              </a:ext>
+            </a:extLst>
+          </p:cNvPr>
+          <p:cNvCxnSpPr/>
+          <p:nvPr/>
+        </p:nvCxnSpPr>
+        <p:spPr>
+          <a:xfrm flipH="1" flipV="1">
+            <a:off x="4767209" y="1510301"/>
+            <a:ext cx="1736333" cy="513708"/>
+          </a:xfrm>
+          <a:prstGeom prst="straightConnector1">
+            <a:avLst/>
+          </a:prstGeom>
+          <a:ln w="28575">
+            <a:tailEnd type="triangle"/>
+          </a:ln>
+        </p:spPr>
+        <p:style>
+          <a:lnRef idx="1">
+            <a:schemeClr val="accent1"/>
+          </a:lnRef>
+          <a:fillRef idx="0">
+            <a:schemeClr val="accent1"/>
+          </a:fillRef>
+          <a:effectRef idx="0">
+            <a:schemeClr val="accent1"/>
+          </a:effectRef>
+          <a:fontRef idx="minor">
+            <a:schemeClr val="tx1"/>
+          </a:fontRef>
+        </p:style>
+      </p:cxnSp>
       <p:sp>
         <p:nvSpPr>
-          <p:cNvPr id="2" name="Title 1">
-            <a:extLst>
-              <a:ext uri="{FF2B5EF4-FFF2-40B4-BE49-F238E27FC236}">
-                <a16:creationId xmlns:a16="http://schemas.microsoft.com/office/drawing/2014/main" id="{A34B4CAC-CD86-DAA4-61EB-4FBAF5A12DBB}"/>
-              </a:ext>
-            </a:extLst>
-          </p:cNvPr>
-          <p:cNvSpPr>
-            <a:spLocks noGrp="1"/>
-          </p:cNvSpPr>
-          <p:nvPr>
-            <p:ph type="title"/>
-          </p:nvPr>
+          <p:cNvPr id="6" name="Rectangle 5">
+            <a:extLst>
+              <a:ext uri="{FF2B5EF4-FFF2-40B4-BE49-F238E27FC236}">
+                <a16:creationId xmlns:a16="http://schemas.microsoft.com/office/drawing/2014/main" id="{37C2F2DD-12D5-409F-A97C-1E8EA44C8E55}"/>
+              </a:ext>
+            </a:extLst>
+          </p:cNvPr>
+          <p:cNvSpPr/>
+          <p:nvPr/>
         </p:nvSpPr>
-        <p:spPr/>
+        <p:spPr>
+          <a:xfrm>
+            <a:off x="1058238" y="708917"/>
+            <a:ext cx="7017250" cy="2116476"/>
+          </a:xfrm>
+          <a:prstGeom prst="rect">
+            <a:avLst/>
+          </a:prstGeom>
+          <a:noFill/>
+        </p:spPr>
+        <p:style>
+          <a:lnRef idx="2">
+            <a:schemeClr val="accent1">
+              <a:shade val="50000"/>
+            </a:schemeClr>
+          </a:lnRef>
+          <a:fillRef idx="1">
+            <a:schemeClr val="accent1"/>
+          </a:fillRef>
+          <a:effectRef idx="0">
+            <a:schemeClr val="accent1"/>
+          </a:effectRef>
+          <a:fontRef idx="minor">
+            <a:schemeClr val="lt1"/>
+          </a:fontRef>
+        </p:style>
         <p:txBody>
-          <a:bodyPr/>
+          <a:bodyPr rtlCol="0" anchor="ctr"/>
           <a:lstStyle/>
           <a:p>
-            <a:r>
-              <a:rPr lang="en-GB" dirty="0"/>
-              <a:t>Interfaces, abstract classes</a:t>
-            </a:r>
+            <a:pPr algn="ctr"/>
+            <a:endParaRPr lang="en-IE"/>
           </a:p>
         </p:txBody>
       </p:sp>
-      <p:sp>
-        <p:nvSpPr>
-          <p:cNvPr id="3" name="Text Placeholder 2">
-            <a:extLst>
-              <a:ext uri="{FF2B5EF4-FFF2-40B4-BE49-F238E27FC236}">
-                <a16:creationId xmlns:a16="http://schemas.microsoft.com/office/drawing/2014/main" id="{3CB5371B-AA99-D482-F471-BC3616BDE8BF}"/>
-              </a:ext>
-            </a:extLst>
-          </p:cNvPr>
-          <p:cNvSpPr>
-            <a:spLocks noGrp="1"/>
-          </p:cNvSpPr>
-          <p:nvPr>
-            <p:ph type="body" idx="1"/>
-          </p:nvPr>
-        </p:nvSpPr>
-        <p:spPr/>
-        <p:txBody>
-          <a:bodyPr/>
-          <a:lstStyle/>
-          <a:p>
-            <a:endParaRPr lang="en-GB" dirty="0"/>
-          </a:p>
-        </p:txBody>
-      </p:sp>
+      <p:cxnSp>
+        <p:nvCxnSpPr>
+          <p:cNvPr id="8" name="Straight Arrow Connector 7">
+            <a:extLst>
+              <a:ext uri="{FF2B5EF4-FFF2-40B4-BE49-F238E27FC236}">
+                <a16:creationId xmlns:a16="http://schemas.microsoft.com/office/drawing/2014/main" id="{C3B55387-CDDB-49E3-9CC0-3E19E2161C76}"/>
+              </a:ext>
+            </a:extLst>
+          </p:cNvPr>
+          <p:cNvCxnSpPr/>
+          <p:nvPr/>
+        </p:nvCxnSpPr>
+        <p:spPr>
+          <a:xfrm flipH="1">
+            <a:off x="6791218" y="3308279"/>
+            <a:ext cx="1767155" cy="120721"/>
+          </a:xfrm>
+          <a:prstGeom prst="straightConnector1">
+            <a:avLst/>
+          </a:prstGeom>
+          <a:ln w="28575">
+            <a:tailEnd type="triangle"/>
+          </a:ln>
+        </p:spPr>
+        <p:style>
+          <a:lnRef idx="1">
+            <a:schemeClr val="accent1"/>
+          </a:lnRef>
+          <a:fillRef idx="0">
+            <a:schemeClr val="accent1"/>
+          </a:fillRef>
+          <a:effectRef idx="0">
+            <a:schemeClr val="accent1"/>
+          </a:effectRef>
+          <a:fontRef idx="minor">
+            <a:schemeClr val="tx1"/>
+          </a:fontRef>
+        </p:style>
+      </p:cxnSp>
     </p:spTree>
     <p:extLst>
       <p:ext uri="{BB962C8B-B14F-4D97-AF65-F5344CB8AC3E}">
-        <p14:creationId xmlns:p14="http://schemas.microsoft.com/office/powerpoint/2010/main" val="1665354833"/>
+        <p14:creationId xmlns:p14="http://schemas.microsoft.com/office/powerpoint/2010/main" val="1164149674"/>
       </p:ext>
     </p:extLst>
   </p:cSld>
@@ -6348,87 +6422,63 @@
           <a:chExt cx="0" cy="0"/>
         </a:xfrm>
       </p:grpSpPr>
-      <p:pic>
-        <p:nvPicPr>
-          <p:cNvPr id="5" name="Picture 4">
-            <a:extLst>
-              <a:ext uri="{FF2B5EF4-FFF2-40B4-BE49-F238E27FC236}">
-                <a16:creationId xmlns:a16="http://schemas.microsoft.com/office/drawing/2014/main" id="{B6852D04-424B-4CDA-A6C7-B0CAE8294408}"/>
-              </a:ext>
-            </a:extLst>
-          </p:cNvPr>
-          <p:cNvPicPr>
-            <a:picLocks noChangeAspect="1"/>
-          </p:cNvPicPr>
-          <p:nvPr/>
-        </p:nvPicPr>
-        <p:blipFill>
-          <a:blip r:embed="rId2"/>
-          <a:stretch>
-            <a:fillRect/>
-          </a:stretch>
-        </p:blipFill>
-        <p:spPr>
-          <a:xfrm>
-            <a:off x="1071097" y="1272684"/>
-            <a:ext cx="10357816" cy="4158625"/>
-          </a:xfrm>
-          <a:prstGeom prst="rect">
-            <a:avLst/>
-          </a:prstGeom>
-        </p:spPr>
-      </p:pic>
       <p:sp>
         <p:nvSpPr>
-          <p:cNvPr id="6" name="Rectangle 5">
-            <a:extLst>
-              <a:ext uri="{FF2B5EF4-FFF2-40B4-BE49-F238E27FC236}">
-                <a16:creationId xmlns:a16="http://schemas.microsoft.com/office/drawing/2014/main" id="{232796C3-116F-516A-5722-E4CE3AF1F566}"/>
-              </a:ext>
-            </a:extLst>
-          </p:cNvPr>
-          <p:cNvSpPr/>
-          <p:nvPr/>
+          <p:cNvPr id="2" name="Title 1">
+            <a:extLst>
+              <a:ext uri="{FF2B5EF4-FFF2-40B4-BE49-F238E27FC236}">
+                <a16:creationId xmlns:a16="http://schemas.microsoft.com/office/drawing/2014/main" id="{A34B4CAC-CD86-DAA4-61EB-4FBAF5A12DBB}"/>
+              </a:ext>
+            </a:extLst>
+          </p:cNvPr>
+          <p:cNvSpPr>
+            <a:spLocks noGrp="1"/>
+          </p:cNvSpPr>
+          <p:nvPr>
+            <p:ph type="title"/>
+          </p:nvPr>
         </p:nvSpPr>
-        <p:spPr>
-          <a:xfrm>
-            <a:off x="2242686" y="1366787"/>
-            <a:ext cx="1337912" cy="442762"/>
-          </a:xfrm>
-          <a:prstGeom prst="rect">
-            <a:avLst/>
-          </a:prstGeom>
-          <a:noFill/>
-        </p:spPr>
-        <p:style>
-          <a:lnRef idx="2">
-            <a:schemeClr val="accent1">
-              <a:shade val="15000"/>
-            </a:schemeClr>
-          </a:lnRef>
-          <a:fillRef idx="1">
-            <a:schemeClr val="accent1"/>
-          </a:fillRef>
-          <a:effectRef idx="0">
-            <a:schemeClr val="accent1"/>
-          </a:effectRef>
-          <a:fontRef idx="minor">
-            <a:schemeClr val="lt1"/>
-          </a:fontRef>
-        </p:style>
+        <p:spPr/>
         <p:txBody>
-          <a:bodyPr rtlCol="0" anchor="ctr"/>
+          <a:bodyPr/>
           <a:lstStyle/>
           <a:p>
-            <a:pPr algn="ctr"/>
-            <a:endParaRPr lang="en-GB"/>
+            <a:r>
+              <a:rPr lang="en-GB" dirty="0"/>
+              <a:t>Interfaces, abstract classes</a:t>
+            </a:r>
+          </a:p>
+        </p:txBody>
+      </p:sp>
+      <p:sp>
+        <p:nvSpPr>
+          <p:cNvPr id="3" name="Text Placeholder 2">
+            <a:extLst>
+              <a:ext uri="{FF2B5EF4-FFF2-40B4-BE49-F238E27FC236}">
+                <a16:creationId xmlns:a16="http://schemas.microsoft.com/office/drawing/2014/main" id="{3CB5371B-AA99-D482-F471-BC3616BDE8BF}"/>
+              </a:ext>
+            </a:extLst>
+          </p:cNvPr>
+          <p:cNvSpPr>
+            <a:spLocks noGrp="1"/>
+          </p:cNvSpPr>
+          <p:nvPr>
+            <p:ph type="body" idx="1"/>
+          </p:nvPr>
+        </p:nvSpPr>
+        <p:spPr/>
+        <p:txBody>
+          <a:bodyPr/>
+          <a:lstStyle/>
+          <a:p>
+            <a:endParaRPr lang="en-GB" dirty="0"/>
           </a:p>
         </p:txBody>
       </p:sp>
     </p:spTree>
     <p:extLst>
       <p:ext uri="{BB962C8B-B14F-4D97-AF65-F5344CB8AC3E}">
-        <p14:creationId xmlns:p14="http://schemas.microsoft.com/office/powerpoint/2010/main" val="413122751"/>
+        <p14:creationId xmlns:p14="http://schemas.microsoft.com/office/powerpoint/2010/main" val="1665354833"/>
       </p:ext>
     </p:extLst>
   </p:cSld>
@@ -6460,7 +6510,7 @@
           <p:cNvPr id="5" name="Picture 4">
             <a:extLst>
               <a:ext uri="{FF2B5EF4-FFF2-40B4-BE49-F238E27FC236}">
-                <a16:creationId xmlns:a16="http://schemas.microsoft.com/office/drawing/2014/main" id="{3A4A5351-59E1-EEE7-F7DE-B2E5C355C7F2}"/>
+                <a16:creationId xmlns:a16="http://schemas.microsoft.com/office/drawing/2014/main" id="{B6852D04-424B-4CDA-A6C7-B0CAE8294408}"/>
               </a:ext>
             </a:extLst>
           </p:cNvPr>
@@ -6477,18 +6527,65 @@
         </p:blipFill>
         <p:spPr>
           <a:xfrm>
-            <a:off x="288892" y="258471"/>
-            <a:ext cx="11532978" cy="5795820"/>
+            <a:off x="1071097" y="1272684"/>
+            <a:ext cx="10357816" cy="4158625"/>
           </a:xfrm>
           <a:prstGeom prst="rect">
             <a:avLst/>
           </a:prstGeom>
         </p:spPr>
       </p:pic>
+      <p:sp>
+        <p:nvSpPr>
+          <p:cNvPr id="6" name="Rectangle 5">
+            <a:extLst>
+              <a:ext uri="{FF2B5EF4-FFF2-40B4-BE49-F238E27FC236}">
+                <a16:creationId xmlns:a16="http://schemas.microsoft.com/office/drawing/2014/main" id="{232796C3-116F-516A-5722-E4CE3AF1F566}"/>
+              </a:ext>
+            </a:extLst>
+          </p:cNvPr>
+          <p:cNvSpPr/>
+          <p:nvPr/>
+        </p:nvSpPr>
+        <p:spPr>
+          <a:xfrm>
+            <a:off x="2242686" y="1366787"/>
+            <a:ext cx="1337912" cy="442762"/>
+          </a:xfrm>
+          <a:prstGeom prst="rect">
+            <a:avLst/>
+          </a:prstGeom>
+          <a:noFill/>
+        </p:spPr>
+        <p:style>
+          <a:lnRef idx="2">
+            <a:schemeClr val="accent1">
+              <a:shade val="15000"/>
+            </a:schemeClr>
+          </a:lnRef>
+          <a:fillRef idx="1">
+            <a:schemeClr val="accent1"/>
+          </a:fillRef>
+          <a:effectRef idx="0">
+            <a:schemeClr val="accent1"/>
+          </a:effectRef>
+          <a:fontRef idx="minor">
+            <a:schemeClr val="lt1"/>
+          </a:fontRef>
+        </p:style>
+        <p:txBody>
+          <a:bodyPr rtlCol="0" anchor="ctr"/>
+          <a:lstStyle/>
+          <a:p>
+            <a:pPr algn="ctr"/>
+            <a:endParaRPr lang="en-GB"/>
+          </a:p>
+        </p:txBody>
+      </p:sp>
     </p:spTree>
     <p:extLst>
       <p:ext uri="{BB962C8B-B14F-4D97-AF65-F5344CB8AC3E}">
-        <p14:creationId xmlns:p14="http://schemas.microsoft.com/office/powerpoint/2010/main" val="1297244950"/>
+        <p14:creationId xmlns:p14="http://schemas.microsoft.com/office/powerpoint/2010/main" val="413122751"/>
       </p:ext>
     </p:extLst>
   </p:cSld>
@@ -6520,7 +6617,7 @@
           <p:cNvPr id="5" name="Picture 4">
             <a:extLst>
               <a:ext uri="{FF2B5EF4-FFF2-40B4-BE49-F238E27FC236}">
-                <a16:creationId xmlns:a16="http://schemas.microsoft.com/office/drawing/2014/main" id="{139D0F41-2BCE-4CFA-3F27-BADC2FFC52E3}"/>
+                <a16:creationId xmlns:a16="http://schemas.microsoft.com/office/drawing/2014/main" id="{3A4A5351-59E1-EEE7-F7DE-B2E5C355C7F2}"/>
               </a:ext>
             </a:extLst>
           </p:cNvPr>
@@ -6531,274 +6628,14 @@
         </p:nvPicPr>
         <p:blipFill>
           <a:blip r:embed="rId2"/>
-          <a:srcRect r="22711"/>
           <a:stretch>
             <a:fillRect/>
           </a:stretch>
         </p:blipFill>
         <p:spPr>
           <a:xfrm>
-            <a:off x="0" y="2221598"/>
-            <a:ext cx="11838591" cy="3033795"/>
-          </a:xfrm>
-          <a:prstGeom prst="rect">
-            <a:avLst/>
-          </a:prstGeom>
-        </p:spPr>
-      </p:pic>
-      <p:cxnSp>
-        <p:nvCxnSpPr>
-          <p:cNvPr id="7" name="Straight Arrow Connector 6">
-            <a:extLst>
-              <a:ext uri="{FF2B5EF4-FFF2-40B4-BE49-F238E27FC236}">
-                <a16:creationId xmlns:a16="http://schemas.microsoft.com/office/drawing/2014/main" id="{5BCEEA32-8AE9-45C7-B0D3-916E6FA72FA7}"/>
-              </a:ext>
-            </a:extLst>
-          </p:cNvPr>
-          <p:cNvCxnSpPr/>
-          <p:nvPr/>
-        </p:nvCxnSpPr>
-        <p:spPr>
-          <a:xfrm flipH="1">
-            <a:off x="8142973" y="1443789"/>
-            <a:ext cx="962526" cy="1780674"/>
-          </a:xfrm>
-          <a:prstGeom prst="straightConnector1">
-            <a:avLst/>
-          </a:prstGeom>
-          <a:ln>
-            <a:tailEnd type="triangle"/>
-          </a:ln>
-        </p:spPr>
-        <p:style>
-          <a:lnRef idx="1">
-            <a:schemeClr val="accent1"/>
-          </a:lnRef>
-          <a:fillRef idx="0">
-            <a:schemeClr val="accent1"/>
-          </a:fillRef>
-          <a:effectRef idx="0">
-            <a:schemeClr val="accent1"/>
-          </a:effectRef>
-          <a:fontRef idx="minor">
-            <a:schemeClr val="tx1"/>
-          </a:fontRef>
-        </p:style>
-      </p:cxnSp>
-      <p:sp>
-        <p:nvSpPr>
-          <p:cNvPr id="8" name="Rectangle 7">
-            <a:extLst>
-              <a:ext uri="{FF2B5EF4-FFF2-40B4-BE49-F238E27FC236}">
-                <a16:creationId xmlns:a16="http://schemas.microsoft.com/office/drawing/2014/main" id="{8D12BD08-4843-3D98-A10C-FB5EF4B87A19}"/>
-              </a:ext>
-            </a:extLst>
-          </p:cNvPr>
-          <p:cNvSpPr/>
-          <p:nvPr/>
-        </p:nvSpPr>
-        <p:spPr>
-          <a:xfrm>
-            <a:off x="6517345" y="376588"/>
-            <a:ext cx="4598793" cy="970737"/>
-          </a:xfrm>
-          <a:prstGeom prst="rect">
-            <a:avLst/>
-          </a:prstGeom>
-          <a:solidFill>
-            <a:schemeClr val="accent4">
-              <a:lumMod val="40000"/>
-              <a:lumOff val="60000"/>
-            </a:schemeClr>
-          </a:solidFill>
-        </p:spPr>
-        <p:style>
-          <a:lnRef idx="2">
-            <a:schemeClr val="accent1">
-              <a:shade val="50000"/>
-            </a:schemeClr>
-          </a:lnRef>
-          <a:fillRef idx="1">
-            <a:schemeClr val="accent1"/>
-          </a:fillRef>
-          <a:effectRef idx="0">
-            <a:schemeClr val="accent1"/>
-          </a:effectRef>
-          <a:fontRef idx="minor">
-            <a:schemeClr val="lt1"/>
-          </a:fontRef>
-        </p:style>
-        <p:txBody>
-          <a:bodyPr rtlCol="0" anchor="ctr"/>
-          <a:lstStyle/>
-          <a:p>
-            <a:pPr algn="ctr"/>
-            <a:r>
-              <a:rPr lang="en-IE" dirty="0">
-                <a:solidFill>
-                  <a:schemeClr val="tx1"/>
-                </a:solidFill>
-              </a:rPr>
-              <a:t>Constructors passes parameters back to base / abstract class</a:t>
-            </a:r>
-          </a:p>
-        </p:txBody>
-      </p:sp>
-      <p:sp>
-        <p:nvSpPr>
-          <p:cNvPr id="9" name="Rectangle 8">
-            <a:extLst>
-              <a:ext uri="{FF2B5EF4-FFF2-40B4-BE49-F238E27FC236}">
-                <a16:creationId xmlns:a16="http://schemas.microsoft.com/office/drawing/2014/main" id="{7822A24E-A95F-B722-DC7D-48C429948DB1}"/>
-              </a:ext>
-            </a:extLst>
-          </p:cNvPr>
-          <p:cNvSpPr/>
-          <p:nvPr/>
-        </p:nvSpPr>
-        <p:spPr>
-          <a:xfrm>
-            <a:off x="721333" y="2752825"/>
-            <a:ext cx="4598793" cy="385010"/>
-          </a:xfrm>
-          <a:prstGeom prst="rect">
-            <a:avLst/>
-          </a:prstGeom>
-          <a:solidFill>
-            <a:schemeClr val="accent4">
-              <a:lumMod val="40000"/>
-              <a:lumOff val="60000"/>
-            </a:schemeClr>
-          </a:solidFill>
-        </p:spPr>
-        <p:style>
-          <a:lnRef idx="2">
-            <a:schemeClr val="accent1">
-              <a:shade val="50000"/>
-            </a:schemeClr>
-          </a:lnRef>
-          <a:fillRef idx="1">
-            <a:schemeClr val="accent1"/>
-          </a:fillRef>
-          <a:effectRef idx="0">
-            <a:schemeClr val="accent1"/>
-          </a:effectRef>
-          <a:fontRef idx="minor">
-            <a:schemeClr val="lt1"/>
-          </a:fontRef>
-        </p:style>
-        <p:txBody>
-          <a:bodyPr rtlCol="0" anchor="ctr"/>
-          <a:lstStyle/>
-          <a:p>
-            <a:pPr algn="ctr"/>
-            <a:r>
-              <a:rPr lang="en-IE" dirty="0">
-                <a:solidFill>
-                  <a:schemeClr val="tx1"/>
-                </a:solidFill>
-              </a:rPr>
-              <a:t>Removed original constructor</a:t>
-            </a:r>
-          </a:p>
-        </p:txBody>
-      </p:sp>
-      <p:cxnSp>
-        <p:nvCxnSpPr>
-          <p:cNvPr id="11" name="Straight Connector 10">
-            <a:extLst>
-              <a:ext uri="{FF2B5EF4-FFF2-40B4-BE49-F238E27FC236}">
-                <a16:creationId xmlns:a16="http://schemas.microsoft.com/office/drawing/2014/main" id="{F649D702-9337-98B7-1A4A-A8880FE0A019}"/>
-              </a:ext>
-            </a:extLst>
-          </p:cNvPr>
-          <p:cNvCxnSpPr/>
-          <p:nvPr/>
-        </p:nvCxnSpPr>
-        <p:spPr>
-          <a:xfrm>
-            <a:off x="1155032" y="3936733"/>
-            <a:ext cx="1309035" cy="1039528"/>
-          </a:xfrm>
-          <a:prstGeom prst="line">
-            <a:avLst/>
-          </a:prstGeom>
-        </p:spPr>
-        <p:style>
-          <a:lnRef idx="1">
-            <a:schemeClr val="accent1"/>
-          </a:lnRef>
-          <a:fillRef idx="0">
-            <a:schemeClr val="accent1"/>
-          </a:fillRef>
-          <a:effectRef idx="0">
-            <a:schemeClr val="accent1"/>
-          </a:effectRef>
-          <a:fontRef idx="minor">
-            <a:schemeClr val="tx1"/>
-          </a:fontRef>
-        </p:style>
-      </p:cxnSp>
-      <p:cxnSp>
-        <p:nvCxnSpPr>
-          <p:cNvPr id="13" name="Straight Connector 12">
-            <a:extLst>
-              <a:ext uri="{FF2B5EF4-FFF2-40B4-BE49-F238E27FC236}">
-                <a16:creationId xmlns:a16="http://schemas.microsoft.com/office/drawing/2014/main" id="{2ABDEB68-668A-2818-C2D7-29410C7BD490}"/>
-              </a:ext>
-            </a:extLst>
-          </p:cNvPr>
-          <p:cNvCxnSpPr/>
-          <p:nvPr/>
-        </p:nvCxnSpPr>
-        <p:spPr>
-          <a:xfrm flipH="1">
-            <a:off x="1318661" y="3917482"/>
-            <a:ext cx="1251284" cy="1029903"/>
-          </a:xfrm>
-          <a:prstGeom prst="line">
-            <a:avLst/>
-          </a:prstGeom>
-        </p:spPr>
-        <p:style>
-          <a:lnRef idx="1">
-            <a:schemeClr val="accent1"/>
-          </a:lnRef>
-          <a:fillRef idx="0">
-            <a:schemeClr val="accent1"/>
-          </a:fillRef>
-          <a:effectRef idx="0">
-            <a:schemeClr val="accent1"/>
-          </a:effectRef>
-          <a:fontRef idx="minor">
-            <a:schemeClr val="tx1"/>
-          </a:fontRef>
-        </p:style>
-      </p:cxnSp>
-      <p:pic>
-        <p:nvPicPr>
-          <p:cNvPr id="15" name="Picture 14">
-            <a:extLst>
-              <a:ext uri="{FF2B5EF4-FFF2-40B4-BE49-F238E27FC236}">
-                <a16:creationId xmlns:a16="http://schemas.microsoft.com/office/drawing/2014/main" id="{9758352B-379C-3492-D74D-118ECBCC6F72}"/>
-              </a:ext>
-            </a:extLst>
-          </p:cNvPr>
-          <p:cNvPicPr>
-            <a:picLocks noChangeAspect="1"/>
-          </p:cNvPicPr>
-          <p:nvPr/>
-        </p:nvPicPr>
-        <p:blipFill>
-          <a:blip r:embed="rId3"/>
-          <a:stretch>
-            <a:fillRect/>
-          </a:stretch>
-        </p:blipFill>
-        <p:spPr>
-          <a:xfrm>
-            <a:off x="919181" y="5255393"/>
-            <a:ext cx="10000228" cy="1330609"/>
+            <a:off x="288892" y="258471"/>
+            <a:ext cx="11532978" cy="5795820"/>
           </a:xfrm>
           <a:prstGeom prst="rect">
             <a:avLst/>
@@ -6808,7 +6645,7 @@
     </p:spTree>
     <p:extLst>
       <p:ext uri="{BB962C8B-B14F-4D97-AF65-F5344CB8AC3E}">
-        <p14:creationId xmlns:p14="http://schemas.microsoft.com/office/powerpoint/2010/main" val="320270045"/>
+        <p14:creationId xmlns:p14="http://schemas.microsoft.com/office/powerpoint/2010/main" val="1297244950"/>
       </p:ext>
     </p:extLst>
   </p:cSld>
@@ -6840,7 +6677,7 @@
           <p:cNvPr id="5" name="Picture 4">
             <a:extLst>
               <a:ext uri="{FF2B5EF4-FFF2-40B4-BE49-F238E27FC236}">
-                <a16:creationId xmlns:a16="http://schemas.microsoft.com/office/drawing/2014/main" id="{CCE872A0-DE02-0E89-6C3F-8E79EFD600CF}"/>
+                <a16:creationId xmlns:a16="http://schemas.microsoft.com/office/drawing/2014/main" id="{139D0F41-2BCE-4CFA-3F27-BADC2FFC52E3}"/>
               </a:ext>
             </a:extLst>
           </p:cNvPr>
@@ -6851,26 +6688,66 @@
         </p:nvPicPr>
         <p:blipFill>
           <a:blip r:embed="rId2"/>
+          <a:srcRect r="22711"/>
           <a:stretch>
             <a:fillRect/>
           </a:stretch>
         </p:blipFill>
         <p:spPr>
           <a:xfrm>
-            <a:off x="477516" y="1087861"/>
-            <a:ext cx="5019048" cy="4104762"/>
+            <a:off x="0" y="2221598"/>
+            <a:ext cx="11838591" cy="3033795"/>
           </a:xfrm>
           <a:prstGeom prst="rect">
             <a:avLst/>
           </a:prstGeom>
         </p:spPr>
       </p:pic>
+      <p:cxnSp>
+        <p:nvCxnSpPr>
+          <p:cNvPr id="7" name="Straight Arrow Connector 6">
+            <a:extLst>
+              <a:ext uri="{FF2B5EF4-FFF2-40B4-BE49-F238E27FC236}">
+                <a16:creationId xmlns:a16="http://schemas.microsoft.com/office/drawing/2014/main" id="{5BCEEA32-8AE9-45C7-B0D3-916E6FA72FA7}"/>
+              </a:ext>
+            </a:extLst>
+          </p:cNvPr>
+          <p:cNvCxnSpPr/>
+          <p:nvPr/>
+        </p:nvCxnSpPr>
+        <p:spPr>
+          <a:xfrm flipH="1">
+            <a:off x="8142973" y="1443789"/>
+            <a:ext cx="962526" cy="1780674"/>
+          </a:xfrm>
+          <a:prstGeom prst="straightConnector1">
+            <a:avLst/>
+          </a:prstGeom>
+          <a:ln>
+            <a:tailEnd type="triangle"/>
+          </a:ln>
+        </p:spPr>
+        <p:style>
+          <a:lnRef idx="1">
+            <a:schemeClr val="accent1"/>
+          </a:lnRef>
+          <a:fillRef idx="0">
+            <a:schemeClr val="accent1"/>
+          </a:fillRef>
+          <a:effectRef idx="0">
+            <a:schemeClr val="accent1"/>
+          </a:effectRef>
+          <a:fontRef idx="minor">
+            <a:schemeClr val="tx1"/>
+          </a:fontRef>
+        </p:style>
+      </p:cxnSp>
       <p:sp>
         <p:nvSpPr>
-          <p:cNvPr id="6" name="Rectangle 5">
-            <a:extLst>
-              <a:ext uri="{FF2B5EF4-FFF2-40B4-BE49-F238E27FC236}">
-                <a16:creationId xmlns:a16="http://schemas.microsoft.com/office/drawing/2014/main" id="{3FFAA2D0-E045-DA01-6755-0697450E05A2}"/>
+          <p:cNvPr id="8" name="Rectangle 7">
+            <a:extLst>
+              <a:ext uri="{FF2B5EF4-FFF2-40B4-BE49-F238E27FC236}">
+                <a16:creationId xmlns:a16="http://schemas.microsoft.com/office/drawing/2014/main" id="{8D12BD08-4843-3D98-A10C-FB5EF4B87A19}"/>
               </a:ext>
             </a:extLst>
           </p:cNvPr>
@@ -6879,7 +6756,7 @@
         </p:nvSpPr>
         <p:spPr>
           <a:xfrm>
-            <a:off x="5496564" y="4467325"/>
+            <a:off x="6517345" y="376588"/>
             <a:ext cx="4598793" cy="970737"/>
           </a:xfrm>
           <a:prstGeom prst="rect">
@@ -6919,17 +6796,76 @@
                   <a:schemeClr val="tx1"/>
                 </a:solidFill>
               </a:rPr>
-              <a:t>Add this to the abstract class</a:t>
+              <a:t>Constructors passes parameters back to base / abstract class</a:t>
+            </a:r>
+          </a:p>
+        </p:txBody>
+      </p:sp>
+      <p:sp>
+        <p:nvSpPr>
+          <p:cNvPr id="9" name="Rectangle 8">
+            <a:extLst>
+              <a:ext uri="{FF2B5EF4-FFF2-40B4-BE49-F238E27FC236}">
+                <a16:creationId xmlns:a16="http://schemas.microsoft.com/office/drawing/2014/main" id="{7822A24E-A95F-B722-DC7D-48C429948DB1}"/>
+              </a:ext>
+            </a:extLst>
+          </p:cNvPr>
+          <p:cNvSpPr/>
+          <p:nvPr/>
+        </p:nvSpPr>
+        <p:spPr>
+          <a:xfrm>
+            <a:off x="721333" y="2752825"/>
+            <a:ext cx="4598793" cy="385010"/>
+          </a:xfrm>
+          <a:prstGeom prst="rect">
+            <a:avLst/>
+          </a:prstGeom>
+          <a:solidFill>
+            <a:schemeClr val="accent4">
+              <a:lumMod val="40000"/>
+              <a:lumOff val="60000"/>
+            </a:schemeClr>
+          </a:solidFill>
+        </p:spPr>
+        <p:style>
+          <a:lnRef idx="2">
+            <a:schemeClr val="accent1">
+              <a:shade val="50000"/>
+            </a:schemeClr>
+          </a:lnRef>
+          <a:fillRef idx="1">
+            <a:schemeClr val="accent1"/>
+          </a:fillRef>
+          <a:effectRef idx="0">
+            <a:schemeClr val="accent1"/>
+          </a:effectRef>
+          <a:fontRef idx="minor">
+            <a:schemeClr val="lt1"/>
+          </a:fontRef>
+        </p:style>
+        <p:txBody>
+          <a:bodyPr rtlCol="0" anchor="ctr"/>
+          <a:lstStyle/>
+          <a:p>
+            <a:pPr algn="ctr"/>
+            <a:r>
+              <a:rPr lang="en-IE" dirty="0">
+                <a:solidFill>
+                  <a:schemeClr val="tx1"/>
+                </a:solidFill>
+              </a:rPr>
+              <a:t>Removed original constructor</a:t>
             </a:r>
           </a:p>
         </p:txBody>
       </p:sp>
       <p:cxnSp>
         <p:nvCxnSpPr>
-          <p:cNvPr id="8" name="Straight Arrow Connector 7">
-            <a:extLst>
-              <a:ext uri="{FF2B5EF4-FFF2-40B4-BE49-F238E27FC236}">
-                <a16:creationId xmlns:a16="http://schemas.microsoft.com/office/drawing/2014/main" id="{F78D1E40-BBE5-EA01-A410-7D34A0284CA4}"/>
+          <p:cNvPr id="11" name="Straight Connector 10">
+            <a:extLst>
+              <a:ext uri="{FF2B5EF4-FFF2-40B4-BE49-F238E27FC236}">
+                <a16:creationId xmlns:a16="http://schemas.microsoft.com/office/drawing/2014/main" id="{F649D702-9337-98B7-1A4A-A8880FE0A019}"/>
               </a:ext>
             </a:extLst>
           </p:cNvPr>
@@ -6937,16 +6873,13 @@
           <p:nvPr/>
         </p:nvCxnSpPr>
         <p:spPr>
-          <a:xfrm flipH="1">
-            <a:off x="4119613" y="5014762"/>
-            <a:ext cx="1232033" cy="0"/>
-          </a:xfrm>
-          <a:prstGeom prst="straightConnector1">
-            <a:avLst/>
-          </a:prstGeom>
-          <a:ln>
-            <a:tailEnd type="triangle"/>
-          </a:ln>
+          <a:xfrm>
+            <a:off x="1155032" y="3936733"/>
+            <a:ext cx="1309035" cy="1039528"/>
+          </a:xfrm>
+          <a:prstGeom prst="line">
+            <a:avLst/>
+          </a:prstGeom>
         </p:spPr>
         <p:style>
           <a:lnRef idx="1">
@@ -6963,10 +6896,76 @@
           </a:fontRef>
         </p:style>
       </p:cxnSp>
+      <p:cxnSp>
+        <p:nvCxnSpPr>
+          <p:cNvPr id="13" name="Straight Connector 12">
+            <a:extLst>
+              <a:ext uri="{FF2B5EF4-FFF2-40B4-BE49-F238E27FC236}">
+                <a16:creationId xmlns:a16="http://schemas.microsoft.com/office/drawing/2014/main" id="{2ABDEB68-668A-2818-C2D7-29410C7BD490}"/>
+              </a:ext>
+            </a:extLst>
+          </p:cNvPr>
+          <p:cNvCxnSpPr/>
+          <p:nvPr/>
+        </p:nvCxnSpPr>
+        <p:spPr>
+          <a:xfrm flipH="1">
+            <a:off x="1318661" y="3917482"/>
+            <a:ext cx="1251284" cy="1029903"/>
+          </a:xfrm>
+          <a:prstGeom prst="line">
+            <a:avLst/>
+          </a:prstGeom>
+        </p:spPr>
+        <p:style>
+          <a:lnRef idx="1">
+            <a:schemeClr val="accent1"/>
+          </a:lnRef>
+          <a:fillRef idx="0">
+            <a:schemeClr val="accent1"/>
+          </a:fillRef>
+          <a:effectRef idx="0">
+            <a:schemeClr val="accent1"/>
+          </a:effectRef>
+          <a:fontRef idx="minor">
+            <a:schemeClr val="tx1"/>
+          </a:fontRef>
+        </p:style>
+      </p:cxnSp>
+      <p:pic>
+        <p:nvPicPr>
+          <p:cNvPr id="15" name="Picture 14">
+            <a:extLst>
+              <a:ext uri="{FF2B5EF4-FFF2-40B4-BE49-F238E27FC236}">
+                <a16:creationId xmlns:a16="http://schemas.microsoft.com/office/drawing/2014/main" id="{9758352B-379C-3492-D74D-118ECBCC6F72}"/>
+              </a:ext>
+            </a:extLst>
+          </p:cNvPr>
+          <p:cNvPicPr>
+            <a:picLocks noChangeAspect="1"/>
+          </p:cNvPicPr>
+          <p:nvPr/>
+        </p:nvPicPr>
+        <p:blipFill>
+          <a:blip r:embed="rId3"/>
+          <a:stretch>
+            <a:fillRect/>
+          </a:stretch>
+        </p:blipFill>
+        <p:spPr>
+          <a:xfrm>
+            <a:off x="919181" y="5255393"/>
+            <a:ext cx="10000228" cy="1330609"/>
+          </a:xfrm>
+          <a:prstGeom prst="rect">
+            <a:avLst/>
+          </a:prstGeom>
+        </p:spPr>
+      </p:pic>
     </p:spTree>
     <p:extLst>
       <p:ext uri="{BB962C8B-B14F-4D97-AF65-F5344CB8AC3E}">
-        <p14:creationId xmlns:p14="http://schemas.microsoft.com/office/powerpoint/2010/main" val="2164239829"/>
+        <p14:creationId xmlns:p14="http://schemas.microsoft.com/office/powerpoint/2010/main" val="320270045"/>
       </p:ext>
     </p:extLst>
   </p:cSld>
@@ -6998,7 +6997,7 @@
           <p:cNvPr id="5" name="Picture 4">
             <a:extLst>
               <a:ext uri="{FF2B5EF4-FFF2-40B4-BE49-F238E27FC236}">
-                <a16:creationId xmlns:a16="http://schemas.microsoft.com/office/drawing/2014/main" id="{BC87A773-B15B-C6B9-F10F-FECF22FDC71E}"/>
+                <a16:creationId xmlns:a16="http://schemas.microsoft.com/office/drawing/2014/main" id="{CCE872A0-DE02-0E89-6C3F-8E79EFD600CF}"/>
               </a:ext>
             </a:extLst>
           </p:cNvPr>
@@ -7015,8 +7014,8 @@
         </p:blipFill>
         <p:spPr>
           <a:xfrm>
-            <a:off x="195713" y="2528354"/>
-            <a:ext cx="11800573" cy="1801292"/>
+            <a:off x="477516" y="1087861"/>
+            <a:ext cx="5019048" cy="4104762"/>
           </a:xfrm>
           <a:prstGeom prst="rect">
             <a:avLst/>
@@ -7028,7 +7027,7 @@
           <p:cNvPr id="6" name="Rectangle 5">
             <a:extLst>
               <a:ext uri="{FF2B5EF4-FFF2-40B4-BE49-F238E27FC236}">
-                <a16:creationId xmlns:a16="http://schemas.microsoft.com/office/drawing/2014/main" id="{37E5071C-60CB-1C23-4ED8-7FF46721D6BF}"/>
+                <a16:creationId xmlns:a16="http://schemas.microsoft.com/office/drawing/2014/main" id="{3FFAA2D0-E045-DA01-6755-0697450E05A2}"/>
               </a:ext>
             </a:extLst>
           </p:cNvPr>
@@ -7037,7 +7036,7 @@
         </p:nvSpPr>
         <p:spPr>
           <a:xfrm>
-            <a:off x="597305" y="877102"/>
+            <a:off x="5496564" y="4467325"/>
             <a:ext cx="4598793" cy="970737"/>
           </a:xfrm>
           <a:prstGeom prst="rect">
@@ -7077,64 +7076,17 @@
                   <a:schemeClr val="tx1"/>
                 </a:solidFill>
               </a:rPr>
-              <a:t>Modify this to implement abstract method from base class</a:t>
+              <a:t>Add this to the abstract class</a:t>
             </a:r>
-          </a:p>
-        </p:txBody>
-      </p:sp>
-      <p:sp>
-        <p:nvSpPr>
-          <p:cNvPr id="7" name="Rectangle 6">
-            <a:extLst>
-              <a:ext uri="{FF2B5EF4-FFF2-40B4-BE49-F238E27FC236}">
-                <a16:creationId xmlns:a16="http://schemas.microsoft.com/office/drawing/2014/main" id="{5F5991C2-C11A-1CFF-EA61-74152318C84C}"/>
-              </a:ext>
-            </a:extLst>
-          </p:cNvPr>
-          <p:cNvSpPr/>
-          <p:nvPr/>
-        </p:nvSpPr>
-        <p:spPr>
-          <a:xfrm>
-            <a:off x="1222411" y="2666198"/>
-            <a:ext cx="943276" cy="259882"/>
-          </a:xfrm>
-          <a:prstGeom prst="rect">
-            <a:avLst/>
-          </a:prstGeom>
-          <a:noFill/>
-        </p:spPr>
-        <p:style>
-          <a:lnRef idx="2">
-            <a:schemeClr val="accent1">
-              <a:shade val="15000"/>
-            </a:schemeClr>
-          </a:lnRef>
-          <a:fillRef idx="1">
-            <a:schemeClr val="accent1"/>
-          </a:fillRef>
-          <a:effectRef idx="0">
-            <a:schemeClr val="accent1"/>
-          </a:effectRef>
-          <a:fontRef idx="minor">
-            <a:schemeClr val="lt1"/>
-          </a:fontRef>
-        </p:style>
-        <p:txBody>
-          <a:bodyPr rtlCol="0" anchor="ctr"/>
-          <a:lstStyle/>
-          <a:p>
-            <a:pPr algn="ctr"/>
-            <a:endParaRPr lang="en-GB"/>
           </a:p>
         </p:txBody>
       </p:sp>
       <p:cxnSp>
         <p:nvCxnSpPr>
-          <p:cNvPr id="9" name="Straight Arrow Connector 8">
-            <a:extLst>
-              <a:ext uri="{FF2B5EF4-FFF2-40B4-BE49-F238E27FC236}">
-                <a16:creationId xmlns:a16="http://schemas.microsoft.com/office/drawing/2014/main" id="{75DDC459-390A-9DD4-94C4-0CDEB03270BE}"/>
+          <p:cNvPr id="8" name="Straight Arrow Connector 7">
+            <a:extLst>
+              <a:ext uri="{FF2B5EF4-FFF2-40B4-BE49-F238E27FC236}">
+                <a16:creationId xmlns:a16="http://schemas.microsoft.com/office/drawing/2014/main" id="{F78D1E40-BBE5-EA01-A410-7D34A0284CA4}"/>
               </a:ext>
             </a:extLst>
           </p:cNvPr>
@@ -7143,8 +7095,8 @@
         </p:nvCxnSpPr>
         <p:spPr>
           <a:xfrm flipH="1">
-            <a:off x="1973179" y="1847839"/>
-            <a:ext cx="356135" cy="500725"/>
+            <a:off x="4119613" y="5014762"/>
+            <a:ext cx="1232033" cy="0"/>
           </a:xfrm>
           <a:prstGeom prst="straightConnector1">
             <a:avLst/>
@@ -7171,7 +7123,7 @@
     </p:spTree>
     <p:extLst>
       <p:ext uri="{BB962C8B-B14F-4D97-AF65-F5344CB8AC3E}">
-        <p14:creationId xmlns:p14="http://schemas.microsoft.com/office/powerpoint/2010/main" val="4081973646"/>
+        <p14:creationId xmlns:p14="http://schemas.microsoft.com/office/powerpoint/2010/main" val="2164239829"/>
       </p:ext>
     </p:extLst>
   </p:cSld>
@@ -7200,10 +7152,10 @@
       </p:grpSpPr>
       <p:pic>
         <p:nvPicPr>
-          <p:cNvPr id="7" name="Picture 6">
-            <a:extLst>
-              <a:ext uri="{FF2B5EF4-FFF2-40B4-BE49-F238E27FC236}">
-                <a16:creationId xmlns:a16="http://schemas.microsoft.com/office/drawing/2014/main" id="{1997F211-3BBA-8C38-8964-235CE5B1473B}"/>
+          <p:cNvPr id="5" name="Picture 4">
+            <a:extLst>
+              <a:ext uri="{FF2B5EF4-FFF2-40B4-BE49-F238E27FC236}">
+                <a16:creationId xmlns:a16="http://schemas.microsoft.com/office/drawing/2014/main" id="{BC87A773-B15B-C6B9-F10F-FECF22FDC71E}"/>
               </a:ext>
             </a:extLst>
           </p:cNvPr>
@@ -7220,50 +7172,126 @@
         </p:blipFill>
         <p:spPr>
           <a:xfrm>
-            <a:off x="2788682" y="245579"/>
-            <a:ext cx="5492670" cy="2218487"/>
+            <a:off x="195713" y="2528354"/>
+            <a:ext cx="11800573" cy="1801292"/>
           </a:xfrm>
           <a:prstGeom prst="rect">
             <a:avLst/>
           </a:prstGeom>
         </p:spPr>
       </p:pic>
-      <p:pic>
-        <p:nvPicPr>
-          <p:cNvPr id="9" name="Picture 8">
-            <a:extLst>
-              <a:ext uri="{FF2B5EF4-FFF2-40B4-BE49-F238E27FC236}">
-                <a16:creationId xmlns:a16="http://schemas.microsoft.com/office/drawing/2014/main" id="{180957E3-89DC-CFDF-3344-0D3E9771B5B0}"/>
-              </a:ext>
-            </a:extLst>
-          </p:cNvPr>
-          <p:cNvPicPr>
-            <a:picLocks noChangeAspect="1"/>
-          </p:cNvPicPr>
-          <p:nvPr/>
-        </p:nvPicPr>
-        <p:blipFill>
-          <a:blip r:embed="rId3"/>
-          <a:stretch>
-            <a:fillRect/>
-          </a:stretch>
-        </p:blipFill>
-        <p:spPr>
-          <a:xfrm>
-            <a:off x="683211" y="4117466"/>
-            <a:ext cx="11271367" cy="1474812"/>
+      <p:sp>
+        <p:nvSpPr>
+          <p:cNvPr id="6" name="Rectangle 5">
+            <a:extLst>
+              <a:ext uri="{FF2B5EF4-FFF2-40B4-BE49-F238E27FC236}">
+                <a16:creationId xmlns:a16="http://schemas.microsoft.com/office/drawing/2014/main" id="{37E5071C-60CB-1C23-4ED8-7FF46721D6BF}"/>
+              </a:ext>
+            </a:extLst>
+          </p:cNvPr>
+          <p:cNvSpPr/>
+          <p:nvPr/>
+        </p:nvSpPr>
+        <p:spPr>
+          <a:xfrm>
+            <a:off x="597305" y="877102"/>
+            <a:ext cx="4598793" cy="970737"/>
           </a:xfrm>
           <a:prstGeom prst="rect">
             <a:avLst/>
           </a:prstGeom>
-        </p:spPr>
-      </p:pic>
+          <a:solidFill>
+            <a:schemeClr val="accent4">
+              <a:lumMod val="40000"/>
+              <a:lumOff val="60000"/>
+            </a:schemeClr>
+          </a:solidFill>
+        </p:spPr>
+        <p:style>
+          <a:lnRef idx="2">
+            <a:schemeClr val="accent1">
+              <a:shade val="50000"/>
+            </a:schemeClr>
+          </a:lnRef>
+          <a:fillRef idx="1">
+            <a:schemeClr val="accent1"/>
+          </a:fillRef>
+          <a:effectRef idx="0">
+            <a:schemeClr val="accent1"/>
+          </a:effectRef>
+          <a:fontRef idx="minor">
+            <a:schemeClr val="lt1"/>
+          </a:fontRef>
+        </p:style>
+        <p:txBody>
+          <a:bodyPr rtlCol="0" anchor="ctr"/>
+          <a:lstStyle/>
+          <a:p>
+            <a:pPr algn="ctr"/>
+            <a:r>
+              <a:rPr lang="en-IE" dirty="0">
+                <a:solidFill>
+                  <a:schemeClr val="tx1"/>
+                </a:solidFill>
+              </a:rPr>
+              <a:t>Modify this to implement abstract method from base class</a:t>
+            </a:r>
+          </a:p>
+        </p:txBody>
+      </p:sp>
+      <p:sp>
+        <p:nvSpPr>
+          <p:cNvPr id="7" name="Rectangle 6">
+            <a:extLst>
+              <a:ext uri="{FF2B5EF4-FFF2-40B4-BE49-F238E27FC236}">
+                <a16:creationId xmlns:a16="http://schemas.microsoft.com/office/drawing/2014/main" id="{5F5991C2-C11A-1CFF-EA61-74152318C84C}"/>
+              </a:ext>
+            </a:extLst>
+          </p:cNvPr>
+          <p:cNvSpPr/>
+          <p:nvPr/>
+        </p:nvSpPr>
+        <p:spPr>
+          <a:xfrm>
+            <a:off x="1222411" y="2666198"/>
+            <a:ext cx="943276" cy="259882"/>
+          </a:xfrm>
+          <a:prstGeom prst="rect">
+            <a:avLst/>
+          </a:prstGeom>
+          <a:noFill/>
+        </p:spPr>
+        <p:style>
+          <a:lnRef idx="2">
+            <a:schemeClr val="accent1">
+              <a:shade val="15000"/>
+            </a:schemeClr>
+          </a:lnRef>
+          <a:fillRef idx="1">
+            <a:schemeClr val="accent1"/>
+          </a:fillRef>
+          <a:effectRef idx="0">
+            <a:schemeClr val="accent1"/>
+          </a:effectRef>
+          <a:fontRef idx="minor">
+            <a:schemeClr val="lt1"/>
+          </a:fontRef>
+        </p:style>
+        <p:txBody>
+          <a:bodyPr rtlCol="0" anchor="ctr"/>
+          <a:lstStyle/>
+          <a:p>
+            <a:pPr algn="ctr"/>
+            <a:endParaRPr lang="en-GB"/>
+          </a:p>
+        </p:txBody>
+      </p:sp>
       <p:cxnSp>
         <p:nvCxnSpPr>
-          <p:cNvPr id="11" name="Straight Arrow Connector 10">
-            <a:extLst>
-              <a:ext uri="{FF2B5EF4-FFF2-40B4-BE49-F238E27FC236}">
-                <a16:creationId xmlns:a16="http://schemas.microsoft.com/office/drawing/2014/main" id="{CEDED1B5-2B17-6F7B-829D-44E013B001C4}"/>
+          <p:cNvPr id="9" name="Straight Arrow Connector 8">
+            <a:extLst>
+              <a:ext uri="{FF2B5EF4-FFF2-40B4-BE49-F238E27FC236}">
+                <a16:creationId xmlns:a16="http://schemas.microsoft.com/office/drawing/2014/main" id="{75DDC459-390A-9DD4-94C4-0CDEB03270BE}"/>
               </a:ext>
             </a:extLst>
           </p:cNvPr>
@@ -7272,8 +7300,8 @@
         </p:nvCxnSpPr>
         <p:spPr>
           <a:xfrm flipH="1">
-            <a:off x="8412480" y="2645873"/>
-            <a:ext cx="644892" cy="1289786"/>
+            <a:off x="1973179" y="1847839"/>
+            <a:ext cx="356135" cy="500725"/>
           </a:xfrm>
           <a:prstGeom prst="straightConnector1">
             <a:avLst/>
@@ -7300,7 +7328,7 @@
     </p:spTree>
     <p:extLst>
       <p:ext uri="{BB962C8B-B14F-4D97-AF65-F5344CB8AC3E}">
-        <p14:creationId xmlns:p14="http://schemas.microsoft.com/office/powerpoint/2010/main" val="4142992940"/>
+        <p14:creationId xmlns:p14="http://schemas.microsoft.com/office/powerpoint/2010/main" val="4081973646"/>
       </p:ext>
     </p:extLst>
   </p:cSld>
@@ -7332,7 +7360,7 @@
           <p:cNvPr id="2" name="Picture 1">
             <a:extLst>
               <a:ext uri="{FF2B5EF4-FFF2-40B4-BE49-F238E27FC236}">
-                <a16:creationId xmlns:a16="http://schemas.microsoft.com/office/drawing/2014/main" id="{5DB1C7BB-3149-40D6-8584-80589B4308F5}"/>
+                <a16:creationId xmlns:a16="http://schemas.microsoft.com/office/drawing/2014/main" id="{BE757A81-DE4F-408D-9AC1-C2C3D502802E}"/>
               </a:ext>
             </a:extLst>
           </p:cNvPr>
@@ -7349,8 +7377,8 @@
         </p:blipFill>
         <p:spPr>
           <a:xfrm>
-            <a:off x="1406211" y="500062"/>
-            <a:ext cx="9197237" cy="5857875"/>
+            <a:off x="1657270" y="463271"/>
+            <a:ext cx="8877460" cy="5737503"/>
           </a:xfrm>
           <a:prstGeom prst="rect">
             <a:avLst/>
@@ -7360,7 +7388,7 @@
     </p:spTree>
     <p:extLst>
       <p:ext uri="{BB962C8B-B14F-4D97-AF65-F5344CB8AC3E}">
-        <p14:creationId xmlns:p14="http://schemas.microsoft.com/office/powerpoint/2010/main" val="488773756"/>
+        <p14:creationId xmlns:p14="http://schemas.microsoft.com/office/powerpoint/2010/main" val="2661305381"/>
       </p:ext>
     </p:extLst>
   </p:cSld>
@@ -7389,10 +7417,10 @@
       </p:grpSpPr>
       <p:pic>
         <p:nvPicPr>
-          <p:cNvPr id="5" name="Picture 4">
-            <a:extLst>
-              <a:ext uri="{FF2B5EF4-FFF2-40B4-BE49-F238E27FC236}">
-                <a16:creationId xmlns:a16="http://schemas.microsoft.com/office/drawing/2014/main" id="{481F9B75-EC1C-AF42-3906-1901803A60FE}"/>
+          <p:cNvPr id="7" name="Picture 6">
+            <a:extLst>
+              <a:ext uri="{FF2B5EF4-FFF2-40B4-BE49-F238E27FC236}">
+                <a16:creationId xmlns:a16="http://schemas.microsoft.com/office/drawing/2014/main" id="{1997F211-3BBA-8C38-8964-235CE5B1473B}"/>
               </a:ext>
             </a:extLst>
           </p:cNvPr>
@@ -7409,8 +7437,8 @@
         </p:blipFill>
         <p:spPr>
           <a:xfrm>
-            <a:off x="1955646" y="443463"/>
-            <a:ext cx="7746619" cy="4369441"/>
+            <a:off x="2788682" y="245579"/>
+            <a:ext cx="5492670" cy="2218487"/>
           </a:xfrm>
           <a:prstGeom prst="rect">
             <a:avLst/>
@@ -7419,10 +7447,10 @@
       </p:pic>
       <p:pic>
         <p:nvPicPr>
-          <p:cNvPr id="6" name="Picture 5">
-            <a:extLst>
-              <a:ext uri="{FF2B5EF4-FFF2-40B4-BE49-F238E27FC236}">
-                <a16:creationId xmlns:a16="http://schemas.microsoft.com/office/drawing/2014/main" id="{304B81AC-8435-34BE-CC4E-BC52762723C9}"/>
+          <p:cNvPr id="9" name="Picture 8">
+            <a:extLst>
+              <a:ext uri="{FF2B5EF4-FFF2-40B4-BE49-F238E27FC236}">
+                <a16:creationId xmlns:a16="http://schemas.microsoft.com/office/drawing/2014/main" id="{180957E3-89DC-CFDF-3344-0D3E9771B5B0}"/>
               </a:ext>
             </a:extLst>
           </p:cNvPr>
@@ -7439,7 +7467,7 @@
         </p:blipFill>
         <p:spPr>
           <a:xfrm>
-            <a:off x="460316" y="5070367"/>
+            <a:off x="683211" y="4117466"/>
             <a:ext cx="11271367" cy="1474812"/>
           </a:xfrm>
           <a:prstGeom prst="rect">
@@ -7447,10 +7475,49 @@
           </a:prstGeom>
         </p:spPr>
       </p:pic>
+      <p:cxnSp>
+        <p:nvCxnSpPr>
+          <p:cNvPr id="11" name="Straight Arrow Connector 10">
+            <a:extLst>
+              <a:ext uri="{FF2B5EF4-FFF2-40B4-BE49-F238E27FC236}">
+                <a16:creationId xmlns:a16="http://schemas.microsoft.com/office/drawing/2014/main" id="{CEDED1B5-2B17-6F7B-829D-44E013B001C4}"/>
+              </a:ext>
+            </a:extLst>
+          </p:cNvPr>
+          <p:cNvCxnSpPr/>
+          <p:nvPr/>
+        </p:nvCxnSpPr>
+        <p:spPr>
+          <a:xfrm flipH="1">
+            <a:off x="8412480" y="2645873"/>
+            <a:ext cx="644892" cy="1289786"/>
+          </a:xfrm>
+          <a:prstGeom prst="straightConnector1">
+            <a:avLst/>
+          </a:prstGeom>
+          <a:ln>
+            <a:tailEnd type="triangle"/>
+          </a:ln>
+        </p:spPr>
+        <p:style>
+          <a:lnRef idx="1">
+            <a:schemeClr val="accent1"/>
+          </a:lnRef>
+          <a:fillRef idx="0">
+            <a:schemeClr val="accent1"/>
+          </a:fillRef>
+          <a:effectRef idx="0">
+            <a:schemeClr val="accent1"/>
+          </a:effectRef>
+          <a:fontRef idx="minor">
+            <a:schemeClr val="tx1"/>
+          </a:fontRef>
+        </p:style>
+      </p:cxnSp>
     </p:spTree>
     <p:extLst>
       <p:ext uri="{BB962C8B-B14F-4D97-AF65-F5344CB8AC3E}">
-        <p14:creationId xmlns:p14="http://schemas.microsoft.com/office/powerpoint/2010/main" val="2096573669"/>
+        <p14:creationId xmlns:p14="http://schemas.microsoft.com/office/powerpoint/2010/main" val="4142992940"/>
       </p:ext>
     </p:extLst>
   </p:cSld>
@@ -7482,7 +7549,7 @@
           <p:cNvPr id="5" name="Picture 4">
             <a:extLst>
               <a:ext uri="{FF2B5EF4-FFF2-40B4-BE49-F238E27FC236}">
-                <a16:creationId xmlns:a16="http://schemas.microsoft.com/office/drawing/2014/main" id="{F730E9BC-3139-7AE8-8C1C-B46C88859466}"/>
+                <a16:creationId xmlns:a16="http://schemas.microsoft.com/office/drawing/2014/main" id="{481F9B75-EC1C-AF42-3906-1901803A60FE}"/>
               </a:ext>
             </a:extLst>
           </p:cNvPr>
@@ -7499,8 +7566,8 @@
         </p:blipFill>
         <p:spPr>
           <a:xfrm>
-            <a:off x="796260" y="423908"/>
-            <a:ext cx="4323809" cy="2333333"/>
+            <a:off x="1955646" y="443463"/>
+            <a:ext cx="7746619" cy="4369441"/>
           </a:xfrm>
           <a:prstGeom prst="rect">
             <a:avLst/>
@@ -7509,10 +7576,10 @@
       </p:pic>
       <p:pic>
         <p:nvPicPr>
-          <p:cNvPr id="7" name="Picture 6">
-            <a:extLst>
-              <a:ext uri="{FF2B5EF4-FFF2-40B4-BE49-F238E27FC236}">
-                <a16:creationId xmlns:a16="http://schemas.microsoft.com/office/drawing/2014/main" id="{3FFD7A3A-B6D6-3B43-D09C-DAB512C2BB7A}"/>
+          <p:cNvPr id="6" name="Picture 5">
+            <a:extLst>
+              <a:ext uri="{FF2B5EF4-FFF2-40B4-BE49-F238E27FC236}">
+                <a16:creationId xmlns:a16="http://schemas.microsoft.com/office/drawing/2014/main" id="{304B81AC-8435-34BE-CC4E-BC52762723C9}"/>
               </a:ext>
             </a:extLst>
           </p:cNvPr>
@@ -7529,280 +7596,18 @@
         </p:blipFill>
         <p:spPr>
           <a:xfrm>
-            <a:off x="962526" y="2847631"/>
-            <a:ext cx="8997895" cy="3372060"/>
+            <a:off x="460316" y="5070367"/>
+            <a:ext cx="11271367" cy="1474812"/>
           </a:xfrm>
           <a:prstGeom prst="rect">
             <a:avLst/>
           </a:prstGeom>
         </p:spPr>
       </p:pic>
-      <p:sp>
-        <p:nvSpPr>
-          <p:cNvPr id="8" name="Rectangle 7">
-            <a:extLst>
-              <a:ext uri="{FF2B5EF4-FFF2-40B4-BE49-F238E27FC236}">
-                <a16:creationId xmlns:a16="http://schemas.microsoft.com/office/drawing/2014/main" id="{90F462E6-A66D-9574-CD2C-9D4E65D2B39D}"/>
-              </a:ext>
-            </a:extLst>
-          </p:cNvPr>
-          <p:cNvSpPr/>
-          <p:nvPr/>
-        </p:nvSpPr>
-        <p:spPr>
-          <a:xfrm>
-            <a:off x="1318660" y="952901"/>
-            <a:ext cx="644893" cy="375385"/>
-          </a:xfrm>
-          <a:prstGeom prst="rect">
-            <a:avLst/>
-          </a:prstGeom>
-          <a:noFill/>
-        </p:spPr>
-        <p:style>
-          <a:lnRef idx="2">
-            <a:schemeClr val="accent1">
-              <a:shade val="15000"/>
-            </a:schemeClr>
-          </a:lnRef>
-          <a:fillRef idx="1">
-            <a:schemeClr val="accent1"/>
-          </a:fillRef>
-          <a:effectRef idx="0">
-            <a:schemeClr val="accent1"/>
-          </a:effectRef>
-          <a:fontRef idx="minor">
-            <a:schemeClr val="lt1"/>
-          </a:fontRef>
-        </p:style>
-        <p:txBody>
-          <a:bodyPr rtlCol="0" anchor="ctr"/>
-          <a:lstStyle/>
-          <a:p>
-            <a:pPr algn="ctr"/>
-            <a:endParaRPr lang="en-GB"/>
-          </a:p>
-        </p:txBody>
-      </p:sp>
-      <p:cxnSp>
-        <p:nvCxnSpPr>
-          <p:cNvPr id="10" name="Straight Arrow Connector 9">
-            <a:extLst>
-              <a:ext uri="{FF2B5EF4-FFF2-40B4-BE49-F238E27FC236}">
-                <a16:creationId xmlns:a16="http://schemas.microsoft.com/office/drawing/2014/main" id="{4EA0FF7A-1DBD-6691-861B-33CB0EC0F7BE}"/>
-              </a:ext>
-            </a:extLst>
-          </p:cNvPr>
-          <p:cNvCxnSpPr/>
-          <p:nvPr/>
-        </p:nvCxnSpPr>
-        <p:spPr>
-          <a:xfrm flipH="1">
-            <a:off x="2088682" y="77002"/>
-            <a:ext cx="1780674" cy="798897"/>
-          </a:xfrm>
-          <a:prstGeom prst="straightConnector1">
-            <a:avLst/>
-          </a:prstGeom>
-          <a:ln>
-            <a:tailEnd type="triangle"/>
-          </a:ln>
-        </p:spPr>
-        <p:style>
-          <a:lnRef idx="1">
-            <a:schemeClr val="accent1"/>
-          </a:lnRef>
-          <a:fillRef idx="0">
-            <a:schemeClr val="accent1"/>
-          </a:fillRef>
-          <a:effectRef idx="0">
-            <a:schemeClr val="accent1"/>
-          </a:effectRef>
-          <a:fontRef idx="minor">
-            <a:schemeClr val="tx1"/>
-          </a:fontRef>
-        </p:style>
-      </p:cxnSp>
-      <p:cxnSp>
-        <p:nvCxnSpPr>
-          <p:cNvPr id="11" name="Straight Arrow Connector 10">
-            <a:extLst>
-              <a:ext uri="{FF2B5EF4-FFF2-40B4-BE49-F238E27FC236}">
-                <a16:creationId xmlns:a16="http://schemas.microsoft.com/office/drawing/2014/main" id="{A09FD424-57F3-4DD8-C9C6-FE7DF8C992C8}"/>
-              </a:ext>
-            </a:extLst>
-          </p:cNvPr>
-          <p:cNvCxnSpPr/>
-          <p:nvPr/>
-        </p:nvCxnSpPr>
-        <p:spPr>
-          <a:xfrm flipH="1">
-            <a:off x="3415364" y="3429000"/>
-            <a:ext cx="1780674" cy="798897"/>
-          </a:xfrm>
-          <a:prstGeom prst="straightConnector1">
-            <a:avLst/>
-          </a:prstGeom>
-          <a:ln>
-            <a:tailEnd type="triangle"/>
-          </a:ln>
-        </p:spPr>
-        <p:style>
-          <a:lnRef idx="1">
-            <a:schemeClr val="accent1"/>
-          </a:lnRef>
-          <a:fillRef idx="0">
-            <a:schemeClr val="accent1"/>
-          </a:fillRef>
-          <a:effectRef idx="0">
-            <a:schemeClr val="accent1"/>
-          </a:effectRef>
-          <a:fontRef idx="minor">
-            <a:schemeClr val="tx1"/>
-          </a:fontRef>
-        </p:style>
-      </p:cxnSp>
-      <p:cxnSp>
-        <p:nvCxnSpPr>
-          <p:cNvPr id="12" name="Straight Arrow Connector 11">
-            <a:extLst>
-              <a:ext uri="{FF2B5EF4-FFF2-40B4-BE49-F238E27FC236}">
-                <a16:creationId xmlns:a16="http://schemas.microsoft.com/office/drawing/2014/main" id="{158C3CDB-C391-65EC-46FA-1BF246D35C69}"/>
-              </a:ext>
-            </a:extLst>
-          </p:cNvPr>
-          <p:cNvCxnSpPr/>
-          <p:nvPr/>
-        </p:nvCxnSpPr>
-        <p:spPr>
-          <a:xfrm flipH="1">
-            <a:off x="3548513" y="4533661"/>
-            <a:ext cx="1780674" cy="798897"/>
-          </a:xfrm>
-          <a:prstGeom prst="straightConnector1">
-            <a:avLst/>
-          </a:prstGeom>
-          <a:ln>
-            <a:tailEnd type="triangle"/>
-          </a:ln>
-        </p:spPr>
-        <p:style>
-          <a:lnRef idx="1">
-            <a:schemeClr val="accent1"/>
-          </a:lnRef>
-          <a:fillRef idx="0">
-            <a:schemeClr val="accent1"/>
-          </a:fillRef>
-          <a:effectRef idx="0">
-            <a:schemeClr val="accent1"/>
-          </a:effectRef>
-          <a:fontRef idx="minor">
-            <a:schemeClr val="tx1"/>
-          </a:fontRef>
-        </p:style>
-      </p:cxnSp>
-      <p:cxnSp>
-        <p:nvCxnSpPr>
-          <p:cNvPr id="13" name="Straight Arrow Connector 12">
-            <a:extLst>
-              <a:ext uri="{FF2B5EF4-FFF2-40B4-BE49-F238E27FC236}">
-                <a16:creationId xmlns:a16="http://schemas.microsoft.com/office/drawing/2014/main" id="{EA0EA304-62F3-12F4-CA34-F2CB77C451D4}"/>
-              </a:ext>
-            </a:extLst>
-          </p:cNvPr>
-          <p:cNvCxnSpPr/>
-          <p:nvPr/>
-        </p:nvCxnSpPr>
-        <p:spPr>
-          <a:xfrm flipH="1">
-            <a:off x="2231579" y="2003539"/>
-            <a:ext cx="1780674" cy="798897"/>
-          </a:xfrm>
-          <a:prstGeom prst="straightConnector1">
-            <a:avLst/>
-          </a:prstGeom>
-          <a:ln>
-            <a:tailEnd type="triangle"/>
-          </a:ln>
-        </p:spPr>
-        <p:style>
-          <a:lnRef idx="1">
-            <a:schemeClr val="accent1"/>
-          </a:lnRef>
-          <a:fillRef idx="0">
-            <a:schemeClr val="accent1"/>
-          </a:fillRef>
-          <a:effectRef idx="0">
-            <a:schemeClr val="accent1"/>
-          </a:effectRef>
-          <a:fontRef idx="minor">
-            <a:schemeClr val="tx1"/>
-          </a:fontRef>
-        </p:style>
-      </p:cxnSp>
-      <p:sp>
-        <p:nvSpPr>
-          <p:cNvPr id="16" name="Rectangle 15">
-            <a:extLst>
-              <a:ext uri="{FF2B5EF4-FFF2-40B4-BE49-F238E27FC236}">
-                <a16:creationId xmlns:a16="http://schemas.microsoft.com/office/drawing/2014/main" id="{8D564A3A-CAFB-50BE-388F-EB52B00F8D25}"/>
-              </a:ext>
-            </a:extLst>
-          </p:cNvPr>
-          <p:cNvSpPr/>
-          <p:nvPr/>
-        </p:nvSpPr>
-        <p:spPr>
-          <a:xfrm>
-            <a:off x="6274547" y="1223612"/>
-            <a:ext cx="4598793" cy="970737"/>
-          </a:xfrm>
-          <a:prstGeom prst="rect">
-            <a:avLst/>
-          </a:prstGeom>
-          <a:solidFill>
-            <a:schemeClr val="accent4">
-              <a:lumMod val="40000"/>
-              <a:lumOff val="60000"/>
-            </a:schemeClr>
-          </a:solidFill>
-        </p:spPr>
-        <p:style>
-          <a:lnRef idx="2">
-            <a:schemeClr val="accent1">
-              <a:shade val="50000"/>
-            </a:schemeClr>
-          </a:lnRef>
-          <a:fillRef idx="1">
-            <a:schemeClr val="accent1"/>
-          </a:fillRef>
-          <a:effectRef idx="0">
-            <a:schemeClr val="accent1"/>
-          </a:effectRef>
-          <a:fontRef idx="minor">
-            <a:schemeClr val="lt1"/>
-          </a:fontRef>
-        </p:style>
-        <p:txBody>
-          <a:bodyPr rtlCol="0" anchor="ctr"/>
-          <a:lstStyle/>
-          <a:p>
-            <a:pPr algn="ctr"/>
-            <a:r>
-              <a:rPr lang="en-IE" dirty="0">
-                <a:solidFill>
-                  <a:schemeClr val="tx1"/>
-                </a:solidFill>
-              </a:rPr>
-              <a:t>Modify Book to return a bool (true/false) and update the method with return declaration and return values</a:t>
-            </a:r>
-          </a:p>
-        </p:txBody>
-      </p:sp>
     </p:spTree>
     <p:extLst>
       <p:ext uri="{BB962C8B-B14F-4D97-AF65-F5344CB8AC3E}">
-        <p14:creationId xmlns:p14="http://schemas.microsoft.com/office/powerpoint/2010/main" val="1955045216"/>
+        <p14:creationId xmlns:p14="http://schemas.microsoft.com/office/powerpoint/2010/main" val="2096573669"/>
       </p:ext>
     </p:extLst>
   </p:cSld>
@@ -7834,7 +7639,7 @@
           <p:cNvPr id="5" name="Picture 4">
             <a:extLst>
               <a:ext uri="{FF2B5EF4-FFF2-40B4-BE49-F238E27FC236}">
-                <a16:creationId xmlns:a16="http://schemas.microsoft.com/office/drawing/2014/main" id="{9F1AA596-877A-C1F9-4CE9-006B4E94260D}"/>
+                <a16:creationId xmlns:a16="http://schemas.microsoft.com/office/drawing/2014/main" id="{F730E9BC-3139-7AE8-8C1C-B46C88859466}"/>
               </a:ext>
             </a:extLst>
           </p:cNvPr>
@@ -7851,8 +7656,38 @@
         </p:blipFill>
         <p:spPr>
           <a:xfrm>
-            <a:off x="483603" y="1325346"/>
-            <a:ext cx="7784498" cy="4439691"/>
+            <a:off x="796260" y="423908"/>
+            <a:ext cx="4323809" cy="2333333"/>
+          </a:xfrm>
+          <a:prstGeom prst="rect">
+            <a:avLst/>
+          </a:prstGeom>
+        </p:spPr>
+      </p:pic>
+      <p:pic>
+        <p:nvPicPr>
+          <p:cNvPr id="7" name="Picture 6">
+            <a:extLst>
+              <a:ext uri="{FF2B5EF4-FFF2-40B4-BE49-F238E27FC236}">
+                <a16:creationId xmlns:a16="http://schemas.microsoft.com/office/drawing/2014/main" id="{3FFD7A3A-B6D6-3B43-D09C-DAB512C2BB7A}"/>
+              </a:ext>
+            </a:extLst>
+          </p:cNvPr>
+          <p:cNvPicPr>
+            <a:picLocks noChangeAspect="1"/>
+          </p:cNvPicPr>
+          <p:nvPr/>
+        </p:nvPicPr>
+        <p:blipFill>
+          <a:blip r:embed="rId3"/>
+          <a:stretch>
+            <a:fillRect/>
+          </a:stretch>
+        </p:blipFill>
+        <p:spPr>
+          <a:xfrm>
+            <a:off x="962526" y="2847631"/>
+            <a:ext cx="8997895" cy="3372060"/>
           </a:xfrm>
           <a:prstGeom prst="rect">
             <a:avLst/>
@@ -7861,10 +7696,10 @@
       </p:pic>
       <p:sp>
         <p:nvSpPr>
-          <p:cNvPr id="10" name="Rectangle 9">
-            <a:extLst>
-              <a:ext uri="{FF2B5EF4-FFF2-40B4-BE49-F238E27FC236}">
-                <a16:creationId xmlns:a16="http://schemas.microsoft.com/office/drawing/2014/main" id="{F476451C-AC8C-7356-C9CD-AD3B39171AB8}"/>
+          <p:cNvPr id="8" name="Rectangle 7">
+            <a:extLst>
+              <a:ext uri="{FF2B5EF4-FFF2-40B4-BE49-F238E27FC236}">
+                <a16:creationId xmlns:a16="http://schemas.microsoft.com/office/drawing/2014/main" id="{90F462E6-A66D-9574-CD2C-9D4E65D2B39D}"/>
               </a:ext>
             </a:extLst>
           </p:cNvPr>
@@ -7873,23 +7708,18 @@
         </p:nvSpPr>
         <p:spPr>
           <a:xfrm>
-            <a:off x="7361465" y="4024563"/>
-            <a:ext cx="4598793" cy="970737"/>
+            <a:off x="1318660" y="952901"/>
+            <a:ext cx="644893" cy="375385"/>
           </a:xfrm>
           <a:prstGeom prst="rect">
             <a:avLst/>
           </a:prstGeom>
-          <a:solidFill>
-            <a:schemeClr val="accent4">
-              <a:lumMod val="40000"/>
-              <a:lumOff val="60000"/>
-            </a:schemeClr>
-          </a:solidFill>
+          <a:noFill/>
         </p:spPr>
         <p:style>
           <a:lnRef idx="2">
             <a:schemeClr val="accent1">
-              <a:shade val="50000"/>
+              <a:shade val="15000"/>
             </a:schemeClr>
           </a:lnRef>
           <a:fillRef idx="1">
@@ -7907,35 +7737,104 @@
           <a:lstStyle/>
           <a:p>
             <a:pPr algn="ctr"/>
-            <a:r>
-              <a:rPr lang="en-IE" dirty="0">
-                <a:solidFill>
-                  <a:schemeClr val="tx1"/>
-                </a:solidFill>
-              </a:rPr>
-              <a:t>Add the two new methods but throw an ‘Not Implemented Exception’</a:t>
-            </a:r>
+            <a:endParaRPr lang="en-GB"/>
           </a:p>
         </p:txBody>
       </p:sp>
       <p:cxnSp>
         <p:nvCxnSpPr>
+          <p:cNvPr id="10" name="Straight Arrow Connector 9">
+            <a:extLst>
+              <a:ext uri="{FF2B5EF4-FFF2-40B4-BE49-F238E27FC236}">
+                <a16:creationId xmlns:a16="http://schemas.microsoft.com/office/drawing/2014/main" id="{4EA0FF7A-1DBD-6691-861B-33CB0EC0F7BE}"/>
+              </a:ext>
+            </a:extLst>
+          </p:cNvPr>
+          <p:cNvCxnSpPr/>
+          <p:nvPr/>
+        </p:nvCxnSpPr>
+        <p:spPr>
+          <a:xfrm flipH="1">
+            <a:off x="2088682" y="77002"/>
+            <a:ext cx="1780674" cy="798897"/>
+          </a:xfrm>
+          <a:prstGeom prst="straightConnector1">
+            <a:avLst/>
+          </a:prstGeom>
+          <a:ln>
+            <a:tailEnd type="triangle"/>
+          </a:ln>
+        </p:spPr>
+        <p:style>
+          <a:lnRef idx="1">
+            <a:schemeClr val="accent1"/>
+          </a:lnRef>
+          <a:fillRef idx="0">
+            <a:schemeClr val="accent1"/>
+          </a:fillRef>
+          <a:effectRef idx="0">
+            <a:schemeClr val="accent1"/>
+          </a:effectRef>
+          <a:fontRef idx="minor">
+            <a:schemeClr val="tx1"/>
+          </a:fontRef>
+        </p:style>
+      </p:cxnSp>
+      <p:cxnSp>
+        <p:nvCxnSpPr>
+          <p:cNvPr id="11" name="Straight Arrow Connector 10">
+            <a:extLst>
+              <a:ext uri="{FF2B5EF4-FFF2-40B4-BE49-F238E27FC236}">
+                <a16:creationId xmlns:a16="http://schemas.microsoft.com/office/drawing/2014/main" id="{A09FD424-57F3-4DD8-C9C6-FE7DF8C992C8}"/>
+              </a:ext>
+            </a:extLst>
+          </p:cNvPr>
+          <p:cNvCxnSpPr/>
+          <p:nvPr/>
+        </p:nvCxnSpPr>
+        <p:spPr>
+          <a:xfrm flipH="1">
+            <a:off x="3415364" y="3429000"/>
+            <a:ext cx="1780674" cy="798897"/>
+          </a:xfrm>
+          <a:prstGeom prst="straightConnector1">
+            <a:avLst/>
+          </a:prstGeom>
+          <a:ln>
+            <a:tailEnd type="triangle"/>
+          </a:ln>
+        </p:spPr>
+        <p:style>
+          <a:lnRef idx="1">
+            <a:schemeClr val="accent1"/>
+          </a:lnRef>
+          <a:fillRef idx="0">
+            <a:schemeClr val="accent1"/>
+          </a:fillRef>
+          <a:effectRef idx="0">
+            <a:schemeClr val="accent1"/>
+          </a:effectRef>
+          <a:fontRef idx="minor">
+            <a:schemeClr val="tx1"/>
+          </a:fontRef>
+        </p:style>
+      </p:cxnSp>
+      <p:cxnSp>
+        <p:nvCxnSpPr>
           <p:cNvPr id="12" name="Straight Arrow Connector 11">
             <a:extLst>
               <a:ext uri="{FF2B5EF4-FFF2-40B4-BE49-F238E27FC236}">
-                <a16:creationId xmlns:a16="http://schemas.microsoft.com/office/drawing/2014/main" id="{56BFEA6A-9607-2A81-E9C4-CF6AF022A8E7}"/>
-              </a:ext>
-            </a:extLst>
-          </p:cNvPr>
-          <p:cNvCxnSpPr>
-            <a:cxnSpLocks/>
-          </p:cNvCxnSpPr>
+                <a16:creationId xmlns:a16="http://schemas.microsoft.com/office/drawing/2014/main" id="{158C3CDB-C391-65EC-46FA-1BF246D35C69}"/>
+              </a:ext>
+            </a:extLst>
+          </p:cNvPr>
+          <p:cNvCxnSpPr/>
           <p:nvPr/>
         </p:nvCxnSpPr>
         <p:spPr>
           <a:xfrm flipH="1">
-            <a:off x="4254366" y="4379495"/>
-            <a:ext cx="2290813" cy="0"/>
+            <a:off x="3548513" y="4533661"/>
+            <a:ext cx="1780674" cy="798897"/>
           </a:xfrm>
           <a:prstGeom prst="straightConnector1">
             <a:avLst/>
@@ -7964,19 +7863,17 @@
           <p:cNvPr id="13" name="Straight Arrow Connector 12">
             <a:extLst>
               <a:ext uri="{FF2B5EF4-FFF2-40B4-BE49-F238E27FC236}">
-                <a16:creationId xmlns:a16="http://schemas.microsoft.com/office/drawing/2014/main" id="{257ACE3D-14E0-520D-04D4-D7FDC67B3FB7}"/>
-              </a:ext>
-            </a:extLst>
-          </p:cNvPr>
-          <p:cNvCxnSpPr>
-            <a:cxnSpLocks/>
-          </p:cNvCxnSpPr>
+                <a16:creationId xmlns:a16="http://schemas.microsoft.com/office/drawing/2014/main" id="{EA0EA304-62F3-12F4-CA34-F2CB77C451D4}"/>
+              </a:ext>
+            </a:extLst>
+          </p:cNvPr>
+          <p:cNvCxnSpPr/>
           <p:nvPr/>
         </p:nvCxnSpPr>
         <p:spPr>
           <a:xfrm flipH="1">
-            <a:off x="6225941" y="4849528"/>
-            <a:ext cx="949693" cy="0"/>
+            <a:off x="2231579" y="2003539"/>
+            <a:ext cx="1780674" cy="798897"/>
           </a:xfrm>
           <a:prstGeom prst="straightConnector1">
             <a:avLst/>
@@ -8000,10 +7897,69 @@
           </a:fontRef>
         </p:style>
       </p:cxnSp>
+      <p:sp>
+        <p:nvSpPr>
+          <p:cNvPr id="16" name="Rectangle 15">
+            <a:extLst>
+              <a:ext uri="{FF2B5EF4-FFF2-40B4-BE49-F238E27FC236}">
+                <a16:creationId xmlns:a16="http://schemas.microsoft.com/office/drawing/2014/main" id="{8D564A3A-CAFB-50BE-388F-EB52B00F8D25}"/>
+              </a:ext>
+            </a:extLst>
+          </p:cNvPr>
+          <p:cNvSpPr/>
+          <p:nvPr/>
+        </p:nvSpPr>
+        <p:spPr>
+          <a:xfrm>
+            <a:off x="6274547" y="1223612"/>
+            <a:ext cx="4598793" cy="970737"/>
+          </a:xfrm>
+          <a:prstGeom prst="rect">
+            <a:avLst/>
+          </a:prstGeom>
+          <a:solidFill>
+            <a:schemeClr val="accent4">
+              <a:lumMod val="40000"/>
+              <a:lumOff val="60000"/>
+            </a:schemeClr>
+          </a:solidFill>
+        </p:spPr>
+        <p:style>
+          <a:lnRef idx="2">
+            <a:schemeClr val="accent1">
+              <a:shade val="50000"/>
+            </a:schemeClr>
+          </a:lnRef>
+          <a:fillRef idx="1">
+            <a:schemeClr val="accent1"/>
+          </a:fillRef>
+          <a:effectRef idx="0">
+            <a:schemeClr val="accent1"/>
+          </a:effectRef>
+          <a:fontRef idx="minor">
+            <a:schemeClr val="lt1"/>
+          </a:fontRef>
+        </p:style>
+        <p:txBody>
+          <a:bodyPr rtlCol="0" anchor="ctr"/>
+          <a:lstStyle/>
+          <a:p>
+            <a:pPr algn="ctr"/>
+            <a:r>
+              <a:rPr lang="en-IE" dirty="0">
+                <a:solidFill>
+                  <a:schemeClr val="tx1"/>
+                </a:solidFill>
+              </a:rPr>
+              <a:t>Modify Book to return a bool (true/false) and update the method with return declaration and return values</a:t>
+            </a:r>
+          </a:p>
+        </p:txBody>
+      </p:sp>
     </p:spTree>
     <p:extLst>
       <p:ext uri="{BB962C8B-B14F-4D97-AF65-F5344CB8AC3E}">
-        <p14:creationId xmlns:p14="http://schemas.microsoft.com/office/powerpoint/2010/main" val="73006775"/>
+        <p14:creationId xmlns:p14="http://schemas.microsoft.com/office/powerpoint/2010/main" val="1955045216"/>
       </p:ext>
     </p:extLst>
   </p:cSld>
@@ -8035,7 +7991,7 @@
           <p:cNvPr id="5" name="Picture 4">
             <a:extLst>
               <a:ext uri="{FF2B5EF4-FFF2-40B4-BE49-F238E27FC236}">
-                <a16:creationId xmlns:a16="http://schemas.microsoft.com/office/drawing/2014/main" id="{764D1CEC-E4E6-7374-3C86-92BC2DB28255}"/>
+                <a16:creationId xmlns:a16="http://schemas.microsoft.com/office/drawing/2014/main" id="{9F1AA596-877A-C1F9-4CE9-006B4E94260D}"/>
               </a:ext>
             </a:extLst>
           </p:cNvPr>
@@ -8052,18 +8008,159 @@
         </p:blipFill>
         <p:spPr>
           <a:xfrm>
-            <a:off x="1217251" y="1870430"/>
-            <a:ext cx="9757498" cy="2922951"/>
+            <a:off x="483603" y="1325346"/>
+            <a:ext cx="7784498" cy="4439691"/>
           </a:xfrm>
           <a:prstGeom prst="rect">
             <a:avLst/>
           </a:prstGeom>
         </p:spPr>
       </p:pic>
+      <p:sp>
+        <p:nvSpPr>
+          <p:cNvPr id="10" name="Rectangle 9">
+            <a:extLst>
+              <a:ext uri="{FF2B5EF4-FFF2-40B4-BE49-F238E27FC236}">
+                <a16:creationId xmlns:a16="http://schemas.microsoft.com/office/drawing/2014/main" id="{F476451C-AC8C-7356-C9CD-AD3B39171AB8}"/>
+              </a:ext>
+            </a:extLst>
+          </p:cNvPr>
+          <p:cNvSpPr/>
+          <p:nvPr/>
+        </p:nvSpPr>
+        <p:spPr>
+          <a:xfrm>
+            <a:off x="7361465" y="4024563"/>
+            <a:ext cx="4598793" cy="970737"/>
+          </a:xfrm>
+          <a:prstGeom prst="rect">
+            <a:avLst/>
+          </a:prstGeom>
+          <a:solidFill>
+            <a:schemeClr val="accent4">
+              <a:lumMod val="40000"/>
+              <a:lumOff val="60000"/>
+            </a:schemeClr>
+          </a:solidFill>
+        </p:spPr>
+        <p:style>
+          <a:lnRef idx="2">
+            <a:schemeClr val="accent1">
+              <a:shade val="50000"/>
+            </a:schemeClr>
+          </a:lnRef>
+          <a:fillRef idx="1">
+            <a:schemeClr val="accent1"/>
+          </a:fillRef>
+          <a:effectRef idx="0">
+            <a:schemeClr val="accent1"/>
+          </a:effectRef>
+          <a:fontRef idx="minor">
+            <a:schemeClr val="lt1"/>
+          </a:fontRef>
+        </p:style>
+        <p:txBody>
+          <a:bodyPr rtlCol="0" anchor="ctr"/>
+          <a:lstStyle/>
+          <a:p>
+            <a:pPr algn="ctr"/>
+            <a:r>
+              <a:rPr lang="en-IE" dirty="0">
+                <a:solidFill>
+                  <a:schemeClr val="tx1"/>
+                </a:solidFill>
+              </a:rPr>
+              <a:t>Add the two new methods but throw an ‘Not Implemented Exception’</a:t>
+            </a:r>
+          </a:p>
+        </p:txBody>
+      </p:sp>
+      <p:cxnSp>
+        <p:nvCxnSpPr>
+          <p:cNvPr id="12" name="Straight Arrow Connector 11">
+            <a:extLst>
+              <a:ext uri="{FF2B5EF4-FFF2-40B4-BE49-F238E27FC236}">
+                <a16:creationId xmlns:a16="http://schemas.microsoft.com/office/drawing/2014/main" id="{56BFEA6A-9607-2A81-E9C4-CF6AF022A8E7}"/>
+              </a:ext>
+            </a:extLst>
+          </p:cNvPr>
+          <p:cNvCxnSpPr>
+            <a:cxnSpLocks/>
+          </p:cNvCxnSpPr>
+          <p:nvPr/>
+        </p:nvCxnSpPr>
+        <p:spPr>
+          <a:xfrm flipH="1">
+            <a:off x="4254366" y="4379495"/>
+            <a:ext cx="2290813" cy="0"/>
+          </a:xfrm>
+          <a:prstGeom prst="straightConnector1">
+            <a:avLst/>
+          </a:prstGeom>
+          <a:ln>
+            <a:tailEnd type="triangle"/>
+          </a:ln>
+        </p:spPr>
+        <p:style>
+          <a:lnRef idx="1">
+            <a:schemeClr val="accent1"/>
+          </a:lnRef>
+          <a:fillRef idx="0">
+            <a:schemeClr val="accent1"/>
+          </a:fillRef>
+          <a:effectRef idx="0">
+            <a:schemeClr val="accent1"/>
+          </a:effectRef>
+          <a:fontRef idx="minor">
+            <a:schemeClr val="tx1"/>
+          </a:fontRef>
+        </p:style>
+      </p:cxnSp>
+      <p:cxnSp>
+        <p:nvCxnSpPr>
+          <p:cNvPr id="13" name="Straight Arrow Connector 12">
+            <a:extLst>
+              <a:ext uri="{FF2B5EF4-FFF2-40B4-BE49-F238E27FC236}">
+                <a16:creationId xmlns:a16="http://schemas.microsoft.com/office/drawing/2014/main" id="{257ACE3D-14E0-520D-04D4-D7FDC67B3FB7}"/>
+              </a:ext>
+            </a:extLst>
+          </p:cNvPr>
+          <p:cNvCxnSpPr>
+            <a:cxnSpLocks/>
+          </p:cNvCxnSpPr>
+          <p:nvPr/>
+        </p:nvCxnSpPr>
+        <p:spPr>
+          <a:xfrm flipH="1">
+            <a:off x="6225941" y="4849528"/>
+            <a:ext cx="949693" cy="0"/>
+          </a:xfrm>
+          <a:prstGeom prst="straightConnector1">
+            <a:avLst/>
+          </a:prstGeom>
+          <a:ln>
+            <a:tailEnd type="triangle"/>
+          </a:ln>
+        </p:spPr>
+        <p:style>
+          <a:lnRef idx="1">
+            <a:schemeClr val="accent1"/>
+          </a:lnRef>
+          <a:fillRef idx="0">
+            <a:schemeClr val="accent1"/>
+          </a:fillRef>
+          <a:effectRef idx="0">
+            <a:schemeClr val="accent1"/>
+          </a:effectRef>
+          <a:fontRef idx="minor">
+            <a:schemeClr val="tx1"/>
+          </a:fontRef>
+        </p:style>
+      </p:cxnSp>
     </p:spTree>
     <p:extLst>
       <p:ext uri="{BB962C8B-B14F-4D97-AF65-F5344CB8AC3E}">
-        <p14:creationId xmlns:p14="http://schemas.microsoft.com/office/powerpoint/2010/main" val="3808289765"/>
+        <p14:creationId xmlns:p14="http://schemas.microsoft.com/office/powerpoint/2010/main" val="73006775"/>
       </p:ext>
     </p:extLst>
   </p:cSld>
@@ -8092,10 +8189,10 @@
       </p:grpSpPr>
       <p:pic>
         <p:nvPicPr>
-          <p:cNvPr id="3" name="Picture 2">
-            <a:extLst>
-              <a:ext uri="{FF2B5EF4-FFF2-40B4-BE49-F238E27FC236}">
-                <a16:creationId xmlns:a16="http://schemas.microsoft.com/office/drawing/2014/main" id="{9E135F79-0A20-4A52-FEE0-542DB805A60C}"/>
+          <p:cNvPr id="5" name="Picture 4">
+            <a:extLst>
+              <a:ext uri="{FF2B5EF4-FFF2-40B4-BE49-F238E27FC236}">
+                <a16:creationId xmlns:a16="http://schemas.microsoft.com/office/drawing/2014/main" id="{764D1CEC-E4E6-7374-3C86-92BC2DB28255}"/>
               </a:ext>
             </a:extLst>
           </p:cNvPr>
@@ -8112,8 +8209,8 @@
         </p:blipFill>
         <p:spPr>
           <a:xfrm>
-            <a:off x="619809" y="1843285"/>
-            <a:ext cx="10952381" cy="3171429"/>
+            <a:off x="1217251" y="1870430"/>
+            <a:ext cx="9757498" cy="2922951"/>
           </a:xfrm>
           <a:prstGeom prst="rect">
             <a:avLst/>
@@ -8123,7 +8220,7 @@
     </p:spTree>
     <p:extLst>
       <p:ext uri="{BB962C8B-B14F-4D97-AF65-F5344CB8AC3E}">
-        <p14:creationId xmlns:p14="http://schemas.microsoft.com/office/powerpoint/2010/main" val="2634191447"/>
+        <p14:creationId xmlns:p14="http://schemas.microsoft.com/office/powerpoint/2010/main" val="3808289765"/>
       </p:ext>
     </p:extLst>
   </p:cSld>
@@ -8150,10 +8247,40 @@
           <a:chExt cx="0" cy="0"/>
         </a:xfrm>
       </p:grpSpPr>
+      <p:pic>
+        <p:nvPicPr>
+          <p:cNvPr id="3" name="Picture 2">
+            <a:extLst>
+              <a:ext uri="{FF2B5EF4-FFF2-40B4-BE49-F238E27FC236}">
+                <a16:creationId xmlns:a16="http://schemas.microsoft.com/office/drawing/2014/main" id="{9E135F79-0A20-4A52-FEE0-542DB805A60C}"/>
+              </a:ext>
+            </a:extLst>
+          </p:cNvPr>
+          <p:cNvPicPr>
+            <a:picLocks noChangeAspect="1"/>
+          </p:cNvPicPr>
+          <p:nvPr/>
+        </p:nvPicPr>
+        <p:blipFill>
+          <a:blip r:embed="rId2"/>
+          <a:stretch>
+            <a:fillRect/>
+          </a:stretch>
+        </p:blipFill>
+        <p:spPr>
+          <a:xfrm>
+            <a:off x="148170" y="1660405"/>
+            <a:ext cx="11949759" cy="3460235"/>
+          </a:xfrm>
+          <a:prstGeom prst="rect">
+            <a:avLst/>
+          </a:prstGeom>
+        </p:spPr>
+      </p:pic>
     </p:spTree>
     <p:extLst>
       <p:ext uri="{BB962C8B-B14F-4D97-AF65-F5344CB8AC3E}">
-        <p14:creationId xmlns:p14="http://schemas.microsoft.com/office/powerpoint/2010/main" val="3653207458"/>
+        <p14:creationId xmlns:p14="http://schemas.microsoft.com/office/powerpoint/2010/main" val="2634191447"/>
       </p:ext>
     </p:extLst>
   </p:cSld>
@@ -8180,10 +8307,40 @@
           <a:chExt cx="0" cy="0"/>
         </a:xfrm>
       </p:grpSpPr>
+      <p:pic>
+        <p:nvPicPr>
+          <p:cNvPr id="3" name="Picture 2">
+            <a:extLst>
+              <a:ext uri="{FF2B5EF4-FFF2-40B4-BE49-F238E27FC236}">
+                <a16:creationId xmlns:a16="http://schemas.microsoft.com/office/drawing/2014/main" id="{BB1407E7-F4F1-F02F-22F5-6FD7662971AE}"/>
+              </a:ext>
+            </a:extLst>
+          </p:cNvPr>
+          <p:cNvPicPr>
+            <a:picLocks noChangeAspect="1"/>
+          </p:cNvPicPr>
+          <p:nvPr/>
+        </p:nvPicPr>
+        <p:blipFill>
+          <a:blip r:embed="rId2"/>
+          <a:stretch>
+            <a:fillRect/>
+          </a:stretch>
+        </p:blipFill>
+        <p:spPr>
+          <a:xfrm>
+            <a:off x="79888" y="1329298"/>
+            <a:ext cx="11685714" cy="3352381"/>
+          </a:xfrm>
+          <a:prstGeom prst="rect">
+            <a:avLst/>
+          </a:prstGeom>
+        </p:spPr>
+      </p:pic>
     </p:spTree>
     <p:extLst>
       <p:ext uri="{BB962C8B-B14F-4D97-AF65-F5344CB8AC3E}">
-        <p14:creationId xmlns:p14="http://schemas.microsoft.com/office/powerpoint/2010/main" val="3983423945"/>
+        <p14:creationId xmlns:p14="http://schemas.microsoft.com/office/powerpoint/2010/main" val="3653207458"/>
       </p:ext>
     </p:extLst>
   </p:cSld>
@@ -8210,10 +8367,462 @@
           <a:chExt cx="0" cy="0"/>
         </a:xfrm>
       </p:grpSpPr>
+      <p:pic>
+        <p:nvPicPr>
+          <p:cNvPr id="3" name="Picture 2">
+            <a:extLst>
+              <a:ext uri="{FF2B5EF4-FFF2-40B4-BE49-F238E27FC236}">
+                <a16:creationId xmlns:a16="http://schemas.microsoft.com/office/drawing/2014/main" id="{B04496C2-A46A-57EA-458E-6C3B73010A4B}"/>
+              </a:ext>
+            </a:extLst>
+          </p:cNvPr>
+          <p:cNvPicPr>
+            <a:picLocks noChangeAspect="1"/>
+          </p:cNvPicPr>
+          <p:nvPr/>
+        </p:nvPicPr>
+        <p:blipFill>
+          <a:blip r:embed="rId2"/>
+          <a:stretch>
+            <a:fillRect/>
+          </a:stretch>
+        </p:blipFill>
+        <p:spPr>
+          <a:xfrm>
+            <a:off x="1360242" y="3428999"/>
+            <a:ext cx="9219048" cy="1790476"/>
+          </a:xfrm>
+          <a:prstGeom prst="rect">
+            <a:avLst/>
+          </a:prstGeom>
+        </p:spPr>
+      </p:pic>
+      <p:pic>
+        <p:nvPicPr>
+          <p:cNvPr id="5" name="Picture 4">
+            <a:extLst>
+              <a:ext uri="{FF2B5EF4-FFF2-40B4-BE49-F238E27FC236}">
+                <a16:creationId xmlns:a16="http://schemas.microsoft.com/office/drawing/2014/main" id="{55D230C4-1B23-C9D8-66FC-59FAFAC69EA9}"/>
+              </a:ext>
+            </a:extLst>
+          </p:cNvPr>
+          <p:cNvPicPr>
+            <a:picLocks noChangeAspect="1"/>
+          </p:cNvPicPr>
+          <p:nvPr/>
+        </p:nvPicPr>
+        <p:blipFill>
+          <a:blip r:embed="rId3"/>
+          <a:stretch>
+            <a:fillRect/>
+          </a:stretch>
+        </p:blipFill>
+        <p:spPr>
+          <a:xfrm>
+            <a:off x="129333" y="294048"/>
+            <a:ext cx="11933333" cy="3304762"/>
+          </a:xfrm>
+          <a:prstGeom prst="rect">
+            <a:avLst/>
+          </a:prstGeom>
+        </p:spPr>
+      </p:pic>
+      <p:cxnSp>
+        <p:nvCxnSpPr>
+          <p:cNvPr id="7" name="Straight Arrow Connector 6">
+            <a:extLst>
+              <a:ext uri="{FF2B5EF4-FFF2-40B4-BE49-F238E27FC236}">
+                <a16:creationId xmlns:a16="http://schemas.microsoft.com/office/drawing/2014/main" id="{6038A32E-3858-5C0E-D083-BE651BC0D181}"/>
+              </a:ext>
+            </a:extLst>
+          </p:cNvPr>
+          <p:cNvCxnSpPr/>
+          <p:nvPr/>
+        </p:nvCxnSpPr>
+        <p:spPr>
+          <a:xfrm flipH="1">
+            <a:off x="7223760" y="1457262"/>
+            <a:ext cx="279132" cy="808523"/>
+          </a:xfrm>
+          <a:prstGeom prst="straightConnector1">
+            <a:avLst/>
+          </a:prstGeom>
+          <a:ln>
+            <a:tailEnd type="triangle"/>
+          </a:ln>
+        </p:spPr>
+        <p:style>
+          <a:lnRef idx="1">
+            <a:schemeClr val="accent1"/>
+          </a:lnRef>
+          <a:fillRef idx="0">
+            <a:schemeClr val="accent1"/>
+          </a:fillRef>
+          <a:effectRef idx="0">
+            <a:schemeClr val="accent1"/>
+          </a:effectRef>
+          <a:fontRef idx="minor">
+            <a:schemeClr val="tx1"/>
+          </a:fontRef>
+        </p:style>
+      </p:cxnSp>
+      <p:cxnSp>
+        <p:nvCxnSpPr>
+          <p:cNvPr id="9" name="Straight Arrow Connector 8">
+            <a:extLst>
+              <a:ext uri="{FF2B5EF4-FFF2-40B4-BE49-F238E27FC236}">
+                <a16:creationId xmlns:a16="http://schemas.microsoft.com/office/drawing/2014/main" id="{7253CB58-7359-CA2D-FAEC-6A439D430283}"/>
+              </a:ext>
+            </a:extLst>
+          </p:cNvPr>
+          <p:cNvCxnSpPr/>
+          <p:nvPr/>
+        </p:nvCxnSpPr>
+        <p:spPr>
+          <a:xfrm flipH="1">
+            <a:off x="8951494" y="1438012"/>
+            <a:ext cx="182880" cy="827773"/>
+          </a:xfrm>
+          <a:prstGeom prst="straightConnector1">
+            <a:avLst/>
+          </a:prstGeom>
+          <a:ln>
+            <a:tailEnd type="triangle"/>
+          </a:ln>
+        </p:spPr>
+        <p:style>
+          <a:lnRef idx="1">
+            <a:schemeClr val="accent1"/>
+          </a:lnRef>
+          <a:fillRef idx="0">
+            <a:schemeClr val="accent1"/>
+          </a:fillRef>
+          <a:effectRef idx="0">
+            <a:schemeClr val="accent1"/>
+          </a:effectRef>
+          <a:fontRef idx="minor">
+            <a:schemeClr val="tx1"/>
+          </a:fontRef>
+        </p:style>
+      </p:cxnSp>
+      <p:sp>
+        <p:nvSpPr>
+          <p:cNvPr id="10" name="Rectangle 9">
+            <a:extLst>
+              <a:ext uri="{FF2B5EF4-FFF2-40B4-BE49-F238E27FC236}">
+                <a16:creationId xmlns:a16="http://schemas.microsoft.com/office/drawing/2014/main" id="{78E050CB-DB2F-24E3-B299-7227C8A7F1D9}"/>
+              </a:ext>
+            </a:extLst>
+          </p:cNvPr>
+          <p:cNvSpPr/>
+          <p:nvPr/>
+        </p:nvSpPr>
+        <p:spPr>
+          <a:xfrm>
+            <a:off x="7223760" y="2943631"/>
+            <a:ext cx="4598793" cy="970737"/>
+          </a:xfrm>
+          <a:prstGeom prst="rect">
+            <a:avLst/>
+          </a:prstGeom>
+          <a:solidFill>
+            <a:schemeClr val="accent4">
+              <a:lumMod val="40000"/>
+              <a:lumOff val="60000"/>
+            </a:schemeClr>
+          </a:solidFill>
+        </p:spPr>
+        <p:style>
+          <a:lnRef idx="2">
+            <a:schemeClr val="accent1">
+              <a:shade val="50000"/>
+            </a:schemeClr>
+          </a:lnRef>
+          <a:fillRef idx="1">
+            <a:schemeClr val="accent1"/>
+          </a:fillRef>
+          <a:effectRef idx="0">
+            <a:schemeClr val="accent1"/>
+          </a:effectRef>
+          <a:fontRef idx="minor">
+            <a:schemeClr val="lt1"/>
+          </a:fontRef>
+        </p:style>
+        <p:txBody>
+          <a:bodyPr rtlCol="0" anchor="ctr"/>
+          <a:lstStyle/>
+          <a:p>
+            <a:pPr algn="ctr"/>
+            <a:r>
+              <a:rPr lang="en-IE" dirty="0">
+                <a:solidFill>
+                  <a:schemeClr val="tx1"/>
+                </a:solidFill>
+              </a:rPr>
+              <a:t>Constructor instantiation (initialising) needs to be updated</a:t>
+            </a:r>
+          </a:p>
+        </p:txBody>
+      </p:sp>
+      <p:pic>
+        <p:nvPicPr>
+          <p:cNvPr id="12" name="Picture 11">
+            <a:extLst>
+              <a:ext uri="{FF2B5EF4-FFF2-40B4-BE49-F238E27FC236}">
+                <a16:creationId xmlns:a16="http://schemas.microsoft.com/office/drawing/2014/main" id="{9E3E2709-3B81-0599-C231-49F3107DEA32}"/>
+              </a:ext>
+            </a:extLst>
+          </p:cNvPr>
+          <p:cNvPicPr>
+            <a:picLocks noChangeAspect="1"/>
+          </p:cNvPicPr>
+          <p:nvPr/>
+        </p:nvPicPr>
+        <p:blipFill>
+          <a:blip r:embed="rId4"/>
+          <a:stretch>
+            <a:fillRect/>
+          </a:stretch>
+        </p:blipFill>
+        <p:spPr>
+          <a:xfrm>
+            <a:off x="631758" y="5075810"/>
+            <a:ext cx="9947532" cy="1406550"/>
+          </a:xfrm>
+          <a:prstGeom prst="rect">
+            <a:avLst/>
+          </a:prstGeom>
+        </p:spPr>
+      </p:pic>
+      <p:cxnSp>
+        <p:nvCxnSpPr>
+          <p:cNvPr id="14" name="Straight Arrow Connector 13">
+            <a:extLst>
+              <a:ext uri="{FF2B5EF4-FFF2-40B4-BE49-F238E27FC236}">
+                <a16:creationId xmlns:a16="http://schemas.microsoft.com/office/drawing/2014/main" id="{A8EDA721-E946-6E6F-869D-7580011BFD3C}"/>
+              </a:ext>
+            </a:extLst>
+          </p:cNvPr>
+          <p:cNvCxnSpPr/>
+          <p:nvPr/>
+        </p:nvCxnSpPr>
+        <p:spPr>
+          <a:xfrm flipH="1">
+            <a:off x="8604985" y="5361272"/>
+            <a:ext cx="259882" cy="567890"/>
+          </a:xfrm>
+          <a:prstGeom prst="straightConnector1">
+            <a:avLst/>
+          </a:prstGeom>
+          <a:ln>
+            <a:tailEnd type="triangle"/>
+          </a:ln>
+        </p:spPr>
+        <p:style>
+          <a:lnRef idx="1">
+            <a:schemeClr val="accent1"/>
+          </a:lnRef>
+          <a:fillRef idx="0">
+            <a:schemeClr val="accent1"/>
+          </a:fillRef>
+          <a:effectRef idx="0">
+            <a:schemeClr val="accent1"/>
+          </a:effectRef>
+          <a:fontRef idx="minor">
+            <a:schemeClr val="tx1"/>
+          </a:fontRef>
+        </p:style>
+      </p:cxnSp>
+      <p:cxnSp>
+        <p:nvCxnSpPr>
+          <p:cNvPr id="16" name="Straight Arrow Connector 15">
+            <a:extLst>
+              <a:ext uri="{FF2B5EF4-FFF2-40B4-BE49-F238E27FC236}">
+                <a16:creationId xmlns:a16="http://schemas.microsoft.com/office/drawing/2014/main" id="{01E6544E-B603-01C1-5937-76EFF18BABE8}"/>
+              </a:ext>
+            </a:extLst>
+          </p:cNvPr>
+          <p:cNvCxnSpPr/>
+          <p:nvPr/>
+        </p:nvCxnSpPr>
+        <p:spPr>
+          <a:xfrm flipH="1">
+            <a:off x="7502892" y="5573027"/>
+            <a:ext cx="332072" cy="375386"/>
+          </a:xfrm>
+          <a:prstGeom prst="straightConnector1">
+            <a:avLst/>
+          </a:prstGeom>
+          <a:ln>
+            <a:tailEnd type="triangle"/>
+          </a:ln>
+        </p:spPr>
+        <p:style>
+          <a:lnRef idx="1">
+            <a:schemeClr val="accent1"/>
+          </a:lnRef>
+          <a:fillRef idx="0">
+            <a:schemeClr val="accent1"/>
+          </a:fillRef>
+          <a:effectRef idx="0">
+            <a:schemeClr val="accent1"/>
+          </a:effectRef>
+          <a:fontRef idx="minor">
+            <a:schemeClr val="tx1"/>
+          </a:fontRef>
+        </p:style>
+      </p:cxnSp>
+      <p:sp>
+        <p:nvSpPr>
+          <p:cNvPr id="17" name="Oval 16">
+            <a:extLst>
+              <a:ext uri="{FF2B5EF4-FFF2-40B4-BE49-F238E27FC236}">
+                <a16:creationId xmlns:a16="http://schemas.microsoft.com/office/drawing/2014/main" id="{6E7BDF7A-20BF-DFF9-62FC-E3FFE3BEE968}"/>
+              </a:ext>
+            </a:extLst>
+          </p:cNvPr>
+          <p:cNvSpPr/>
+          <p:nvPr/>
+        </p:nvSpPr>
+        <p:spPr>
+          <a:xfrm>
+            <a:off x="7976936" y="1466631"/>
+            <a:ext cx="500513" cy="437472"/>
+          </a:xfrm>
+          <a:prstGeom prst="ellipse">
+            <a:avLst/>
+          </a:prstGeom>
+        </p:spPr>
+        <p:style>
+          <a:lnRef idx="2">
+            <a:schemeClr val="accent1">
+              <a:shade val="15000"/>
+            </a:schemeClr>
+          </a:lnRef>
+          <a:fillRef idx="1">
+            <a:schemeClr val="accent1"/>
+          </a:fillRef>
+          <a:effectRef idx="0">
+            <a:schemeClr val="accent1"/>
+          </a:effectRef>
+          <a:fontRef idx="minor">
+            <a:schemeClr val="lt1"/>
+          </a:fontRef>
+        </p:style>
+        <p:txBody>
+          <a:bodyPr rtlCol="0" anchor="ctr"/>
+          <a:lstStyle/>
+          <a:p>
+            <a:pPr algn="ctr"/>
+            <a:r>
+              <a:rPr lang="en-GB" dirty="0"/>
+              <a:t>1</a:t>
+            </a:r>
+          </a:p>
+        </p:txBody>
+      </p:sp>
+      <p:sp>
+        <p:nvSpPr>
+          <p:cNvPr id="18" name="Oval 17">
+            <a:extLst>
+              <a:ext uri="{FF2B5EF4-FFF2-40B4-BE49-F238E27FC236}">
+                <a16:creationId xmlns:a16="http://schemas.microsoft.com/office/drawing/2014/main" id="{CE800700-19D3-1A03-B613-64942D8CD479}"/>
+              </a:ext>
+            </a:extLst>
+          </p:cNvPr>
+          <p:cNvSpPr/>
+          <p:nvPr/>
+        </p:nvSpPr>
+        <p:spPr>
+          <a:xfrm>
+            <a:off x="5605524" y="3928002"/>
+            <a:ext cx="500513" cy="437472"/>
+          </a:xfrm>
+          <a:prstGeom prst="ellipse">
+            <a:avLst/>
+          </a:prstGeom>
+        </p:spPr>
+        <p:style>
+          <a:lnRef idx="2">
+            <a:schemeClr val="accent1">
+              <a:shade val="15000"/>
+            </a:schemeClr>
+          </a:lnRef>
+          <a:fillRef idx="1">
+            <a:schemeClr val="accent1"/>
+          </a:fillRef>
+          <a:effectRef idx="0">
+            <a:schemeClr val="accent1"/>
+          </a:effectRef>
+          <a:fontRef idx="minor">
+            <a:schemeClr val="lt1"/>
+          </a:fontRef>
+        </p:style>
+        <p:txBody>
+          <a:bodyPr rtlCol="0" anchor="ctr"/>
+          <a:lstStyle/>
+          <a:p>
+            <a:pPr algn="ctr"/>
+            <a:r>
+              <a:rPr lang="en-GB" dirty="0"/>
+              <a:t>2</a:t>
+            </a:r>
+          </a:p>
+        </p:txBody>
+      </p:sp>
+      <p:sp>
+        <p:nvSpPr>
+          <p:cNvPr id="19" name="Oval 18">
+            <a:extLst>
+              <a:ext uri="{FF2B5EF4-FFF2-40B4-BE49-F238E27FC236}">
+                <a16:creationId xmlns:a16="http://schemas.microsoft.com/office/drawing/2014/main" id="{F2AEF034-73CB-04EC-8F35-78BDC91ED4C9}"/>
+              </a:ext>
+            </a:extLst>
+          </p:cNvPr>
+          <p:cNvSpPr/>
+          <p:nvPr/>
+        </p:nvSpPr>
+        <p:spPr>
+          <a:xfrm>
+            <a:off x="8062935" y="5199995"/>
+            <a:ext cx="500513" cy="437472"/>
+          </a:xfrm>
+          <a:prstGeom prst="ellipse">
+            <a:avLst/>
+          </a:prstGeom>
+        </p:spPr>
+        <p:style>
+          <a:lnRef idx="2">
+            <a:schemeClr val="accent1">
+              <a:shade val="15000"/>
+            </a:schemeClr>
+          </a:lnRef>
+          <a:fillRef idx="1">
+            <a:schemeClr val="accent1"/>
+          </a:fillRef>
+          <a:effectRef idx="0">
+            <a:schemeClr val="accent1"/>
+          </a:effectRef>
+          <a:fontRef idx="minor">
+            <a:schemeClr val="lt1"/>
+          </a:fontRef>
+        </p:style>
+        <p:txBody>
+          <a:bodyPr rtlCol="0" anchor="ctr"/>
+          <a:lstStyle/>
+          <a:p>
+            <a:pPr algn="ctr"/>
+            <a:r>
+              <a:rPr lang="en-GB" dirty="0"/>
+              <a:t>3</a:t>
+            </a:r>
+          </a:p>
+        </p:txBody>
+      </p:sp>
     </p:spTree>
     <p:extLst>
       <p:ext uri="{BB962C8B-B14F-4D97-AF65-F5344CB8AC3E}">
-        <p14:creationId xmlns:p14="http://schemas.microsoft.com/office/powerpoint/2010/main" val="2627098666"/>
+        <p14:creationId xmlns:p14="http://schemas.microsoft.com/office/powerpoint/2010/main" val="3983423945"/>
       </p:ext>
     </p:extLst>
   </p:cSld>
@@ -8240,10 +8849,308 @@
           <a:chExt cx="0" cy="0"/>
         </a:xfrm>
       </p:grpSpPr>
+      <p:pic>
+        <p:nvPicPr>
+          <p:cNvPr id="3" name="Picture 2">
+            <a:extLst>
+              <a:ext uri="{FF2B5EF4-FFF2-40B4-BE49-F238E27FC236}">
+                <a16:creationId xmlns:a16="http://schemas.microsoft.com/office/drawing/2014/main" id="{45144E30-A43B-2161-4745-9C2991B549F3}"/>
+              </a:ext>
+            </a:extLst>
+          </p:cNvPr>
+          <p:cNvPicPr>
+            <a:picLocks noChangeAspect="1"/>
+          </p:cNvPicPr>
+          <p:nvPr/>
+        </p:nvPicPr>
+        <p:blipFill>
+          <a:blip r:embed="rId2"/>
+          <a:stretch>
+            <a:fillRect/>
+          </a:stretch>
+        </p:blipFill>
+        <p:spPr>
+          <a:xfrm>
+            <a:off x="196000" y="1297689"/>
+            <a:ext cx="11800000" cy="3742857"/>
+          </a:xfrm>
+          <a:prstGeom prst="rect">
+            <a:avLst/>
+          </a:prstGeom>
+        </p:spPr>
+      </p:pic>
+      <p:sp>
+        <p:nvSpPr>
+          <p:cNvPr id="4" name="Oval 3">
+            <a:extLst>
+              <a:ext uri="{FF2B5EF4-FFF2-40B4-BE49-F238E27FC236}">
+                <a16:creationId xmlns:a16="http://schemas.microsoft.com/office/drawing/2014/main" id="{9CA08883-3AEF-653C-1EF4-0E30F58C1058}"/>
+              </a:ext>
+            </a:extLst>
+          </p:cNvPr>
+          <p:cNvSpPr/>
+          <p:nvPr/>
+        </p:nvSpPr>
+        <p:spPr>
+          <a:xfrm>
+            <a:off x="4040203" y="4084703"/>
+            <a:ext cx="500513" cy="437472"/>
+          </a:xfrm>
+          <a:prstGeom prst="ellipse">
+            <a:avLst/>
+          </a:prstGeom>
+        </p:spPr>
+        <p:style>
+          <a:lnRef idx="2">
+            <a:schemeClr val="accent1">
+              <a:shade val="15000"/>
+            </a:schemeClr>
+          </a:lnRef>
+          <a:fillRef idx="1">
+            <a:schemeClr val="accent1"/>
+          </a:fillRef>
+          <a:effectRef idx="0">
+            <a:schemeClr val="accent1"/>
+          </a:effectRef>
+          <a:fontRef idx="minor">
+            <a:schemeClr val="lt1"/>
+          </a:fontRef>
+        </p:style>
+        <p:txBody>
+          <a:bodyPr rtlCol="0" anchor="ctr"/>
+          <a:lstStyle/>
+          <a:p>
+            <a:pPr algn="ctr"/>
+            <a:r>
+              <a:rPr lang="en-GB" dirty="0"/>
+              <a:t>1</a:t>
+            </a:r>
+          </a:p>
+        </p:txBody>
+      </p:sp>
+      <p:pic>
+        <p:nvPicPr>
+          <p:cNvPr id="6" name="Picture 5">
+            <a:extLst>
+              <a:ext uri="{FF2B5EF4-FFF2-40B4-BE49-F238E27FC236}">
+                <a16:creationId xmlns:a16="http://schemas.microsoft.com/office/drawing/2014/main" id="{6D2FBF19-1FA0-1F4E-D9D9-C80923D7AE21}"/>
+              </a:ext>
+            </a:extLst>
+          </p:cNvPr>
+          <p:cNvPicPr>
+            <a:picLocks noChangeAspect="1"/>
+          </p:cNvPicPr>
+          <p:nvPr/>
+        </p:nvPicPr>
+        <p:blipFill>
+          <a:blip r:embed="rId3"/>
+          <a:stretch>
+            <a:fillRect/>
+          </a:stretch>
+        </p:blipFill>
+        <p:spPr>
+          <a:xfrm>
+            <a:off x="64966" y="5210797"/>
+            <a:ext cx="11604859" cy="1512448"/>
+          </a:xfrm>
+          <a:prstGeom prst="rect">
+            <a:avLst/>
+          </a:prstGeom>
+        </p:spPr>
+      </p:pic>
+      <p:sp>
+        <p:nvSpPr>
+          <p:cNvPr id="7" name="Oval 6">
+            <a:extLst>
+              <a:ext uri="{FF2B5EF4-FFF2-40B4-BE49-F238E27FC236}">
+                <a16:creationId xmlns:a16="http://schemas.microsoft.com/office/drawing/2014/main" id="{F89B3B24-214C-2EF1-115E-155FE00E350E}"/>
+              </a:ext>
+            </a:extLst>
+          </p:cNvPr>
+          <p:cNvSpPr/>
+          <p:nvPr/>
+        </p:nvSpPr>
+        <p:spPr>
+          <a:xfrm>
+            <a:off x="5366883" y="5529549"/>
+            <a:ext cx="500513" cy="437472"/>
+          </a:xfrm>
+          <a:prstGeom prst="ellipse">
+            <a:avLst/>
+          </a:prstGeom>
+        </p:spPr>
+        <p:style>
+          <a:lnRef idx="2">
+            <a:schemeClr val="accent1">
+              <a:shade val="15000"/>
+            </a:schemeClr>
+          </a:lnRef>
+          <a:fillRef idx="1">
+            <a:schemeClr val="accent1"/>
+          </a:fillRef>
+          <a:effectRef idx="0">
+            <a:schemeClr val="accent1"/>
+          </a:effectRef>
+          <a:fontRef idx="minor">
+            <a:schemeClr val="lt1"/>
+          </a:fontRef>
+        </p:style>
+        <p:txBody>
+          <a:bodyPr rtlCol="0" anchor="ctr"/>
+          <a:lstStyle/>
+          <a:p>
+            <a:pPr algn="ctr"/>
+            <a:r>
+              <a:rPr lang="en-GB" dirty="0"/>
+              <a:t>2</a:t>
+            </a:r>
+          </a:p>
+        </p:txBody>
+      </p:sp>
+      <p:sp>
+        <p:nvSpPr>
+          <p:cNvPr id="8" name="Oval 7">
+            <a:extLst>
+              <a:ext uri="{FF2B5EF4-FFF2-40B4-BE49-F238E27FC236}">
+                <a16:creationId xmlns:a16="http://schemas.microsoft.com/office/drawing/2014/main" id="{31E03B45-4B1E-F8FB-3F7B-43F1EEA9184F}"/>
+              </a:ext>
+            </a:extLst>
+          </p:cNvPr>
+          <p:cNvSpPr/>
+          <p:nvPr/>
+        </p:nvSpPr>
+        <p:spPr>
+          <a:xfrm>
+            <a:off x="6964679" y="5449886"/>
+            <a:ext cx="500513" cy="437472"/>
+          </a:xfrm>
+          <a:prstGeom prst="ellipse">
+            <a:avLst/>
+          </a:prstGeom>
+        </p:spPr>
+        <p:style>
+          <a:lnRef idx="2">
+            <a:schemeClr val="accent1">
+              <a:shade val="15000"/>
+            </a:schemeClr>
+          </a:lnRef>
+          <a:fillRef idx="1">
+            <a:schemeClr val="accent1"/>
+          </a:fillRef>
+          <a:effectRef idx="0">
+            <a:schemeClr val="accent1"/>
+          </a:effectRef>
+          <a:fontRef idx="minor">
+            <a:schemeClr val="lt1"/>
+          </a:fontRef>
+        </p:style>
+        <p:txBody>
+          <a:bodyPr rtlCol="0" anchor="ctr"/>
+          <a:lstStyle/>
+          <a:p>
+            <a:pPr algn="ctr"/>
+            <a:r>
+              <a:rPr lang="en-GB" dirty="0"/>
+              <a:t>3</a:t>
+            </a:r>
+          </a:p>
+        </p:txBody>
+      </p:sp>
+      <p:sp>
+        <p:nvSpPr>
+          <p:cNvPr id="10" name="Rectangle 9">
+            <a:extLst>
+              <a:ext uri="{FF2B5EF4-FFF2-40B4-BE49-F238E27FC236}">
+                <a16:creationId xmlns:a16="http://schemas.microsoft.com/office/drawing/2014/main" id="{C6E3CC02-23DF-F874-3A15-E256F96FA32B}"/>
+              </a:ext>
+            </a:extLst>
+          </p:cNvPr>
+          <p:cNvSpPr/>
+          <p:nvPr/>
+        </p:nvSpPr>
+        <p:spPr>
+          <a:xfrm>
+            <a:off x="6675120" y="207407"/>
+            <a:ext cx="4598793" cy="970737"/>
+          </a:xfrm>
+          <a:prstGeom prst="rect">
+            <a:avLst/>
+          </a:prstGeom>
+          <a:solidFill>
+            <a:schemeClr val="accent4">
+              <a:lumMod val="40000"/>
+              <a:lumOff val="60000"/>
+            </a:schemeClr>
+          </a:solidFill>
+        </p:spPr>
+        <p:style>
+          <a:lnRef idx="2">
+            <a:schemeClr val="accent1">
+              <a:shade val="50000"/>
+            </a:schemeClr>
+          </a:lnRef>
+          <a:fillRef idx="1">
+            <a:schemeClr val="accent1"/>
+          </a:fillRef>
+          <a:effectRef idx="0">
+            <a:schemeClr val="accent1"/>
+          </a:effectRef>
+          <a:fontRef idx="minor">
+            <a:schemeClr val="lt1"/>
+          </a:fontRef>
+        </p:style>
+        <p:txBody>
+          <a:bodyPr rtlCol="0" anchor="ctr"/>
+          <a:lstStyle/>
+          <a:p>
+            <a:pPr algn="ctr"/>
+            <a:r>
+              <a:rPr lang="en-IE" dirty="0">
+                <a:solidFill>
+                  <a:schemeClr val="tx1"/>
+                </a:solidFill>
+              </a:rPr>
+              <a:t>Initialise </a:t>
+            </a:r>
+            <a:r>
+              <a:rPr lang="en-IE" dirty="0" err="1">
+                <a:solidFill>
+                  <a:schemeClr val="tx1"/>
+                </a:solidFill>
+              </a:rPr>
+              <a:t>AssetTag</a:t>
+            </a:r>
+            <a:r>
+              <a:rPr lang="en-IE" dirty="0">
+                <a:solidFill>
+                  <a:schemeClr val="tx1"/>
+                </a:solidFill>
+              </a:rPr>
+              <a:t> and </a:t>
+            </a:r>
+            <a:r>
+              <a:rPr lang="en-IE" dirty="0" err="1">
+                <a:solidFill>
+                  <a:schemeClr val="tx1"/>
+                </a:solidFill>
+              </a:rPr>
+              <a:t>KitType</a:t>
+            </a:r>
+            <a:r>
+              <a:rPr lang="en-IE" dirty="0">
+                <a:solidFill>
+                  <a:schemeClr val="tx1"/>
+                </a:solidFill>
+              </a:rPr>
+              <a:t> and update Display method</a:t>
+            </a:r>
+          </a:p>
+        </p:txBody>
+      </p:sp>
     </p:spTree>
     <p:extLst>
       <p:ext uri="{BB962C8B-B14F-4D97-AF65-F5344CB8AC3E}">
-        <p14:creationId xmlns:p14="http://schemas.microsoft.com/office/powerpoint/2010/main" val="2353242281"/>
+        <p14:creationId xmlns:p14="http://schemas.microsoft.com/office/powerpoint/2010/main" val="2627098666"/>
       </p:ext>
     </p:extLst>
   </p:cSld>
@@ -8270,10 +9177,40 @@
           <a:chExt cx="0" cy="0"/>
         </a:xfrm>
       </p:grpSpPr>
+      <p:pic>
+        <p:nvPicPr>
+          <p:cNvPr id="3" name="Picture 2">
+            <a:extLst>
+              <a:ext uri="{FF2B5EF4-FFF2-40B4-BE49-F238E27FC236}">
+                <a16:creationId xmlns:a16="http://schemas.microsoft.com/office/drawing/2014/main" id="{5F1A66A7-4FCA-6F50-AA60-577311053695}"/>
+              </a:ext>
+            </a:extLst>
+          </p:cNvPr>
+          <p:cNvPicPr>
+            <a:picLocks noChangeAspect="1"/>
+          </p:cNvPicPr>
+          <p:nvPr/>
+        </p:nvPicPr>
+        <p:blipFill>
+          <a:blip r:embed="rId2"/>
+          <a:stretch>
+            <a:fillRect/>
+          </a:stretch>
+        </p:blipFill>
+        <p:spPr>
+          <a:xfrm>
+            <a:off x="625376" y="0"/>
+            <a:ext cx="10941248" cy="6858000"/>
+          </a:xfrm>
+          <a:prstGeom prst="rect">
+            <a:avLst/>
+          </a:prstGeom>
+        </p:spPr>
+      </p:pic>
     </p:spTree>
     <p:extLst>
       <p:ext uri="{BB962C8B-B14F-4D97-AF65-F5344CB8AC3E}">
-        <p14:creationId xmlns:p14="http://schemas.microsoft.com/office/powerpoint/2010/main" val="3208859128"/>
+        <p14:creationId xmlns:p14="http://schemas.microsoft.com/office/powerpoint/2010/main" val="2353242281"/>
       </p:ext>
     </p:extLst>
   </p:cSld>
@@ -8305,7 +9242,7 @@
           <p:cNvPr id="2" name="Picture 1">
             <a:extLst>
               <a:ext uri="{FF2B5EF4-FFF2-40B4-BE49-F238E27FC236}">
-                <a16:creationId xmlns:a16="http://schemas.microsoft.com/office/drawing/2014/main" id="{0C2D2D4E-10E8-4217-AF7C-A65D7C011CBB}"/>
+                <a16:creationId xmlns:a16="http://schemas.microsoft.com/office/drawing/2014/main" id="{5DB1C7BB-3149-40D6-8584-80589B4308F5}"/>
               </a:ext>
             </a:extLst>
           </p:cNvPr>
@@ -8322,8 +9259,8 @@
         </p:blipFill>
         <p:spPr>
           <a:xfrm>
-            <a:off x="1238250" y="1660977"/>
-            <a:ext cx="9925050" cy="2755786"/>
+            <a:off x="1406211" y="500062"/>
+            <a:ext cx="9197237" cy="5857875"/>
           </a:xfrm>
           <a:prstGeom prst="rect">
             <a:avLst/>
@@ -8333,7 +9270,7 @@
     </p:spTree>
     <p:extLst>
       <p:ext uri="{BB962C8B-B14F-4D97-AF65-F5344CB8AC3E}">
-        <p14:creationId xmlns:p14="http://schemas.microsoft.com/office/powerpoint/2010/main" val="2445765700"/>
+        <p14:creationId xmlns:p14="http://schemas.microsoft.com/office/powerpoint/2010/main" val="488773756"/>
       </p:ext>
     </p:extLst>
   </p:cSld>
@@ -8360,10 +9297,70 @@
           <a:chExt cx="0" cy="0"/>
         </a:xfrm>
       </p:grpSpPr>
+      <p:pic>
+        <p:nvPicPr>
+          <p:cNvPr id="3" name="Picture 2">
+            <a:extLst>
+              <a:ext uri="{FF2B5EF4-FFF2-40B4-BE49-F238E27FC236}">
+                <a16:creationId xmlns:a16="http://schemas.microsoft.com/office/drawing/2014/main" id="{55FC9A64-6117-92D2-D286-82C86FFF02CE}"/>
+              </a:ext>
+            </a:extLst>
+          </p:cNvPr>
+          <p:cNvPicPr>
+            <a:picLocks noChangeAspect="1"/>
+          </p:cNvPicPr>
+          <p:nvPr/>
+        </p:nvPicPr>
+        <p:blipFill>
+          <a:blip r:embed="rId2"/>
+          <a:stretch>
+            <a:fillRect/>
+          </a:stretch>
+        </p:blipFill>
+        <p:spPr>
+          <a:xfrm>
+            <a:off x="326847" y="304758"/>
+            <a:ext cx="3838095" cy="2552381"/>
+          </a:xfrm>
+          <a:prstGeom prst="rect">
+            <a:avLst/>
+          </a:prstGeom>
+        </p:spPr>
+      </p:pic>
+      <p:pic>
+        <p:nvPicPr>
+          <p:cNvPr id="5" name="Picture 4">
+            <a:extLst>
+              <a:ext uri="{FF2B5EF4-FFF2-40B4-BE49-F238E27FC236}">
+                <a16:creationId xmlns:a16="http://schemas.microsoft.com/office/drawing/2014/main" id="{65529D36-DC9A-52D3-6555-71446ED52AA4}"/>
+              </a:ext>
+            </a:extLst>
+          </p:cNvPr>
+          <p:cNvPicPr>
+            <a:picLocks noChangeAspect="1"/>
+          </p:cNvPicPr>
+          <p:nvPr/>
+        </p:nvPicPr>
+        <p:blipFill>
+          <a:blip r:embed="rId3"/>
+          <a:stretch>
+            <a:fillRect/>
+          </a:stretch>
+        </p:blipFill>
+        <p:spPr>
+          <a:xfrm>
+            <a:off x="4442027" y="2857139"/>
+            <a:ext cx="7523809" cy="3761905"/>
+          </a:xfrm>
+          <a:prstGeom prst="rect">
+            <a:avLst/>
+          </a:prstGeom>
+        </p:spPr>
+      </p:pic>
     </p:spTree>
     <p:extLst>
       <p:ext uri="{BB962C8B-B14F-4D97-AF65-F5344CB8AC3E}">
-        <p14:creationId xmlns:p14="http://schemas.microsoft.com/office/powerpoint/2010/main" val="4076882749"/>
+        <p14:creationId xmlns:p14="http://schemas.microsoft.com/office/powerpoint/2010/main" val="3208859128"/>
       </p:ext>
     </p:extLst>
   </p:cSld>
@@ -8390,6 +9387,504 @@
           <a:chExt cx="0" cy="0"/>
         </a:xfrm>
       </p:grpSpPr>
+      <p:pic>
+        <p:nvPicPr>
+          <p:cNvPr id="12" name="Picture 11">
+            <a:extLst>
+              <a:ext uri="{FF2B5EF4-FFF2-40B4-BE49-F238E27FC236}">
+                <a16:creationId xmlns:a16="http://schemas.microsoft.com/office/drawing/2014/main" id="{2EC84519-42B4-6F59-7D7C-1BF6B6FEE1BF}"/>
+              </a:ext>
+            </a:extLst>
+          </p:cNvPr>
+          <p:cNvPicPr>
+            <a:picLocks noChangeAspect="1"/>
+          </p:cNvPicPr>
+          <p:nvPr/>
+        </p:nvPicPr>
+        <p:blipFill>
+          <a:blip r:embed="rId2"/>
+          <a:stretch>
+            <a:fillRect/>
+          </a:stretch>
+        </p:blipFill>
+        <p:spPr>
+          <a:xfrm>
+            <a:off x="340572" y="1427589"/>
+            <a:ext cx="8961905" cy="4847619"/>
+          </a:xfrm>
+          <a:prstGeom prst="rect">
+            <a:avLst/>
+          </a:prstGeom>
+        </p:spPr>
+      </p:pic>
+      <p:sp>
+        <p:nvSpPr>
+          <p:cNvPr id="4" name="Rectangle 3">
+            <a:extLst>
+              <a:ext uri="{FF2B5EF4-FFF2-40B4-BE49-F238E27FC236}">
+                <a16:creationId xmlns:a16="http://schemas.microsoft.com/office/drawing/2014/main" id="{BE045F3E-7672-D073-F5C4-B260E6F49721}"/>
+              </a:ext>
+            </a:extLst>
+          </p:cNvPr>
+          <p:cNvSpPr/>
+          <p:nvPr/>
+        </p:nvSpPr>
+        <p:spPr>
+          <a:xfrm>
+            <a:off x="7252635" y="582792"/>
+            <a:ext cx="4598793" cy="970737"/>
+          </a:xfrm>
+          <a:prstGeom prst="rect">
+            <a:avLst/>
+          </a:prstGeom>
+          <a:solidFill>
+            <a:schemeClr val="accent4">
+              <a:lumMod val="40000"/>
+              <a:lumOff val="60000"/>
+            </a:schemeClr>
+          </a:solidFill>
+        </p:spPr>
+        <p:style>
+          <a:lnRef idx="2">
+            <a:schemeClr val="accent1">
+              <a:shade val="50000"/>
+            </a:schemeClr>
+          </a:lnRef>
+          <a:fillRef idx="1">
+            <a:schemeClr val="accent1"/>
+          </a:fillRef>
+          <a:effectRef idx="0">
+            <a:schemeClr val="accent1"/>
+          </a:effectRef>
+          <a:fontRef idx="minor">
+            <a:schemeClr val="lt1"/>
+          </a:fontRef>
+        </p:style>
+        <p:txBody>
+          <a:bodyPr rtlCol="0" anchor="ctr"/>
+          <a:lstStyle/>
+          <a:p>
+            <a:pPr algn="ctr"/>
+            <a:r>
+              <a:rPr lang="en-IE" dirty="0">
+                <a:solidFill>
+                  <a:schemeClr val="tx1"/>
+                </a:solidFill>
+              </a:rPr>
+              <a:t>Copy from driver</a:t>
+            </a:r>
+          </a:p>
+        </p:txBody>
+      </p:sp>
+      <p:cxnSp>
+        <p:nvCxnSpPr>
+          <p:cNvPr id="6" name="Straight Arrow Connector 5">
+            <a:extLst>
+              <a:ext uri="{FF2B5EF4-FFF2-40B4-BE49-F238E27FC236}">
+                <a16:creationId xmlns:a16="http://schemas.microsoft.com/office/drawing/2014/main" id="{891D77C9-680E-5332-A8DF-6DF192F5FE2B}"/>
+              </a:ext>
+            </a:extLst>
+          </p:cNvPr>
+          <p:cNvCxnSpPr/>
+          <p:nvPr/>
+        </p:nvCxnSpPr>
+        <p:spPr>
+          <a:xfrm flipH="1">
+            <a:off x="8200724" y="1809549"/>
+            <a:ext cx="798897" cy="1029904"/>
+          </a:xfrm>
+          <a:prstGeom prst="straightConnector1">
+            <a:avLst/>
+          </a:prstGeom>
+          <a:ln>
+            <a:tailEnd type="triangle"/>
+          </a:ln>
+        </p:spPr>
+        <p:style>
+          <a:lnRef idx="1">
+            <a:schemeClr val="accent1"/>
+          </a:lnRef>
+          <a:fillRef idx="0">
+            <a:schemeClr val="accent1"/>
+          </a:fillRef>
+          <a:effectRef idx="0">
+            <a:schemeClr val="accent1"/>
+          </a:effectRef>
+          <a:fontRef idx="minor">
+            <a:schemeClr val="tx1"/>
+          </a:fontRef>
+        </p:style>
+      </p:cxnSp>
+      <p:sp>
+        <p:nvSpPr>
+          <p:cNvPr id="8" name="Oval 7">
+            <a:extLst>
+              <a:ext uri="{FF2B5EF4-FFF2-40B4-BE49-F238E27FC236}">
+                <a16:creationId xmlns:a16="http://schemas.microsoft.com/office/drawing/2014/main" id="{BF70E5C7-06C8-C1DB-434B-C7AF9F7DAB35}"/>
+              </a:ext>
+            </a:extLst>
+          </p:cNvPr>
+          <p:cNvSpPr/>
+          <p:nvPr/>
+        </p:nvSpPr>
+        <p:spPr>
+          <a:xfrm>
+            <a:off x="3096006" y="1553529"/>
+            <a:ext cx="500513" cy="437472"/>
+          </a:xfrm>
+          <a:prstGeom prst="ellipse">
+            <a:avLst/>
+          </a:prstGeom>
+        </p:spPr>
+        <p:style>
+          <a:lnRef idx="2">
+            <a:schemeClr val="accent1">
+              <a:shade val="15000"/>
+            </a:schemeClr>
+          </a:lnRef>
+          <a:fillRef idx="1">
+            <a:schemeClr val="accent1"/>
+          </a:fillRef>
+          <a:effectRef idx="0">
+            <a:schemeClr val="accent1"/>
+          </a:effectRef>
+          <a:fontRef idx="minor">
+            <a:schemeClr val="lt1"/>
+          </a:fontRef>
+        </p:style>
+        <p:txBody>
+          <a:bodyPr rtlCol="0" anchor="ctr"/>
+          <a:lstStyle/>
+          <a:p>
+            <a:pPr algn="ctr"/>
+            <a:r>
+              <a:rPr lang="en-GB" dirty="0"/>
+              <a:t>1</a:t>
+            </a:r>
+          </a:p>
+        </p:txBody>
+      </p:sp>
+      <p:sp>
+        <p:nvSpPr>
+          <p:cNvPr id="9" name="Oval 8">
+            <a:extLst>
+              <a:ext uri="{FF2B5EF4-FFF2-40B4-BE49-F238E27FC236}">
+                <a16:creationId xmlns:a16="http://schemas.microsoft.com/office/drawing/2014/main" id="{C7DF8C50-625E-6E28-3FE1-0DD8B66FA13E}"/>
+              </a:ext>
+            </a:extLst>
+          </p:cNvPr>
+          <p:cNvSpPr/>
+          <p:nvPr/>
+        </p:nvSpPr>
+        <p:spPr>
+          <a:xfrm>
+            <a:off x="7486047" y="2401981"/>
+            <a:ext cx="500513" cy="437472"/>
+          </a:xfrm>
+          <a:prstGeom prst="ellipse">
+            <a:avLst/>
+          </a:prstGeom>
+        </p:spPr>
+        <p:style>
+          <a:lnRef idx="2">
+            <a:schemeClr val="accent1">
+              <a:shade val="15000"/>
+            </a:schemeClr>
+          </a:lnRef>
+          <a:fillRef idx="1">
+            <a:schemeClr val="accent1"/>
+          </a:fillRef>
+          <a:effectRef idx="0">
+            <a:schemeClr val="accent1"/>
+          </a:effectRef>
+          <a:fontRef idx="minor">
+            <a:schemeClr val="lt1"/>
+          </a:fontRef>
+        </p:style>
+        <p:txBody>
+          <a:bodyPr rtlCol="0" anchor="ctr"/>
+          <a:lstStyle/>
+          <a:p>
+            <a:pPr algn="ctr"/>
+            <a:r>
+              <a:rPr lang="en-GB" dirty="0"/>
+              <a:t>2</a:t>
+            </a:r>
+          </a:p>
+        </p:txBody>
+      </p:sp>
+      <p:sp>
+        <p:nvSpPr>
+          <p:cNvPr id="10" name="Oval 9">
+            <a:extLst>
+              <a:ext uri="{FF2B5EF4-FFF2-40B4-BE49-F238E27FC236}">
+                <a16:creationId xmlns:a16="http://schemas.microsoft.com/office/drawing/2014/main" id="{56970FE7-29AE-2C60-91E1-2E324FC9E36F}"/>
+              </a:ext>
+            </a:extLst>
+          </p:cNvPr>
+          <p:cNvSpPr/>
+          <p:nvPr/>
+        </p:nvSpPr>
+        <p:spPr>
+          <a:xfrm>
+            <a:off x="6908531" y="4344585"/>
+            <a:ext cx="500513" cy="437472"/>
+          </a:xfrm>
+          <a:prstGeom prst="ellipse">
+            <a:avLst/>
+          </a:prstGeom>
+        </p:spPr>
+        <p:style>
+          <a:lnRef idx="2">
+            <a:schemeClr val="accent1">
+              <a:shade val="15000"/>
+            </a:schemeClr>
+          </a:lnRef>
+          <a:fillRef idx="1">
+            <a:schemeClr val="accent1"/>
+          </a:fillRef>
+          <a:effectRef idx="0">
+            <a:schemeClr val="accent1"/>
+          </a:effectRef>
+          <a:fontRef idx="minor">
+            <a:schemeClr val="lt1"/>
+          </a:fontRef>
+        </p:style>
+        <p:txBody>
+          <a:bodyPr rtlCol="0" anchor="ctr"/>
+          <a:lstStyle/>
+          <a:p>
+            <a:pPr algn="ctr"/>
+            <a:r>
+              <a:rPr lang="en-GB" dirty="0"/>
+              <a:t>3</a:t>
+            </a:r>
+          </a:p>
+        </p:txBody>
+      </p:sp>
+    </p:spTree>
+    <p:extLst>
+      <p:ext uri="{BB962C8B-B14F-4D97-AF65-F5344CB8AC3E}">
+        <p14:creationId xmlns:p14="http://schemas.microsoft.com/office/powerpoint/2010/main" val="4076882749"/>
+      </p:ext>
+    </p:extLst>
+  </p:cSld>
+  <p:clrMapOvr>
+    <a:masterClrMapping/>
+  </p:clrMapOvr>
+</p:sld>
+</file>
+
+<file path=ppt/slides/slide52.xml><?xml version="1.0" encoding="utf-8"?>
+<p:sld xmlns:a="http://schemas.openxmlformats.org/drawingml/2006/main" xmlns:r="http://schemas.openxmlformats.org/officeDocument/2006/relationships" xmlns:p="http://schemas.openxmlformats.org/presentationml/2006/main">
+  <p:cSld>
+    <p:spTree>
+      <p:nvGrpSpPr>
+        <p:cNvPr id="1" name=""/>
+        <p:cNvGrpSpPr/>
+        <p:nvPr/>
+      </p:nvGrpSpPr>
+      <p:grpSpPr>
+        <a:xfrm>
+          <a:off x="0" y="0"/>
+          <a:ext cx="0" cy="0"/>
+          <a:chOff x="0" y="0"/>
+          <a:chExt cx="0" cy="0"/>
+        </a:xfrm>
+      </p:grpSpPr>
+      <p:pic>
+        <p:nvPicPr>
+          <p:cNvPr id="3" name="Picture 2">
+            <a:extLst>
+              <a:ext uri="{FF2B5EF4-FFF2-40B4-BE49-F238E27FC236}">
+                <a16:creationId xmlns:a16="http://schemas.microsoft.com/office/drawing/2014/main" id="{77CF681D-D80F-E648-487A-6613254E0CAE}"/>
+              </a:ext>
+            </a:extLst>
+          </p:cNvPr>
+          <p:cNvPicPr>
+            <a:picLocks noChangeAspect="1"/>
+          </p:cNvPicPr>
+          <p:nvPr/>
+        </p:nvPicPr>
+        <p:blipFill>
+          <a:blip r:embed="rId2"/>
+          <a:stretch>
+            <a:fillRect/>
+          </a:stretch>
+        </p:blipFill>
+        <p:spPr>
+          <a:xfrm>
+            <a:off x="0" y="462873"/>
+            <a:ext cx="12192000" cy="5932254"/>
+          </a:xfrm>
+          <a:prstGeom prst="rect">
+            <a:avLst/>
+          </a:prstGeom>
+        </p:spPr>
+      </p:pic>
+      <p:sp>
+        <p:nvSpPr>
+          <p:cNvPr id="4" name="Oval 3">
+            <a:extLst>
+              <a:ext uri="{FF2B5EF4-FFF2-40B4-BE49-F238E27FC236}">
+                <a16:creationId xmlns:a16="http://schemas.microsoft.com/office/drawing/2014/main" id="{F86A98B9-802A-DEE5-7448-3645AE44D29C}"/>
+              </a:ext>
+            </a:extLst>
+          </p:cNvPr>
+          <p:cNvSpPr/>
+          <p:nvPr/>
+        </p:nvSpPr>
+        <p:spPr>
+          <a:xfrm>
+            <a:off x="7128992" y="3545959"/>
+            <a:ext cx="500513" cy="437472"/>
+          </a:xfrm>
+          <a:prstGeom prst="ellipse">
+            <a:avLst/>
+          </a:prstGeom>
+          <a:solidFill>
+            <a:srgbClr val="FF0000"/>
+          </a:solidFill>
+        </p:spPr>
+        <p:style>
+          <a:lnRef idx="2">
+            <a:schemeClr val="accent1">
+              <a:shade val="15000"/>
+            </a:schemeClr>
+          </a:lnRef>
+          <a:fillRef idx="1">
+            <a:schemeClr val="accent1"/>
+          </a:fillRef>
+          <a:effectRef idx="0">
+            <a:schemeClr val="accent1"/>
+          </a:effectRef>
+          <a:fontRef idx="minor">
+            <a:schemeClr val="lt1"/>
+          </a:fontRef>
+        </p:style>
+        <p:txBody>
+          <a:bodyPr rtlCol="0" anchor="ctr"/>
+          <a:lstStyle/>
+          <a:p>
+            <a:pPr algn="ctr"/>
+            <a:r>
+              <a:rPr lang="en-GB" dirty="0"/>
+              <a:t>1</a:t>
+            </a:r>
+          </a:p>
+        </p:txBody>
+      </p:sp>
+      <p:sp>
+        <p:nvSpPr>
+          <p:cNvPr id="5" name="Oval 4">
+            <a:extLst>
+              <a:ext uri="{FF2B5EF4-FFF2-40B4-BE49-F238E27FC236}">
+                <a16:creationId xmlns:a16="http://schemas.microsoft.com/office/drawing/2014/main" id="{BD36959E-A9B2-4430-B0CE-E255E88803C0}"/>
+              </a:ext>
+            </a:extLst>
+          </p:cNvPr>
+          <p:cNvSpPr/>
+          <p:nvPr/>
+        </p:nvSpPr>
+        <p:spPr>
+          <a:xfrm>
+            <a:off x="7379248" y="4970543"/>
+            <a:ext cx="500513" cy="437472"/>
+          </a:xfrm>
+          <a:prstGeom prst="ellipse">
+            <a:avLst/>
+          </a:prstGeom>
+          <a:solidFill>
+            <a:srgbClr val="FF0000"/>
+          </a:solidFill>
+        </p:spPr>
+        <p:style>
+          <a:lnRef idx="2">
+            <a:schemeClr val="accent1">
+              <a:shade val="15000"/>
+            </a:schemeClr>
+          </a:lnRef>
+          <a:fillRef idx="1">
+            <a:schemeClr val="accent1"/>
+          </a:fillRef>
+          <a:effectRef idx="0">
+            <a:schemeClr val="accent1"/>
+          </a:effectRef>
+          <a:fontRef idx="minor">
+            <a:schemeClr val="lt1"/>
+          </a:fontRef>
+        </p:style>
+        <p:txBody>
+          <a:bodyPr rtlCol="0" anchor="ctr"/>
+          <a:lstStyle/>
+          <a:p>
+            <a:pPr algn="ctr"/>
+            <a:r>
+              <a:rPr lang="en-GB" dirty="0"/>
+              <a:t>2</a:t>
+            </a:r>
+          </a:p>
+        </p:txBody>
+      </p:sp>
+      <p:sp>
+        <p:nvSpPr>
+          <p:cNvPr id="6" name="Rectangle 5">
+            <a:extLst>
+              <a:ext uri="{FF2B5EF4-FFF2-40B4-BE49-F238E27FC236}">
+                <a16:creationId xmlns:a16="http://schemas.microsoft.com/office/drawing/2014/main" id="{4146C319-F812-B226-8B4B-B19223B90677}"/>
+              </a:ext>
+            </a:extLst>
+          </p:cNvPr>
+          <p:cNvSpPr/>
+          <p:nvPr/>
+        </p:nvSpPr>
+        <p:spPr>
+          <a:xfrm>
+            <a:off x="3662412" y="6208294"/>
+            <a:ext cx="4598793" cy="533251"/>
+          </a:xfrm>
+          <a:prstGeom prst="rect">
+            <a:avLst/>
+          </a:prstGeom>
+          <a:solidFill>
+            <a:schemeClr val="accent4">
+              <a:lumMod val="40000"/>
+              <a:lumOff val="60000"/>
+            </a:schemeClr>
+          </a:solidFill>
+        </p:spPr>
+        <p:style>
+          <a:lnRef idx="2">
+            <a:schemeClr val="accent1">
+              <a:shade val="50000"/>
+            </a:schemeClr>
+          </a:lnRef>
+          <a:fillRef idx="1">
+            <a:schemeClr val="accent1"/>
+          </a:fillRef>
+          <a:effectRef idx="0">
+            <a:schemeClr val="accent1"/>
+          </a:effectRef>
+          <a:fontRef idx="minor">
+            <a:schemeClr val="lt1"/>
+          </a:fontRef>
+        </p:style>
+        <p:txBody>
+          <a:bodyPr rtlCol="0" anchor="ctr"/>
+          <a:lstStyle/>
+          <a:p>
+            <a:pPr algn="ctr"/>
+            <a:r>
+              <a:rPr lang="en-IE" dirty="0">
+                <a:solidFill>
+                  <a:schemeClr val="tx1"/>
+                </a:solidFill>
+              </a:rPr>
+              <a:t>Fix the failing tests</a:t>
+            </a:r>
+          </a:p>
+        </p:txBody>
+      </p:sp>
     </p:spTree>
     <p:extLst>
       <p:ext uri="{BB962C8B-B14F-4D97-AF65-F5344CB8AC3E}">
@@ -8425,7 +9920,7 @@
           <p:cNvPr id="2" name="Picture 1">
             <a:extLst>
               <a:ext uri="{FF2B5EF4-FFF2-40B4-BE49-F238E27FC236}">
-                <a16:creationId xmlns:a16="http://schemas.microsoft.com/office/drawing/2014/main" id="{770CBC4A-BF0A-4A25-A217-BD382811AB7E}"/>
+                <a16:creationId xmlns:a16="http://schemas.microsoft.com/office/drawing/2014/main" id="{0C2D2D4E-10E8-4217-AF7C-A65D7C011CBB}"/>
               </a:ext>
             </a:extLst>
           </p:cNvPr>
@@ -8442,92 +9937,18 @@
         </p:blipFill>
         <p:spPr>
           <a:xfrm>
-            <a:off x="1528488" y="1204662"/>
-            <a:ext cx="3934374" cy="3591426"/>
+            <a:off x="1238250" y="1660977"/>
+            <a:ext cx="9925050" cy="2755786"/>
           </a:xfrm>
           <a:prstGeom prst="rect">
             <a:avLst/>
           </a:prstGeom>
         </p:spPr>
       </p:pic>
-      <p:cxnSp>
-        <p:nvCxnSpPr>
-          <p:cNvPr id="4" name="Straight Arrow Connector 3">
-            <a:extLst>
-              <a:ext uri="{FF2B5EF4-FFF2-40B4-BE49-F238E27FC236}">
-                <a16:creationId xmlns:a16="http://schemas.microsoft.com/office/drawing/2014/main" id="{A04D6683-C21C-4DD1-B961-2744EEFA8092}"/>
-              </a:ext>
-            </a:extLst>
-          </p:cNvPr>
-          <p:cNvCxnSpPr/>
-          <p:nvPr/>
-        </p:nvCxnSpPr>
-        <p:spPr>
-          <a:xfrm flipH="1">
-            <a:off x="5753100" y="2095500"/>
-            <a:ext cx="3771900" cy="1247775"/>
-          </a:xfrm>
-          <a:prstGeom prst="straightConnector1">
-            <a:avLst/>
-          </a:prstGeom>
-          <a:ln w="28575">
-            <a:tailEnd type="triangle"/>
-          </a:ln>
-        </p:spPr>
-        <p:style>
-          <a:lnRef idx="1">
-            <a:schemeClr val="accent1"/>
-          </a:lnRef>
-          <a:fillRef idx="0">
-            <a:schemeClr val="accent1"/>
-          </a:fillRef>
-          <a:effectRef idx="0">
-            <a:schemeClr val="accent1"/>
-          </a:effectRef>
-          <a:fontRef idx="minor">
-            <a:schemeClr val="tx1"/>
-          </a:fontRef>
-        </p:style>
-      </p:cxnSp>
-      <p:sp>
-        <p:nvSpPr>
-          <p:cNvPr id="5" name="TextBox 4">
-            <a:extLst>
-              <a:ext uri="{FF2B5EF4-FFF2-40B4-BE49-F238E27FC236}">
-                <a16:creationId xmlns:a16="http://schemas.microsoft.com/office/drawing/2014/main" id="{D361ECCF-EF5D-4D64-BF76-78E348E0F17E}"/>
-              </a:ext>
-            </a:extLst>
-          </p:cNvPr>
-          <p:cNvSpPr txBox="1"/>
-          <p:nvPr/>
-        </p:nvSpPr>
-        <p:spPr>
-          <a:xfrm>
-            <a:off x="7820025" y="2973943"/>
-            <a:ext cx="1928028" cy="369332"/>
-          </a:xfrm>
-          <a:prstGeom prst="rect">
-            <a:avLst/>
-          </a:prstGeom>
-          <a:noFill/>
-        </p:spPr>
-        <p:txBody>
-          <a:bodyPr wrap="none" rtlCol="0">
-            <a:spAutoFit/>
-          </a:bodyPr>
-          <a:lstStyle/>
-          <a:p>
-            <a:r>
-              <a:rPr lang="en-IE" dirty="0"/>
-              <a:t>Create New Folder</a:t>
-            </a:r>
-          </a:p>
-        </p:txBody>
-      </p:sp>
     </p:spTree>
     <p:extLst>
       <p:ext uri="{BB962C8B-B14F-4D97-AF65-F5344CB8AC3E}">
-        <p14:creationId xmlns:p14="http://schemas.microsoft.com/office/powerpoint/2010/main" val="1015573047"/>
+        <p14:creationId xmlns:p14="http://schemas.microsoft.com/office/powerpoint/2010/main" val="2445765700"/>
       </p:ext>
     </p:extLst>
   </p:cSld>
@@ -8556,10 +9977,10 @@
       </p:grpSpPr>
       <p:pic>
         <p:nvPicPr>
-          <p:cNvPr id="5" name="Picture 4">
-            <a:extLst>
-              <a:ext uri="{FF2B5EF4-FFF2-40B4-BE49-F238E27FC236}">
-                <a16:creationId xmlns:a16="http://schemas.microsoft.com/office/drawing/2014/main" id="{1098EDB7-33BD-4DD2-82C7-BBEC890E98F0}"/>
+          <p:cNvPr id="2" name="Picture 1">
+            <a:extLst>
+              <a:ext uri="{FF2B5EF4-FFF2-40B4-BE49-F238E27FC236}">
+                <a16:creationId xmlns:a16="http://schemas.microsoft.com/office/drawing/2014/main" id="{770CBC4A-BF0A-4A25-A217-BD382811AB7E}"/>
               </a:ext>
             </a:extLst>
           </p:cNvPr>
@@ -8576,48 +9997,92 @@
         </p:blipFill>
         <p:spPr>
           <a:xfrm>
-            <a:off x="346963" y="457584"/>
-            <a:ext cx="6192114" cy="1400370"/>
+            <a:off x="1528488" y="1204662"/>
+            <a:ext cx="3934374" cy="3591426"/>
           </a:xfrm>
           <a:prstGeom prst="rect">
             <a:avLst/>
           </a:prstGeom>
         </p:spPr>
       </p:pic>
-      <p:pic>
-        <p:nvPicPr>
-          <p:cNvPr id="2" name="Picture 1">
-            <a:extLst>
-              <a:ext uri="{FF2B5EF4-FFF2-40B4-BE49-F238E27FC236}">
-                <a16:creationId xmlns:a16="http://schemas.microsoft.com/office/drawing/2014/main" id="{87167BE7-087E-4903-B9A4-46238D8FBC01}"/>
-              </a:ext>
-            </a:extLst>
-          </p:cNvPr>
-          <p:cNvPicPr>
-            <a:picLocks noChangeAspect="1"/>
-          </p:cNvPicPr>
-          <p:nvPr/>
-        </p:nvPicPr>
-        <p:blipFill>
-          <a:blip r:embed="rId3"/>
-          <a:stretch>
-            <a:fillRect/>
-          </a:stretch>
-        </p:blipFill>
-        <p:spPr>
-          <a:xfrm>
-            <a:off x="7125785" y="2886075"/>
-            <a:ext cx="3536066" cy="2971800"/>
+      <p:cxnSp>
+        <p:nvCxnSpPr>
+          <p:cNvPr id="4" name="Straight Arrow Connector 3">
+            <a:extLst>
+              <a:ext uri="{FF2B5EF4-FFF2-40B4-BE49-F238E27FC236}">
+                <a16:creationId xmlns:a16="http://schemas.microsoft.com/office/drawing/2014/main" id="{A04D6683-C21C-4DD1-B961-2744EEFA8092}"/>
+              </a:ext>
+            </a:extLst>
+          </p:cNvPr>
+          <p:cNvCxnSpPr/>
+          <p:nvPr/>
+        </p:nvCxnSpPr>
+        <p:spPr>
+          <a:xfrm flipH="1">
+            <a:off x="5753100" y="2095500"/>
+            <a:ext cx="3771900" cy="1247775"/>
+          </a:xfrm>
+          <a:prstGeom prst="straightConnector1">
+            <a:avLst/>
+          </a:prstGeom>
+          <a:ln w="28575">
+            <a:tailEnd type="triangle"/>
+          </a:ln>
+        </p:spPr>
+        <p:style>
+          <a:lnRef idx="1">
+            <a:schemeClr val="accent1"/>
+          </a:lnRef>
+          <a:fillRef idx="0">
+            <a:schemeClr val="accent1"/>
+          </a:fillRef>
+          <a:effectRef idx="0">
+            <a:schemeClr val="accent1"/>
+          </a:effectRef>
+          <a:fontRef idx="minor">
+            <a:schemeClr val="tx1"/>
+          </a:fontRef>
+        </p:style>
+      </p:cxnSp>
+      <p:sp>
+        <p:nvSpPr>
+          <p:cNvPr id="5" name="TextBox 4">
+            <a:extLst>
+              <a:ext uri="{FF2B5EF4-FFF2-40B4-BE49-F238E27FC236}">
+                <a16:creationId xmlns:a16="http://schemas.microsoft.com/office/drawing/2014/main" id="{D361ECCF-EF5D-4D64-BF76-78E348E0F17E}"/>
+              </a:ext>
+            </a:extLst>
+          </p:cNvPr>
+          <p:cNvSpPr txBox="1"/>
+          <p:nvPr/>
+        </p:nvSpPr>
+        <p:spPr>
+          <a:xfrm>
+            <a:off x="7820025" y="2973943"/>
+            <a:ext cx="1928028" cy="369332"/>
           </a:xfrm>
           <a:prstGeom prst="rect">
             <a:avLst/>
           </a:prstGeom>
-        </p:spPr>
-      </p:pic>
+          <a:noFill/>
+        </p:spPr>
+        <p:txBody>
+          <a:bodyPr wrap="none" rtlCol="0">
+            <a:spAutoFit/>
+          </a:bodyPr>
+          <a:lstStyle/>
+          <a:p>
+            <a:r>
+              <a:rPr lang="en-IE" dirty="0"/>
+              <a:t>Create New Folder</a:t>
+            </a:r>
+          </a:p>
+        </p:txBody>
+      </p:sp>
     </p:spTree>
     <p:extLst>
       <p:ext uri="{BB962C8B-B14F-4D97-AF65-F5344CB8AC3E}">
-        <p14:creationId xmlns:p14="http://schemas.microsoft.com/office/powerpoint/2010/main" val="3304014948"/>
+        <p14:creationId xmlns:p14="http://schemas.microsoft.com/office/powerpoint/2010/main" val="1015573047"/>
       </p:ext>
     </p:extLst>
   </p:cSld>
@@ -8646,10 +10111,10 @@
       </p:grpSpPr>
       <p:pic>
         <p:nvPicPr>
-          <p:cNvPr id="4" name="Picture 3">
-            <a:extLst>
-              <a:ext uri="{FF2B5EF4-FFF2-40B4-BE49-F238E27FC236}">
-                <a16:creationId xmlns:a16="http://schemas.microsoft.com/office/drawing/2014/main" id="{AEF26E8E-6917-4BD7-B429-8F590D7DD412}"/>
+          <p:cNvPr id="5" name="Picture 4">
+            <a:extLst>
+              <a:ext uri="{FF2B5EF4-FFF2-40B4-BE49-F238E27FC236}">
+                <a16:creationId xmlns:a16="http://schemas.microsoft.com/office/drawing/2014/main" id="{1098EDB7-33BD-4DD2-82C7-BBEC890E98F0}"/>
               </a:ext>
             </a:extLst>
           </p:cNvPr>
@@ -8666,104 +10131,48 @@
         </p:blipFill>
         <p:spPr>
           <a:xfrm>
-            <a:off x="2042857" y="1904787"/>
-            <a:ext cx="9030960" cy="3048425"/>
+            <a:off x="346963" y="457584"/>
+            <a:ext cx="6192114" cy="1400370"/>
           </a:xfrm>
           <a:prstGeom prst="rect">
             <a:avLst/>
           </a:prstGeom>
         </p:spPr>
       </p:pic>
-      <p:cxnSp>
-        <p:nvCxnSpPr>
-          <p:cNvPr id="3" name="Straight Arrow Connector 2">
-            <a:extLst>
-              <a:ext uri="{FF2B5EF4-FFF2-40B4-BE49-F238E27FC236}">
-                <a16:creationId xmlns:a16="http://schemas.microsoft.com/office/drawing/2014/main" id="{69671EA6-38D4-43F1-A23C-E05B37A0A680}"/>
-              </a:ext>
-            </a:extLst>
-          </p:cNvPr>
-          <p:cNvCxnSpPr/>
-          <p:nvPr/>
-        </p:nvCxnSpPr>
-        <p:spPr>
-          <a:xfrm flipH="1">
-            <a:off x="4029075" y="752475"/>
-            <a:ext cx="971550" cy="1076112"/>
-          </a:xfrm>
-          <a:prstGeom prst="straightConnector1">
-            <a:avLst/>
-          </a:prstGeom>
-          <a:ln w="28575">
-            <a:tailEnd type="triangle"/>
-          </a:ln>
-        </p:spPr>
-        <p:style>
-          <a:lnRef idx="1">
-            <a:schemeClr val="accent1"/>
-          </a:lnRef>
-          <a:fillRef idx="0">
-            <a:schemeClr val="accent1"/>
-          </a:fillRef>
-          <a:effectRef idx="0">
-            <a:schemeClr val="accent1"/>
-          </a:effectRef>
-          <a:fontRef idx="minor">
-            <a:schemeClr val="tx1"/>
-          </a:fontRef>
-        </p:style>
-      </p:cxnSp>
-      <p:sp>
-        <p:nvSpPr>
-          <p:cNvPr id="5" name="Rectangle 4">
-            <a:extLst>
-              <a:ext uri="{FF2B5EF4-FFF2-40B4-BE49-F238E27FC236}">
-                <a16:creationId xmlns:a16="http://schemas.microsoft.com/office/drawing/2014/main" id="{C7DEBC14-BE34-4270-82C0-E735DFBA1634}"/>
-              </a:ext>
-            </a:extLst>
-          </p:cNvPr>
-          <p:cNvSpPr/>
-          <p:nvPr/>
-        </p:nvSpPr>
-        <p:spPr>
-          <a:xfrm>
-            <a:off x="3419474" y="1990725"/>
-            <a:ext cx="1190625" cy="400050"/>
+      <p:pic>
+        <p:nvPicPr>
+          <p:cNvPr id="2" name="Picture 1">
+            <a:extLst>
+              <a:ext uri="{FF2B5EF4-FFF2-40B4-BE49-F238E27FC236}">
+                <a16:creationId xmlns:a16="http://schemas.microsoft.com/office/drawing/2014/main" id="{87167BE7-087E-4903-B9A4-46238D8FBC01}"/>
+              </a:ext>
+            </a:extLst>
+          </p:cNvPr>
+          <p:cNvPicPr>
+            <a:picLocks noChangeAspect="1"/>
+          </p:cNvPicPr>
+          <p:nvPr/>
+        </p:nvPicPr>
+        <p:blipFill>
+          <a:blip r:embed="rId3"/>
+          <a:stretch>
+            <a:fillRect/>
+          </a:stretch>
+        </p:blipFill>
+        <p:spPr>
+          <a:xfrm>
+            <a:off x="7125785" y="2886075"/>
+            <a:ext cx="3536066" cy="2971800"/>
           </a:xfrm>
           <a:prstGeom prst="rect">
             <a:avLst/>
           </a:prstGeom>
-          <a:noFill/>
-        </p:spPr>
-        <p:style>
-          <a:lnRef idx="2">
-            <a:schemeClr val="accent1">
-              <a:shade val="50000"/>
-            </a:schemeClr>
-          </a:lnRef>
-          <a:fillRef idx="1">
-            <a:schemeClr val="accent1"/>
-          </a:fillRef>
-          <a:effectRef idx="0">
-            <a:schemeClr val="accent1"/>
-          </a:effectRef>
-          <a:fontRef idx="minor">
-            <a:schemeClr val="lt1"/>
-          </a:fontRef>
-        </p:style>
-        <p:txBody>
-          <a:bodyPr rtlCol="0" anchor="ctr"/>
-          <a:lstStyle/>
-          <a:p>
-            <a:pPr algn="ctr"/>
-            <a:endParaRPr lang="en-IE"/>
-          </a:p>
-        </p:txBody>
-      </p:sp>
+        </p:spPr>
+      </p:pic>
     </p:spTree>
     <p:extLst>
       <p:ext uri="{BB962C8B-B14F-4D97-AF65-F5344CB8AC3E}">
-        <p14:creationId xmlns:p14="http://schemas.microsoft.com/office/powerpoint/2010/main" val="2542255041"/>
+        <p14:creationId xmlns:p14="http://schemas.microsoft.com/office/powerpoint/2010/main" val="3304014948"/>
       </p:ext>
     </p:extLst>
   </p:cSld>
@@ -8792,10 +10201,10 @@
       </p:grpSpPr>
       <p:pic>
         <p:nvPicPr>
-          <p:cNvPr id="6" name="Picture 5">
-            <a:extLst>
-              <a:ext uri="{FF2B5EF4-FFF2-40B4-BE49-F238E27FC236}">
-                <a16:creationId xmlns:a16="http://schemas.microsoft.com/office/drawing/2014/main" id="{83CB04F6-9669-4322-9B09-9D4A9850D07A}"/>
+          <p:cNvPr id="4" name="Picture 3">
+            <a:extLst>
+              <a:ext uri="{FF2B5EF4-FFF2-40B4-BE49-F238E27FC236}">
+                <a16:creationId xmlns:a16="http://schemas.microsoft.com/office/drawing/2014/main" id="{AEF26E8E-6917-4BD7-B429-8F590D7DD412}"/>
               </a:ext>
             </a:extLst>
           </p:cNvPr>
@@ -8812,18 +10221,104 @@
         </p:blipFill>
         <p:spPr>
           <a:xfrm>
-            <a:off x="2136089" y="1528815"/>
-            <a:ext cx="7332763" cy="3800370"/>
+            <a:off x="2042857" y="1904787"/>
+            <a:ext cx="9030960" cy="3048425"/>
           </a:xfrm>
           <a:prstGeom prst="rect">
             <a:avLst/>
           </a:prstGeom>
         </p:spPr>
       </p:pic>
+      <p:cxnSp>
+        <p:nvCxnSpPr>
+          <p:cNvPr id="3" name="Straight Arrow Connector 2">
+            <a:extLst>
+              <a:ext uri="{FF2B5EF4-FFF2-40B4-BE49-F238E27FC236}">
+                <a16:creationId xmlns:a16="http://schemas.microsoft.com/office/drawing/2014/main" id="{69671EA6-38D4-43F1-A23C-E05B37A0A680}"/>
+              </a:ext>
+            </a:extLst>
+          </p:cNvPr>
+          <p:cNvCxnSpPr/>
+          <p:nvPr/>
+        </p:nvCxnSpPr>
+        <p:spPr>
+          <a:xfrm flipH="1">
+            <a:off x="4029075" y="752475"/>
+            <a:ext cx="971550" cy="1076112"/>
+          </a:xfrm>
+          <a:prstGeom prst="straightConnector1">
+            <a:avLst/>
+          </a:prstGeom>
+          <a:ln w="28575">
+            <a:tailEnd type="triangle"/>
+          </a:ln>
+        </p:spPr>
+        <p:style>
+          <a:lnRef idx="1">
+            <a:schemeClr val="accent1"/>
+          </a:lnRef>
+          <a:fillRef idx="0">
+            <a:schemeClr val="accent1"/>
+          </a:fillRef>
+          <a:effectRef idx="0">
+            <a:schemeClr val="accent1"/>
+          </a:effectRef>
+          <a:fontRef idx="minor">
+            <a:schemeClr val="tx1"/>
+          </a:fontRef>
+        </p:style>
+      </p:cxnSp>
+      <p:sp>
+        <p:nvSpPr>
+          <p:cNvPr id="5" name="Rectangle 4">
+            <a:extLst>
+              <a:ext uri="{FF2B5EF4-FFF2-40B4-BE49-F238E27FC236}">
+                <a16:creationId xmlns:a16="http://schemas.microsoft.com/office/drawing/2014/main" id="{C7DEBC14-BE34-4270-82C0-E735DFBA1634}"/>
+              </a:ext>
+            </a:extLst>
+          </p:cNvPr>
+          <p:cNvSpPr/>
+          <p:nvPr/>
+        </p:nvSpPr>
+        <p:spPr>
+          <a:xfrm>
+            <a:off x="3419474" y="1990725"/>
+            <a:ext cx="1190625" cy="400050"/>
+          </a:xfrm>
+          <a:prstGeom prst="rect">
+            <a:avLst/>
+          </a:prstGeom>
+          <a:noFill/>
+        </p:spPr>
+        <p:style>
+          <a:lnRef idx="2">
+            <a:schemeClr val="accent1">
+              <a:shade val="50000"/>
+            </a:schemeClr>
+          </a:lnRef>
+          <a:fillRef idx="1">
+            <a:schemeClr val="accent1"/>
+          </a:fillRef>
+          <a:effectRef idx="0">
+            <a:schemeClr val="accent1"/>
+          </a:effectRef>
+          <a:fontRef idx="minor">
+            <a:schemeClr val="lt1"/>
+          </a:fontRef>
+        </p:style>
+        <p:txBody>
+          <a:bodyPr rtlCol="0" anchor="ctr"/>
+          <a:lstStyle/>
+          <a:p>
+            <a:pPr algn="ctr"/>
+            <a:endParaRPr lang="en-IE"/>
+          </a:p>
+        </p:txBody>
+      </p:sp>
     </p:spTree>
     <p:extLst>
       <p:ext uri="{BB962C8B-B14F-4D97-AF65-F5344CB8AC3E}">
-        <p14:creationId xmlns:p14="http://schemas.microsoft.com/office/powerpoint/2010/main" val="3930244857"/>
+        <p14:creationId xmlns:p14="http://schemas.microsoft.com/office/powerpoint/2010/main" val="2542255041"/>
       </p:ext>
     </p:extLst>
   </p:cSld>

--- a/CameraKit Walkthrough.pptx
+++ b/CameraKit Walkthrough.pptx
@@ -57,6 +57,9 @@
     <p:sldId id="304" r:id="rId51"/>
     <p:sldId id="305" r:id="rId52"/>
     <p:sldId id="306" r:id="rId53"/>
+    <p:sldId id="308" r:id="rId54"/>
+    <p:sldId id="309" r:id="rId55"/>
+    <p:sldId id="310" r:id="rId56"/>
   </p:sldIdLst>
   <p:sldSz cx="12192000" cy="6858000"/>
   <p:notesSz cx="6858000" cy="9144000"/>
@@ -4829,9 +4832,12 @@
           <a:bodyPr/>
           <a:lstStyle/>
           <a:p>
-            <a:r>
+            <a:br>
               <a:rPr lang="en-IE" dirty="0"/>
-              <a:t>https://github.com/JohnRowleyDorsetCollege2025/oop-2025-a-camera-rental-20251111.git</a:t>
+            </a:br>
+            <a:r>
+              <a:rPr lang="en-IE" dirty="0"/>
+              <a:t>https://github.com/JohnRowleyDorsetCollege2025/oop-2025-camera-rental-20251111.git</a:t>
             </a:r>
           </a:p>
         </p:txBody>
@@ -6527,7 +6533,7 @@
         </p:blipFill>
         <p:spPr>
           <a:xfrm>
-            <a:off x="1071097" y="1272684"/>
+            <a:off x="1014536" y="1332588"/>
             <a:ext cx="10357816" cy="4158625"/>
           </a:xfrm>
           <a:prstGeom prst="rect">
@@ -6579,6 +6585,218 @@
           <a:p>
             <a:pPr algn="ctr"/>
             <a:endParaRPr lang="en-GB"/>
+          </a:p>
+        </p:txBody>
+      </p:sp>
+      <p:sp>
+        <p:nvSpPr>
+          <p:cNvPr id="7" name="Rectangle 6">
+            <a:extLst>
+              <a:ext uri="{FF2B5EF4-FFF2-40B4-BE49-F238E27FC236}">
+                <a16:creationId xmlns:a16="http://schemas.microsoft.com/office/drawing/2014/main" id="{455D3B91-DB75-A5CD-92E4-E9B6925FA44C}"/>
+              </a:ext>
+            </a:extLst>
+          </p:cNvPr>
+          <p:cNvSpPr/>
+          <p:nvPr/>
+        </p:nvSpPr>
+        <p:spPr>
+          <a:xfrm>
+            <a:off x="6596798" y="285259"/>
+            <a:ext cx="5196134" cy="827103"/>
+          </a:xfrm>
+          <a:prstGeom prst="rect">
+            <a:avLst/>
+          </a:prstGeom>
+          <a:solidFill>
+            <a:schemeClr val="accent4">
+              <a:lumMod val="40000"/>
+              <a:lumOff val="60000"/>
+            </a:schemeClr>
+          </a:solidFill>
+        </p:spPr>
+        <p:style>
+          <a:lnRef idx="2">
+            <a:schemeClr val="accent1">
+              <a:shade val="50000"/>
+            </a:schemeClr>
+          </a:lnRef>
+          <a:fillRef idx="1">
+            <a:schemeClr val="accent1"/>
+          </a:fillRef>
+          <a:effectRef idx="0">
+            <a:schemeClr val="accent1"/>
+          </a:effectRef>
+          <a:fontRef idx="minor">
+            <a:schemeClr val="lt1"/>
+          </a:fontRef>
+        </p:style>
+        <p:txBody>
+          <a:bodyPr rtlCol="0" anchor="ctr"/>
+          <a:lstStyle/>
+          <a:p>
+            <a:pPr algn="ctr"/>
+            <a:r>
+              <a:rPr lang="en-IE" dirty="0">
+                <a:solidFill>
+                  <a:schemeClr val="tx1"/>
+                </a:solidFill>
+              </a:rPr>
+              <a:t>Move these properties out of </a:t>
+            </a:r>
+            <a:r>
+              <a:rPr lang="en-IE" dirty="0" err="1">
+                <a:solidFill>
+                  <a:schemeClr val="tx1"/>
+                </a:solidFill>
+              </a:rPr>
+              <a:t>CameraKit</a:t>
+            </a:r>
+            <a:r>
+              <a:rPr lang="en-IE" dirty="0">
+                <a:solidFill>
+                  <a:schemeClr val="tx1"/>
+                </a:solidFill>
+              </a:rPr>
+              <a:t> and up into Rental Item</a:t>
+            </a:r>
+          </a:p>
+        </p:txBody>
+      </p:sp>
+      <p:cxnSp>
+        <p:nvCxnSpPr>
+          <p:cNvPr id="9" name="Straight Arrow Connector 8">
+            <a:extLst>
+              <a:ext uri="{FF2B5EF4-FFF2-40B4-BE49-F238E27FC236}">
+                <a16:creationId xmlns:a16="http://schemas.microsoft.com/office/drawing/2014/main" id="{DBE79BB5-4A14-2613-4699-2F2EAFB2A024}"/>
+              </a:ext>
+            </a:extLst>
+          </p:cNvPr>
+          <p:cNvCxnSpPr/>
+          <p:nvPr/>
+        </p:nvCxnSpPr>
+        <p:spPr>
+          <a:xfrm>
+            <a:off x="2139885" y="226243"/>
+            <a:ext cx="650449" cy="999242"/>
+          </a:xfrm>
+          <a:prstGeom prst="straightConnector1">
+            <a:avLst/>
+          </a:prstGeom>
+          <a:ln>
+            <a:tailEnd type="triangle"/>
+          </a:ln>
+        </p:spPr>
+        <p:style>
+          <a:lnRef idx="1">
+            <a:schemeClr val="accent1"/>
+          </a:lnRef>
+          <a:fillRef idx="0">
+            <a:schemeClr val="accent1"/>
+          </a:fillRef>
+          <a:effectRef idx="0">
+            <a:schemeClr val="accent1"/>
+          </a:effectRef>
+          <a:fontRef idx="minor">
+            <a:schemeClr val="tx1"/>
+          </a:fontRef>
+        </p:style>
+      </p:cxnSp>
+      <p:sp>
+        <p:nvSpPr>
+          <p:cNvPr id="10" name="Oval 9">
+            <a:extLst>
+              <a:ext uri="{FF2B5EF4-FFF2-40B4-BE49-F238E27FC236}">
+                <a16:creationId xmlns:a16="http://schemas.microsoft.com/office/drawing/2014/main" id="{CE8344AE-9B20-9CC8-64A1-3C6F9A160FAE}"/>
+              </a:ext>
+            </a:extLst>
+          </p:cNvPr>
+          <p:cNvSpPr/>
+          <p:nvPr/>
+        </p:nvSpPr>
+        <p:spPr>
+          <a:xfrm>
+            <a:off x="2540077" y="188138"/>
+            <a:ext cx="500513" cy="437472"/>
+          </a:xfrm>
+          <a:prstGeom prst="ellipse">
+            <a:avLst/>
+          </a:prstGeom>
+        </p:spPr>
+        <p:style>
+          <a:lnRef idx="2">
+            <a:schemeClr val="accent1">
+              <a:shade val="15000"/>
+            </a:schemeClr>
+          </a:lnRef>
+          <a:fillRef idx="1">
+            <a:schemeClr val="accent1"/>
+          </a:fillRef>
+          <a:effectRef idx="0">
+            <a:schemeClr val="accent1"/>
+          </a:effectRef>
+          <a:fontRef idx="minor">
+            <a:schemeClr val="lt1"/>
+          </a:fontRef>
+        </p:style>
+        <p:txBody>
+          <a:bodyPr rtlCol="0" anchor="ctr"/>
+          <a:lstStyle/>
+          <a:p>
+            <a:pPr algn="ctr"/>
+            <a:r>
+              <a:rPr lang="en-GB" dirty="0"/>
+              <a:t>1</a:t>
+            </a:r>
+          </a:p>
+        </p:txBody>
+      </p:sp>
+      <p:sp>
+        <p:nvSpPr>
+          <p:cNvPr id="11" name="Oval 10">
+            <a:extLst>
+              <a:ext uri="{FF2B5EF4-FFF2-40B4-BE49-F238E27FC236}">
+                <a16:creationId xmlns:a16="http://schemas.microsoft.com/office/drawing/2014/main" id="{7DC39951-F0D1-4388-1750-9EC218E35D1A}"/>
+              </a:ext>
+            </a:extLst>
+          </p:cNvPr>
+          <p:cNvSpPr/>
+          <p:nvPr/>
+        </p:nvSpPr>
+        <p:spPr>
+          <a:xfrm>
+            <a:off x="5785200" y="305339"/>
+            <a:ext cx="500513" cy="437472"/>
+          </a:xfrm>
+          <a:prstGeom prst="ellipse">
+            <a:avLst/>
+          </a:prstGeom>
+        </p:spPr>
+        <p:style>
+          <a:lnRef idx="2">
+            <a:schemeClr val="accent1">
+              <a:shade val="15000"/>
+            </a:schemeClr>
+          </a:lnRef>
+          <a:fillRef idx="1">
+            <a:schemeClr val="accent1"/>
+          </a:fillRef>
+          <a:effectRef idx="0">
+            <a:schemeClr val="accent1"/>
+          </a:effectRef>
+          <a:fontRef idx="minor">
+            <a:schemeClr val="lt1"/>
+          </a:fontRef>
+        </p:style>
+        <p:txBody>
+          <a:bodyPr rtlCol="0" anchor="ctr"/>
+          <a:lstStyle/>
+          <a:p>
+            <a:pPr algn="ctr"/>
+            <a:r>
+              <a:rPr lang="en-GB" dirty="0"/>
+              <a:t>2</a:t>
+            </a:r>
           </a:p>
         </p:txBody>
       </p:sp>
@@ -6962,6 +7180,153 @@
           </a:prstGeom>
         </p:spPr>
       </p:pic>
+      <p:sp>
+        <p:nvSpPr>
+          <p:cNvPr id="16" name="Oval 15">
+            <a:extLst>
+              <a:ext uri="{FF2B5EF4-FFF2-40B4-BE49-F238E27FC236}">
+                <a16:creationId xmlns:a16="http://schemas.microsoft.com/office/drawing/2014/main" id="{E394BF1D-542E-810B-08B9-CBCC14D080EB}"/>
+              </a:ext>
+            </a:extLst>
+          </p:cNvPr>
+          <p:cNvSpPr/>
+          <p:nvPr/>
+        </p:nvSpPr>
+        <p:spPr>
+          <a:xfrm>
+            <a:off x="5069869" y="2700363"/>
+            <a:ext cx="500513" cy="437472"/>
+          </a:xfrm>
+          <a:prstGeom prst="ellipse">
+            <a:avLst/>
+          </a:prstGeom>
+        </p:spPr>
+        <p:style>
+          <a:lnRef idx="2">
+            <a:schemeClr val="accent1">
+              <a:shade val="15000"/>
+            </a:schemeClr>
+          </a:lnRef>
+          <a:fillRef idx="1">
+            <a:schemeClr val="accent1"/>
+          </a:fillRef>
+          <a:effectRef idx="0">
+            <a:schemeClr val="accent1"/>
+          </a:effectRef>
+          <a:fontRef idx="minor">
+            <a:schemeClr val="lt1"/>
+          </a:fontRef>
+        </p:style>
+        <p:txBody>
+          <a:bodyPr rtlCol="0" anchor="ctr"/>
+          <a:lstStyle/>
+          <a:p>
+            <a:pPr algn="ctr"/>
+            <a:r>
+              <a:rPr lang="en-GB" dirty="0"/>
+              <a:t>1</a:t>
+            </a:r>
+          </a:p>
+        </p:txBody>
+      </p:sp>
+      <p:sp>
+        <p:nvSpPr>
+          <p:cNvPr id="17" name="Oval 16">
+            <a:extLst>
+              <a:ext uri="{FF2B5EF4-FFF2-40B4-BE49-F238E27FC236}">
+                <a16:creationId xmlns:a16="http://schemas.microsoft.com/office/drawing/2014/main" id="{2F8DB3ED-C2C2-A38A-0E49-4C9101E70145}"/>
+              </a:ext>
+            </a:extLst>
+          </p:cNvPr>
+          <p:cNvSpPr/>
+          <p:nvPr/>
+        </p:nvSpPr>
+        <p:spPr>
+          <a:xfrm>
+            <a:off x="8566484" y="2786991"/>
+            <a:ext cx="500513" cy="437472"/>
+          </a:xfrm>
+          <a:prstGeom prst="ellipse">
+            <a:avLst/>
+          </a:prstGeom>
+        </p:spPr>
+        <p:style>
+          <a:lnRef idx="2">
+            <a:schemeClr val="accent1">
+              <a:shade val="15000"/>
+            </a:schemeClr>
+          </a:lnRef>
+          <a:fillRef idx="1">
+            <a:schemeClr val="accent1"/>
+          </a:fillRef>
+          <a:effectRef idx="0">
+            <a:schemeClr val="accent1"/>
+          </a:effectRef>
+          <a:fontRef idx="minor">
+            <a:schemeClr val="lt1"/>
+          </a:fontRef>
+        </p:style>
+        <p:txBody>
+          <a:bodyPr rtlCol="0" anchor="ctr"/>
+          <a:lstStyle/>
+          <a:p>
+            <a:pPr algn="ctr"/>
+            <a:r>
+              <a:rPr lang="en-GB" dirty="0"/>
+              <a:t>2</a:t>
+            </a:r>
+          </a:p>
+        </p:txBody>
+      </p:sp>
+      <p:sp>
+        <p:nvSpPr>
+          <p:cNvPr id="18" name="Oval 17">
+            <a:extLst>
+              <a:ext uri="{FF2B5EF4-FFF2-40B4-BE49-F238E27FC236}">
+                <a16:creationId xmlns:a16="http://schemas.microsoft.com/office/drawing/2014/main" id="{F88ED870-A3F4-E75E-94EE-69354CBC14F0}"/>
+              </a:ext>
+            </a:extLst>
+          </p:cNvPr>
+          <p:cNvSpPr/>
+          <p:nvPr/>
+        </p:nvSpPr>
+        <p:spPr>
+          <a:xfrm>
+            <a:off x="6267088" y="5920697"/>
+            <a:ext cx="500513" cy="437472"/>
+          </a:xfrm>
+          <a:prstGeom prst="ellipse">
+            <a:avLst/>
+          </a:prstGeom>
+        </p:spPr>
+        <p:style>
+          <a:lnRef idx="2">
+            <a:schemeClr val="accent1">
+              <a:shade val="15000"/>
+            </a:schemeClr>
+          </a:lnRef>
+          <a:fillRef idx="1">
+            <a:schemeClr val="accent1"/>
+          </a:fillRef>
+          <a:effectRef idx="0">
+            <a:schemeClr val="accent1"/>
+          </a:effectRef>
+          <a:fontRef idx="minor">
+            <a:schemeClr val="lt1"/>
+          </a:fontRef>
+        </p:style>
+        <p:txBody>
+          <a:bodyPr rtlCol="0" anchor="ctr"/>
+          <a:lstStyle/>
+          <a:p>
+            <a:pPr algn="ctr"/>
+            <a:r>
+              <a:rPr lang="en-GB" dirty="0"/>
+              <a:t>3</a:t>
+            </a:r>
+          </a:p>
+        </p:txBody>
+      </p:sp>
     </p:spTree>
     <p:extLst>
       <p:ext uri="{BB962C8B-B14F-4D97-AF65-F5344CB8AC3E}">
@@ -7036,7 +7401,7 @@
         </p:nvSpPr>
         <p:spPr>
           <a:xfrm>
-            <a:off x="5496564" y="4467325"/>
+            <a:off x="5641481" y="4707254"/>
             <a:ext cx="4598793" cy="970737"/>
           </a:xfrm>
           <a:prstGeom prst="rect">
@@ -7120,6 +7485,101 @@
           </a:fontRef>
         </p:style>
       </p:cxnSp>
+      <p:cxnSp>
+        <p:nvCxnSpPr>
+          <p:cNvPr id="10" name="Straight Arrow Connector 9">
+            <a:extLst>
+              <a:ext uri="{FF2B5EF4-FFF2-40B4-BE49-F238E27FC236}">
+                <a16:creationId xmlns:a16="http://schemas.microsoft.com/office/drawing/2014/main" id="{7A797226-A77D-A492-9CAF-6018DBFBB3DC}"/>
+              </a:ext>
+            </a:extLst>
+          </p:cNvPr>
+          <p:cNvCxnSpPr/>
+          <p:nvPr/>
+        </p:nvCxnSpPr>
+        <p:spPr>
+          <a:xfrm flipH="1">
+            <a:off x="801278" y="4628561"/>
+            <a:ext cx="2017336" cy="0"/>
+          </a:xfrm>
+          <a:prstGeom prst="straightConnector1">
+            <a:avLst/>
+          </a:prstGeom>
+          <a:ln>
+            <a:tailEnd type="triangle"/>
+          </a:ln>
+        </p:spPr>
+        <p:style>
+          <a:lnRef idx="1">
+            <a:schemeClr val="accent1"/>
+          </a:lnRef>
+          <a:fillRef idx="0">
+            <a:schemeClr val="accent1"/>
+          </a:fillRef>
+          <a:effectRef idx="0">
+            <a:schemeClr val="accent1"/>
+          </a:effectRef>
+          <a:fontRef idx="minor">
+            <a:schemeClr val="tx1"/>
+          </a:fontRef>
+        </p:style>
+      </p:cxnSp>
+      <p:sp>
+        <p:nvSpPr>
+          <p:cNvPr id="11" name="Rectangle 10">
+            <a:extLst>
+              <a:ext uri="{FF2B5EF4-FFF2-40B4-BE49-F238E27FC236}">
+                <a16:creationId xmlns:a16="http://schemas.microsoft.com/office/drawing/2014/main" id="{B534523B-FFFB-C227-888A-3DB3104EF4DF}"/>
+              </a:ext>
+            </a:extLst>
+          </p:cNvPr>
+          <p:cNvSpPr/>
+          <p:nvPr/>
+        </p:nvSpPr>
+        <p:spPr>
+          <a:xfrm>
+            <a:off x="3007890" y="4487454"/>
+            <a:ext cx="2299397" cy="282213"/>
+          </a:xfrm>
+          <a:prstGeom prst="rect">
+            <a:avLst/>
+          </a:prstGeom>
+          <a:solidFill>
+            <a:srgbClr val="FF0000"/>
+          </a:solidFill>
+        </p:spPr>
+        <p:style>
+          <a:lnRef idx="2">
+            <a:schemeClr val="accent1">
+              <a:shade val="50000"/>
+            </a:schemeClr>
+          </a:lnRef>
+          <a:fillRef idx="1">
+            <a:schemeClr val="accent1"/>
+          </a:fillRef>
+          <a:effectRef idx="0">
+            <a:schemeClr val="accent1"/>
+          </a:effectRef>
+          <a:fontRef idx="minor">
+            <a:schemeClr val="lt1"/>
+          </a:fontRef>
+        </p:style>
+        <p:txBody>
+          <a:bodyPr rtlCol="0" anchor="ctr"/>
+          <a:lstStyle/>
+          <a:p>
+            <a:pPr algn="ctr"/>
+            <a:r>
+              <a:rPr lang="en-IE" sz="1200" dirty="0">
+                <a:solidFill>
+                  <a:schemeClr val="bg1"/>
+                </a:solidFill>
+              </a:rPr>
+              <a:t>Position outside the constructor</a:t>
+            </a:r>
+          </a:p>
+        </p:txBody>
+      </p:sp>
     </p:spTree>
     <p:extLst>
       <p:ext uri="{BB962C8B-B14F-4D97-AF65-F5344CB8AC3E}">
@@ -7566,7 +8026,7 @@
         </p:blipFill>
         <p:spPr>
           <a:xfrm>
-            <a:off x="1955646" y="443463"/>
+            <a:off x="532199" y="405756"/>
             <a:ext cx="7746619" cy="4369441"/>
           </a:xfrm>
           <a:prstGeom prst="rect">
@@ -7604,6 +8064,196 @@
           </a:prstGeom>
         </p:spPr>
       </p:pic>
+      <p:sp>
+        <p:nvSpPr>
+          <p:cNvPr id="7" name="Rectangle 6">
+            <a:extLst>
+              <a:ext uri="{FF2B5EF4-FFF2-40B4-BE49-F238E27FC236}">
+                <a16:creationId xmlns:a16="http://schemas.microsoft.com/office/drawing/2014/main" id="{671E72E1-D900-DEB7-FCA1-5DAB55BE206E}"/>
+              </a:ext>
+            </a:extLst>
+          </p:cNvPr>
+          <p:cNvSpPr/>
+          <p:nvPr/>
+        </p:nvSpPr>
+        <p:spPr>
+          <a:xfrm>
+            <a:off x="6178809" y="4099630"/>
+            <a:ext cx="4598793" cy="970737"/>
+          </a:xfrm>
+          <a:prstGeom prst="rect">
+            <a:avLst/>
+          </a:prstGeom>
+          <a:solidFill>
+            <a:schemeClr val="accent4">
+              <a:lumMod val="40000"/>
+              <a:lumOff val="60000"/>
+            </a:schemeClr>
+          </a:solidFill>
+        </p:spPr>
+        <p:style>
+          <a:lnRef idx="2">
+            <a:schemeClr val="accent1">
+              <a:shade val="50000"/>
+            </a:schemeClr>
+          </a:lnRef>
+          <a:fillRef idx="1">
+            <a:schemeClr val="accent1"/>
+          </a:fillRef>
+          <a:effectRef idx="0">
+            <a:schemeClr val="accent1"/>
+          </a:effectRef>
+          <a:fontRef idx="minor">
+            <a:schemeClr val="lt1"/>
+          </a:fontRef>
+        </p:style>
+        <p:txBody>
+          <a:bodyPr rtlCol="0" anchor="ctr"/>
+          <a:lstStyle/>
+          <a:p>
+            <a:pPr algn="ctr"/>
+            <a:r>
+              <a:rPr lang="en-IE" dirty="0">
+                <a:solidFill>
+                  <a:schemeClr val="tx1"/>
+                </a:solidFill>
+              </a:rPr>
+              <a:t>Think of an Interface as a ‘contract’ : when you apply </a:t>
+            </a:r>
+            <a:r>
+              <a:rPr lang="en-IE" dirty="0" err="1">
+                <a:solidFill>
+                  <a:schemeClr val="tx1"/>
+                </a:solidFill>
+              </a:rPr>
+              <a:t>IRentable</a:t>
+            </a:r>
+            <a:r>
+              <a:rPr lang="en-IE" dirty="0">
+                <a:solidFill>
+                  <a:schemeClr val="tx1"/>
+                </a:solidFill>
+              </a:rPr>
+              <a:t> to a class, you are obligated to implement those interface methods</a:t>
+            </a:r>
+          </a:p>
+        </p:txBody>
+      </p:sp>
+      <p:sp>
+        <p:nvSpPr>
+          <p:cNvPr id="8" name="Rectangle 7">
+            <a:extLst>
+              <a:ext uri="{FF2B5EF4-FFF2-40B4-BE49-F238E27FC236}">
+                <a16:creationId xmlns:a16="http://schemas.microsoft.com/office/drawing/2014/main" id="{E9DA21D0-23F1-999D-B636-ADA55F59252D}"/>
+              </a:ext>
+            </a:extLst>
+          </p:cNvPr>
+          <p:cNvSpPr/>
+          <p:nvPr/>
+        </p:nvSpPr>
+        <p:spPr>
+          <a:xfrm>
+            <a:off x="6614013" y="312821"/>
+            <a:ext cx="4598793" cy="970737"/>
+          </a:xfrm>
+          <a:prstGeom prst="rect">
+            <a:avLst/>
+          </a:prstGeom>
+          <a:solidFill>
+            <a:schemeClr val="accent4">
+              <a:lumMod val="40000"/>
+              <a:lumOff val="60000"/>
+            </a:schemeClr>
+          </a:solidFill>
+        </p:spPr>
+        <p:style>
+          <a:lnRef idx="2">
+            <a:schemeClr val="accent1">
+              <a:shade val="50000"/>
+            </a:schemeClr>
+          </a:lnRef>
+          <a:fillRef idx="1">
+            <a:schemeClr val="accent1"/>
+          </a:fillRef>
+          <a:effectRef idx="0">
+            <a:schemeClr val="accent1"/>
+          </a:effectRef>
+          <a:fontRef idx="minor">
+            <a:schemeClr val="lt1"/>
+          </a:fontRef>
+        </p:style>
+        <p:txBody>
+          <a:bodyPr rtlCol="0" anchor="ctr"/>
+          <a:lstStyle/>
+          <a:p>
+            <a:pPr algn="ctr"/>
+            <a:r>
+              <a:rPr lang="en-IE" dirty="0">
+                <a:solidFill>
+                  <a:schemeClr val="tx1"/>
+                </a:solidFill>
+              </a:rPr>
+              <a:t>Interfaces, by convention, always start with an ‘I’</a:t>
+            </a:r>
+          </a:p>
+        </p:txBody>
+      </p:sp>
+      <p:sp>
+        <p:nvSpPr>
+          <p:cNvPr id="9" name="Rectangle 8">
+            <a:extLst>
+              <a:ext uri="{FF2B5EF4-FFF2-40B4-BE49-F238E27FC236}">
+                <a16:creationId xmlns:a16="http://schemas.microsoft.com/office/drawing/2014/main" id="{02982A29-78B4-7C29-7162-3A47D9F4FB19}"/>
+              </a:ext>
+            </a:extLst>
+          </p:cNvPr>
+          <p:cNvSpPr/>
+          <p:nvPr/>
+        </p:nvSpPr>
+        <p:spPr>
+          <a:xfrm>
+            <a:off x="3097815" y="6155703"/>
+            <a:ext cx="8384032" cy="702297"/>
+          </a:xfrm>
+          <a:prstGeom prst="rect">
+            <a:avLst/>
+          </a:prstGeom>
+          <a:solidFill>
+            <a:schemeClr val="accent6"/>
+          </a:solidFill>
+        </p:spPr>
+        <p:style>
+          <a:lnRef idx="2">
+            <a:schemeClr val="accent1">
+              <a:shade val="50000"/>
+            </a:schemeClr>
+          </a:lnRef>
+          <a:fillRef idx="1">
+            <a:schemeClr val="accent1"/>
+          </a:fillRef>
+          <a:effectRef idx="0">
+            <a:schemeClr val="accent1"/>
+          </a:effectRef>
+          <a:fontRef idx="minor">
+            <a:schemeClr val="lt1"/>
+          </a:fontRef>
+        </p:style>
+        <p:txBody>
+          <a:bodyPr rtlCol="0" anchor="ctr"/>
+          <a:lstStyle/>
+          <a:p>
+            <a:pPr algn="ctr"/>
+            <a:r>
+              <a:rPr lang="en-IE" dirty="0">
+                <a:solidFill>
+                  <a:schemeClr val="tx1"/>
+                </a:solidFill>
+              </a:rPr>
+              <a:t>Tip: If you have not implemented the methods, right clicking on the interface in VS will offer to create the methods</a:t>
+            </a:r>
+          </a:p>
+        </p:txBody>
+      </p:sp>
     </p:spTree>
     <p:extLst>
       <p:ext uri="{BB962C8B-B14F-4D97-AF65-F5344CB8AC3E}">
@@ -7715,6 +8365,11 @@
             <a:avLst/>
           </a:prstGeom>
           <a:noFill/>
+          <a:ln>
+            <a:solidFill>
+              <a:srgbClr val="FF0000"/>
+            </a:solidFill>
+          </a:ln>
         </p:spPr>
         <p:style>
           <a:lnRef idx="2">
@@ -7750,13 +8405,15 @@
               </a:ext>
             </a:extLst>
           </p:cNvPr>
-          <p:cNvCxnSpPr/>
+          <p:cNvCxnSpPr>
+            <a:cxnSpLocks/>
+          </p:cNvCxnSpPr>
           <p:nvPr/>
         </p:nvCxnSpPr>
         <p:spPr>
           <a:xfrm flipH="1">
-            <a:off x="2088682" y="77002"/>
-            <a:ext cx="1780674" cy="798897"/>
+            <a:off x="2088682" y="761076"/>
+            <a:ext cx="2155774" cy="114823"/>
           </a:xfrm>
           <a:prstGeom prst="straightConnector1">
             <a:avLst/>
@@ -7867,13 +8524,15 @@
               </a:ext>
             </a:extLst>
           </p:cNvPr>
-          <p:cNvCxnSpPr/>
+          <p:cNvCxnSpPr>
+            <a:cxnSpLocks/>
+          </p:cNvCxnSpPr>
           <p:nvPr/>
         </p:nvCxnSpPr>
         <p:spPr>
           <a:xfrm flipH="1">
-            <a:off x="2231579" y="2003539"/>
-            <a:ext cx="1780674" cy="798897"/>
+            <a:off x="2276232" y="2194349"/>
+            <a:ext cx="1738019" cy="665159"/>
           </a:xfrm>
           <a:prstGeom prst="straightConnector1">
             <a:avLst/>
@@ -7953,6 +8612,358 @@
               </a:rPr>
               <a:t>Modify Book to return a bool (true/false) and update the method with return declaration and return values</a:t>
             </a:r>
+          </a:p>
+        </p:txBody>
+      </p:sp>
+      <p:sp>
+        <p:nvSpPr>
+          <p:cNvPr id="17" name="Oval 16">
+            <a:extLst>
+              <a:ext uri="{FF2B5EF4-FFF2-40B4-BE49-F238E27FC236}">
+                <a16:creationId xmlns:a16="http://schemas.microsoft.com/office/drawing/2014/main" id="{ABD963C2-268B-F33D-73C4-ABF52FD4F375}"/>
+              </a:ext>
+            </a:extLst>
+          </p:cNvPr>
+          <p:cNvSpPr/>
+          <p:nvPr/>
+        </p:nvSpPr>
+        <p:spPr>
+          <a:xfrm>
+            <a:off x="4321181" y="599751"/>
+            <a:ext cx="500513" cy="437472"/>
+          </a:xfrm>
+          <a:prstGeom prst="ellipse">
+            <a:avLst/>
+          </a:prstGeom>
+        </p:spPr>
+        <p:style>
+          <a:lnRef idx="2">
+            <a:schemeClr val="accent1">
+              <a:shade val="15000"/>
+            </a:schemeClr>
+          </a:lnRef>
+          <a:fillRef idx="1">
+            <a:schemeClr val="accent1"/>
+          </a:fillRef>
+          <a:effectRef idx="0">
+            <a:schemeClr val="accent1"/>
+          </a:effectRef>
+          <a:fontRef idx="minor">
+            <a:schemeClr val="lt1"/>
+          </a:fontRef>
+        </p:style>
+        <p:txBody>
+          <a:bodyPr rtlCol="0" anchor="ctr"/>
+          <a:lstStyle/>
+          <a:p>
+            <a:pPr algn="ctr"/>
+            <a:r>
+              <a:rPr lang="en-GB" dirty="0"/>
+              <a:t>1</a:t>
+            </a:r>
+          </a:p>
+        </p:txBody>
+      </p:sp>
+      <p:sp>
+        <p:nvSpPr>
+          <p:cNvPr id="19" name="Oval 18">
+            <a:extLst>
+              <a:ext uri="{FF2B5EF4-FFF2-40B4-BE49-F238E27FC236}">
+                <a16:creationId xmlns:a16="http://schemas.microsoft.com/office/drawing/2014/main" id="{DD58D0EB-D377-55E3-A3CA-9E9E92E77F26}"/>
+              </a:ext>
+            </a:extLst>
+          </p:cNvPr>
+          <p:cNvSpPr/>
+          <p:nvPr/>
+        </p:nvSpPr>
+        <p:spPr>
+          <a:xfrm>
+            <a:off x="4188593" y="2038541"/>
+            <a:ext cx="500513" cy="437472"/>
+          </a:xfrm>
+          <a:prstGeom prst="ellipse">
+            <a:avLst/>
+          </a:prstGeom>
+        </p:spPr>
+        <p:style>
+          <a:lnRef idx="2">
+            <a:schemeClr val="accent1">
+              <a:shade val="15000"/>
+            </a:schemeClr>
+          </a:lnRef>
+          <a:fillRef idx="1">
+            <a:schemeClr val="accent1"/>
+          </a:fillRef>
+          <a:effectRef idx="0">
+            <a:schemeClr val="accent1"/>
+          </a:effectRef>
+          <a:fontRef idx="minor">
+            <a:schemeClr val="lt1"/>
+          </a:fontRef>
+        </p:style>
+        <p:txBody>
+          <a:bodyPr rtlCol="0" anchor="ctr"/>
+          <a:lstStyle/>
+          <a:p>
+            <a:pPr algn="ctr"/>
+            <a:r>
+              <a:rPr lang="en-GB" dirty="0"/>
+              <a:t>2</a:t>
+            </a:r>
+          </a:p>
+        </p:txBody>
+      </p:sp>
+      <p:sp>
+        <p:nvSpPr>
+          <p:cNvPr id="21" name="Oval 20">
+            <a:extLst>
+              <a:ext uri="{FF2B5EF4-FFF2-40B4-BE49-F238E27FC236}">
+                <a16:creationId xmlns:a16="http://schemas.microsoft.com/office/drawing/2014/main" id="{5F4AE0C4-5485-3E75-F289-6720BCF968C6}"/>
+              </a:ext>
+            </a:extLst>
+          </p:cNvPr>
+          <p:cNvSpPr/>
+          <p:nvPr/>
+        </p:nvSpPr>
+        <p:spPr>
+          <a:xfrm>
+            <a:off x="5313687" y="3034438"/>
+            <a:ext cx="500513" cy="437472"/>
+          </a:xfrm>
+          <a:prstGeom prst="ellipse">
+            <a:avLst/>
+          </a:prstGeom>
+        </p:spPr>
+        <p:style>
+          <a:lnRef idx="2">
+            <a:schemeClr val="accent1">
+              <a:shade val="15000"/>
+            </a:schemeClr>
+          </a:lnRef>
+          <a:fillRef idx="1">
+            <a:schemeClr val="accent1"/>
+          </a:fillRef>
+          <a:effectRef idx="0">
+            <a:schemeClr val="accent1"/>
+          </a:effectRef>
+          <a:fontRef idx="minor">
+            <a:schemeClr val="lt1"/>
+          </a:fontRef>
+        </p:style>
+        <p:txBody>
+          <a:bodyPr rtlCol="0" anchor="ctr"/>
+          <a:lstStyle/>
+          <a:p>
+            <a:pPr algn="ctr"/>
+            <a:r>
+              <a:rPr lang="en-GB" dirty="0"/>
+              <a:t>3</a:t>
+            </a:r>
+          </a:p>
+        </p:txBody>
+      </p:sp>
+      <p:sp>
+        <p:nvSpPr>
+          <p:cNvPr id="22" name="Oval 21">
+            <a:extLst>
+              <a:ext uri="{FF2B5EF4-FFF2-40B4-BE49-F238E27FC236}">
+                <a16:creationId xmlns:a16="http://schemas.microsoft.com/office/drawing/2014/main" id="{ADB447D1-CD56-8B1A-D35E-242796123753}"/>
+              </a:ext>
+            </a:extLst>
+          </p:cNvPr>
+          <p:cNvSpPr/>
+          <p:nvPr/>
+        </p:nvSpPr>
+        <p:spPr>
+          <a:xfrm>
+            <a:off x="5461473" y="4314925"/>
+            <a:ext cx="500513" cy="437472"/>
+          </a:xfrm>
+          <a:prstGeom prst="ellipse">
+            <a:avLst/>
+          </a:prstGeom>
+        </p:spPr>
+        <p:style>
+          <a:lnRef idx="2">
+            <a:schemeClr val="accent1">
+              <a:shade val="15000"/>
+            </a:schemeClr>
+          </a:lnRef>
+          <a:fillRef idx="1">
+            <a:schemeClr val="accent1"/>
+          </a:fillRef>
+          <a:effectRef idx="0">
+            <a:schemeClr val="accent1"/>
+          </a:effectRef>
+          <a:fontRef idx="minor">
+            <a:schemeClr val="lt1"/>
+          </a:fontRef>
+        </p:style>
+        <p:txBody>
+          <a:bodyPr rtlCol="0" anchor="ctr"/>
+          <a:lstStyle/>
+          <a:p>
+            <a:pPr algn="ctr"/>
+            <a:r>
+              <a:rPr lang="en-GB" dirty="0"/>
+              <a:t>4</a:t>
+            </a:r>
+          </a:p>
+        </p:txBody>
+      </p:sp>
+      <p:sp>
+        <p:nvSpPr>
+          <p:cNvPr id="23" name="Rectangle 22">
+            <a:extLst>
+              <a:ext uri="{FF2B5EF4-FFF2-40B4-BE49-F238E27FC236}">
+                <a16:creationId xmlns:a16="http://schemas.microsoft.com/office/drawing/2014/main" id="{BD15DE99-A133-7444-7C01-5C153053BFFB}"/>
+              </a:ext>
+            </a:extLst>
+          </p:cNvPr>
+          <p:cNvSpPr/>
+          <p:nvPr/>
+        </p:nvSpPr>
+        <p:spPr>
+          <a:xfrm>
+            <a:off x="1847654" y="2916070"/>
+            <a:ext cx="500513" cy="234901"/>
+          </a:xfrm>
+          <a:prstGeom prst="rect">
+            <a:avLst/>
+          </a:prstGeom>
+          <a:noFill/>
+          <a:ln>
+            <a:solidFill>
+              <a:srgbClr val="FF0000"/>
+            </a:solidFill>
+          </a:ln>
+        </p:spPr>
+        <p:style>
+          <a:lnRef idx="2">
+            <a:schemeClr val="accent1">
+              <a:shade val="15000"/>
+            </a:schemeClr>
+          </a:lnRef>
+          <a:fillRef idx="1">
+            <a:schemeClr val="accent1"/>
+          </a:fillRef>
+          <a:effectRef idx="0">
+            <a:schemeClr val="accent1"/>
+          </a:effectRef>
+          <a:fontRef idx="minor">
+            <a:schemeClr val="lt1"/>
+          </a:fontRef>
+        </p:style>
+        <p:txBody>
+          <a:bodyPr rtlCol="0" anchor="ctr"/>
+          <a:lstStyle/>
+          <a:p>
+            <a:pPr algn="ctr"/>
+            <a:endParaRPr lang="en-GB"/>
+          </a:p>
+        </p:txBody>
+      </p:sp>
+      <p:sp>
+        <p:nvSpPr>
+          <p:cNvPr id="24" name="Rectangle 23">
+            <a:extLst>
+              <a:ext uri="{FF2B5EF4-FFF2-40B4-BE49-F238E27FC236}">
+                <a16:creationId xmlns:a16="http://schemas.microsoft.com/office/drawing/2014/main" id="{A4F02ABE-B8DC-E3AD-6E6C-C49CB4AA6DC9}"/>
+              </a:ext>
+            </a:extLst>
+          </p:cNvPr>
+          <p:cNvSpPr/>
+          <p:nvPr/>
+        </p:nvSpPr>
+        <p:spPr>
+          <a:xfrm>
+            <a:off x="1963553" y="4213633"/>
+            <a:ext cx="1334162" cy="234901"/>
+          </a:xfrm>
+          <a:prstGeom prst="rect">
+            <a:avLst/>
+          </a:prstGeom>
+          <a:noFill/>
+          <a:ln>
+            <a:solidFill>
+              <a:srgbClr val="FF0000"/>
+            </a:solidFill>
+          </a:ln>
+        </p:spPr>
+        <p:style>
+          <a:lnRef idx="2">
+            <a:schemeClr val="accent1">
+              <a:shade val="15000"/>
+            </a:schemeClr>
+          </a:lnRef>
+          <a:fillRef idx="1">
+            <a:schemeClr val="accent1"/>
+          </a:fillRef>
+          <a:effectRef idx="0">
+            <a:schemeClr val="accent1"/>
+          </a:effectRef>
+          <a:fontRef idx="minor">
+            <a:schemeClr val="lt1"/>
+          </a:fontRef>
+        </p:style>
+        <p:txBody>
+          <a:bodyPr rtlCol="0" anchor="ctr"/>
+          <a:lstStyle/>
+          <a:p>
+            <a:pPr algn="ctr"/>
+            <a:endParaRPr lang="en-GB"/>
+          </a:p>
+        </p:txBody>
+      </p:sp>
+      <p:sp>
+        <p:nvSpPr>
+          <p:cNvPr id="25" name="Rectangle 24">
+            <a:extLst>
+              <a:ext uri="{FF2B5EF4-FFF2-40B4-BE49-F238E27FC236}">
+                <a16:creationId xmlns:a16="http://schemas.microsoft.com/office/drawing/2014/main" id="{99AA77DB-7A90-5CDC-E6F1-923BACA4CD6C}"/>
+              </a:ext>
+            </a:extLst>
+          </p:cNvPr>
+          <p:cNvSpPr/>
+          <p:nvPr/>
+        </p:nvSpPr>
+        <p:spPr>
+          <a:xfrm>
+            <a:off x="1963553" y="5276295"/>
+            <a:ext cx="1334162" cy="234901"/>
+          </a:xfrm>
+          <a:prstGeom prst="rect">
+            <a:avLst/>
+          </a:prstGeom>
+          <a:noFill/>
+          <a:ln>
+            <a:solidFill>
+              <a:srgbClr val="FF0000"/>
+            </a:solidFill>
+          </a:ln>
+        </p:spPr>
+        <p:style>
+          <a:lnRef idx="2">
+            <a:schemeClr val="accent1">
+              <a:shade val="15000"/>
+            </a:schemeClr>
+          </a:lnRef>
+          <a:fillRef idx="1">
+            <a:schemeClr val="accent1"/>
+          </a:fillRef>
+          <a:effectRef idx="0">
+            <a:schemeClr val="accent1"/>
+          </a:effectRef>
+          <a:fontRef idx="minor">
+            <a:schemeClr val="lt1"/>
+          </a:fontRef>
+        </p:style>
+        <p:txBody>
+          <a:bodyPr rtlCol="0" anchor="ctr"/>
+          <a:lstStyle/>
+          <a:p>
+            <a:pPr algn="ctr"/>
+            <a:endParaRPr lang="en-GB"/>
           </a:p>
         </p:txBody>
       </p:sp>
@@ -8337,6 +9348,104 @@
           </a:prstGeom>
         </p:spPr>
       </p:pic>
+      <p:sp>
+        <p:nvSpPr>
+          <p:cNvPr id="4" name="Oval 3">
+            <a:extLst>
+              <a:ext uri="{FF2B5EF4-FFF2-40B4-BE49-F238E27FC236}">
+                <a16:creationId xmlns:a16="http://schemas.microsoft.com/office/drawing/2014/main" id="{73774A08-12F0-7AB1-FABD-75ECCFD26A61}"/>
+              </a:ext>
+            </a:extLst>
+          </p:cNvPr>
+          <p:cNvSpPr/>
+          <p:nvPr/>
+        </p:nvSpPr>
+        <p:spPr>
+          <a:xfrm>
+            <a:off x="6691279" y="2049913"/>
+            <a:ext cx="500513" cy="437472"/>
+          </a:xfrm>
+          <a:prstGeom prst="ellipse">
+            <a:avLst/>
+          </a:prstGeom>
+        </p:spPr>
+        <p:style>
+          <a:lnRef idx="2">
+            <a:schemeClr val="accent1">
+              <a:shade val="15000"/>
+            </a:schemeClr>
+          </a:lnRef>
+          <a:fillRef idx="1">
+            <a:schemeClr val="accent1"/>
+          </a:fillRef>
+          <a:effectRef idx="0">
+            <a:schemeClr val="accent1"/>
+          </a:effectRef>
+          <a:fontRef idx="minor">
+            <a:schemeClr val="lt1"/>
+          </a:fontRef>
+        </p:style>
+        <p:txBody>
+          <a:bodyPr rtlCol="0" anchor="ctr"/>
+          <a:lstStyle/>
+          <a:p>
+            <a:pPr algn="ctr"/>
+            <a:r>
+              <a:rPr lang="en-GB" dirty="0"/>
+              <a:t>1</a:t>
+            </a:r>
+          </a:p>
+        </p:txBody>
+      </p:sp>
+      <p:sp>
+        <p:nvSpPr>
+          <p:cNvPr id="5" name="Oval 4">
+            <a:extLst>
+              <a:ext uri="{FF2B5EF4-FFF2-40B4-BE49-F238E27FC236}">
+                <a16:creationId xmlns:a16="http://schemas.microsoft.com/office/drawing/2014/main" id="{39AB4E80-5299-DB43-47CF-5A6BE1D40871}"/>
+              </a:ext>
+            </a:extLst>
+          </p:cNvPr>
+          <p:cNvSpPr/>
+          <p:nvPr/>
+        </p:nvSpPr>
+        <p:spPr>
+          <a:xfrm>
+            <a:off x="6691278" y="2770528"/>
+            <a:ext cx="500513" cy="437472"/>
+          </a:xfrm>
+          <a:prstGeom prst="ellipse">
+            <a:avLst/>
+          </a:prstGeom>
+        </p:spPr>
+        <p:style>
+          <a:lnRef idx="2">
+            <a:schemeClr val="accent1">
+              <a:shade val="15000"/>
+            </a:schemeClr>
+          </a:lnRef>
+          <a:fillRef idx="1">
+            <a:schemeClr val="accent1"/>
+          </a:fillRef>
+          <a:effectRef idx="0">
+            <a:schemeClr val="accent1"/>
+          </a:effectRef>
+          <a:fontRef idx="minor">
+            <a:schemeClr val="lt1"/>
+          </a:fontRef>
+        </p:style>
+        <p:txBody>
+          <a:bodyPr rtlCol="0" anchor="ctr"/>
+          <a:lstStyle/>
+          <a:p>
+            <a:pPr algn="ctr"/>
+            <a:r>
+              <a:rPr lang="en-GB" dirty="0"/>
+              <a:t>2</a:t>
+            </a:r>
+          </a:p>
+        </p:txBody>
+      </p:sp>
     </p:spTree>
     <p:extLst>
       <p:ext uri="{BB962C8B-B14F-4D97-AF65-F5344CB8AC3E}">
@@ -9662,6 +10771,183 @@
           </a:p>
         </p:txBody>
       </p:sp>
+      <p:sp>
+        <p:nvSpPr>
+          <p:cNvPr id="13" name="Rectangle 12">
+            <a:extLst>
+              <a:ext uri="{FF2B5EF4-FFF2-40B4-BE49-F238E27FC236}">
+                <a16:creationId xmlns:a16="http://schemas.microsoft.com/office/drawing/2014/main" id="{1CFECAA1-713A-3D3D-670B-1DA3A6166AF1}"/>
+              </a:ext>
+            </a:extLst>
+          </p:cNvPr>
+          <p:cNvSpPr/>
+          <p:nvPr/>
+        </p:nvSpPr>
+        <p:spPr>
+          <a:xfrm>
+            <a:off x="1776868" y="3585973"/>
+            <a:ext cx="4454249" cy="364754"/>
+          </a:xfrm>
+          <a:prstGeom prst="rect">
+            <a:avLst/>
+          </a:prstGeom>
+          <a:solidFill>
+            <a:schemeClr val="accent4">
+              <a:lumMod val="40000"/>
+              <a:lumOff val="60000"/>
+            </a:schemeClr>
+          </a:solidFill>
+        </p:spPr>
+        <p:style>
+          <a:lnRef idx="2">
+            <a:schemeClr val="accent1">
+              <a:shade val="50000"/>
+            </a:schemeClr>
+          </a:lnRef>
+          <a:fillRef idx="1">
+            <a:schemeClr val="accent1"/>
+          </a:fillRef>
+          <a:effectRef idx="0">
+            <a:schemeClr val="accent1"/>
+          </a:effectRef>
+          <a:fontRef idx="minor">
+            <a:schemeClr val="lt1"/>
+          </a:fontRef>
+        </p:style>
+        <p:txBody>
+          <a:bodyPr rtlCol="0" anchor="ctr"/>
+          <a:lstStyle/>
+          <a:p>
+            <a:pPr algn="ctr"/>
+            <a:r>
+              <a:rPr lang="en-IE" dirty="0">
+                <a:solidFill>
+                  <a:schemeClr val="tx1"/>
+                </a:solidFill>
+              </a:rPr>
+              <a:t>FACT – indicates it should be treated as a test</a:t>
+            </a:r>
+          </a:p>
+        </p:txBody>
+      </p:sp>
+      <p:sp>
+        <p:nvSpPr>
+          <p:cNvPr id="14" name="Rectangle 13">
+            <a:extLst>
+              <a:ext uri="{FF2B5EF4-FFF2-40B4-BE49-F238E27FC236}">
+                <a16:creationId xmlns:a16="http://schemas.microsoft.com/office/drawing/2014/main" id="{5B644D1A-BE5E-986F-790E-E609B9A2899F}"/>
+              </a:ext>
+            </a:extLst>
+          </p:cNvPr>
+          <p:cNvSpPr/>
+          <p:nvPr/>
+        </p:nvSpPr>
+        <p:spPr>
+          <a:xfrm>
+            <a:off x="6849894" y="3842867"/>
+            <a:ext cx="4905165" cy="364754"/>
+          </a:xfrm>
+          <a:prstGeom prst="rect">
+            <a:avLst/>
+          </a:prstGeom>
+          <a:solidFill>
+            <a:schemeClr val="accent4">
+              <a:lumMod val="40000"/>
+              <a:lumOff val="60000"/>
+            </a:schemeClr>
+          </a:solidFill>
+        </p:spPr>
+        <p:style>
+          <a:lnRef idx="2">
+            <a:schemeClr val="accent1">
+              <a:shade val="50000"/>
+            </a:schemeClr>
+          </a:lnRef>
+          <a:fillRef idx="1">
+            <a:schemeClr val="accent1"/>
+          </a:fillRef>
+          <a:effectRef idx="0">
+            <a:schemeClr val="accent1"/>
+          </a:effectRef>
+          <a:fontRef idx="minor">
+            <a:schemeClr val="lt1"/>
+          </a:fontRef>
+        </p:style>
+        <p:txBody>
+          <a:bodyPr rtlCol="0" anchor="ctr"/>
+          <a:lstStyle/>
+          <a:p>
+            <a:pPr algn="ctr"/>
+            <a:r>
+              <a:rPr lang="en-IE" dirty="0">
+                <a:solidFill>
+                  <a:schemeClr val="tx1"/>
+                </a:solidFill>
+              </a:rPr>
+              <a:t>Test name indicates what is expected by the test</a:t>
+            </a:r>
+          </a:p>
+        </p:txBody>
+      </p:sp>
+      <p:sp>
+        <p:nvSpPr>
+          <p:cNvPr id="15" name="Rectangle 14">
+            <a:extLst>
+              <a:ext uri="{FF2B5EF4-FFF2-40B4-BE49-F238E27FC236}">
+                <a16:creationId xmlns:a16="http://schemas.microsoft.com/office/drawing/2014/main" id="{06926E3E-131C-94F6-7065-CCB42C508C5F}"/>
+              </a:ext>
+            </a:extLst>
+          </p:cNvPr>
+          <p:cNvSpPr/>
+          <p:nvPr/>
+        </p:nvSpPr>
+        <p:spPr>
+          <a:xfrm>
+            <a:off x="6427259" y="5163878"/>
+            <a:ext cx="4905165" cy="364754"/>
+          </a:xfrm>
+          <a:prstGeom prst="rect">
+            <a:avLst/>
+          </a:prstGeom>
+          <a:solidFill>
+            <a:schemeClr val="accent4">
+              <a:lumMod val="40000"/>
+              <a:lumOff val="60000"/>
+            </a:schemeClr>
+          </a:solidFill>
+        </p:spPr>
+        <p:style>
+          <a:lnRef idx="2">
+            <a:schemeClr val="accent1">
+              <a:shade val="50000"/>
+            </a:schemeClr>
+          </a:lnRef>
+          <a:fillRef idx="1">
+            <a:schemeClr val="accent1"/>
+          </a:fillRef>
+          <a:effectRef idx="0">
+            <a:schemeClr val="accent1"/>
+          </a:effectRef>
+          <a:fontRef idx="minor">
+            <a:schemeClr val="lt1"/>
+          </a:fontRef>
+        </p:style>
+        <p:txBody>
+          <a:bodyPr rtlCol="0" anchor="ctr"/>
+          <a:lstStyle/>
+          <a:p>
+            <a:pPr algn="ctr"/>
+            <a:r>
+              <a:rPr lang="en-IE" dirty="0">
+                <a:solidFill>
+                  <a:schemeClr val="tx1"/>
+                </a:solidFill>
+              </a:rPr>
+              <a:t>Assertions validate various items</a:t>
+            </a:r>
+          </a:p>
+        </p:txBody>
+      </p:sp>
     </p:spTree>
     <p:extLst>
       <p:ext uri="{BB962C8B-B14F-4D97-AF65-F5344CB8AC3E}">
@@ -9889,6 +11175,261 @@
     <p:extLst>
       <p:ext uri="{BB962C8B-B14F-4D97-AF65-F5344CB8AC3E}">
         <p14:creationId xmlns:p14="http://schemas.microsoft.com/office/powerpoint/2010/main" val="4098131677"/>
+      </p:ext>
+    </p:extLst>
+  </p:cSld>
+  <p:clrMapOvr>
+    <a:masterClrMapping/>
+  </p:clrMapOvr>
+</p:sld>
+</file>
+
+<file path=ppt/slides/slide53.xml><?xml version="1.0" encoding="utf-8"?>
+<p:sld xmlns:a="http://schemas.openxmlformats.org/drawingml/2006/main" xmlns:r="http://schemas.openxmlformats.org/officeDocument/2006/relationships" xmlns:p="http://schemas.openxmlformats.org/presentationml/2006/main">
+  <p:cSld>
+    <p:spTree>
+      <p:nvGrpSpPr>
+        <p:cNvPr id="1" name=""/>
+        <p:cNvGrpSpPr/>
+        <p:nvPr/>
+      </p:nvGrpSpPr>
+      <p:grpSpPr>
+        <a:xfrm>
+          <a:off x="0" y="0"/>
+          <a:ext cx="0" cy="0"/>
+          <a:chOff x="0" y="0"/>
+          <a:chExt cx="0" cy="0"/>
+        </a:xfrm>
+      </p:grpSpPr>
+      <p:pic>
+        <p:nvPicPr>
+          <p:cNvPr id="3" name="Picture 2">
+            <a:extLst>
+              <a:ext uri="{FF2B5EF4-FFF2-40B4-BE49-F238E27FC236}">
+                <a16:creationId xmlns:a16="http://schemas.microsoft.com/office/drawing/2014/main" id="{A35C7BC6-A159-7F95-CD32-D00D9DDE9545}"/>
+              </a:ext>
+            </a:extLst>
+          </p:cNvPr>
+          <p:cNvPicPr>
+            <a:picLocks noChangeAspect="1"/>
+          </p:cNvPicPr>
+          <p:nvPr/>
+        </p:nvPicPr>
+        <p:blipFill>
+          <a:blip r:embed="rId2"/>
+          <a:srcRect l="-1130" r="23303"/>
+          <a:stretch>
+            <a:fillRect/>
+          </a:stretch>
+        </p:blipFill>
+        <p:spPr>
+          <a:xfrm>
+            <a:off x="320511" y="1703307"/>
+            <a:ext cx="10737257" cy="4037615"/>
+          </a:xfrm>
+          <a:prstGeom prst="rect">
+            <a:avLst/>
+          </a:prstGeom>
+        </p:spPr>
+      </p:pic>
+      <p:sp>
+        <p:nvSpPr>
+          <p:cNvPr id="4" name="Oval 3">
+            <a:extLst>
+              <a:ext uri="{FF2B5EF4-FFF2-40B4-BE49-F238E27FC236}">
+                <a16:creationId xmlns:a16="http://schemas.microsoft.com/office/drawing/2014/main" id="{A8FC0AF2-91DA-828C-4B8A-9F616C2FF2F7}"/>
+              </a:ext>
+            </a:extLst>
+          </p:cNvPr>
+          <p:cNvSpPr/>
+          <p:nvPr/>
+        </p:nvSpPr>
+        <p:spPr>
+          <a:xfrm>
+            <a:off x="4687450" y="2377036"/>
+            <a:ext cx="500513" cy="437472"/>
+          </a:xfrm>
+          <a:prstGeom prst="ellipse">
+            <a:avLst/>
+          </a:prstGeom>
+          <a:solidFill>
+            <a:srgbClr val="FF0000"/>
+          </a:solidFill>
+        </p:spPr>
+        <p:style>
+          <a:lnRef idx="2">
+            <a:schemeClr val="accent1">
+              <a:shade val="15000"/>
+            </a:schemeClr>
+          </a:lnRef>
+          <a:fillRef idx="1">
+            <a:schemeClr val="accent1"/>
+          </a:fillRef>
+          <a:effectRef idx="0">
+            <a:schemeClr val="accent1"/>
+          </a:effectRef>
+          <a:fontRef idx="minor">
+            <a:schemeClr val="lt1"/>
+          </a:fontRef>
+        </p:style>
+        <p:txBody>
+          <a:bodyPr rtlCol="0" anchor="ctr"/>
+          <a:lstStyle/>
+          <a:p>
+            <a:pPr algn="ctr"/>
+            <a:r>
+              <a:rPr lang="en-GB" dirty="0"/>
+              <a:t>1</a:t>
+            </a:r>
+          </a:p>
+        </p:txBody>
+      </p:sp>
+      <p:sp>
+        <p:nvSpPr>
+          <p:cNvPr id="5" name="Oval 4">
+            <a:extLst>
+              <a:ext uri="{FF2B5EF4-FFF2-40B4-BE49-F238E27FC236}">
+                <a16:creationId xmlns:a16="http://schemas.microsoft.com/office/drawing/2014/main" id="{AA45366E-B8AB-5CA8-881B-A4B460D19728}"/>
+              </a:ext>
+            </a:extLst>
+          </p:cNvPr>
+          <p:cNvSpPr/>
+          <p:nvPr/>
+        </p:nvSpPr>
+        <p:spPr>
+          <a:xfrm>
+            <a:off x="8265368" y="2377036"/>
+            <a:ext cx="500513" cy="437472"/>
+          </a:xfrm>
+          <a:prstGeom prst="ellipse">
+            <a:avLst/>
+          </a:prstGeom>
+          <a:solidFill>
+            <a:srgbClr val="FF0000"/>
+          </a:solidFill>
+        </p:spPr>
+        <p:style>
+          <a:lnRef idx="2">
+            <a:schemeClr val="accent1">
+              <a:shade val="15000"/>
+            </a:schemeClr>
+          </a:lnRef>
+          <a:fillRef idx="1">
+            <a:schemeClr val="accent1"/>
+          </a:fillRef>
+          <a:effectRef idx="0">
+            <a:schemeClr val="accent1"/>
+          </a:effectRef>
+          <a:fontRef idx="minor">
+            <a:schemeClr val="lt1"/>
+          </a:fontRef>
+        </p:style>
+        <p:txBody>
+          <a:bodyPr rtlCol="0" anchor="ctr"/>
+          <a:lstStyle/>
+          <a:p>
+            <a:pPr algn="ctr"/>
+            <a:r>
+              <a:rPr lang="en-GB" dirty="0"/>
+              <a:t>2</a:t>
+            </a:r>
+          </a:p>
+        </p:txBody>
+      </p:sp>
+    </p:spTree>
+    <p:extLst>
+      <p:ext uri="{BB962C8B-B14F-4D97-AF65-F5344CB8AC3E}">
+        <p14:creationId xmlns:p14="http://schemas.microsoft.com/office/powerpoint/2010/main" val="611892663"/>
+      </p:ext>
+    </p:extLst>
+  </p:cSld>
+  <p:clrMapOvr>
+    <a:masterClrMapping/>
+  </p:clrMapOvr>
+</p:sld>
+</file>
+
+<file path=ppt/slides/slide54.xml><?xml version="1.0" encoding="utf-8"?>
+<p:sld xmlns:a="http://schemas.openxmlformats.org/drawingml/2006/main" xmlns:r="http://schemas.openxmlformats.org/officeDocument/2006/relationships" xmlns:p="http://schemas.openxmlformats.org/presentationml/2006/main">
+  <p:cSld>
+    <p:spTree>
+      <p:nvGrpSpPr>
+        <p:cNvPr id="1" name=""/>
+        <p:cNvGrpSpPr/>
+        <p:nvPr/>
+      </p:nvGrpSpPr>
+      <p:grpSpPr>
+        <a:xfrm>
+          <a:off x="0" y="0"/>
+          <a:ext cx="0" cy="0"/>
+          <a:chOff x="0" y="0"/>
+          <a:chExt cx="0" cy="0"/>
+        </a:xfrm>
+      </p:grpSpPr>
+      <p:pic>
+        <p:nvPicPr>
+          <p:cNvPr id="3" name="Picture 2">
+            <a:extLst>
+              <a:ext uri="{FF2B5EF4-FFF2-40B4-BE49-F238E27FC236}">
+                <a16:creationId xmlns:a16="http://schemas.microsoft.com/office/drawing/2014/main" id="{43406304-9585-66D9-AC84-8462B8E6B067}"/>
+              </a:ext>
+            </a:extLst>
+          </p:cNvPr>
+          <p:cNvPicPr>
+            <a:picLocks noChangeAspect="1"/>
+          </p:cNvPicPr>
+          <p:nvPr/>
+        </p:nvPicPr>
+        <p:blipFill>
+          <a:blip r:embed="rId2"/>
+          <a:stretch>
+            <a:fillRect/>
+          </a:stretch>
+        </p:blipFill>
+        <p:spPr>
+          <a:xfrm>
+            <a:off x="813752" y="540842"/>
+            <a:ext cx="9642530" cy="5963653"/>
+          </a:xfrm>
+          <a:prstGeom prst="rect">
+            <a:avLst/>
+          </a:prstGeom>
+        </p:spPr>
+      </p:pic>
+    </p:spTree>
+    <p:extLst>
+      <p:ext uri="{BB962C8B-B14F-4D97-AF65-F5344CB8AC3E}">
+        <p14:creationId xmlns:p14="http://schemas.microsoft.com/office/powerpoint/2010/main" val="4181291897"/>
+      </p:ext>
+    </p:extLst>
+  </p:cSld>
+  <p:clrMapOvr>
+    <a:masterClrMapping/>
+  </p:clrMapOvr>
+</p:sld>
+</file>
+
+<file path=ppt/slides/slide55.xml><?xml version="1.0" encoding="utf-8"?>
+<p:sld xmlns:a="http://schemas.openxmlformats.org/drawingml/2006/main" xmlns:r="http://schemas.openxmlformats.org/officeDocument/2006/relationships" xmlns:p="http://schemas.openxmlformats.org/presentationml/2006/main">
+  <p:cSld>
+    <p:spTree>
+      <p:nvGrpSpPr>
+        <p:cNvPr id="1" name=""/>
+        <p:cNvGrpSpPr/>
+        <p:nvPr/>
+      </p:nvGrpSpPr>
+      <p:grpSpPr>
+        <a:xfrm>
+          <a:off x="0" y="0"/>
+          <a:ext cx="0" cy="0"/>
+          <a:chOff x="0" y="0"/>
+          <a:chExt cx="0" cy="0"/>
+        </a:xfrm>
+      </p:grpSpPr>
+    </p:spTree>
+    <p:extLst>
+      <p:ext uri="{BB962C8B-B14F-4D97-AF65-F5344CB8AC3E}">
+        <p14:creationId xmlns:p14="http://schemas.microsoft.com/office/powerpoint/2010/main" val="3102751788"/>
       </p:ext>
     </p:extLst>
   </p:cSld>
